--- a/docs/presentation/pusat_informasi_paroki_dewan.pptx
+++ b/docs/presentation/pusat_informasi_paroki_dewan.pptx
@@ -4,6 +4,9 @@
   <p:sldMasterIdLst>
     <p:sldMasterId id="2147483648" r:id="rId1"/>
   </p:sldMasterIdLst>
+  <p:notesMasterIdLst>
+    <p:notesMasterId r:id="rId15"/>
+  </p:notesMasterIdLst>
   <p:sldIdLst>
     <p:sldId id="256" r:id="rId2"/>
     <p:sldId id="257" r:id="rId3"/>
@@ -17,12 +20,8 @@
     <p:sldId id="265" r:id="rId11"/>
     <p:sldId id="266" r:id="rId12"/>
     <p:sldId id="267" r:id="rId13"/>
-    <p:sldId id="268" r:id="rId14"/>
-    <p:sldId id="269" r:id="rId15"/>
+    <p:sldId id="269" r:id="rId14"/>
   </p:sldIdLst>
-  <p:notesMasterIdLst>
-    <p:notesMasterId r:id="rId16"/>
-  </p:notesMasterIdLst>
   <p:sldSz cx="12192000" cy="6858000"/>
   <p:notesSz cx="6858000" cy="12192000"/>
   <p:defaultTextStyle>
@@ -120,37 +119,36 @@
   <p:extLst>
     <p:ext uri="{521415D9-36F7-43E2-AB2F-B90AF26B5E84}">
       <p14:sectionLst xmlns:p14="http://schemas.microsoft.com/office/powerpoint/2010/main">
-        <p14:section name="Pembukaan" id="{e74a8aef-42cb-2cec-02e3-eb18e1bce971}">
+        <p14:section name="Pembukaan" id="{E74A8AEF-42CB-2CEC-02E3-EB18E1BCE971}">
           <p14:sldIdLst>
             <p14:sldId id="256"/>
             <p14:sldId id="257"/>
             <p14:sldId id="258"/>
           </p14:sldIdLst>
         </p14:section>
-        <p14:section name="Langkah 1: Kumpulkan" id="{64938e33-4ed3-bbab-74d5-f03123259824}">
+        <p14:section name="Langkah 1: Kumpulkan" id="{64938E33-4ED3-BBAB-74D5-F03123259824}">
           <p14:sldIdLst>
             <p14:sldId id="259"/>
             <p14:sldId id="260"/>
           </p14:sldIdLst>
         </p14:section>
-        <p14:section name="Langkah 2: Bagikan" id="{c3d6641f-218e-03b9-79a8-ed37153c25b8}">
+        <p14:section name="Langkah 2: Bagikan" id="{C3D6641F-218E-03B9-79A8-ED37153C25B8}">
           <p14:sldIdLst>
             <p14:sldId id="261"/>
             <p14:sldId id="262"/>
           </p14:sldIdLst>
         </p14:section>
-        <p14:section name="Langkah 3: Pahami" id="{544a731e-89e1-7d1d-b4d5-a127d4909c0f}">
+        <p14:section name="Langkah 3: Pahami" id="{544A731E-89E1-7D1D-B4D5-A127D4909C0F}">
           <p14:sldIdLst>
             <p14:sldId id="263"/>
             <p14:sldId id="264"/>
             <p14:sldId id="265"/>
           </p14:sldIdLst>
         </p14:section>
-        <p14:section name="Prinsip dan usulan" id="{697a309a-5c97-a68f-c56d-2d801d562fba}">
+        <p14:section name="Prinsip dan usulan" id="{697A309A-5C97-A68F-C56D-2D801D562FBA}">
           <p14:sldIdLst>
             <p14:sldId id="266"/>
             <p14:sldId id="267"/>
-            <p14:sldId id="268"/>
             <p14:sldId id="269"/>
           </p14:sldIdLst>
         </p14:section>
@@ -161,6 +159,341 @@
     </p:ext>
   </p:extLst>
 </p:presentation>
+</file>
+
+<file path=ppt/changesInfos/changesInfo1.xml><?xml version="1.0" encoding="utf-8"?>
+<pc:chgInfo xmlns:a="http://schemas.openxmlformats.org/drawingml/2006/main" xmlns:r="http://schemas.openxmlformats.org/officeDocument/2006/relationships" xmlns:ac="http://schemas.microsoft.com/office/drawing/2013/main/command" xmlns:pc="http://schemas.microsoft.com/office/powerpoint/2013/main/command">
+  <pc:docChgLst>
+    <pc:chgData name="Thong, Sintyadi" userId="9dfa709e-56f0-43d5-a48d-209ca243e947" providerId="ADAL" clId="{EBDA2D21-6929-4704-A288-8E38C5AADA9C}"/>
+    <pc:docChg chg="undo custSel delSld modSld modSection">
+      <pc:chgData name="Thong, Sintyadi" userId="9dfa709e-56f0-43d5-a48d-209ca243e947" providerId="ADAL" clId="{EBDA2D21-6929-4704-A288-8E38C5AADA9C}" dt="2026-10-23T11:26:59.412" v="469" actId="478"/>
+      <pc:docMkLst>
+        <pc:docMk/>
+      </pc:docMkLst>
+      <pc:sldChg chg="modSp mod">
+        <pc:chgData name="Thong, Sintyadi" userId="9dfa709e-56f0-43d5-a48d-209ca243e947" providerId="ADAL" clId="{EBDA2D21-6929-4704-A288-8E38C5AADA9C}" dt="2026-10-23T11:16:44.938" v="155" actId="20577"/>
+        <pc:sldMkLst>
+          <pc:docMk/>
+          <pc:sldMk cId="0" sldId="256"/>
+        </pc:sldMkLst>
+        <pc:spChg chg="mod">
+          <ac:chgData name="Thong, Sintyadi" userId="9dfa709e-56f0-43d5-a48d-209ca243e947" providerId="ADAL" clId="{EBDA2D21-6929-4704-A288-8E38C5AADA9C}" dt="2026-10-23T11:16:44.938" v="155" actId="20577"/>
+          <ac:spMkLst>
+            <pc:docMk/>
+            <pc:sldMk cId="0" sldId="256"/>
+            <ac:spMk id="5" creationId="{00000000-0000-0000-0000-000000000000}"/>
+          </ac:spMkLst>
+        </pc:spChg>
+      </pc:sldChg>
+      <pc:sldChg chg="modSp mod">
+        <pc:chgData name="Thong, Sintyadi" userId="9dfa709e-56f0-43d5-a48d-209ca243e947" providerId="ADAL" clId="{EBDA2D21-6929-4704-A288-8E38C5AADA9C}" dt="2026-10-23T11:16:34.603" v="154" actId="20577"/>
+        <pc:sldMkLst>
+          <pc:docMk/>
+          <pc:sldMk cId="0" sldId="257"/>
+        </pc:sldMkLst>
+        <pc:spChg chg="mod">
+          <ac:chgData name="Thong, Sintyadi" userId="9dfa709e-56f0-43d5-a48d-209ca243e947" providerId="ADAL" clId="{EBDA2D21-6929-4704-A288-8E38C5AADA9C}" dt="2026-10-23T11:16:07.148" v="95" actId="20577"/>
+          <ac:spMkLst>
+            <pc:docMk/>
+            <pc:sldMk cId="0" sldId="257"/>
+            <ac:spMk id="10" creationId="{00000000-0000-0000-0000-000000000000}"/>
+          </ac:spMkLst>
+        </pc:spChg>
+        <pc:spChg chg="mod">
+          <ac:chgData name="Thong, Sintyadi" userId="9dfa709e-56f0-43d5-a48d-209ca243e947" providerId="ADAL" clId="{EBDA2D21-6929-4704-A288-8E38C5AADA9C}" dt="2026-10-23T11:16:12.203" v="98" actId="20577"/>
+          <ac:spMkLst>
+            <pc:docMk/>
+            <pc:sldMk cId="0" sldId="257"/>
+            <ac:spMk id="16" creationId="{00000000-0000-0000-0000-000000000000}"/>
+          </ac:spMkLst>
+        </pc:spChg>
+        <pc:spChg chg="mod">
+          <ac:chgData name="Thong, Sintyadi" userId="9dfa709e-56f0-43d5-a48d-209ca243e947" providerId="ADAL" clId="{EBDA2D21-6929-4704-A288-8E38C5AADA9C}" dt="2026-10-23T11:16:34.603" v="154" actId="20577"/>
+          <ac:spMkLst>
+            <pc:docMk/>
+            <pc:sldMk cId="0" sldId="257"/>
+            <ac:spMk id="17" creationId="{00000000-0000-0000-0000-000000000000}"/>
+          </ac:spMkLst>
+        </pc:spChg>
+      </pc:sldChg>
+      <pc:sldChg chg="modSp mod">
+        <pc:chgData name="Thong, Sintyadi" userId="9dfa709e-56f0-43d5-a48d-209ca243e947" providerId="ADAL" clId="{EBDA2D21-6929-4704-A288-8E38C5AADA9C}" dt="2026-10-23T11:17:01.834" v="192" actId="20577"/>
+        <pc:sldMkLst>
+          <pc:docMk/>
+          <pc:sldMk cId="0" sldId="258"/>
+        </pc:sldMkLst>
+        <pc:spChg chg="mod">
+          <ac:chgData name="Thong, Sintyadi" userId="9dfa709e-56f0-43d5-a48d-209ca243e947" providerId="ADAL" clId="{EBDA2D21-6929-4704-A288-8E38C5AADA9C}" dt="2026-10-23T11:17:01.834" v="192" actId="20577"/>
+          <ac:spMkLst>
+            <pc:docMk/>
+            <pc:sldMk cId="0" sldId="258"/>
+            <ac:spMk id="19" creationId="{00000000-0000-0000-0000-000000000000}"/>
+          </ac:spMkLst>
+        </pc:spChg>
+      </pc:sldChg>
+      <pc:sldChg chg="delSp mod">
+        <pc:chgData name="Thong, Sintyadi" userId="9dfa709e-56f0-43d5-a48d-209ca243e947" providerId="ADAL" clId="{EBDA2D21-6929-4704-A288-8E38C5AADA9C}" dt="2026-10-23T11:26:59.412" v="469" actId="478"/>
+        <pc:sldMkLst>
+          <pc:docMk/>
+          <pc:sldMk cId="0" sldId="259"/>
+        </pc:sldMkLst>
+        <pc:spChg chg="del">
+          <ac:chgData name="Thong, Sintyadi" userId="9dfa709e-56f0-43d5-a48d-209ca243e947" providerId="ADAL" clId="{EBDA2D21-6929-4704-A288-8E38C5AADA9C}" dt="2026-10-23T11:26:59.412" v="469" actId="478"/>
+          <ac:spMkLst>
+            <pc:docMk/>
+            <pc:sldMk cId="0" sldId="259"/>
+            <ac:spMk id="33" creationId="{00000000-0000-0000-0000-000000000000}"/>
+          </ac:spMkLst>
+        </pc:spChg>
+        <pc:spChg chg="del">
+          <ac:chgData name="Thong, Sintyadi" userId="9dfa709e-56f0-43d5-a48d-209ca243e947" providerId="ADAL" clId="{EBDA2D21-6929-4704-A288-8E38C5AADA9C}" dt="2026-10-23T11:26:59.412" v="469" actId="478"/>
+          <ac:spMkLst>
+            <pc:docMk/>
+            <pc:sldMk cId="0" sldId="259"/>
+            <ac:spMk id="34" creationId="{00000000-0000-0000-0000-000000000000}"/>
+          </ac:spMkLst>
+        </pc:spChg>
+        <pc:spChg chg="del">
+          <ac:chgData name="Thong, Sintyadi" userId="9dfa709e-56f0-43d5-a48d-209ca243e947" providerId="ADAL" clId="{EBDA2D21-6929-4704-A288-8E38C5AADA9C}" dt="2026-10-23T11:26:59.412" v="469" actId="478"/>
+          <ac:spMkLst>
+            <pc:docMk/>
+            <pc:sldMk cId="0" sldId="259"/>
+            <ac:spMk id="35" creationId="{00000000-0000-0000-0000-000000000000}"/>
+          </ac:spMkLst>
+        </pc:spChg>
+        <pc:spChg chg="del">
+          <ac:chgData name="Thong, Sintyadi" userId="9dfa709e-56f0-43d5-a48d-209ca243e947" providerId="ADAL" clId="{EBDA2D21-6929-4704-A288-8E38C5AADA9C}" dt="2026-10-23T11:26:59.412" v="469" actId="478"/>
+          <ac:spMkLst>
+            <pc:docMk/>
+            <pc:sldMk cId="0" sldId="259"/>
+            <ac:spMk id="36" creationId="{00000000-0000-0000-0000-000000000000}"/>
+          </ac:spMkLst>
+        </pc:spChg>
+        <pc:spChg chg="del">
+          <ac:chgData name="Thong, Sintyadi" userId="9dfa709e-56f0-43d5-a48d-209ca243e947" providerId="ADAL" clId="{EBDA2D21-6929-4704-A288-8E38C5AADA9C}" dt="2026-10-23T11:26:59.412" v="469" actId="478"/>
+          <ac:spMkLst>
+            <pc:docMk/>
+            <pc:sldMk cId="0" sldId="259"/>
+            <ac:spMk id="38" creationId="{00000000-0000-0000-0000-000000000000}"/>
+          </ac:spMkLst>
+        </pc:spChg>
+        <pc:spChg chg="del">
+          <ac:chgData name="Thong, Sintyadi" userId="9dfa709e-56f0-43d5-a48d-209ca243e947" providerId="ADAL" clId="{EBDA2D21-6929-4704-A288-8E38C5AADA9C}" dt="2026-10-23T11:26:59.412" v="469" actId="478"/>
+          <ac:spMkLst>
+            <pc:docMk/>
+            <pc:sldMk cId="0" sldId="259"/>
+            <ac:spMk id="40" creationId="{00000000-0000-0000-0000-000000000000}"/>
+          </ac:spMkLst>
+        </pc:spChg>
+        <pc:spChg chg="del">
+          <ac:chgData name="Thong, Sintyadi" userId="9dfa709e-56f0-43d5-a48d-209ca243e947" providerId="ADAL" clId="{EBDA2D21-6929-4704-A288-8E38C5AADA9C}" dt="2026-10-23T11:26:59.412" v="469" actId="478"/>
+          <ac:spMkLst>
+            <pc:docMk/>
+            <pc:sldMk cId="0" sldId="259"/>
+            <ac:spMk id="41" creationId="{00000000-0000-0000-0000-000000000000}"/>
+          </ac:spMkLst>
+        </pc:spChg>
+        <pc:spChg chg="del">
+          <ac:chgData name="Thong, Sintyadi" userId="9dfa709e-56f0-43d5-a48d-209ca243e947" providerId="ADAL" clId="{EBDA2D21-6929-4704-A288-8E38C5AADA9C}" dt="2026-10-23T11:26:59.412" v="469" actId="478"/>
+          <ac:spMkLst>
+            <pc:docMk/>
+            <pc:sldMk cId="0" sldId="259"/>
+            <ac:spMk id="42" creationId="{00000000-0000-0000-0000-000000000000}"/>
+          </ac:spMkLst>
+        </pc:spChg>
+        <pc:spChg chg="del">
+          <ac:chgData name="Thong, Sintyadi" userId="9dfa709e-56f0-43d5-a48d-209ca243e947" providerId="ADAL" clId="{EBDA2D21-6929-4704-A288-8E38C5AADA9C}" dt="2026-10-23T11:26:59.412" v="469" actId="478"/>
+          <ac:spMkLst>
+            <pc:docMk/>
+            <pc:sldMk cId="0" sldId="259"/>
+            <ac:spMk id="43" creationId="{00000000-0000-0000-0000-000000000000}"/>
+          </ac:spMkLst>
+        </pc:spChg>
+        <pc:spChg chg="del">
+          <ac:chgData name="Thong, Sintyadi" userId="9dfa709e-56f0-43d5-a48d-209ca243e947" providerId="ADAL" clId="{EBDA2D21-6929-4704-A288-8E38C5AADA9C}" dt="2026-10-23T11:26:59.412" v="469" actId="478"/>
+          <ac:spMkLst>
+            <pc:docMk/>
+            <pc:sldMk cId="0" sldId="259"/>
+            <ac:spMk id="44" creationId="{00000000-0000-0000-0000-000000000000}"/>
+          </ac:spMkLst>
+        </pc:spChg>
+      </pc:sldChg>
+      <pc:sldChg chg="delSp modSp mod">
+        <pc:chgData name="Thong, Sintyadi" userId="9dfa709e-56f0-43d5-a48d-209ca243e947" providerId="ADAL" clId="{EBDA2D21-6929-4704-A288-8E38C5AADA9C}" dt="2026-10-23T11:25:11.660" v="466" actId="20577"/>
+        <pc:sldMkLst>
+          <pc:docMk/>
+          <pc:sldMk cId="0" sldId="267"/>
+        </pc:sldMkLst>
+        <pc:spChg chg="mod">
+          <ac:chgData name="Thong, Sintyadi" userId="9dfa709e-56f0-43d5-a48d-209ca243e947" providerId="ADAL" clId="{EBDA2D21-6929-4704-A288-8E38C5AADA9C}" dt="2026-10-23T11:24:49.068" v="398" actId="20577"/>
+          <ac:spMkLst>
+            <pc:docMk/>
+            <pc:sldMk cId="0" sldId="267"/>
+            <ac:spMk id="3" creationId="{00000000-0000-0000-0000-000000000000}"/>
+          </ac:spMkLst>
+        </pc:spChg>
+        <pc:spChg chg="mod">
+          <ac:chgData name="Thong, Sintyadi" userId="9dfa709e-56f0-43d5-a48d-209ca243e947" providerId="ADAL" clId="{EBDA2D21-6929-4704-A288-8E38C5AADA9C}" dt="2026-10-23T11:24:58.831" v="417" actId="20577"/>
+          <ac:spMkLst>
+            <pc:docMk/>
+            <pc:sldMk cId="0" sldId="267"/>
+            <ac:spMk id="4" creationId="{00000000-0000-0000-0000-000000000000}"/>
+          </ac:spMkLst>
+        </pc:spChg>
+        <pc:spChg chg="del">
+          <ac:chgData name="Thong, Sintyadi" userId="9dfa709e-56f0-43d5-a48d-209ca243e947" providerId="ADAL" clId="{EBDA2D21-6929-4704-A288-8E38C5AADA9C}" dt="2026-10-23T11:18:57.287" v="198" actId="478"/>
+          <ac:spMkLst>
+            <pc:docMk/>
+            <pc:sldMk cId="0" sldId="267"/>
+            <ac:spMk id="5" creationId="{00000000-0000-0000-0000-000000000000}"/>
+          </ac:spMkLst>
+        </pc:spChg>
+        <pc:spChg chg="del">
+          <ac:chgData name="Thong, Sintyadi" userId="9dfa709e-56f0-43d5-a48d-209ca243e947" providerId="ADAL" clId="{EBDA2D21-6929-4704-A288-8E38C5AADA9C}" dt="2026-10-23T11:19:00.199" v="199" actId="478"/>
+          <ac:spMkLst>
+            <pc:docMk/>
+            <pc:sldMk cId="0" sldId="267"/>
+            <ac:spMk id="6" creationId="{00000000-0000-0000-0000-000000000000}"/>
+          </ac:spMkLst>
+        </pc:spChg>
+        <pc:spChg chg="del">
+          <ac:chgData name="Thong, Sintyadi" userId="9dfa709e-56f0-43d5-a48d-209ca243e947" providerId="ADAL" clId="{EBDA2D21-6929-4704-A288-8E38C5AADA9C}" dt="2026-10-23T11:19:00.199" v="199" actId="478"/>
+          <ac:spMkLst>
+            <pc:docMk/>
+            <pc:sldMk cId="0" sldId="267"/>
+            <ac:spMk id="7" creationId="{00000000-0000-0000-0000-000000000000}"/>
+          </ac:spMkLst>
+        </pc:spChg>
+        <pc:spChg chg="mod">
+          <ac:chgData name="Thong, Sintyadi" userId="9dfa709e-56f0-43d5-a48d-209ca243e947" providerId="ADAL" clId="{EBDA2D21-6929-4704-A288-8E38C5AADA9C}" dt="2026-10-23T11:22:23.584" v="252" actId="1076"/>
+          <ac:spMkLst>
+            <pc:docMk/>
+            <pc:sldMk cId="0" sldId="267"/>
+            <ac:spMk id="8" creationId="{00000000-0000-0000-0000-000000000000}"/>
+          </ac:spMkLst>
+        </pc:spChg>
+        <pc:spChg chg="mod">
+          <ac:chgData name="Thong, Sintyadi" userId="9dfa709e-56f0-43d5-a48d-209ca243e947" providerId="ADAL" clId="{EBDA2D21-6929-4704-A288-8E38C5AADA9C}" dt="2026-10-23T11:22:23.584" v="252" actId="1076"/>
+          <ac:spMkLst>
+            <pc:docMk/>
+            <pc:sldMk cId="0" sldId="267"/>
+            <ac:spMk id="9" creationId="{00000000-0000-0000-0000-000000000000}"/>
+          </ac:spMkLst>
+        </pc:spChg>
+        <pc:spChg chg="mod">
+          <ac:chgData name="Thong, Sintyadi" userId="9dfa709e-56f0-43d5-a48d-209ca243e947" providerId="ADAL" clId="{EBDA2D21-6929-4704-A288-8E38C5AADA9C}" dt="2026-10-23T11:25:11.660" v="466" actId="20577"/>
+          <ac:spMkLst>
+            <pc:docMk/>
+            <pc:sldMk cId="0" sldId="267"/>
+            <ac:spMk id="10" creationId="{00000000-0000-0000-0000-000000000000}"/>
+          </ac:spMkLst>
+        </pc:spChg>
+      </pc:sldChg>
+      <pc:sldChg chg="modSp del mod">
+        <pc:chgData name="Thong, Sintyadi" userId="9dfa709e-56f0-43d5-a48d-209ca243e947" providerId="ADAL" clId="{EBDA2D21-6929-4704-A288-8E38C5AADA9C}" dt="2026-10-23T11:24:26.598" v="362" actId="47"/>
+        <pc:sldMkLst>
+          <pc:docMk/>
+          <pc:sldMk cId="0" sldId="268"/>
+        </pc:sldMkLst>
+        <pc:spChg chg="mod">
+          <ac:chgData name="Thong, Sintyadi" userId="9dfa709e-56f0-43d5-a48d-209ca243e947" providerId="ADAL" clId="{EBDA2D21-6929-4704-A288-8E38C5AADA9C}" dt="2026-10-23T11:22:44.201" v="254" actId="20577"/>
+          <ac:spMkLst>
+            <pc:docMk/>
+            <pc:sldMk cId="0" sldId="268"/>
+            <ac:spMk id="8" creationId="{00000000-0000-0000-0000-000000000000}"/>
+          </ac:spMkLst>
+        </pc:spChg>
+        <pc:spChg chg="mod">
+          <ac:chgData name="Thong, Sintyadi" userId="9dfa709e-56f0-43d5-a48d-209ca243e947" providerId="ADAL" clId="{EBDA2D21-6929-4704-A288-8E38C5AADA9C}" dt="2026-10-23T11:23:56.485" v="315" actId="20577"/>
+          <ac:spMkLst>
+            <pc:docMk/>
+            <pc:sldMk cId="0" sldId="268"/>
+            <ac:spMk id="12" creationId="{00000000-0000-0000-0000-000000000000}"/>
+          </ac:spMkLst>
+        </pc:spChg>
+        <pc:spChg chg="mod">
+          <ac:chgData name="Thong, Sintyadi" userId="9dfa709e-56f0-43d5-a48d-209ca243e947" providerId="ADAL" clId="{EBDA2D21-6929-4704-A288-8E38C5AADA9C}" dt="2026-10-23T11:24:06.585" v="361" actId="20577"/>
+          <ac:spMkLst>
+            <pc:docMk/>
+            <pc:sldMk cId="0" sldId="268"/>
+            <ac:spMk id="16" creationId="{00000000-0000-0000-0000-000000000000}"/>
+          </ac:spMkLst>
+        </pc:spChg>
+      </pc:sldChg>
+      <pc:sldChg chg="delSp mod">
+        <pc:chgData name="Thong, Sintyadi" userId="9dfa709e-56f0-43d5-a48d-209ca243e947" providerId="ADAL" clId="{EBDA2D21-6929-4704-A288-8E38C5AADA9C}" dt="2026-10-23T11:25:32.227" v="468" actId="478"/>
+        <pc:sldMkLst>
+          <pc:docMk/>
+          <pc:sldMk cId="0" sldId="269"/>
+        </pc:sldMkLst>
+        <pc:spChg chg="del">
+          <ac:chgData name="Thong, Sintyadi" userId="9dfa709e-56f0-43d5-a48d-209ca243e947" providerId="ADAL" clId="{EBDA2D21-6929-4704-A288-8E38C5AADA9C}" dt="2026-10-23T11:25:26.952" v="467" actId="478"/>
+          <ac:spMkLst>
+            <pc:docMk/>
+            <pc:sldMk cId="0" sldId="269"/>
+            <ac:spMk id="5" creationId="{00000000-0000-0000-0000-000000000000}"/>
+          </ac:spMkLst>
+        </pc:spChg>
+        <pc:spChg chg="del">
+          <ac:chgData name="Thong, Sintyadi" userId="9dfa709e-56f0-43d5-a48d-209ca243e947" providerId="ADAL" clId="{EBDA2D21-6929-4704-A288-8E38C5AADA9C}" dt="2026-10-23T11:25:32.227" v="468" actId="478"/>
+          <ac:spMkLst>
+            <pc:docMk/>
+            <pc:sldMk cId="0" sldId="269"/>
+            <ac:spMk id="6" creationId="{00000000-0000-0000-0000-000000000000}"/>
+          </ac:spMkLst>
+        </pc:spChg>
+        <pc:spChg chg="del">
+          <ac:chgData name="Thong, Sintyadi" userId="9dfa709e-56f0-43d5-a48d-209ca243e947" providerId="ADAL" clId="{EBDA2D21-6929-4704-A288-8E38C5AADA9C}" dt="2026-10-23T11:25:32.227" v="468" actId="478"/>
+          <ac:spMkLst>
+            <pc:docMk/>
+            <pc:sldMk cId="0" sldId="269"/>
+            <ac:spMk id="7" creationId="{00000000-0000-0000-0000-000000000000}"/>
+          </ac:spMkLst>
+        </pc:spChg>
+        <pc:spChg chg="del">
+          <ac:chgData name="Thong, Sintyadi" userId="9dfa709e-56f0-43d5-a48d-209ca243e947" providerId="ADAL" clId="{EBDA2D21-6929-4704-A288-8E38C5AADA9C}" dt="2026-10-23T11:25:32.227" v="468" actId="478"/>
+          <ac:spMkLst>
+            <pc:docMk/>
+            <pc:sldMk cId="0" sldId="269"/>
+            <ac:spMk id="8" creationId="{00000000-0000-0000-0000-000000000000}"/>
+          </ac:spMkLst>
+        </pc:spChg>
+        <pc:spChg chg="del">
+          <ac:chgData name="Thong, Sintyadi" userId="9dfa709e-56f0-43d5-a48d-209ca243e947" providerId="ADAL" clId="{EBDA2D21-6929-4704-A288-8E38C5AADA9C}" dt="2026-10-23T11:25:32.227" v="468" actId="478"/>
+          <ac:spMkLst>
+            <pc:docMk/>
+            <pc:sldMk cId="0" sldId="269"/>
+            <ac:spMk id="9" creationId="{00000000-0000-0000-0000-000000000000}"/>
+          </ac:spMkLst>
+        </pc:spChg>
+        <pc:spChg chg="del">
+          <ac:chgData name="Thong, Sintyadi" userId="9dfa709e-56f0-43d5-a48d-209ca243e947" providerId="ADAL" clId="{EBDA2D21-6929-4704-A288-8E38C5AADA9C}" dt="2026-10-23T11:25:32.227" v="468" actId="478"/>
+          <ac:spMkLst>
+            <pc:docMk/>
+            <pc:sldMk cId="0" sldId="269"/>
+            <ac:spMk id="10" creationId="{00000000-0000-0000-0000-000000000000}"/>
+          </ac:spMkLst>
+        </pc:spChg>
+        <pc:spChg chg="del">
+          <ac:chgData name="Thong, Sintyadi" userId="9dfa709e-56f0-43d5-a48d-209ca243e947" providerId="ADAL" clId="{EBDA2D21-6929-4704-A288-8E38C5AADA9C}" dt="2026-10-23T11:25:32.227" v="468" actId="478"/>
+          <ac:spMkLst>
+            <pc:docMk/>
+            <pc:sldMk cId="0" sldId="269"/>
+            <ac:spMk id="11" creationId="{00000000-0000-0000-0000-000000000000}"/>
+          </ac:spMkLst>
+        </pc:spChg>
+        <pc:spChg chg="del">
+          <ac:chgData name="Thong, Sintyadi" userId="9dfa709e-56f0-43d5-a48d-209ca243e947" providerId="ADAL" clId="{EBDA2D21-6929-4704-A288-8E38C5AADA9C}" dt="2026-10-23T11:25:32.227" v="468" actId="478"/>
+          <ac:spMkLst>
+            <pc:docMk/>
+            <pc:sldMk cId="0" sldId="269"/>
+            <ac:spMk id="12" creationId="{00000000-0000-0000-0000-000000000000}"/>
+          </ac:spMkLst>
+        </pc:spChg>
+      </pc:sldChg>
+    </pc:docChg>
+  </pc:docChgLst>
+</pc:chgInfo>
 </file>
 
 <file path=ppt/notesMasters/notesMaster1.xml><?xml version="1.0" encoding="utf-8"?>
@@ -185,234 +518,10 @@
           <a:chExt cx="0" cy="0"/>
         </a:xfrm>
       </p:grpSpPr>
-      <p:sp>
-        <p:nvSpPr>
-          <p:cNvPr id="2" name="Header Placeholder 1"/>
-          <p:cNvSpPr>
-            <a:spLocks noGrp="1"/>
-          </p:cNvSpPr>
-          <p:nvPr>
-            <p:ph type="hdr" sz="quarter"/>
-          </p:nvPr>
-        </p:nvSpPr>
-        <p:spPr>
-          <a:xfrm>
-            <a:off x="0" y="0"/>
-            <a:ext cx="2971800" cy="458788"/>
-          </a:xfrm>
-          <a:prstGeom prst="rect">
-            <a:avLst/>
-          </a:prstGeom>
-        </p:spPr>
-        <p:txBody>
-          <a:bodyPr vert="horz" lIns="91440" tIns="45720" rIns="91440" bIns="45720" rtlCol="0"/>
-          <a:lstStyle>
-            <a:lvl1pPr algn="l">
-              <a:defRPr sz="1200"/>
-            </a:lvl1pPr>
-          </a:lstStyle>
-          <a:p>
-            <a:endParaRPr lang="en-US"/>
-          </a:p>
-        </p:txBody>
-      </p:sp>
-      <p:sp>
-        <p:nvSpPr>
-          <p:cNvPr id="3" name="Date Placeholder 2"/>
-          <p:cNvSpPr>
-            <a:spLocks noGrp="1"/>
-          </p:cNvSpPr>
-          <p:nvPr>
-            <p:ph type="dt" idx="1"/>
-          </p:nvPr>
-        </p:nvSpPr>
-        <p:spPr>
-          <a:xfrm>
-            <a:off x="3884613" y="0"/>
-            <a:ext cx="2971800" cy="458788"/>
-          </a:xfrm>
-          <a:prstGeom prst="rect">
-            <a:avLst/>
-          </a:prstGeom>
-        </p:spPr>
-        <p:txBody>
-          <a:bodyPr vert="horz" lIns="91440" tIns="45720" rIns="91440" bIns="45720" rtlCol="0"/>
-          <a:lstStyle>
-            <a:lvl1pPr algn="r">
-              <a:defRPr sz="1200"/>
-            </a:lvl1pPr>
-          </a:lstStyle>
-          <a:p>
-            <a:fld id="{5282F153-3F37-0F45-9E97-73ACFA13230C}" type="datetimeFigureOut">
-              <a:rPr lang="en-US"/>
-              <a:t>7/23/19</a:t>
-            </a:fld>
-            <a:endParaRPr lang="en-US"/>
-          </a:p>
-        </p:txBody>
-      </p:sp>
-      <p:sp>
-        <p:nvSpPr>
-          <p:cNvPr id="4" name="Slide Image Placeholder 3"/>
-          <p:cNvSpPr>
-            <a:spLocks noGrp="1" noRot="1" noChangeAspect="1"/>
-          </p:cNvSpPr>
-          <p:nvPr>
-            <p:ph type="sldImg" idx="2"/>
-          </p:nvPr>
-        </p:nvSpPr>
-        <p:spPr>
-          <a:xfrm>
-            <a:off x="685800" y="1143000"/>
-            <a:ext cx="5486400" cy="3086100"/>
-          </a:xfrm>
-          <a:prstGeom prst="rect">
-            <a:avLst/>
-          </a:prstGeom>
-          <a:noFill/>
-          <a:ln w="12700">
-            <a:solidFill>
-              <a:prstClr val="black"/>
-            </a:solidFill>
-          </a:ln>
-        </p:spPr>
-        <p:txBody>
-          <a:bodyPr vert="horz" lIns="91440" tIns="45720" rIns="91440" bIns="45720" rtlCol="0" anchor="ctr"/>
-          <a:lstStyle/>
-          <a:p>
-            <a:endParaRPr lang="en-US"/>
-          </a:p>
-        </p:txBody>
-      </p:sp>
-      <p:sp>
-        <p:nvSpPr>
-          <p:cNvPr id="5" name="Notes Placeholder 4"/>
-          <p:cNvSpPr>
-            <a:spLocks noGrp="1"/>
-          </p:cNvSpPr>
-          <p:nvPr>
-            <p:ph type="body" sz="quarter" idx="3"/>
-          </p:nvPr>
-        </p:nvSpPr>
-        <p:spPr>
-          <a:xfrm>
-            <a:off x="685800" y="4400550"/>
-            <a:ext cx="5486400" cy="3600450"/>
-          </a:xfrm>
-          <a:prstGeom prst="rect">
-            <a:avLst/>
-          </a:prstGeom>
-        </p:spPr>
-        <p:txBody>
-          <a:bodyPr vert="horz" lIns="91440" tIns="45720" rIns="91440" bIns="45720" rtlCol="0"/>
-          <a:lstStyle/>
-          <a:p>
-            <a:pPr lvl="0"/>
-            <a:r>
-              <a:rPr lang="en-US"/>
-              <a:t>Click to edit Master text styles</a:t>
-            </a:r>
-          </a:p>
-          <a:p>
-            <a:pPr lvl="1"/>
-            <a:r>
-              <a:rPr lang="en-US"/>
-              <a:t>Second level</a:t>
-            </a:r>
-          </a:p>
-          <a:p>
-            <a:pPr lvl="2"/>
-            <a:r>
-              <a:rPr lang="en-US"/>
-              <a:t>Third level</a:t>
-            </a:r>
-          </a:p>
-          <a:p>
-            <a:pPr lvl="3"/>
-            <a:r>
-              <a:rPr lang="en-US"/>
-              <a:t>Fourth level</a:t>
-            </a:r>
-          </a:p>
-          <a:p>
-            <a:pPr lvl="4"/>
-            <a:r>
-              <a:rPr lang="en-US"/>
-              <a:t>Fifth level</a:t>
-            </a:r>
-          </a:p>
-        </p:txBody>
-      </p:sp>
-      <p:sp>
-        <p:nvSpPr>
-          <p:cNvPr id="6" name="Footer Placeholder 5"/>
-          <p:cNvSpPr>
-            <a:spLocks noGrp="1"/>
-          </p:cNvSpPr>
-          <p:nvPr>
-            <p:ph type="ftr" sz="quarter" idx="4"/>
-          </p:nvPr>
-        </p:nvSpPr>
-        <p:spPr>
-          <a:xfrm>
-            <a:off x="0" y="8685213"/>
-            <a:ext cx="2971800" cy="458787"/>
-          </a:xfrm>
-          <a:prstGeom prst="rect">
-            <a:avLst/>
-          </a:prstGeom>
-        </p:spPr>
-        <p:txBody>
-          <a:bodyPr vert="horz" lIns="91440" tIns="45720" rIns="91440" bIns="45720" rtlCol="0" anchor="b"/>
-          <a:lstStyle>
-            <a:lvl1pPr algn="l">
-              <a:defRPr sz="1200"/>
-            </a:lvl1pPr>
-          </a:lstStyle>
-          <a:p>
-            <a:endParaRPr lang="en-US"/>
-          </a:p>
-        </p:txBody>
-      </p:sp>
-      <p:sp>
-        <p:nvSpPr>
-          <p:cNvPr id="7" name="Slide Number Placeholder 6"/>
-          <p:cNvSpPr>
-            <a:spLocks noGrp="1"/>
-          </p:cNvSpPr>
-          <p:nvPr>
-            <p:ph type="sldNum" sz="quarter" idx="5"/>
-          </p:nvPr>
-        </p:nvSpPr>
-        <p:spPr>
-          <a:xfrm>
-            <a:off x="3884613" y="8685213"/>
-            <a:ext cx="2971800" cy="458787"/>
-          </a:xfrm>
-          <a:prstGeom prst="rect">
-            <a:avLst/>
-          </a:prstGeom>
-        </p:spPr>
-        <p:txBody>
-          <a:bodyPr vert="horz" lIns="91440" tIns="45720" rIns="91440" bIns="45720" rtlCol="0" anchor="b"/>
-          <a:lstStyle>
-            <a:lvl1pPr algn="r">
-              <a:defRPr sz="1200"/>
-            </a:lvl1pPr>
-          </a:lstStyle>
-          <a:p>
-            <a:fld id="{CE5E9CC1-C706-0F49-92D6-E571CC5EEA8F}" type="slidenum">
-              <a:rPr lang="en-US"/>
-              <a:t>‹#›</a:t>
-            </a:fld>
-            <a:endParaRPr lang="en-US"/>
-          </a:p>
-        </p:txBody>
-      </p:sp>
     </p:spTree>
     <p:extLst>
       <p:ext uri="{BB962C8B-B14F-4D97-AF65-F5344CB8AC3E}">
-        <p14:creationId xmlns:p14="http://schemas.microsoft.com/office/powerpoint/2010/main" val="1024086991"/>
+        <p14:creationId xmlns:p14="http://schemas.microsoft.com/office/powerpoint/2010/main" val="2815826730"/>
       </p:ext>
     </p:extLst>
   </p:cSld>
@@ -560,7 +669,6 @@
               <a:rPr lang="en-US" dirty="0"/>
               <a:t>Selamat pagi, Bapak dan Ibu anggota dewan. Hari ini saya ingin mengajak kita melihat sebuah perjalanan kecil, dari catatan paroki yang tersebar menuju pastoral yang berbasis data. Perjalanan ini punya tiga langkah: mengumpulkan data, membagikan informasi yang tepat kepada umat, lalu memahami data itu supaya pelayanan kita lebih tepat. Semua angka yang akan Bapak dan Ibu lihat hari ini adalah data simulasi (fiktif), bukan data nyata paroki kita.</a:t>
             </a:r>
-            <a:endParaRPr lang="en-US" dirty="0"/>
           </a:p>
         </p:txBody>
       </p:sp>
@@ -648,7 +756,6 @@
               <a:rPr lang="en-US" dirty="0"/>
               <a:t>Di sinilah data bertemu dengan pelayanan. Data tidak memberi jawaban, tetapi membantu kita mengajukan pertanyaan yang lebih tepat. Pengeluaran program naik lebih cepat daripada kolekte: pertanyaan pastoralnya, program mana yang paling berbuah dan perlu dipertahankan. Sumbangan Adven menutup makin sedikit biaya Natal: bagaimana mengajak umat terlibat lebih awal. Sedikit umat berusia dua puluh sampai dua puluh sembilan tahun: apa yang dibutuhkan orang muda dari paroki, dan kita bisa mendengarkannya lewat survei. Ini contoh saja. Dewan dan gembala tetap yang memutuskan; data membantu kita mendengar dengan lebih teliti.</a:t>
             </a:r>
-            <a:endParaRPr lang="en-US" dirty="0"/>
           </a:p>
         </p:txBody>
       </p:sp>
@@ -736,7 +843,6 @@
               <a:rPr lang="en-US" dirty="0"/>
               <a:t>Sebelum melangkah lebih jauh, ada lima prinsip yang kita pegang. Pertama, melayani bukan menilai: kolekte bukan ukuran iman, dan kita tidak mengurutkan wilayah atau lingkungan dari yang terbaik. Kedua, privasi lebih dulu: hanya angka gabungan yang ditampilkan, dan kelompok yang hanya berisi satu sampai empat orang disembunyikan. Ketiga, jelas sumbernya: setiap angka dapat ditelusuri ke catatan asal dan penanggung jawabnya. Keempat, manusia yang memutuskan: perkiraan hanyalah gambaran, dan dewan serta gembala tetap yang memutuskan. Kelima, mulai kecil dan bertahap. Pastoral berbasis data berarti mendengar lebih teliti, bukan menilai umat.</a:t>
             </a:r>
-            <a:endParaRPr lang="en-US" dirty="0"/>
           </a:p>
         </p:txBody>
       </p:sp>
@@ -824,7 +930,6 @@
               <a:rPr lang="en-US" dirty="0"/>
               <a:t>Supaya jelas, inilah posisi kita sekarang. Yang sudah ada adalah contoh awal: dasbor berbahasa Indonesia dengan dua belas halaman, versi satu berkas yang bisa dibuka tanpa instalasi, seratus tiga puluh delapan dokumen PDF contoh, dan semuanya sudah dicoba berjalan di akun percobaan Snowflake. Semua ini memakai data simulasi. Yang belum ada adalah hal-hal yang memang perlu diputuskan bersama: data nyata paroki, kesepakatan siapa boleh melihat apa, penanggung jawab data di setiap seksi, kebijakan privasi dan izin pemakaian data, serta pilihan platform dan biayanya. Contoh ini memakai Snowflake karena akun percobaannya memudahkan, tetapi konsepnya tidak terikat pada satu produk.</a:t>
             </a:r>
-            <a:endParaRPr lang="en-US" dirty="0"/>
           </a:p>
         </p:txBody>
       </p:sp>
@@ -910,9 +1015,8 @@
           <a:p>
             <a:r>
               <a:rPr lang="en-US" dirty="0"/>
-              <a:t>Usulan kami sederhana dan mengikuti tiga langkah tadi. Untuk langkah Kumpulkan: pilih dua sampai tiga bidang data nyata untuk dimulai, misalnya jadwal Misa, kehadiran, dan kegiatan, dan tunjuk satu koordinator data. Untuk langkah Bagikan: mulai membagikan jadwal kegiatan dan panduan layanan kepada umat, tanpa anggaran. Untuk langkah Pahami: siapkan ringkasan berkala bagi dewan tentang kolekte, anggaran, dan susunan umat, dengan aturan privasi yang jelas. Yang kami mohon dari dewan ada tiga hal: menyetujui arah perjalanan ini, menunjuk koordinator data dan seksi untuk percobaan, dan menyepakati prinsip privasi tentang siapa boleh melihat apa. Soal waktu dan biaya, kita tentukan bersama setelah dewan sepakat; belum ada angka yang kami usulkan hari ini.</a:t>
-            </a:r>
-            <a:endParaRPr lang="en-US" dirty="0"/>
+              <a:t>Sebagai penutup: perjalanan ini dimulai dari hal yang sederhana, yaitu mengumpulkan data dengan rapi, membagikan yang tepat kepada umat, lalu memahaminya supaya pelayanan kita lebih tepat. Pastoral berbasis data bukan tentang menilai umat, melainkan tentang mendengar lebih baik dan melayani lebih tepat. Terima kasih atas perhatian Bapak dan Ibu. Kami sangat menantikan pertanyaan dan masukan dari dewan.</a:t>
+            </a:r>
           </a:p>
         </p:txBody>
       </p:sp>
@@ -934,94 +1038,6 @@
             <a:fld id="{F7021451-1387-4CA6-816F-3879F97B5CBC}" type="slidenum">
               <a:rPr lang="en-US"/>
               <a:t>13</a:t>
-            </a:fld>
-            <a:endParaRPr lang="en-US"/>
-          </a:p>
-        </p:txBody>
-      </p:sp>
-    </p:spTree>
-    <p:extLst>
-      <p:ext uri="{BB962C8B-B14F-4D97-AF65-F5344CB8AC3E}">
-        <p14:creationId xmlns:p14="http://schemas.microsoft.com/office/powerpoint/2010/main" val="1024086991"/>
-      </p:ext>
-    </p:extLst>
-  </p:cSld>
-  <p:clrMapOvr>
-    <a:masterClrMapping/>
-  </p:clrMapOvr>
-</p:notes>
-</file>
-
-<file path=ppt/notesSlides/notesSlide14.xml><?xml version="1.0" encoding="utf-8"?>
-<p:notes xmlns:a="http://schemas.openxmlformats.org/drawingml/2006/main" xmlns:r="http://schemas.openxmlformats.org/officeDocument/2006/relationships" xmlns:p="http://schemas.openxmlformats.org/presentationml/2006/main">
-  <p:cSld>
-    <p:spTree>
-      <p:nvGrpSpPr>
-        <p:cNvPr id="1" name=""/>
-        <p:cNvGrpSpPr/>
-        <p:nvPr/>
-      </p:nvGrpSpPr>
-      <p:grpSpPr>
-        <a:xfrm>
-          <a:off x="0" y="0"/>
-          <a:ext cx="0" cy="0"/>
-          <a:chOff x="0" y="0"/>
-          <a:chExt cx="0" cy="0"/>
-        </a:xfrm>
-      </p:grpSpPr>
-      <p:sp>
-        <p:nvSpPr>
-          <p:cNvPr id="2" name="Slide Image Placeholder 1"/>
-          <p:cNvSpPr>
-            <a:spLocks noGrp="1" noRot="1" noChangeAspect="1"/>
-          </p:cNvSpPr>
-          <p:nvPr>
-            <p:ph type="sldImg"/>
-          </p:nvPr>
-        </p:nvSpPr>
-        <p:spPr/>
-      </p:sp>
-      <p:sp>
-        <p:nvSpPr>
-          <p:cNvPr id="3" name="Notes Placeholder 2"/>
-          <p:cNvSpPr>
-            <a:spLocks noGrp="1"/>
-          </p:cNvSpPr>
-          <p:nvPr>
-            <p:ph type="body" idx="1"/>
-          </p:nvPr>
-        </p:nvSpPr>
-        <p:spPr/>
-        <p:txBody>
-          <a:bodyPr/>
-          <a:lstStyle/>
-          <a:p>
-            <a:r>
-              <a:rPr lang="en-US" dirty="0"/>
-              <a:t>Sebagai penutup: perjalanan ini dimulai dari hal yang sederhana, yaitu mengumpulkan data dengan rapi, membagikan yang tepat kepada umat, lalu memahaminya supaya pelayanan kita lebih tepat. Pastoral berbasis data bukan tentang menilai umat, melainkan tentang mendengar lebih baik dan melayani lebih tepat. Terima kasih atas perhatian Bapak dan Ibu. Kami sangat menantikan pertanyaan dan masukan dari dewan.</a:t>
-            </a:r>
-            <a:endParaRPr lang="en-US" dirty="0"/>
-          </a:p>
-        </p:txBody>
-      </p:sp>
-      <p:sp>
-        <p:nvSpPr>
-          <p:cNvPr id="4" name="Slide Number Placeholder 3"/>
-          <p:cNvSpPr>
-            <a:spLocks noGrp="1"/>
-          </p:cNvSpPr>
-          <p:nvPr>
-            <p:ph type="sldNum" sz="quarter" idx="10"/>
-          </p:nvPr>
-        </p:nvSpPr>
-        <p:spPr/>
-        <p:txBody>
-          <a:bodyPr/>
-          <a:lstStyle/>
-          <a:p>
-            <a:fld id="{F7021451-1387-4CA6-816F-3879F97B5CBC}" type="slidenum">
-              <a:rPr lang="en-US"/>
-              <a:t>14</a:t>
             </a:fld>
             <a:endParaRPr lang="en-US"/>
           </a:p>
@@ -1088,7 +1104,6 @@
               <a:rPr lang="en-US" dirty="0"/>
               <a:t>Ini empat pertanyaan yang mungkin akrab bagi kita semua: berapa umat yang hadir di setiap Misa, apakah kolekte cukup menutup biaya kegiatan, kegiatan apa yang akan datang, dan siapa saja umat kita menurut usia. Jawabannya biasanya ada di paroki, tetapi tersebar di buku catatan, lembar kerja, dan ingatan para pengurus. Akibatnya, menjawab satu pertanyaan sederhana bisa memakan waktu, dan jawaban dari dua orang bisa berbeda. Itulah alasan kita ingin memulai perjalanan ini.</a:t>
             </a:r>
-            <a:endParaRPr lang="en-US" dirty="0"/>
           </a:p>
         </p:txBody>
       </p:sp>
@@ -1176,7 +1191,6 @@
               <a:rPr lang="en-US" dirty="0"/>
               <a:t>Perjalanan ini kita bagi menjadi tiga langkah. Langkah pertama, Kumpulkan: data dari semua bidang paroki disimpan rapi di satu tempat, dalam tabel sederhana yang saling terhubung. Langkah kedua, Bagikan: umat mendapat informasi yang berguna bagi mereka, seperti jadwal, kegiatan, dan panduan layanan. Langkah ketiga, Pahami: data menjadi wawasan yang membantu dewan dan seksi mengambil keputusan. Setiap langkah berguna sendiri, jadi kita tidak perlu menunggu semuanya selesai untuk merasakan manfaatnya. Contoh awal yang akan kita lihat sudah memperlihatkan ketiganya, dengan data simulasi.</a:t>
             </a:r>
-            <a:endParaRPr lang="en-US" dirty="0"/>
           </a:p>
         </p:txBody>
       </p:sp>
@@ -1264,7 +1278,6 @@
               <a:rPr lang="en-US" dirty="0"/>
               <a:t>Langkah pertama adalah mengumpulkan data. Idenya sederhana: setiap bidang kegiatan paroki punya tabelnya sendiri, seperti lembar kerja yang rapi dan seragam, dan tabel-tabel itu saling terhubung. Dalam contoh ini ada sembilan bidang: jadwal Misa, kehadiran, kolekte, data umat dan keluarga, sumbangan khusus seperti Prapaskah dan Adven, survei, rencana kerja dan anggaran, kegiatan dan laporannya, serta wilayah dan lingkungan. Isinya empat puluh tiga tabel dengan riwayat lebih dari lima tahun, termasuk seribu tujuh ratus tiga puluh empat Misa. Semuanya data simulasi.</a:t>
             </a:r>
-            <a:endParaRPr lang="en-US" dirty="0"/>
           </a:p>
         </p:txBody>
       </p:sp>
@@ -1352,7 +1365,6 @@
               <a:rPr lang="en-US" dirty="0"/>
               <a:t>Inilah artinya data yang saling terhubung. Ambil satu kegiatan saja: Pelatihan Lektor dan Pemazmur dari Seksi Liturgi. Ada rencana kerja, ada anggaran sebesar satu juta tujuh ratus lima puluh ribu rupiah, ada kegiatannya sendiri pada empat belas Februari dua ribu dua puluh satu dengan target tiga puluh peserta dan dua puluh sembilan yang hadir, dan ada laporan akhirnya dengan biaya terpakai satu juta tujuh ratus empat puluh ribu rupiah. Karena keempatnya terhubung, kita bisa melihatnya bersama dan menelusurinya kapan saja, tanpa mencari di empat tempat berbeda. Kegiatan ini hanya contoh simulasi.</a:t>
             </a:r>
-            <a:endParaRPr lang="en-US" dirty="0"/>
           </a:p>
         </p:txBody>
       </p:sp>
@@ -1440,7 +1452,6 @@
               <a:rPr lang="en-US" dirty="0"/>
               <a:t>Langkah kedua adalah berbagi. Tidak semua data perlu atau boleh dilihat semua orang. Umat cukup tahu hal-hal yang berguna bagi mereka: jadwal Misa, kegiatan yang akan datang dengan nama, tanggal, dan tempatnya, panduan layanan seperti persyaratan Baptis, Krisma, dan Pernikahan, serta pengumuman. Umat tidak perlu melihat anggaran. Anggaran, kolekte, laporan kegiatan, dan data umat hanya untuk pengurus dan dewan, dan data umat hanya bagi yang berwenang. Karena itu setiap data diberi tingkat kerahasiaan: Publik, Internal, Terbatas, dan Sangat Terbatas.</a:t>
             </a:r>
-            <a:endParaRPr lang="en-US" dirty="0"/>
           </a:p>
         </p:txBody>
       </p:sp>
@@ -1528,7 +1539,6 @@
               <a:rPr lang="en-US" dirty="0"/>
               <a:t>Ini dua contoh dari halaman yang sudah kita buat, dengan data simulasi. Di kiri, jadwal Misa lengkap dengan hari, jam, tempat, dan bahasanya. Di kanan, panduan layanan: Baptis Dewasa dengan daftar persyaratan dan langkah-langkahnya, yang juga bisa diunduh sebagai PDF untuk dicetak. Ada enam panduan contoh: Baptis Dewasa, Baptis Batuta, Krisma, Pernikahan, Pendaftaran Lingkungan, dan Pelayanan Kematian. Perlu saya jelaskan bahwa halaman kegiatan di contoh kita adalah tampilan pengurus dan memuat anggaran. Untuk umat, kita akan menampilkan jadwalnya saja: nama, tanggal, dan tempat. Panduan ini hanya contoh untuk demonstrasi, bukan ketentuan resmi.</a:t>
             </a:r>
-            <a:endParaRPr lang="en-US" dirty="0"/>
           </a:p>
         </p:txBody>
       </p:sp>
@@ -1616,7 +1626,6 @@
               <a:rPr lang="en-US" dirty="0"/>
               <a:t>Inilah langkah ketiga, mengubah data menjadi wawasan. Dengan data simulasi, ada empat hal yang langsung terlihat. Pertama, pengeluaran program naik tiga koma enam kali lipat, dari sekitar lima puluh lima juta rupiah pada tahun dua ribu dua puluh satu menjadi sekitar seratus sembilan puluh tujuh juta pada dua ribu dua puluh lima, sementara kolekte relatif datar. Kedua, sumbangan Adven yang menutup biaya Natal turun dari seratus tujuh belas persen menjadi enam puluh enam persen, sedangkan sumbangan Prapaskah masih menutup biaya Paskah. Ketiga, sepuluh peristiwa luar biasa seperti hujan deras dan kabut asap membuat sekitar enam puluh dua juta rupiah kolekte tidak diterima, dan perkiraan kolekte meleset jauh bila ada peristiwa. Keempat, hanya tiga puluh tujuh umat berusia dua puluh sampai dua puluh sembilan tahun. Semua ini angka simulasi untuk memperlihatkan jenis pertanyaan yang bisa dijawab. Garis tren hanya gambaran, bukan ramalan.</a:t>
             </a:r>
-            <a:endParaRPr lang="en-US" dirty="0"/>
           </a:p>
         </p:txBody>
       </p:sp>
@@ -1704,7 +1713,6 @@
               <a:rPr lang="en-US" dirty="0"/>
               <a:t>Beginilah tampilan dasbor contoh kita. Di kiri, halaman Ringkasan: angka pokok kolekte dan pengeluaran program, serta grafik yang memperlihatkan arah tren. Di kanan, halaman Demografi umat, dengan piramida usia dan jenis kelamin. Halaman ini hanya memuat angka gabungan: tidak ada nama, dan kelompok yang terlalu kecil disembunyikan agar tidak ada orang yang bisa dikenali. Seluruhnya ada dua belas halaman berbahasa Indonesia, dan tersedia juga sebagai satu berkas yang bisa dibuka tanpa memasang apa pun, misalnya bila akun percobaan berakhir.</a:t>
             </a:r>
-            <a:endParaRPr lang="en-US" dirty="0"/>
           </a:p>
         </p:txBody>
       </p:sp>
@@ -1782,6 +1790,7 @@
         <a:solidFill>
           <a:srgbClr val="FAF6EE"/>
         </a:solidFill>
+        <a:effectLst/>
       </p:bgPr>
     </p:bg>
     <p:spTree>
@@ -1801,9 +1810,11 @@
       <p:sp>
         <p:nvSpPr>
           <p:cNvPr id="2" name="Text 0"/>
-          <p:cNvSpPr/>
+          <p:cNvSpPr>
+            <a:spLocks noGrp="1"/>
+          </p:cNvSpPr>
           <p:nvPr>
-            <p:ph idx="100" type="body" hasCustomPrompt="1"/>
+            <p:ph type="body" idx="100" hasCustomPrompt="1"/>
           </p:nvPr>
         </p:nvSpPr>
         <p:spPr>
@@ -1820,9 +1831,9 @@
         <p:txBody>
           <a:bodyPr wrap="square" rtlCol="0"/>
           <a:lstStyle>
-            <a:lvl1pPr algn="l" indent="0" marL="0">
-              <a:buNone/>
-              <a:defRPr lang="id-ID" altLang="en-US" sz="1200" b="1" spc="200" kern="0" dirty="0">
+            <a:lvl1pPr marL="0" indent="0" algn="l">
+              <a:buNone/>
+              <a:defRPr lang="id-ID" altLang="en-US" sz="1200" b="1" kern="0" spc="200" dirty="0">
                 <a:solidFill>
                   <a:schemeClr val="accent3"/>
                 </a:solidFill>
@@ -1830,7 +1841,7 @@
             </a:lvl1pPr>
           </a:lstStyle>
           <a:p>
-            <a:pPr algn="l" indent="0" marL="0">
+            <a:pPr marL="0" indent="0" algn="l">
               <a:buNone/>
             </a:pPr>
             <a:endParaRPr lang="id-ID" sz="1200" dirty="0"/>
@@ -1840,9 +1851,11 @@
       <p:sp>
         <p:nvSpPr>
           <p:cNvPr id="3" name="Text 0"/>
-          <p:cNvSpPr/>
+          <p:cNvSpPr>
+            <a:spLocks noGrp="1"/>
+          </p:cNvSpPr>
           <p:nvPr>
-            <p:ph idx="101" type="title" hasCustomPrompt="1"/>
+            <p:ph type="title" idx="101" hasCustomPrompt="1"/>
           </p:nvPr>
         </p:nvSpPr>
         <p:spPr>
@@ -1859,7 +1872,7 @@
         <p:txBody>
           <a:bodyPr wrap="square" rtlCol="0"/>
           <a:lstStyle>
-            <a:lvl1pPr algn="l" indent="0" marL="0">
+            <a:lvl1pPr marL="0" indent="0" algn="l">
               <a:buNone/>
               <a:defRPr lang="id-ID" altLang="en-US" sz="3400" b="1" dirty="0">
                 <a:solidFill>
@@ -1869,7 +1882,7 @@
             </a:lvl1pPr>
           </a:lstStyle>
           <a:p>
-            <a:pPr algn="l" indent="0" marL="0">
+            <a:pPr marL="0" indent="0" algn="l">
               <a:buNone/>
             </a:pPr>
             <a:endParaRPr lang="id-ID" sz="3400" dirty="0"/>
@@ -1897,7 +1910,7 @@
           <a:bodyPr wrap="square" lIns="0" tIns="0" rIns="0" bIns="0" rtlCol="0" anchor="ctr"/>
           <a:lstStyle/>
           <a:p>
-            <a:pPr indent="0" marL="0">
+            <a:pPr marL="0" indent="0">
               <a:buNone/>
             </a:pPr>
             <a:r>
@@ -1932,7 +1945,7 @@
           </a:prstGeom>
           <a:extLst>
             <a:ext uri="{C572A759-6A51-4108-AA02-DFA0A04FC94B}">
-              <ma14:wrappingTextBoxFlag xmlns:ma14="http://schemas.microsoft.com/office/mac/drawingml/2011/main" val="0"/>
+              <ma14:wrappingTextBoxFlag xmlns:ma14="http://schemas.microsoft.com/office/mac/drawingml/2011/main" xmlns="" val="0"/>
             </a:ext>
           </a:extLst>
         </p:spPr>
@@ -1950,8 +1963,8 @@
           <a:p>
             <a:pPr algn="r"/>
             <a:fld id="{F7021451-1387-4CA6-816F-3879F97B5CBC}" type="slidenum">
-              <a:rPr b="0" lang="en-US"/>
-              <a:t>1002</a:t>
+              <a:rPr lang="en-US" b="0"/>
+              <a:t>‹#›</a:t>
             </a:fld>
             <a:endParaRPr lang="en-US"/>
           </a:p>
@@ -1973,6 +1986,7 @@
         <a:solidFill>
           <a:srgbClr val="F0E8D8"/>
         </a:solidFill>
+        <a:effectLst/>
       </p:bgPr>
     </p:bg>
     <p:spTree>
@@ -1992,9 +2006,11 @@
       <p:sp>
         <p:nvSpPr>
           <p:cNvPr id="2" name="Text 0"/>
-          <p:cNvSpPr/>
+          <p:cNvSpPr>
+            <a:spLocks noGrp="1"/>
+          </p:cNvSpPr>
           <p:nvPr>
-            <p:ph idx="100" type="body" hasCustomPrompt="1"/>
+            <p:ph type="body" idx="100" hasCustomPrompt="1"/>
           </p:nvPr>
         </p:nvSpPr>
         <p:spPr>
@@ -2011,9 +2027,9 @@
         <p:txBody>
           <a:bodyPr wrap="square" rtlCol="0"/>
           <a:lstStyle>
-            <a:lvl1pPr algn="l" indent="0" marL="0">
-              <a:buNone/>
-              <a:defRPr lang="id-ID" altLang="en-US" sz="1200" b="1" spc="200" kern="0" dirty="0">
+            <a:lvl1pPr marL="0" indent="0" algn="l">
+              <a:buNone/>
+              <a:defRPr lang="id-ID" altLang="en-US" sz="1200" b="1" kern="0" spc="200" dirty="0">
                 <a:solidFill>
                   <a:schemeClr val="accent3"/>
                 </a:solidFill>
@@ -2021,7 +2037,7 @@
             </a:lvl1pPr>
           </a:lstStyle>
           <a:p>
-            <a:pPr algn="l" indent="0" marL="0">
+            <a:pPr marL="0" indent="0" algn="l">
               <a:buNone/>
             </a:pPr>
             <a:endParaRPr lang="id-ID" sz="1200" dirty="0"/>
@@ -2031,9 +2047,11 @@
       <p:sp>
         <p:nvSpPr>
           <p:cNvPr id="3" name="Text 0"/>
-          <p:cNvSpPr/>
+          <p:cNvSpPr>
+            <a:spLocks noGrp="1"/>
+          </p:cNvSpPr>
           <p:nvPr>
-            <p:ph idx="101" type="title" hasCustomPrompt="1"/>
+            <p:ph type="title" idx="101" hasCustomPrompt="1"/>
           </p:nvPr>
         </p:nvSpPr>
         <p:spPr>
@@ -2050,7 +2068,7 @@
         <p:txBody>
           <a:bodyPr wrap="square" rtlCol="0"/>
           <a:lstStyle>
-            <a:lvl1pPr algn="l" indent="0" marL="0">
+            <a:lvl1pPr marL="0" indent="0" algn="l">
               <a:buNone/>
               <a:defRPr lang="id-ID" altLang="en-US" sz="3400" b="1" dirty="0">
                 <a:solidFill>
@@ -2060,7 +2078,7 @@
             </a:lvl1pPr>
           </a:lstStyle>
           <a:p>
-            <a:pPr algn="l" indent="0" marL="0">
+            <a:pPr marL="0" indent="0" algn="l">
               <a:buNone/>
             </a:pPr>
             <a:endParaRPr lang="id-ID" sz="3400" dirty="0"/>
@@ -2088,7 +2106,7 @@
           <a:bodyPr wrap="square" lIns="0" tIns="0" rIns="0" bIns="0" rtlCol="0" anchor="ctr"/>
           <a:lstStyle/>
           <a:p>
-            <a:pPr indent="0" marL="0">
+            <a:pPr marL="0" indent="0">
               <a:buNone/>
             </a:pPr>
             <a:r>
@@ -2123,7 +2141,7 @@
           </a:prstGeom>
           <a:extLst>
             <a:ext uri="{C572A759-6A51-4108-AA02-DFA0A04FC94B}">
-              <ma14:wrappingTextBoxFlag xmlns:ma14="http://schemas.microsoft.com/office/mac/drawingml/2011/main" val="0"/>
+              <ma14:wrappingTextBoxFlag xmlns:ma14="http://schemas.microsoft.com/office/mac/drawingml/2011/main" xmlns="" val="0"/>
             </a:ext>
           </a:extLst>
         </p:spPr>
@@ -2141,8 +2159,8 @@
           <a:p>
             <a:pPr algn="r"/>
             <a:fld id="{F7021451-1387-4CA6-816F-3879F97B5CBC}" type="slidenum">
-              <a:rPr b="0" lang="en-US"/>
-              <a:t>1003</a:t>
+              <a:rPr lang="en-US" b="0"/>
+              <a:t>‹#›</a:t>
             </a:fld>
             <a:endParaRPr lang="en-US"/>
           </a:p>
@@ -2164,6 +2182,7 @@
         <a:solidFill>
           <a:srgbClr val="1B2B3F"/>
         </a:solidFill>
+        <a:effectLst/>
       </p:bgPr>
     </p:bg>
     <p:spTree>
@@ -2183,9 +2202,11 @@
       <p:sp>
         <p:nvSpPr>
           <p:cNvPr id="2" name="Text 0"/>
-          <p:cNvSpPr/>
+          <p:cNvSpPr>
+            <a:spLocks noGrp="1"/>
+          </p:cNvSpPr>
           <p:nvPr>
-            <p:ph idx="100" type="body" hasCustomPrompt="1"/>
+            <p:ph type="body" idx="100" hasCustomPrompt="1"/>
           </p:nvPr>
         </p:nvSpPr>
         <p:spPr>
@@ -2202,9 +2223,9 @@
         <p:txBody>
           <a:bodyPr wrap="square" rtlCol="0"/>
           <a:lstStyle>
-            <a:lvl1pPr algn="l" indent="0" marL="0">
-              <a:buNone/>
-              <a:defRPr lang="id-ID" altLang="en-US" sz="1300" b="1" spc="300" kern="0" dirty="0">
+            <a:lvl1pPr marL="0" indent="0" algn="l">
+              <a:buNone/>
+              <a:defRPr lang="id-ID" altLang="en-US" sz="1300" b="1" kern="0" spc="300" dirty="0">
                 <a:solidFill>
                   <a:schemeClr val="accent4"/>
                 </a:solidFill>
@@ -2212,7 +2233,7 @@
             </a:lvl1pPr>
           </a:lstStyle>
           <a:p>
-            <a:pPr algn="l" indent="0" marL="0">
+            <a:pPr marL="0" indent="0" algn="l">
               <a:buNone/>
             </a:pPr>
             <a:endParaRPr lang="id-ID" sz="1300" dirty="0"/>
@@ -2222,9 +2243,11 @@
       <p:sp>
         <p:nvSpPr>
           <p:cNvPr id="3" name="Text 0"/>
-          <p:cNvSpPr/>
+          <p:cNvSpPr>
+            <a:spLocks noGrp="1"/>
+          </p:cNvSpPr>
           <p:nvPr>
-            <p:ph idx="101" type="title" hasCustomPrompt="1"/>
+            <p:ph type="title" idx="101" hasCustomPrompt="1"/>
           </p:nvPr>
         </p:nvSpPr>
         <p:spPr>
@@ -2241,7 +2264,7 @@
         <p:txBody>
           <a:bodyPr wrap="square" rtlCol="0"/>
           <a:lstStyle>
-            <a:lvl1pPr algn="l" indent="0" marL="0">
+            <a:lvl1pPr marL="0" indent="0" algn="l">
               <a:buNone/>
               <a:defRPr lang="id-ID" altLang="en-US" sz="5000" b="1" dirty="0">
                 <a:solidFill>
@@ -2251,7 +2274,7 @@
             </a:lvl1pPr>
           </a:lstStyle>
           <a:p>
-            <a:pPr algn="l" indent="0" marL="0">
+            <a:pPr marL="0" indent="0" algn="l">
               <a:buNone/>
             </a:pPr>
             <a:endParaRPr lang="id-ID" sz="5000" dirty="0"/>
@@ -2269,6 +2292,11 @@
 <file path=ppt/slideMasters/slideMaster1.xml><?xml version="1.0" encoding="utf-8"?>
 <p:sldMaster xmlns:a="http://schemas.openxmlformats.org/drawingml/2006/main" xmlns:r="http://schemas.openxmlformats.org/officeDocument/2006/relationships" xmlns:p="http://schemas.openxmlformats.org/presentationml/2006/main">
   <p:cSld>
+    <p:bg>
+      <p:bgRef idx="1001">
+        <a:schemeClr val="bg1"/>
+      </p:bgRef>
+    </p:bg>
     <p:spTree>
       <p:nvGrpSpPr>
         <p:cNvPr id="1" name=""/>
@@ -2303,7 +2331,7 @@
           </a:prstGeom>
           <a:extLst>
             <a:ext uri="{C572A759-6A51-4108-AA02-DFA0A04FC94B}">
-              <ma14:wrappingTextBoxFlag xmlns:ma14="http://schemas.microsoft.com/office/mac/drawingml/2011/main" val="0"/>
+              <ma14:wrappingTextBoxFlag xmlns:ma14="http://schemas.microsoft.com/office/mac/drawingml/2011/main" xmlns="" val="0"/>
             </a:ext>
           </a:extLst>
         </p:spPr>
@@ -2321,8 +2349,8 @@
           <a:p>
             <a:pPr algn="r"/>
             <a:fld id="{F7021451-1387-4CA6-816F-3879F97B5CBC}" type="slidenum">
-              <a:rPr b="0" lang="en-US"/>
-              <a:t>null</a:t>
+              <a:rPr lang="en-US" b="0"/>
+              <a:t>‹#›</a:t>
             </a:fld>
             <a:endParaRPr lang="en-US"/>
           </a:p>
@@ -2611,9 +2639,11 @@
       <p:sp>
         <p:nvSpPr>
           <p:cNvPr id="3" name="Text 0"/>
-          <p:cNvSpPr/>
+          <p:cNvSpPr>
+            <a:spLocks noGrp="1"/>
+          </p:cNvSpPr>
           <p:nvPr>
-            <p:ph idx="100" type="body" hasCustomPrompt="1"/>
+            <p:ph type="body" idx="100" hasCustomPrompt="1"/>
           </p:nvPr>
         </p:nvSpPr>
         <p:spPr>
@@ -2631,11 +2661,11 @@
           <a:bodyPr wrap="square" lIns="0" tIns="0" rIns="0" bIns="0" rtlCol="0" anchor="t"/>
           <a:lstStyle/>
           <a:p>
-            <a:pPr algn="l" indent="0" marL="0">
-              <a:buNone/>
-            </a:pPr>
-            <a:r>
-              <a:rPr lang="id-ID" altLang="en-US" sz="1300" b="1" spc="300" kern="0" dirty="0">
+            <a:pPr marL="0" indent="0" algn="l">
+              <a:buNone/>
+            </a:pPr>
+            <a:r>
+              <a:rPr lang="id-ID" altLang="en-US" sz="1300" b="1" kern="0" spc="300" dirty="0">
                 <a:solidFill>
                   <a:schemeClr val="accent4"/>
                 </a:solidFill>
@@ -2649,9 +2679,11 @@
       <p:sp>
         <p:nvSpPr>
           <p:cNvPr id="4" name="Text 0"/>
-          <p:cNvSpPr/>
+          <p:cNvSpPr>
+            <a:spLocks noGrp="1"/>
+          </p:cNvSpPr>
           <p:nvPr>
-            <p:ph idx="101" type="title" hasCustomPrompt="1"/>
+            <p:ph type="title" idx="101" hasCustomPrompt="1"/>
           </p:nvPr>
         </p:nvSpPr>
         <p:spPr>
@@ -2669,7 +2701,7 @@
           <a:bodyPr wrap="square" lIns="0" tIns="0" rIns="0" bIns="0" rtlCol="0" anchor="t"/>
           <a:lstStyle/>
           <a:p>
-            <a:pPr algn="l" indent="0" marL="0">
+            <a:pPr marL="0" indent="0" algn="l">
               <a:buNone/>
             </a:pPr>
             <a:r>
@@ -2683,7 +2715,7 @@
             <a:endParaRPr lang="id-ID" sz="5000" dirty="0"/>
           </a:p>
           <a:p>
-            <a:pPr algn="l" indent="0" marL="0">
+            <a:pPr marL="0" indent="0" algn="l">
               <a:buNone/>
             </a:pPr>
             <a:r>
@@ -2719,7 +2751,7 @@
           <a:bodyPr wrap="square" lIns="0" tIns="0" rIns="0" bIns="0" rtlCol="0" anchor="t"/>
           <a:lstStyle/>
           <a:p>
-            <a:pPr indent="0" marL="0">
+            <a:pPr marL="0" indent="0">
               <a:buNone/>
             </a:pPr>
             <a:r>
@@ -2728,7 +2760,7 @@
                   <a:schemeClr val="accent6"/>
                 </a:solidFill>
               </a:rPr>
-              <a:t>Pusat Informasi Paroki: dari catatan yang tersebar menjadi pelayanan yang lebih tepat</a:t>
+              <a:t>Pusat Informasi Paroki</a:t>
             </a:r>
             <a:endParaRPr lang="id-ID" sz="2000" dirty="0"/>
           </a:p>
@@ -2756,6 +2788,13 @@
             <a:prstDash val="solid"/>
           </a:ln>
         </p:spPr>
+        <p:txBody>
+          <a:bodyPr/>
+          <a:lstStyle/>
+          <a:p>
+            <a:endParaRPr lang="en-US"/>
+          </a:p>
+        </p:txBody>
       </p:sp>
       <p:sp>
         <p:nvSpPr>
@@ -2784,7 +2823,7 @@
           <a:bodyPr wrap="square" lIns="0" tIns="0" rIns="0" bIns="0" rtlCol="0" anchor="ctr"/>
           <a:lstStyle/>
           <a:p>
-            <a:pPr algn="ctr" indent="0" marL="0">
+            <a:pPr marL="0" indent="0" algn="ctr">
               <a:buNone/>
             </a:pPr>
             <a:r>
@@ -2820,7 +2859,7 @@
           <a:bodyPr wrap="square" lIns="0" tIns="0" rIns="0" bIns="0" rtlCol="0" anchor="ctr"/>
           <a:lstStyle/>
           <a:p>
-            <a:pPr algn="ctr" indent="0" marL="0">
+            <a:pPr marL="0" indent="0" algn="ctr">
               <a:buNone/>
             </a:pPr>
             <a:r>
@@ -2862,7 +2901,7 @@
           <a:bodyPr wrap="square" lIns="0" tIns="0" rIns="0" bIns="0" rtlCol="0" anchor="ctr"/>
           <a:lstStyle/>
           <a:p>
-            <a:pPr algn="ctr" indent="0" marL="0">
+            <a:pPr marL="0" indent="0" algn="ctr">
               <a:buNone/>
             </a:pPr>
             <a:r>
@@ -2898,7 +2937,7 @@
           <a:bodyPr wrap="square" lIns="0" tIns="0" rIns="0" bIns="0" rtlCol="0" anchor="ctr"/>
           <a:lstStyle/>
           <a:p>
-            <a:pPr algn="ctr" indent="0" marL="0">
+            <a:pPr marL="0" indent="0" algn="ctr">
               <a:buNone/>
             </a:pPr>
             <a:r>
@@ -2940,7 +2979,7 @@
           <a:bodyPr wrap="square" lIns="0" tIns="0" rIns="0" bIns="0" rtlCol="0" anchor="ctr"/>
           <a:lstStyle/>
           <a:p>
-            <a:pPr algn="ctr" indent="0" marL="0">
+            <a:pPr marL="0" indent="0" algn="ctr">
               <a:buNone/>
             </a:pPr>
             <a:r>
@@ -2976,7 +3015,7 @@
           <a:bodyPr wrap="square" lIns="0" tIns="0" rIns="0" bIns="0" rtlCol="0" anchor="ctr"/>
           <a:lstStyle/>
           <a:p>
-            <a:pPr algn="ctr" indent="0" marL="0">
+            <a:pPr marL="0" indent="0" algn="ctr">
               <a:buNone/>
             </a:pPr>
             <a:r>
@@ -3019,9 +3058,11 @@
       <p:sp>
         <p:nvSpPr>
           <p:cNvPr id="3" name="Text 0"/>
-          <p:cNvSpPr/>
+          <p:cNvSpPr>
+            <a:spLocks noGrp="1"/>
+          </p:cNvSpPr>
           <p:nvPr>
-            <p:ph idx="100" type="body" hasCustomPrompt="1"/>
+            <p:ph type="body" idx="100" hasCustomPrompt="1"/>
           </p:nvPr>
         </p:nvSpPr>
         <p:spPr>
@@ -3039,11 +3080,11 @@
           <a:bodyPr wrap="square" lIns="0" tIns="0" rIns="0" bIns="0" rtlCol="0" anchor="t"/>
           <a:lstStyle/>
           <a:p>
-            <a:pPr algn="l" indent="0" marL="0">
-              <a:buNone/>
-            </a:pPr>
-            <a:r>
-              <a:rPr lang="id-ID" altLang="en-US" sz="1200" b="1" spc="200" kern="0" dirty="0">
+            <a:pPr marL="0" indent="0" algn="l">
+              <a:buNone/>
+            </a:pPr>
+            <a:r>
+              <a:rPr lang="id-ID" altLang="en-US" sz="1200" b="1" kern="0" spc="200" dirty="0">
                 <a:solidFill>
                   <a:schemeClr val="accent3"/>
                 </a:solidFill>
@@ -3057,9 +3098,11 @@
       <p:sp>
         <p:nvSpPr>
           <p:cNvPr id="4" name="Text 0"/>
-          <p:cNvSpPr/>
+          <p:cNvSpPr>
+            <a:spLocks noGrp="1"/>
+          </p:cNvSpPr>
           <p:nvPr>
-            <p:ph idx="101" type="title" hasCustomPrompt="1"/>
+            <p:ph type="title" idx="101" hasCustomPrompt="1"/>
           </p:nvPr>
         </p:nvSpPr>
         <p:spPr>
@@ -3077,7 +3120,7 @@
           <a:bodyPr wrap="square" lIns="0" tIns="0" rIns="0" bIns="0" rtlCol="0" anchor="t"/>
           <a:lstStyle/>
           <a:p>
-            <a:pPr algn="l" indent="0" marL="0">
+            <a:pPr marL="0" indent="0" algn="l">
               <a:buNone/>
             </a:pPr>
             <a:r>
@@ -3108,16 +3151,34 @@
         </p:nvGraphicFramePr>
         <p:xfrm>
           <a:off x="640080" y="1874520"/>
-          <a:ext cx="10911535" cy="914400"/>
+          <a:ext cx="10911535" cy="3246120"/>
         </p:xfrm>
         <a:graphic>
           <a:graphicData uri="http://schemas.openxmlformats.org/drawingml/2006/table">
             <a:tbl>
               <a:tblPr/>
               <a:tblGrid>
-                <a:gridCol w="3383280"/>
-                <a:gridCol w="3474720"/>
-                <a:gridCol w="4053535"/>
+                <a:gridCol w="3383280">
+                  <a:extLst>
+                    <a:ext uri="{9D8B030D-6E8A-4147-A177-3AD203B41FA5}">
+                      <a16:colId xmlns:a16="http://schemas.microsoft.com/office/drawing/2014/main" val="20000"/>
+                    </a:ext>
+                  </a:extLst>
+                </a:gridCol>
+                <a:gridCol w="3474720">
+                  <a:extLst>
+                    <a:ext uri="{9D8B030D-6E8A-4147-A177-3AD203B41FA5}">
+                      <a16:colId xmlns:a16="http://schemas.microsoft.com/office/drawing/2014/main" val="20001"/>
+                    </a:ext>
+                  </a:extLst>
+                </a:gridCol>
+                <a:gridCol w="4053535">
+                  <a:extLst>
+                    <a:ext uri="{9D8B030D-6E8A-4147-A177-3AD203B41FA5}">
+                      <a16:colId xmlns:a16="http://schemas.microsoft.com/office/drawing/2014/main" val="20002"/>
+                    </a:ext>
+                  </a:extLst>
+                </a:gridCol>
               </a:tblGrid>
               <a:tr h="502920">
                 <a:tc>
@@ -3125,7 +3186,7 @@
                     <a:bodyPr/>
                     <a:lstStyle/>
                     <a:p>
-                      <a:pPr indent="0" marL="0">
+                      <a:pPr marL="0" indent="0">
                         <a:buNone/>
                       </a:pPr>
                       <a:r>
@@ -3193,7 +3254,7 @@
                     <a:bodyPr/>
                     <a:lstStyle/>
                     <a:p>
-                      <a:pPr indent="0" marL="0">
+                      <a:pPr marL="0" indent="0">
                         <a:buNone/>
                       </a:pPr>
                       <a:r>
@@ -3261,7 +3322,7 @@
                     <a:bodyPr/>
                     <a:lstStyle/>
                     <a:p>
-                      <a:pPr indent="0" marL="0">
+                      <a:pPr marL="0" indent="0">
                         <a:buNone/>
                       </a:pPr>
                       <a:r>
@@ -3324,6 +3385,11 @@
                     </a:solidFill>
                   </a:tcPr>
                 </a:tc>
+                <a:extLst>
+                  <a:ext uri="{0D108BD9-81ED-4DB2-BD59-A6C34878D82A}">
+                    <a16:rowId xmlns:a16="http://schemas.microsoft.com/office/drawing/2014/main" val="10000"/>
+                  </a:ext>
+                </a:extLst>
               </a:tr>
               <a:tr h="914400">
                 <a:tc>
@@ -3331,7 +3397,7 @@
                     <a:bodyPr/>
                     <a:lstStyle/>
                     <a:p>
-                      <a:pPr indent="0" marL="0">
+                      <a:pPr marL="0" indent="0">
                         <a:buNone/>
                       </a:pPr>
                       <a:r>
@@ -3399,7 +3465,7 @@
                     <a:bodyPr/>
                     <a:lstStyle/>
                     <a:p>
-                      <a:pPr indent="0" marL="0">
+                      <a:pPr marL="0" indent="0">
                         <a:buNone/>
                       </a:pPr>
                       <a:r>
@@ -3467,7 +3533,7 @@
                     <a:bodyPr/>
                     <a:lstStyle/>
                     <a:p>
-                      <a:pPr indent="0" marL="0">
+                      <a:pPr marL="0" indent="0">
                         <a:buNone/>
                       </a:pPr>
                       <a:r>
@@ -3530,6 +3596,11 @@
                     </a:solidFill>
                   </a:tcPr>
                 </a:tc>
+                <a:extLst>
+                  <a:ext uri="{0D108BD9-81ED-4DB2-BD59-A6C34878D82A}">
+                    <a16:rowId xmlns:a16="http://schemas.microsoft.com/office/drawing/2014/main" val="10001"/>
+                  </a:ext>
+                </a:extLst>
               </a:tr>
               <a:tr h="914400">
                 <a:tc>
@@ -3537,7 +3608,7 @@
                     <a:bodyPr/>
                     <a:lstStyle/>
                     <a:p>
-                      <a:pPr indent="0" marL="0">
+                      <a:pPr marL="0" indent="0">
                         <a:buNone/>
                       </a:pPr>
                       <a:r>
@@ -3605,7 +3676,7 @@
                     <a:bodyPr/>
                     <a:lstStyle/>
                     <a:p>
-                      <a:pPr indent="0" marL="0">
+                      <a:pPr marL="0" indent="0">
                         <a:buNone/>
                       </a:pPr>
                       <a:r>
@@ -3673,7 +3744,7 @@
                     <a:bodyPr/>
                     <a:lstStyle/>
                     <a:p>
-                      <a:pPr indent="0" marL="0">
+                      <a:pPr marL="0" indent="0">
                         <a:buNone/>
                       </a:pPr>
                       <a:r>
@@ -3736,6 +3807,11 @@
                     </a:solidFill>
                   </a:tcPr>
                 </a:tc>
+                <a:extLst>
+                  <a:ext uri="{0D108BD9-81ED-4DB2-BD59-A6C34878D82A}">
+                    <a16:rowId xmlns:a16="http://schemas.microsoft.com/office/drawing/2014/main" val="10002"/>
+                  </a:ext>
+                </a:extLst>
               </a:tr>
               <a:tr h="914400">
                 <a:tc>
@@ -3743,7 +3819,7 @@
                     <a:bodyPr/>
                     <a:lstStyle/>
                     <a:p>
-                      <a:pPr indent="0" marL="0">
+                      <a:pPr marL="0" indent="0">
                         <a:buNone/>
                       </a:pPr>
                       <a:r>
@@ -3811,7 +3887,7 @@
                     <a:bodyPr/>
                     <a:lstStyle/>
                     <a:p>
-                      <a:pPr indent="0" marL="0">
+                      <a:pPr marL="0" indent="0">
                         <a:buNone/>
                       </a:pPr>
                       <a:r>
@@ -3879,7 +3955,7 @@
                     <a:bodyPr/>
                     <a:lstStyle/>
                     <a:p>
-                      <a:pPr indent="0" marL="0">
+                      <a:pPr marL="0" indent="0">
                         <a:buNone/>
                       </a:pPr>
                       <a:r>
@@ -3942,6 +4018,11 @@
                     </a:solidFill>
                   </a:tcPr>
                 </a:tc>
+                <a:extLst>
+                  <a:ext uri="{0D108BD9-81ED-4DB2-BD59-A6C34878D82A}">
+                    <a16:rowId xmlns:a16="http://schemas.microsoft.com/office/drawing/2014/main" val="10003"/>
+                  </a:ext>
+                </a:extLst>
               </a:tr>
             </a:tbl>
           </a:graphicData>
@@ -3968,7 +4049,7 @@
           <a:bodyPr wrap="square" lIns="0" tIns="0" rIns="0" bIns="0" rtlCol="0" anchor="ctr"/>
           <a:lstStyle/>
           <a:p>
-            <a:pPr indent="0" marL="0">
+            <a:pPr marL="0" indent="0">
               <a:buNone/>
             </a:pPr>
             <a:r>
@@ -4004,7 +4085,7 @@
           <a:bodyPr wrap="square" lIns="0" tIns="0" rIns="0" bIns="0" rtlCol="0" anchor="ctr"/>
           <a:lstStyle/>
           <a:p>
-            <a:pPr algn="r" indent="0" marL="0">
+            <a:pPr marL="0" indent="0" algn="r">
               <a:buNone/>
             </a:pPr>
             <a:r>
@@ -4013,44 +4094,8 @@
                   <a:schemeClr val="tx2"/>
                 </a:solidFill>
               </a:rPr>
-              <a:t>1 Kumpulkan</a:t>
-            </a:r>
-            <a:pPr algn="r" indent="0" marL="0">
-              <a:buNone/>
-            </a:pPr>
-            <a:r>
-              <a:rPr lang="id-ID" altLang="en-US" sz="1100" dirty="0">
-                <a:solidFill>
-                  <a:schemeClr val="tx2"/>
-                </a:solidFill>
-              </a:rPr>
-              <a:t>  ·  </a:t>
-            </a:r>
-            <a:pPr algn="r" indent="0" marL="0">
-              <a:buNone/>
-            </a:pPr>
-            <a:r>
-              <a:rPr lang="id-ID" altLang="en-US" sz="1100" dirty="0">
-                <a:solidFill>
-                  <a:schemeClr val="tx2"/>
-                </a:solidFill>
-              </a:rPr>
-              <a:t>2 Bagikan</a:t>
-            </a:r>
-            <a:pPr algn="r" indent="0" marL="0">
-              <a:buNone/>
-            </a:pPr>
-            <a:r>
-              <a:rPr lang="id-ID" altLang="en-US" sz="1100" dirty="0">
-                <a:solidFill>
-                  <a:schemeClr val="tx2"/>
-                </a:solidFill>
-              </a:rPr>
-              <a:t>  ·  </a:t>
-            </a:r>
-            <a:pPr algn="r" indent="0" marL="0">
-              <a:buNone/>
-            </a:pPr>
+              <a:t>1 Kumpulkan  ·  2 Bagikan  ·  </a:t>
+            </a:r>
             <a:r>
               <a:rPr lang="id-ID" altLang="en-US" sz="1100" b="1" dirty="0">
                 <a:solidFill>
@@ -4083,7 +4128,7 @@
           </a:prstGeom>
           <a:extLst>
             <a:ext uri="{C572A759-6A51-4108-AA02-DFA0A04FC94B}">
-              <ma14:wrappingTextBoxFlag xmlns:ma14="http://schemas.microsoft.com/office/mac/drawingml/2011/main" val="0"/>
+              <ma14:wrappingTextBoxFlag xmlns:ma14="http://schemas.microsoft.com/office/mac/drawingml/2011/main" xmlns="" val="0"/>
             </a:ext>
           </a:extLst>
         </p:spPr>
@@ -4101,7 +4146,7 @@
           <a:p>
             <a:pPr algn="r"/>
             <a:fld id="{F7021451-1387-4CA6-816F-3879F97B5CBC}" type="slidenum">
-              <a:rPr b="0" lang="en-US"/>
+              <a:rPr lang="en-US" b="0"/>
               <a:t>10</a:t>
             </a:fld>
             <a:endParaRPr lang="en-US"/>
@@ -4136,9 +4181,11 @@
       <p:sp>
         <p:nvSpPr>
           <p:cNvPr id="3" name="Text 0"/>
-          <p:cNvSpPr/>
+          <p:cNvSpPr>
+            <a:spLocks noGrp="1"/>
+          </p:cNvSpPr>
           <p:nvPr>
-            <p:ph idx="100" type="body" hasCustomPrompt="1"/>
+            <p:ph type="body" idx="100" hasCustomPrompt="1"/>
           </p:nvPr>
         </p:nvSpPr>
         <p:spPr>
@@ -4156,11 +4203,11 @@
           <a:bodyPr wrap="square" lIns="0" tIns="0" rIns="0" bIns="0" rtlCol="0" anchor="t"/>
           <a:lstStyle/>
           <a:p>
-            <a:pPr algn="l" indent="0" marL="0">
-              <a:buNone/>
-            </a:pPr>
-            <a:r>
-              <a:rPr lang="id-ID" altLang="en-US" sz="1200" b="1" spc="200" kern="0" dirty="0">
+            <a:pPr marL="0" indent="0" algn="l">
+              <a:buNone/>
+            </a:pPr>
+            <a:r>
+              <a:rPr lang="id-ID" altLang="en-US" sz="1200" b="1" kern="0" spc="200" dirty="0">
                 <a:solidFill>
                   <a:schemeClr val="accent3"/>
                 </a:solidFill>
@@ -4174,9 +4221,11 @@
       <p:sp>
         <p:nvSpPr>
           <p:cNvPr id="4" name="Text 0"/>
-          <p:cNvSpPr/>
+          <p:cNvSpPr>
+            <a:spLocks noGrp="1"/>
+          </p:cNvSpPr>
           <p:nvPr>
-            <p:ph idx="101" type="title" hasCustomPrompt="1"/>
+            <p:ph type="title" idx="101" hasCustomPrompt="1"/>
           </p:nvPr>
         </p:nvSpPr>
         <p:spPr>
@@ -4194,7 +4243,7 @@
           <a:bodyPr wrap="square" lIns="0" tIns="0" rIns="0" bIns="0" rtlCol="0" anchor="t"/>
           <a:lstStyle/>
           <a:p>
-            <a:pPr algn="l" indent="0" marL="0">
+            <a:pPr marL="0" indent="0" algn="l">
               <a:buNone/>
             </a:pPr>
             <a:r>
@@ -4235,17 +4284,24 @@
             <a:prstDash val="solid"/>
           </a:ln>
         </p:spPr>
+        <p:txBody>
+          <a:bodyPr/>
+          <a:lstStyle/>
+          <a:p>
+            <a:endParaRPr lang="en-US"/>
+          </a:p>
+        </p:txBody>
       </p:sp>
       <p:pic>
         <p:nvPicPr>
-          <p:cNvPr id="6" name="Image 0" descr="Ikon Melayani, bukan menilai">    </p:cNvPr>
+          <p:cNvPr id="6" name="Image 0" descr="Ikon Melayani, bukan menilai"/>
           <p:cNvPicPr>
             <a:picLocks noChangeAspect="1"/>
           </p:cNvPicPr>
           <p:nvPr/>
         </p:nvPicPr>
         <p:blipFill>
-          <a:blip r:embed="rId1"/>
+          <a:blip r:embed="rId3"/>
           <a:stretch>
             <a:fillRect/>
           </a:stretch>
@@ -4281,7 +4337,7 @@
           <a:bodyPr wrap="square" lIns="0" tIns="0" rIns="0" bIns="0" rtlCol="0" anchor="t"/>
           <a:lstStyle/>
           <a:p>
-            <a:pPr indent="0" marL="0">
+            <a:pPr marL="0" indent="0">
               <a:buNone/>
             </a:pPr>
             <a:r>
@@ -4320,7 +4376,7 @@
           <a:bodyPr wrap="square" lIns="0" tIns="0" rIns="0" bIns="0" rtlCol="0" anchor="t"/>
           <a:lstStyle/>
           <a:p>
-            <a:pPr indent="0" marL="0">
+            <a:pPr marL="0" indent="0">
               <a:buNone/>
             </a:pPr>
             <a:r>
@@ -4361,17 +4417,24 @@
             <a:prstDash val="solid"/>
           </a:ln>
         </p:spPr>
+        <p:txBody>
+          <a:bodyPr/>
+          <a:lstStyle/>
+          <a:p>
+            <a:endParaRPr lang="en-US"/>
+          </a:p>
+        </p:txBody>
       </p:sp>
       <p:pic>
         <p:nvPicPr>
-          <p:cNvPr id="10" name="Image 1" descr="Ikon Privasi lebih dulu">    </p:cNvPr>
+          <p:cNvPr id="10" name="Image 1" descr="Ikon Privasi lebih dulu"/>
           <p:cNvPicPr>
             <a:picLocks noChangeAspect="1"/>
           </p:cNvPicPr>
           <p:nvPr/>
         </p:nvPicPr>
         <p:blipFill>
-          <a:blip r:embed="rId2"/>
+          <a:blip r:embed="rId4"/>
           <a:stretch>
             <a:fillRect/>
           </a:stretch>
@@ -4407,7 +4470,7 @@
           <a:bodyPr wrap="square" lIns="0" tIns="0" rIns="0" bIns="0" rtlCol="0" anchor="t"/>
           <a:lstStyle/>
           <a:p>
-            <a:pPr indent="0" marL="0">
+            <a:pPr marL="0" indent="0">
               <a:buNone/>
             </a:pPr>
             <a:r>
@@ -4446,7 +4509,7 @@
           <a:bodyPr wrap="square" lIns="0" tIns="0" rIns="0" bIns="0" rtlCol="0" anchor="t"/>
           <a:lstStyle/>
           <a:p>
-            <a:pPr indent="0" marL="0">
+            <a:pPr marL="0" indent="0">
               <a:buNone/>
             </a:pPr>
             <a:r>
@@ -4487,17 +4550,24 @@
             <a:prstDash val="solid"/>
           </a:ln>
         </p:spPr>
+        <p:txBody>
+          <a:bodyPr/>
+          <a:lstStyle/>
+          <a:p>
+            <a:endParaRPr lang="en-US"/>
+          </a:p>
+        </p:txBody>
       </p:sp>
       <p:pic>
         <p:nvPicPr>
-          <p:cNvPr id="14" name="Image 2" descr="Ikon Jelas sumbernya">    </p:cNvPr>
+          <p:cNvPr id="14" name="Image 2" descr="Ikon Jelas sumbernya"/>
           <p:cNvPicPr>
             <a:picLocks noChangeAspect="1"/>
           </p:cNvPicPr>
           <p:nvPr/>
         </p:nvPicPr>
         <p:blipFill>
-          <a:blip r:embed="rId3"/>
+          <a:blip r:embed="rId5"/>
           <a:stretch>
             <a:fillRect/>
           </a:stretch>
@@ -4533,7 +4603,7 @@
           <a:bodyPr wrap="square" lIns="0" tIns="0" rIns="0" bIns="0" rtlCol="0" anchor="t"/>
           <a:lstStyle/>
           <a:p>
-            <a:pPr indent="0" marL="0">
+            <a:pPr marL="0" indent="0">
               <a:buNone/>
             </a:pPr>
             <a:r>
@@ -4572,7 +4642,7 @@
           <a:bodyPr wrap="square" lIns="0" tIns="0" rIns="0" bIns="0" rtlCol="0" anchor="t"/>
           <a:lstStyle/>
           <a:p>
-            <a:pPr indent="0" marL="0">
+            <a:pPr marL="0" indent="0">
               <a:buNone/>
             </a:pPr>
             <a:r>
@@ -4613,17 +4683,24 @@
             <a:prstDash val="solid"/>
           </a:ln>
         </p:spPr>
+        <p:txBody>
+          <a:bodyPr/>
+          <a:lstStyle/>
+          <a:p>
+            <a:endParaRPr lang="en-US"/>
+          </a:p>
+        </p:txBody>
       </p:sp>
       <p:pic>
         <p:nvPicPr>
-          <p:cNvPr id="18" name="Image 3" descr="Ikon Manusia yang memutuskan">    </p:cNvPr>
+          <p:cNvPr id="18" name="Image 3" descr="Ikon Manusia yang memutuskan"/>
           <p:cNvPicPr>
             <a:picLocks noChangeAspect="1"/>
           </p:cNvPicPr>
           <p:nvPr/>
         </p:nvPicPr>
         <p:blipFill>
-          <a:blip r:embed="rId4"/>
+          <a:blip r:embed="rId6"/>
           <a:stretch>
             <a:fillRect/>
           </a:stretch>
@@ -4659,7 +4736,7 @@
           <a:bodyPr wrap="square" lIns="0" tIns="0" rIns="0" bIns="0" rtlCol="0" anchor="t"/>
           <a:lstStyle/>
           <a:p>
-            <a:pPr indent="0" marL="0">
+            <a:pPr marL="0" indent="0">
               <a:buNone/>
             </a:pPr>
             <a:r>
@@ -4698,7 +4775,7 @@
           <a:bodyPr wrap="square" lIns="0" tIns="0" rIns="0" bIns="0" rtlCol="0" anchor="t"/>
           <a:lstStyle/>
           <a:p>
-            <a:pPr indent="0" marL="0">
+            <a:pPr marL="0" indent="0">
               <a:buNone/>
             </a:pPr>
             <a:r>
@@ -4739,17 +4816,24 @@
             <a:prstDash val="solid"/>
           </a:ln>
         </p:spPr>
+        <p:txBody>
+          <a:bodyPr/>
+          <a:lstStyle/>
+          <a:p>
+            <a:endParaRPr lang="en-US"/>
+          </a:p>
+        </p:txBody>
       </p:sp>
       <p:pic>
         <p:nvPicPr>
-          <p:cNvPr id="22" name="Image 4" descr="Ikon Mulai kecil">    </p:cNvPr>
+          <p:cNvPr id="22" name="Image 4" descr="Ikon Mulai kecil"/>
           <p:cNvPicPr>
             <a:picLocks noChangeAspect="1"/>
           </p:cNvPicPr>
           <p:nvPr/>
         </p:nvPicPr>
         <p:blipFill>
-          <a:blip r:embed="rId5"/>
+          <a:blip r:embed="rId7"/>
           <a:stretch>
             <a:fillRect/>
           </a:stretch>
@@ -4785,7 +4869,7 @@
           <a:bodyPr wrap="square" lIns="0" tIns="0" rIns="0" bIns="0" rtlCol="0" anchor="t"/>
           <a:lstStyle/>
           <a:p>
-            <a:pPr indent="0" marL="0">
+            <a:pPr marL="0" indent="0">
               <a:buNone/>
             </a:pPr>
             <a:r>
@@ -4824,7 +4908,7 @@
           <a:bodyPr wrap="square" lIns="0" tIns="0" rIns="0" bIns="0" rtlCol="0" anchor="t"/>
           <a:lstStyle/>
           <a:p>
-            <a:pPr indent="0" marL="0">
+            <a:pPr marL="0" indent="0">
               <a:buNone/>
             </a:pPr>
             <a:r>
@@ -4860,7 +4944,7 @@
           <a:bodyPr wrap="square" lIns="0" tIns="0" rIns="0" bIns="0" rtlCol="0" anchor="ctr"/>
           <a:lstStyle/>
           <a:p>
-            <a:pPr indent="0" marL="0">
+            <a:pPr marL="0" indent="0">
               <a:buNone/>
             </a:pPr>
             <a:r>
@@ -4877,7 +4961,7 @@
       </p:sp>
       <p:sp>
         <p:nvSpPr>
-          <p:cNvPr id="25" name="Slide Number Placeholder 0"/>
+          <p:cNvPr id="2" name="Slide Number Placeholder 0"/>
           <p:cNvSpPr>
             <a:spLocks noGrp="1"/>
           </p:cNvSpPr>
@@ -4895,7 +4979,7 @@
           </a:prstGeom>
           <a:extLst>
             <a:ext uri="{C572A759-6A51-4108-AA02-DFA0A04FC94B}">
-              <ma14:wrappingTextBoxFlag xmlns:ma14="http://schemas.microsoft.com/office/mac/drawingml/2011/main" val="0"/>
+              <ma14:wrappingTextBoxFlag xmlns:ma14="http://schemas.microsoft.com/office/mac/drawingml/2011/main" xmlns="" val="0"/>
             </a:ext>
           </a:extLst>
         </p:spPr>
@@ -4913,7 +4997,7 @@
           <a:p>
             <a:pPr algn="r"/>
             <a:fld id="{F7021451-1387-4CA6-816F-3879F97B5CBC}" type="slidenum">
-              <a:rPr b="0" lang="en-US"/>
+              <a:rPr lang="en-US" b="0"/>
               <a:t>11</a:t>
             </a:fld>
             <a:endParaRPr lang="en-US"/>
@@ -4948,9 +5032,11 @@
       <p:sp>
         <p:nvSpPr>
           <p:cNvPr id="3" name="Text 0"/>
-          <p:cNvSpPr/>
+          <p:cNvSpPr>
+            <a:spLocks noGrp="1"/>
+          </p:cNvSpPr>
           <p:nvPr>
-            <p:ph idx="100" type="body" hasCustomPrompt="1"/>
+            <p:ph type="body" idx="100" hasCustomPrompt="1"/>
           </p:nvPr>
         </p:nvSpPr>
         <p:spPr>
@@ -4968,16 +5054,40 @@
           <a:bodyPr wrap="square" lIns="0" tIns="0" rIns="0" bIns="0" rtlCol="0" anchor="t"/>
           <a:lstStyle/>
           <a:p>
-            <a:pPr algn="l" indent="0" marL="0">
-              <a:buNone/>
-            </a:pPr>
-            <a:r>
-              <a:rPr lang="id-ID" altLang="en-US" sz="1200" b="1" spc="200" kern="0" dirty="0">
+            <a:pPr marL="0" indent="0" algn="l">
+              <a:buNone/>
+            </a:pPr>
+            <a:r>
+              <a:rPr lang="en-US" altLang="en-US" sz="1200" b="1" kern="0" spc="200" dirty="0" err="1">
                 <a:solidFill>
                   <a:schemeClr val="accent3"/>
                 </a:solidFill>
               </a:rPr>
-              <a:t>POSISI KITA SEKARANG</a:t>
+              <a:t>Mengenai</a:t>
+            </a:r>
+            <a:r>
+              <a:rPr lang="en-US" altLang="en-US" sz="1200" b="1" kern="0" spc="200" dirty="0">
+                <a:solidFill>
+                  <a:schemeClr val="accent3"/>
+                </a:solidFill>
+              </a:rPr>
+              <a:t> </a:t>
+            </a:r>
+            <a:r>
+              <a:rPr lang="en-US" altLang="en-US" sz="1200" b="1" kern="0" spc="200" dirty="0" err="1">
+                <a:solidFill>
+                  <a:schemeClr val="accent3"/>
+                </a:solidFill>
+              </a:rPr>
+              <a:t>Presentasi</a:t>
+            </a:r>
+            <a:r>
+              <a:rPr lang="en-US" altLang="en-US" sz="1200" b="1" kern="0" spc="200" dirty="0">
+                <a:solidFill>
+                  <a:schemeClr val="accent3"/>
+                </a:solidFill>
+              </a:rPr>
+              <a:t> Ini</a:t>
             </a:r>
             <a:endParaRPr lang="id-ID" sz="1200" dirty="0"/>
           </a:p>
@@ -4986,9 +5096,11 @@
       <p:sp>
         <p:nvSpPr>
           <p:cNvPr id="4" name="Text 0"/>
-          <p:cNvSpPr/>
+          <p:cNvSpPr>
+            <a:spLocks noGrp="1"/>
+          </p:cNvSpPr>
           <p:nvPr>
-            <p:ph idx="101" type="title" hasCustomPrompt="1"/>
+            <p:ph type="title" idx="101" hasCustomPrompt="1"/>
           </p:nvPr>
         </p:nvSpPr>
         <p:spPr>
@@ -5006,7 +5118,7 @@
           <a:bodyPr wrap="square" lIns="0" tIns="0" rIns="0" bIns="0" rtlCol="0" anchor="t"/>
           <a:lstStyle/>
           <a:p>
-            <a:pPr algn="l" indent="0" marL="0">
+            <a:pPr marL="0" indent="0" algn="l">
               <a:buNone/>
             </a:pPr>
             <a:r>
@@ -5015,187 +5127,25 @@
                   <a:schemeClr val="tx1"/>
                 </a:solidFill>
               </a:rPr>
-              <a:t>Yang sudah ada dan yang belum</a:t>
+              <a:t>Yang sudah ada </a:t>
+            </a:r>
+            <a:r>
+              <a:rPr lang="en-US" altLang="en-US" sz="3400" b="1" dirty="0">
+                <a:solidFill>
+                  <a:schemeClr val="tx1"/>
+                </a:solidFill>
+              </a:rPr>
+              <a:t>dan yang </a:t>
+            </a:r>
+            <a:r>
+              <a:rPr lang="en-US" altLang="en-US" sz="3400" b="1" dirty="0" err="1">
+                <a:solidFill>
+                  <a:schemeClr val="tx1"/>
+                </a:solidFill>
+              </a:rPr>
+              <a:t>diharapkan</a:t>
             </a:r>
             <a:endParaRPr lang="id-ID" sz="3400" dirty="0"/>
-          </a:p>
-        </p:txBody>
-      </p:sp>
-      <p:sp>
-        <p:nvSpPr>
-          <p:cNvPr id="5" name="Shape 2"/>
-          <p:cNvSpPr/>
-          <p:nvPr/>
-        </p:nvSpPr>
-        <p:spPr>
-          <a:xfrm>
-            <a:off x="640080" y="1828800"/>
-            <a:ext cx="5272888" cy="3749040"/>
-          </a:xfrm>
-          <a:prstGeom prst="roundRect">
-            <a:avLst>
-              <a:gd name="adj" fmla="val 3659"/>
-            </a:avLst>
-          </a:prstGeom>
-          <a:solidFill>
-            <a:schemeClr val="bg1"/>
-          </a:solidFill>
-          <a:ln w="25400">
-            <a:solidFill>
-              <a:schemeClr val="accent1"/>
-            </a:solidFill>
-            <a:prstDash val="solid"/>
-          </a:ln>
-        </p:spPr>
-      </p:sp>
-      <p:sp>
-        <p:nvSpPr>
-          <p:cNvPr id="6" name="Text 3"/>
-          <p:cNvSpPr txBox="1"/>
-          <p:nvPr/>
-        </p:nvSpPr>
-        <p:spPr>
-          <a:xfrm>
-            <a:off x="1005840" y="2057400"/>
-            <a:ext cx="4541368" cy="777240"/>
-          </a:xfrm>
-          <a:prstGeom prst="rect">
-            <a:avLst/>
-          </a:prstGeom>
-          <a:noFill/>
-          <a:ln/>
-        </p:spPr>
-        <p:txBody>
-          <a:bodyPr wrap="square" lIns="0" tIns="0" rIns="0" bIns="0" rtlCol="0" anchor="t"/>
-          <a:lstStyle/>
-          <a:p>
-            <a:pPr indent="0" marL="0">
-              <a:buNone/>
-            </a:pPr>
-            <a:r>
-              <a:rPr lang="id-ID" altLang="en-US" sz="2200" b="1" dirty="0">
-                <a:solidFill>
-                  <a:schemeClr val="accent1"/>
-                </a:solidFill>
-                <a:latin typeface="Cambria" pitchFamily="34" charset="0"/>
-                <a:ea typeface="Cambria" pitchFamily="34" charset="-122"/>
-                <a:cs typeface="Cambria" pitchFamily="34" charset="-120"/>
-              </a:rPr>
-              <a:t>Sudah ada: contoh awal</a:t>
-            </a:r>
-            <a:endParaRPr lang="id-ID" sz="2200" dirty="0"/>
-          </a:p>
-        </p:txBody>
-      </p:sp>
-      <p:sp>
-        <p:nvSpPr>
-          <p:cNvPr id="7" name="Text 4"/>
-          <p:cNvSpPr txBox="1"/>
-          <p:nvPr/>
-        </p:nvSpPr>
-        <p:spPr>
-          <a:xfrm>
-            <a:off x="1005840" y="2926080"/>
-            <a:ext cx="4541368" cy="2834640"/>
-          </a:xfrm>
-          <a:prstGeom prst="rect">
-            <a:avLst/>
-          </a:prstGeom>
-          <a:noFill/>
-          <a:ln/>
-        </p:spPr>
-        <p:txBody>
-          <a:bodyPr wrap="square" lIns="0" tIns="0" rIns="0" bIns="0" rtlCol="0" anchor="t"/>
-          <a:lstStyle/>
-          <a:p>
-            <a:pPr marL="342900" indent="-342900">
-              <a:spcAft>
-                <a:spcPts val="800"/>
-              </a:spcAft>
-              <a:buSzPct val="100000"/>
-              <a:buChar char="•"/>
-            </a:pPr>
-            <a:r>
-              <a:rPr lang="id-ID" altLang="en-US" sz="1500" dirty="0">
-                <a:solidFill>
-                  <a:schemeClr val="tx1"/>
-                </a:solidFill>
-              </a:rPr>
-              <a:t>Contoh yang berjalan, dengan data simulasi (fiktif)</a:t>
-            </a:r>
-            <a:endParaRPr lang="id-ID" sz="1500" dirty="0"/>
-          </a:p>
-          <a:p>
-            <a:pPr marL="342900" indent="-342900">
-              <a:spcAft>
-                <a:spcPts val="800"/>
-              </a:spcAft>
-              <a:buSzPct val="100000"/>
-              <a:buChar char="•"/>
-            </a:pPr>
-            <a:r>
-              <a:rPr lang="id-ID" altLang="en-US" sz="1500" dirty="0">
-                <a:solidFill>
-                  <a:schemeClr val="tx1"/>
-                </a:solidFill>
-              </a:rPr>
-              <a:t>12 halaman dasbor berbahasa Indonesia</a:t>
-            </a:r>
-            <a:endParaRPr lang="id-ID" sz="1500" dirty="0"/>
-          </a:p>
-          <a:p>
-            <a:pPr marL="342900" indent="-342900">
-              <a:spcAft>
-                <a:spcPts val="800"/>
-              </a:spcAft>
-              <a:buSzPct val="100000"/>
-              <a:buChar char="•"/>
-            </a:pPr>
-            <a:r>
-              <a:rPr lang="id-ID" altLang="en-US" sz="1500" dirty="0">
-                <a:solidFill>
-                  <a:schemeClr val="tx1"/>
-                </a:solidFill>
-              </a:rPr>
-              <a:t>Satu berkas yang dibuka tanpa instalasi</a:t>
-            </a:r>
-            <a:endParaRPr lang="id-ID" sz="1500" dirty="0"/>
-          </a:p>
-          <a:p>
-            <a:pPr marL="342900" indent="-342900">
-              <a:spcAft>
-                <a:spcPts val="800"/>
-              </a:spcAft>
-              <a:buSzPct val="100000"/>
-              <a:buChar char="•"/>
-            </a:pPr>
-            <a:r>
-              <a:rPr lang="id-ID" altLang="en-US" sz="1500" dirty="0">
-                <a:solidFill>
-                  <a:schemeClr val="tx1"/>
-                </a:solidFill>
-              </a:rPr>
-              <a:t>138 dokumen PDF contoh: 132 laporan kegiatan dan 6 panduan layanan</a:t>
-            </a:r>
-            <a:endParaRPr lang="id-ID" sz="1500" dirty="0"/>
-          </a:p>
-          <a:p>
-            <a:pPr marL="342900" indent="-342900">
-              <a:spcAft>
-                <a:spcPts val="800"/>
-              </a:spcAft>
-              <a:buSzPct val="100000"/>
-              <a:buChar char="•"/>
-            </a:pPr>
-            <a:r>
-              <a:rPr lang="id-ID" altLang="en-US" sz="1500" dirty="0">
-                <a:solidFill>
-                  <a:schemeClr val="tx1"/>
-                </a:solidFill>
-              </a:rPr>
-              <a:t>Sudah dicoba berjalan di akun Snowflake percobaan</a:t>
-            </a:r>
-            <a:endParaRPr lang="id-ID" sz="1500" dirty="0"/>
           </a:p>
         </p:txBody>
       </p:sp>
@@ -5207,7 +5157,7 @@
         </p:nvSpPr>
         <p:spPr>
           <a:xfrm>
-            <a:off x="6278728" y="1828800"/>
+            <a:off x="2824718" y="1828800"/>
             <a:ext cx="5272888" cy="3749040"/>
           </a:xfrm>
           <a:prstGeom prst="roundRect">
@@ -5225,6 +5175,13 @@
             <a:prstDash val="solid"/>
           </a:ln>
         </p:spPr>
+        <p:txBody>
+          <a:bodyPr/>
+          <a:lstStyle/>
+          <a:p>
+            <a:endParaRPr lang="en-US"/>
+          </a:p>
+        </p:txBody>
       </p:sp>
       <p:sp>
         <p:nvSpPr>
@@ -5234,7 +5191,7 @@
         </p:nvSpPr>
         <p:spPr>
           <a:xfrm>
-            <a:off x="6644488" y="2057400"/>
+            <a:off x="3190478" y="2057400"/>
             <a:ext cx="4541368" cy="777240"/>
           </a:xfrm>
           <a:prstGeom prst="rect">
@@ -5247,11 +5204,11 @@
           <a:bodyPr wrap="square" lIns="0" tIns="0" rIns="0" bIns="0" rtlCol="0" anchor="t"/>
           <a:lstStyle/>
           <a:p>
-            <a:pPr indent="0" marL="0">
-              <a:buNone/>
-            </a:pPr>
-            <a:r>
-              <a:rPr lang="id-ID" altLang="en-US" sz="2200" b="1" dirty="0">
+            <a:pPr marL="0" indent="0">
+              <a:buNone/>
+            </a:pPr>
+            <a:r>
+              <a:rPr lang="en-US" altLang="en-US" sz="2200" b="1" dirty="0">
                 <a:solidFill>
                   <a:schemeClr val="accent3"/>
                 </a:solidFill>
@@ -5259,7 +5216,18 @@
                 <a:ea typeface="Cambria" pitchFamily="34" charset="-122"/>
                 <a:cs typeface="Cambria" pitchFamily="34" charset="-120"/>
               </a:rPr>
-              <a:t>Belum ada: yang perlu kita putuskan</a:t>
+              <a:t>Yang </a:t>
+            </a:r>
+            <a:r>
+              <a:rPr lang="id-ID" altLang="en-US" sz="2200" b="1" dirty="0">
+                <a:solidFill>
+                  <a:schemeClr val="accent3"/>
+                </a:solidFill>
+                <a:latin typeface="Cambria" pitchFamily="34" charset="0"/>
+                <a:ea typeface="Cambria" pitchFamily="34" charset="-122"/>
+                <a:cs typeface="Cambria" pitchFamily="34" charset="-120"/>
+              </a:rPr>
+              <a:t>perlu kita putuskan</a:t>
             </a:r>
             <a:endParaRPr lang="id-ID" sz="2200" dirty="0"/>
           </a:p>
@@ -5273,7 +5241,7 @@
         </p:nvSpPr>
         <p:spPr>
           <a:xfrm>
-            <a:off x="6644488" y="2926080"/>
+            <a:off x="3190478" y="2926080"/>
             <a:ext cx="4541368" cy="2834640"/>
           </a:xfrm>
           <a:prstGeom prst="rect">
@@ -5294,12 +5262,40 @@
               <a:buChar char="•"/>
             </a:pPr>
             <a:r>
-              <a:rPr lang="id-ID" altLang="en-US" sz="1500" dirty="0">
-                <a:solidFill>
-                  <a:schemeClr val="tx1"/>
-                </a:solidFill>
-              </a:rPr>
-              <a:t>Data nyata paroki</a:t>
+              <a:rPr lang="en-US" sz="1500" dirty="0"/>
+              <a:t>Apa </a:t>
+            </a:r>
+            <a:r>
+              <a:rPr lang="en-US" sz="1500" dirty="0" err="1"/>
+              <a:t>saja</a:t>
+            </a:r>
+            <a:r>
+              <a:rPr lang="en-US" sz="1500" dirty="0"/>
+              <a:t> yang </a:t>
+            </a:r>
+            <a:r>
+              <a:rPr lang="en-US" sz="1500" dirty="0" err="1"/>
+              <a:t>ingin</a:t>
+            </a:r>
+            <a:r>
+              <a:rPr lang="en-US" sz="1500" dirty="0"/>
+              <a:t> </a:t>
+            </a:r>
+            <a:r>
+              <a:rPr lang="en-US" sz="1500" dirty="0" err="1"/>
+              <a:t>kita</a:t>
+            </a:r>
+            <a:r>
+              <a:rPr lang="en-US" sz="1500" dirty="0"/>
+              <a:t> </a:t>
+            </a:r>
+            <a:r>
+              <a:rPr lang="en-US" sz="1500" dirty="0" err="1"/>
+              <a:t>pahami</a:t>
+            </a:r>
+            <a:r>
+              <a:rPr lang="en-US" sz="1500" dirty="0"/>
+              <a:t>?</a:t>
             </a:r>
             <a:endParaRPr lang="id-ID" sz="1500" dirty="0"/>
           </a:p>
@@ -5397,7 +5393,7 @@
           </a:prstGeom>
           <a:extLst>
             <a:ext uri="{C572A759-6A51-4108-AA02-DFA0A04FC94B}">
-              <ma14:wrappingTextBoxFlag xmlns:ma14="http://schemas.microsoft.com/office/mac/drawingml/2011/main" val="0"/>
+              <ma14:wrappingTextBoxFlag xmlns:ma14="http://schemas.microsoft.com/office/mac/drawingml/2011/main" xmlns="" val="0"/>
             </a:ext>
           </a:extLst>
         </p:spPr>
@@ -5415,7 +5411,7 @@
           <a:p>
             <a:pPr algn="r"/>
             <a:fld id="{F7021451-1387-4CA6-816F-3879F97B5CBC}" type="slidenum">
-              <a:rPr b="0" lang="en-US"/>
+              <a:rPr lang="en-US" b="0"/>
               <a:t>12</a:t>
             </a:fld>
             <a:endParaRPr lang="en-US"/>
@@ -5431,827 +5427,6 @@
 </file>
 
 <file path=ppt/slides/slide13.xml><?xml version="1.0" encoding="utf-8"?>
-<p:sld xmlns:a="http://schemas.openxmlformats.org/drawingml/2006/main" xmlns:r="http://schemas.openxmlformats.org/officeDocument/2006/relationships" xmlns:p="http://schemas.openxmlformats.org/presentationml/2006/main">
-  <p:cSld name="Slide 13">
-    <p:spTree>
-      <p:nvGrpSpPr>
-        <p:cNvPr id="1" name=""/>
-        <p:cNvGrpSpPr/>
-        <p:nvPr/>
-      </p:nvGrpSpPr>
-      <p:grpSpPr>
-        <a:xfrm>
-          <a:off x="0" y="0"/>
-          <a:ext cx="0" cy="0"/>
-          <a:chOff x="0" y="0"/>
-          <a:chExt cx="0" cy="0"/>
-        </a:xfrm>
-      </p:grpSpPr>
-      <p:sp>
-        <p:nvSpPr>
-          <p:cNvPr id="3" name="Text 0"/>
-          <p:cNvSpPr/>
-          <p:nvPr>
-            <p:ph idx="100" type="body" hasCustomPrompt="1"/>
-          </p:nvPr>
-        </p:nvSpPr>
-        <p:spPr>
-          <a:xfrm>
-            <a:off x="640080" y="502920"/>
-            <a:ext cx="10911535" cy="320040"/>
-          </a:xfrm>
-          <a:prstGeom prst="rect">
-            <a:avLst/>
-          </a:prstGeom>
-          <a:noFill/>
-          <a:ln/>
-        </p:spPr>
-        <p:txBody>
-          <a:bodyPr wrap="square" lIns="0" tIns="0" rIns="0" bIns="0" rtlCol="0" anchor="t"/>
-          <a:lstStyle/>
-          <a:p>
-            <a:pPr algn="l" indent="0" marL="0">
-              <a:buNone/>
-            </a:pPr>
-            <a:r>
-              <a:rPr lang="id-ID" altLang="en-US" sz="1200" b="1" spc="200" kern="0" dirty="0">
-                <a:solidFill>
-                  <a:schemeClr val="accent3"/>
-                </a:solidFill>
-              </a:rPr>
-              <a:t>USULAN</a:t>
-            </a:r>
-            <a:endParaRPr lang="id-ID" sz="1200" dirty="0"/>
-          </a:p>
-        </p:txBody>
-      </p:sp>
-      <p:sp>
-        <p:nvSpPr>
-          <p:cNvPr id="4" name="Text 0"/>
-          <p:cNvSpPr/>
-          <p:nvPr>
-            <p:ph idx="101" type="title" hasCustomPrompt="1"/>
-          </p:nvPr>
-        </p:nvSpPr>
-        <p:spPr>
-          <a:xfrm>
-            <a:off x="640080" y="841248"/>
-            <a:ext cx="10911535" cy="822960"/>
-          </a:xfrm>
-          <a:prstGeom prst="rect">
-            <a:avLst/>
-          </a:prstGeom>
-          <a:noFill/>
-          <a:ln/>
-        </p:spPr>
-        <p:txBody>
-          <a:bodyPr wrap="square" lIns="0" tIns="0" rIns="0" bIns="0" rtlCol="0" anchor="t"/>
-          <a:lstStyle/>
-          <a:p>
-            <a:pPr algn="l" indent="0" marL="0">
-              <a:buNone/>
-            </a:pPr>
-            <a:r>
-              <a:rPr lang="id-ID" altLang="en-US" sz="3400" b="1" dirty="0">
-                <a:solidFill>
-                  <a:schemeClr val="tx1"/>
-                </a:solidFill>
-              </a:rPr>
-              <a:t>Langkah berikutnya</a:t>
-            </a:r>
-            <a:endParaRPr lang="id-ID" sz="3400" dirty="0"/>
-          </a:p>
-        </p:txBody>
-      </p:sp>
-      <p:sp>
-        <p:nvSpPr>
-          <p:cNvPr id="5" name="Shape 2"/>
-          <p:cNvSpPr/>
-          <p:nvPr/>
-        </p:nvSpPr>
-        <p:spPr>
-          <a:xfrm>
-            <a:off x="640080" y="1828800"/>
-            <a:ext cx="3454298" cy="2148840"/>
-          </a:xfrm>
-          <a:prstGeom prst="roundRect">
-            <a:avLst>
-              <a:gd name="adj" fmla="val 6383"/>
-            </a:avLst>
-          </a:prstGeom>
-          <a:solidFill>
-            <a:schemeClr val="bg1"/>
-          </a:solidFill>
-          <a:ln w="12700">
-            <a:solidFill>
-              <a:schemeClr val="accent6"/>
-            </a:solidFill>
-            <a:prstDash val="solid"/>
-          </a:ln>
-        </p:spPr>
-      </p:sp>
-      <p:sp>
-        <p:nvSpPr>
-          <p:cNvPr id="6" name="Text 3"/>
-          <p:cNvSpPr/>
-          <p:nvPr/>
-        </p:nvSpPr>
-        <p:spPr>
-          <a:xfrm>
-            <a:off x="914400" y="2011680"/>
-            <a:ext cx="457200" cy="457200"/>
-          </a:xfrm>
-          <a:prstGeom prst="ellipse">
-            <a:avLst/>
-          </a:prstGeom>
-          <a:solidFill>
-            <a:schemeClr val="accent2"/>
-          </a:solidFill>
-          <a:ln>
-            <a:solidFill>
-              <a:schemeClr val="accent2"/>
-            </a:solidFill>
-          </a:ln>
-        </p:spPr>
-        <p:txBody>
-          <a:bodyPr wrap="square" lIns="0" tIns="0" rIns="0" bIns="0" rtlCol="0" anchor="ctr"/>
-          <a:lstStyle/>
-          <a:p>
-            <a:pPr algn="ctr" indent="0" marL="0">
-              <a:buNone/>
-            </a:pPr>
-            <a:r>
-              <a:rPr lang="id-ID" altLang="en-US" sz="2000" b="1" dirty="0">
-                <a:solidFill>
-                  <a:schemeClr val="tx1"/>
-                </a:solidFill>
-              </a:rPr>
-              <a:t>1</a:t>
-            </a:r>
-            <a:endParaRPr lang="id-ID" sz="2000" dirty="0"/>
-          </a:p>
-        </p:txBody>
-      </p:sp>
-      <p:sp>
-        <p:nvSpPr>
-          <p:cNvPr id="7" name="Text 4"/>
-          <p:cNvSpPr txBox="1"/>
-          <p:nvPr/>
-        </p:nvSpPr>
-        <p:spPr>
-          <a:xfrm>
-            <a:off x="1554480" y="2011680"/>
-            <a:ext cx="2265578" cy="457200"/>
-          </a:xfrm>
-          <a:prstGeom prst="rect">
-            <a:avLst/>
-          </a:prstGeom>
-          <a:noFill/>
-          <a:ln/>
-        </p:spPr>
-        <p:txBody>
-          <a:bodyPr wrap="square" lIns="0" tIns="0" rIns="0" bIns="0" rtlCol="0" anchor="ctr"/>
-          <a:lstStyle/>
-          <a:p>
-            <a:pPr indent="0" marL="0">
-              <a:buNone/>
-            </a:pPr>
-            <a:r>
-              <a:rPr lang="id-ID" altLang="en-US" sz="2400" b="1" dirty="0">
-                <a:solidFill>
-                  <a:schemeClr val="tx1"/>
-                </a:solidFill>
-                <a:latin typeface="Cambria" pitchFamily="34" charset="0"/>
-                <a:ea typeface="Cambria" pitchFamily="34" charset="-122"/>
-                <a:cs typeface="Cambria" pitchFamily="34" charset="-120"/>
-              </a:rPr>
-              <a:t>Kumpulkan</a:t>
-            </a:r>
-            <a:endParaRPr lang="id-ID" sz="2400" dirty="0"/>
-          </a:p>
-        </p:txBody>
-      </p:sp>
-      <p:sp>
-        <p:nvSpPr>
-          <p:cNvPr id="8" name="Text 5"/>
-          <p:cNvSpPr txBox="1"/>
-          <p:nvPr/>
-        </p:nvSpPr>
-        <p:spPr>
-          <a:xfrm>
-            <a:off x="914400" y="2651760"/>
-            <a:ext cx="2905658" cy="1234440"/>
-          </a:xfrm>
-          <a:prstGeom prst="rect">
-            <a:avLst/>
-          </a:prstGeom>
-          <a:noFill/>
-          <a:ln/>
-        </p:spPr>
-        <p:txBody>
-          <a:bodyPr wrap="square" lIns="0" tIns="0" rIns="0" bIns="0" rtlCol="0" anchor="t"/>
-          <a:lstStyle/>
-          <a:p>
-            <a:pPr indent="0" marL="0">
-              <a:buNone/>
-            </a:pPr>
-            <a:r>
-              <a:rPr lang="id-ID" altLang="en-US" sz="1500" dirty="0">
-                <a:solidFill>
-                  <a:schemeClr val="tx2"/>
-                </a:solidFill>
-              </a:rPr>
-              <a:t>Pilih 2 sampai 3 bidang data nyata untuk dimulai, misalnya jadwal Misa, kehadiran, dan kegiatan. Tunjuk satu koordinator data.</a:t>
-            </a:r>
-            <a:endParaRPr lang="id-ID" sz="1500" dirty="0"/>
-          </a:p>
-        </p:txBody>
-      </p:sp>
-      <p:sp>
-        <p:nvSpPr>
-          <p:cNvPr id="9" name="Shape 6"/>
-          <p:cNvSpPr/>
-          <p:nvPr/>
-        </p:nvSpPr>
-        <p:spPr>
-          <a:xfrm>
-            <a:off x="4368698" y="1828800"/>
-            <a:ext cx="3454298" cy="2148840"/>
-          </a:xfrm>
-          <a:prstGeom prst="roundRect">
-            <a:avLst>
-              <a:gd name="adj" fmla="val 6383"/>
-            </a:avLst>
-          </a:prstGeom>
-          <a:solidFill>
-            <a:schemeClr val="bg1"/>
-          </a:solidFill>
-          <a:ln w="12700">
-            <a:solidFill>
-              <a:schemeClr val="accent6"/>
-            </a:solidFill>
-            <a:prstDash val="solid"/>
-          </a:ln>
-        </p:spPr>
-      </p:sp>
-      <p:sp>
-        <p:nvSpPr>
-          <p:cNvPr id="10" name="Text 7"/>
-          <p:cNvSpPr/>
-          <p:nvPr/>
-        </p:nvSpPr>
-        <p:spPr>
-          <a:xfrm>
-            <a:off x="4643018" y="2011680"/>
-            <a:ext cx="457200" cy="457200"/>
-          </a:xfrm>
-          <a:prstGeom prst="ellipse">
-            <a:avLst/>
-          </a:prstGeom>
-          <a:solidFill>
-            <a:schemeClr val="accent2"/>
-          </a:solidFill>
-          <a:ln>
-            <a:solidFill>
-              <a:schemeClr val="accent2"/>
-            </a:solidFill>
-          </a:ln>
-        </p:spPr>
-        <p:txBody>
-          <a:bodyPr wrap="square" lIns="0" tIns="0" rIns="0" bIns="0" rtlCol="0" anchor="ctr"/>
-          <a:lstStyle/>
-          <a:p>
-            <a:pPr algn="ctr" indent="0" marL="0">
-              <a:buNone/>
-            </a:pPr>
-            <a:r>
-              <a:rPr lang="id-ID" altLang="en-US" sz="2000" b="1" dirty="0">
-                <a:solidFill>
-                  <a:schemeClr val="tx1"/>
-                </a:solidFill>
-              </a:rPr>
-              <a:t>2</a:t>
-            </a:r>
-            <a:endParaRPr lang="id-ID" sz="2000" dirty="0"/>
-          </a:p>
-        </p:txBody>
-      </p:sp>
-      <p:sp>
-        <p:nvSpPr>
-          <p:cNvPr id="11" name="Text 8"/>
-          <p:cNvSpPr txBox="1"/>
-          <p:nvPr/>
-        </p:nvSpPr>
-        <p:spPr>
-          <a:xfrm>
-            <a:off x="5283098" y="2011680"/>
-            <a:ext cx="2265578" cy="457200"/>
-          </a:xfrm>
-          <a:prstGeom prst="rect">
-            <a:avLst/>
-          </a:prstGeom>
-          <a:noFill/>
-          <a:ln/>
-        </p:spPr>
-        <p:txBody>
-          <a:bodyPr wrap="square" lIns="0" tIns="0" rIns="0" bIns="0" rtlCol="0" anchor="ctr"/>
-          <a:lstStyle/>
-          <a:p>
-            <a:pPr indent="0" marL="0">
-              <a:buNone/>
-            </a:pPr>
-            <a:r>
-              <a:rPr lang="id-ID" altLang="en-US" sz="2400" b="1" dirty="0">
-                <a:solidFill>
-                  <a:schemeClr val="tx1"/>
-                </a:solidFill>
-                <a:latin typeface="Cambria" pitchFamily="34" charset="0"/>
-                <a:ea typeface="Cambria" pitchFamily="34" charset="-122"/>
-                <a:cs typeface="Cambria" pitchFamily="34" charset="-120"/>
-              </a:rPr>
-              <a:t>Bagikan</a:t>
-            </a:r>
-            <a:endParaRPr lang="id-ID" sz="2400" dirty="0"/>
-          </a:p>
-        </p:txBody>
-      </p:sp>
-      <p:sp>
-        <p:nvSpPr>
-          <p:cNvPr id="12" name="Text 9"/>
-          <p:cNvSpPr txBox="1"/>
-          <p:nvPr/>
-        </p:nvSpPr>
-        <p:spPr>
-          <a:xfrm>
-            <a:off x="4643018" y="2651760"/>
-            <a:ext cx="2905658" cy="1234440"/>
-          </a:xfrm>
-          <a:prstGeom prst="rect">
-            <a:avLst/>
-          </a:prstGeom>
-          <a:noFill/>
-          <a:ln/>
-        </p:spPr>
-        <p:txBody>
-          <a:bodyPr wrap="square" lIns="0" tIns="0" rIns="0" bIns="0" rtlCol="0" anchor="t"/>
-          <a:lstStyle/>
-          <a:p>
-            <a:pPr indent="0" marL="0">
-              <a:buNone/>
-            </a:pPr>
-            <a:r>
-              <a:rPr lang="id-ID" altLang="en-US" sz="1500" dirty="0">
-                <a:solidFill>
-                  <a:schemeClr val="tx2"/>
-                </a:solidFill>
-              </a:rPr>
-              <a:t>Mulai membagikan jadwal kegiatan dan panduan layanan kepada umat. Anggaran tidak ikut dibagikan.</a:t>
-            </a:r>
-            <a:endParaRPr lang="id-ID" sz="1500" dirty="0"/>
-          </a:p>
-        </p:txBody>
-      </p:sp>
-      <p:sp>
-        <p:nvSpPr>
-          <p:cNvPr id="13" name="Shape 10"/>
-          <p:cNvSpPr/>
-          <p:nvPr/>
-        </p:nvSpPr>
-        <p:spPr>
-          <a:xfrm>
-            <a:off x="8097317" y="1828800"/>
-            <a:ext cx="3454298" cy="2148840"/>
-          </a:xfrm>
-          <a:prstGeom prst="roundRect">
-            <a:avLst>
-              <a:gd name="adj" fmla="val 6383"/>
-            </a:avLst>
-          </a:prstGeom>
-          <a:solidFill>
-            <a:schemeClr val="bg1"/>
-          </a:solidFill>
-          <a:ln w="12700">
-            <a:solidFill>
-              <a:schemeClr val="accent6"/>
-            </a:solidFill>
-            <a:prstDash val="solid"/>
-          </a:ln>
-        </p:spPr>
-      </p:sp>
-      <p:sp>
-        <p:nvSpPr>
-          <p:cNvPr id="14" name="Text 11"/>
-          <p:cNvSpPr/>
-          <p:nvPr/>
-        </p:nvSpPr>
-        <p:spPr>
-          <a:xfrm>
-            <a:off x="8371637" y="2011680"/>
-            <a:ext cx="457200" cy="457200"/>
-          </a:xfrm>
-          <a:prstGeom prst="ellipse">
-            <a:avLst/>
-          </a:prstGeom>
-          <a:solidFill>
-            <a:schemeClr val="accent2"/>
-          </a:solidFill>
-          <a:ln>
-            <a:solidFill>
-              <a:schemeClr val="accent2"/>
-            </a:solidFill>
-          </a:ln>
-        </p:spPr>
-        <p:txBody>
-          <a:bodyPr wrap="square" lIns="0" tIns="0" rIns="0" bIns="0" rtlCol="0" anchor="ctr"/>
-          <a:lstStyle/>
-          <a:p>
-            <a:pPr algn="ctr" indent="0" marL="0">
-              <a:buNone/>
-            </a:pPr>
-            <a:r>
-              <a:rPr lang="id-ID" altLang="en-US" sz="2000" b="1" dirty="0">
-                <a:solidFill>
-                  <a:schemeClr val="tx1"/>
-                </a:solidFill>
-              </a:rPr>
-              <a:t>3</a:t>
-            </a:r>
-            <a:endParaRPr lang="id-ID" sz="2000" dirty="0"/>
-          </a:p>
-        </p:txBody>
-      </p:sp>
-      <p:sp>
-        <p:nvSpPr>
-          <p:cNvPr id="15" name="Text 12"/>
-          <p:cNvSpPr txBox="1"/>
-          <p:nvPr/>
-        </p:nvSpPr>
-        <p:spPr>
-          <a:xfrm>
-            <a:off x="9011717" y="2011680"/>
-            <a:ext cx="2265578" cy="457200"/>
-          </a:xfrm>
-          <a:prstGeom prst="rect">
-            <a:avLst/>
-          </a:prstGeom>
-          <a:noFill/>
-          <a:ln/>
-        </p:spPr>
-        <p:txBody>
-          <a:bodyPr wrap="square" lIns="0" tIns="0" rIns="0" bIns="0" rtlCol="0" anchor="ctr"/>
-          <a:lstStyle/>
-          <a:p>
-            <a:pPr indent="0" marL="0">
-              <a:buNone/>
-            </a:pPr>
-            <a:r>
-              <a:rPr lang="id-ID" altLang="en-US" sz="2400" b="1" dirty="0">
-                <a:solidFill>
-                  <a:schemeClr val="tx1"/>
-                </a:solidFill>
-                <a:latin typeface="Cambria" pitchFamily="34" charset="0"/>
-                <a:ea typeface="Cambria" pitchFamily="34" charset="-122"/>
-                <a:cs typeface="Cambria" pitchFamily="34" charset="-120"/>
-              </a:rPr>
-              <a:t>Pahami</a:t>
-            </a:r>
-            <a:endParaRPr lang="id-ID" sz="2400" dirty="0"/>
-          </a:p>
-        </p:txBody>
-      </p:sp>
-      <p:sp>
-        <p:nvSpPr>
-          <p:cNvPr id="16" name="Text 13"/>
-          <p:cNvSpPr txBox="1"/>
-          <p:nvPr/>
-        </p:nvSpPr>
-        <p:spPr>
-          <a:xfrm>
-            <a:off x="8371637" y="2651760"/>
-            <a:ext cx="2905658" cy="1234440"/>
-          </a:xfrm>
-          <a:prstGeom prst="rect">
-            <a:avLst/>
-          </a:prstGeom>
-          <a:noFill/>
-          <a:ln/>
-        </p:spPr>
-        <p:txBody>
-          <a:bodyPr wrap="square" lIns="0" tIns="0" rIns="0" bIns="0" rtlCol="0" anchor="t"/>
-          <a:lstStyle/>
-          <a:p>
-            <a:pPr indent="0" marL="0">
-              <a:buNone/>
-            </a:pPr>
-            <a:r>
-              <a:rPr lang="id-ID" altLang="en-US" sz="1500" dirty="0">
-                <a:solidFill>
-                  <a:schemeClr val="tx2"/>
-                </a:solidFill>
-              </a:rPr>
-              <a:t>Siapkan ringkasan berkala untuk dewan: kolekte, anggaran, dan susunan umat, dengan aturan privasi yang jelas.</a:t>
-            </a:r>
-            <a:endParaRPr lang="id-ID" sz="1500" dirty="0"/>
-          </a:p>
-        </p:txBody>
-      </p:sp>
-      <p:sp>
-        <p:nvSpPr>
-          <p:cNvPr id="17" name="Shape 14"/>
-          <p:cNvSpPr/>
-          <p:nvPr/>
-        </p:nvSpPr>
-        <p:spPr>
-          <a:xfrm>
-            <a:off x="640080" y="4206240"/>
-            <a:ext cx="10911535" cy="1600200"/>
-          </a:xfrm>
-          <a:prstGeom prst="roundRect">
-            <a:avLst>
-              <a:gd name="adj" fmla="val 8571"/>
-            </a:avLst>
-          </a:prstGeom>
-          <a:solidFill>
-            <a:schemeClr val="tx1"/>
-          </a:solidFill>
-          <a:ln w="12700">
-            <a:solidFill>
-              <a:schemeClr val="tx1"/>
-            </a:solidFill>
-            <a:prstDash val="solid"/>
-          </a:ln>
-        </p:spPr>
-      </p:sp>
-      <p:sp>
-        <p:nvSpPr>
-          <p:cNvPr id="18" name="Text 15"/>
-          <p:cNvSpPr txBox="1"/>
-          <p:nvPr/>
-        </p:nvSpPr>
-        <p:spPr>
-          <a:xfrm>
-            <a:off x="1005840" y="4343400"/>
-            <a:ext cx="10180015" cy="457200"/>
-          </a:xfrm>
-          <a:prstGeom prst="rect">
-            <a:avLst/>
-          </a:prstGeom>
-          <a:noFill/>
-          <a:ln/>
-        </p:spPr>
-        <p:txBody>
-          <a:bodyPr wrap="square" lIns="0" tIns="0" rIns="0" bIns="0" rtlCol="0" anchor="ctr"/>
-          <a:lstStyle/>
-          <a:p>
-            <a:pPr indent="0" marL="0">
-              <a:buNone/>
-            </a:pPr>
-            <a:r>
-              <a:rPr lang="id-ID" altLang="en-US" sz="2200" b="1" dirty="0">
-                <a:solidFill>
-                  <a:schemeClr val="accent4"/>
-                </a:solidFill>
-                <a:latin typeface="Cambria" pitchFamily="34" charset="0"/>
-                <a:ea typeface="Cambria" pitchFamily="34" charset="-122"/>
-                <a:cs typeface="Cambria" pitchFamily="34" charset="-120"/>
-              </a:rPr>
-              <a:t>Yang kami mohon dari dewan</a:t>
-            </a:r>
-            <a:endParaRPr lang="id-ID" sz="2200" dirty="0"/>
-          </a:p>
-        </p:txBody>
-      </p:sp>
-      <p:sp>
-        <p:nvSpPr>
-          <p:cNvPr id="19" name="Text 16"/>
-          <p:cNvSpPr txBox="1"/>
-          <p:nvPr/>
-        </p:nvSpPr>
-        <p:spPr>
-          <a:xfrm>
-            <a:off x="1005840" y="4846320"/>
-            <a:ext cx="3149498" cy="822960"/>
-          </a:xfrm>
-          <a:prstGeom prst="rect">
-            <a:avLst/>
-          </a:prstGeom>
-          <a:noFill/>
-          <a:ln/>
-        </p:spPr>
-        <p:txBody>
-          <a:bodyPr wrap="square" lIns="0" tIns="0" rIns="0" bIns="0" rtlCol="0" anchor="t"/>
-          <a:lstStyle/>
-          <a:p>
-            <a:pPr indent="0" marL="0">
-              <a:buNone/>
-            </a:pPr>
-            <a:r>
-              <a:rPr lang="id-ID" altLang="en-US" sz="1600" b="1" dirty="0">
-                <a:solidFill>
-                  <a:schemeClr val="accent4"/>
-                </a:solidFill>
-              </a:rPr>
-              <a:t>1.  </a:t>
-            </a:r>
-            <a:pPr indent="0" marL="0">
-              <a:buNone/>
-            </a:pPr>
-            <a:r>
-              <a:rPr lang="id-ID" altLang="en-US" sz="1600" dirty="0">
-                <a:solidFill>
-                  <a:schemeClr val="bg2"/>
-                </a:solidFill>
-              </a:rPr>
-              <a:t>Menyetujui arah perjalanan tiga langkah ini</a:t>
-            </a:r>
-            <a:endParaRPr lang="id-ID" sz="1600" dirty="0"/>
-          </a:p>
-        </p:txBody>
-      </p:sp>
-      <p:sp>
-        <p:nvSpPr>
-          <p:cNvPr id="20" name="Text 17"/>
-          <p:cNvSpPr txBox="1"/>
-          <p:nvPr/>
-        </p:nvSpPr>
-        <p:spPr>
-          <a:xfrm>
-            <a:off x="4521098" y="4846320"/>
-            <a:ext cx="3149498" cy="822960"/>
-          </a:xfrm>
-          <a:prstGeom prst="rect">
-            <a:avLst/>
-          </a:prstGeom>
-          <a:noFill/>
-          <a:ln/>
-        </p:spPr>
-        <p:txBody>
-          <a:bodyPr wrap="square" lIns="0" tIns="0" rIns="0" bIns="0" rtlCol="0" anchor="t"/>
-          <a:lstStyle/>
-          <a:p>
-            <a:pPr indent="0" marL="0">
-              <a:buNone/>
-            </a:pPr>
-            <a:r>
-              <a:rPr lang="id-ID" altLang="en-US" sz="1600" b="1" dirty="0">
-                <a:solidFill>
-                  <a:schemeClr val="accent4"/>
-                </a:solidFill>
-              </a:rPr>
-              <a:t>2.  </a:t>
-            </a:r>
-            <a:pPr indent="0" marL="0">
-              <a:buNone/>
-            </a:pPr>
-            <a:r>
-              <a:rPr lang="id-ID" altLang="en-US" sz="1600" dirty="0">
-                <a:solidFill>
-                  <a:schemeClr val="bg2"/>
-                </a:solidFill>
-              </a:rPr>
-              <a:t>Menunjuk koordinator data dan seksi untuk percobaan</a:t>
-            </a:r>
-            <a:endParaRPr lang="id-ID" sz="1600" dirty="0"/>
-          </a:p>
-        </p:txBody>
-      </p:sp>
-      <p:sp>
-        <p:nvSpPr>
-          <p:cNvPr id="21" name="Text 18"/>
-          <p:cNvSpPr txBox="1"/>
-          <p:nvPr/>
-        </p:nvSpPr>
-        <p:spPr>
-          <a:xfrm>
-            <a:off x="8036357" y="4846320"/>
-            <a:ext cx="3149498" cy="822960"/>
-          </a:xfrm>
-          <a:prstGeom prst="rect">
-            <a:avLst/>
-          </a:prstGeom>
-          <a:noFill/>
-          <a:ln/>
-        </p:spPr>
-        <p:txBody>
-          <a:bodyPr wrap="square" lIns="0" tIns="0" rIns="0" bIns="0" rtlCol="0" anchor="t"/>
-          <a:lstStyle/>
-          <a:p>
-            <a:pPr indent="0" marL="0">
-              <a:buNone/>
-            </a:pPr>
-            <a:r>
-              <a:rPr lang="id-ID" altLang="en-US" sz="1600" b="1" dirty="0">
-                <a:solidFill>
-                  <a:schemeClr val="accent4"/>
-                </a:solidFill>
-              </a:rPr>
-              <a:t>3.  </a:t>
-            </a:r>
-            <a:pPr indent="0" marL="0">
-              <a:buNone/>
-            </a:pPr>
-            <a:r>
-              <a:rPr lang="id-ID" altLang="en-US" sz="1600" dirty="0">
-                <a:solidFill>
-                  <a:schemeClr val="bg2"/>
-                </a:solidFill>
-              </a:rPr>
-              <a:t>Menyepakati prinsip privasi: siapa boleh melihat apa</a:t>
-            </a:r>
-            <a:endParaRPr lang="id-ID" sz="1600" dirty="0"/>
-          </a:p>
-        </p:txBody>
-      </p:sp>
-      <p:sp>
-        <p:nvSpPr>
-          <p:cNvPr id="22" name="Text 19"/>
-          <p:cNvSpPr txBox="1"/>
-          <p:nvPr/>
-        </p:nvSpPr>
-        <p:spPr>
-          <a:xfrm>
-            <a:off x="640080" y="5897880"/>
-            <a:ext cx="10911535" cy="365760"/>
-          </a:xfrm>
-          <a:prstGeom prst="rect">
-            <a:avLst/>
-          </a:prstGeom>
-          <a:noFill/>
-          <a:ln/>
-        </p:spPr>
-        <p:txBody>
-          <a:bodyPr wrap="square" lIns="0" tIns="0" rIns="0" bIns="0" rtlCol="0" anchor="ctr"/>
-          <a:lstStyle/>
-          <a:p>
-            <a:pPr indent="0" marL="0">
-              <a:buNone/>
-            </a:pPr>
-            <a:r>
-              <a:rPr lang="id-ID" altLang="en-US" sz="1300" dirty="0">
-                <a:solidFill>
-                  <a:schemeClr val="tx2"/>
-                </a:solidFill>
-              </a:rPr>
-              <a:t>Usulan untuk dibahas bersama. Waktu dan biaya ditentukan setelah dewan sepakat.</a:t>
-            </a:r>
-            <a:endParaRPr lang="id-ID" sz="1300" dirty="0"/>
-          </a:p>
-        </p:txBody>
-      </p:sp>
-      <p:sp>
-        <p:nvSpPr>
-          <p:cNvPr id="25" name="Slide Number Placeholder 0"/>
-          <p:cNvSpPr>
-            <a:spLocks noGrp="1"/>
-          </p:cNvSpPr>
-          <p:nvPr>
-            <p:ph type="sldNum" sz="quarter" idx="4294967295"/>
-          </p:nvPr>
-        </p:nvSpPr>
-        <p:spPr>
-          <a:xfrm>
-            <a:off x="11000232" y="6355080"/>
-            <a:ext cx="548640" cy="274320"/>
-          </a:xfrm>
-          <a:prstGeom prst="rect">
-            <a:avLst/>
-          </a:prstGeom>
-          <a:extLst>
-            <a:ext uri="{C572A759-6A51-4108-AA02-DFA0A04FC94B}">
-              <ma14:wrappingTextBoxFlag xmlns:ma14="http://schemas.microsoft.com/office/mac/drawingml/2011/main" val="0"/>
-            </a:ext>
-          </a:extLst>
-        </p:spPr>
-        <p:txBody>
-          <a:bodyPr/>
-          <a:lstStyle>
-            <a:lvl1pPr>
-              <a:defRPr sz="1100">
-                <a:solidFill>
-                  <a:schemeClr val="tx2"/>
-                </a:solidFill>
-              </a:defRPr>
-            </a:lvl1pPr>
-          </a:lstStyle>
-          <a:p>
-            <a:pPr algn="r"/>
-            <a:fld id="{F7021451-1387-4CA6-816F-3879F97B5CBC}" type="slidenum">
-              <a:rPr b="0" lang="en-US"/>
-              <a:t>13</a:t>
-            </a:fld>
-            <a:endParaRPr lang="en-US"/>
-          </a:p>
-        </p:txBody>
-      </p:sp>
-    </p:spTree>
-  </p:cSld>
-  <p:clrMapOvr>
-    <a:masterClrMapping/>
-  </p:clrMapOvr>
-</p:sld>
-</file>
-
-<file path=ppt/slides/slide14.xml><?xml version="1.0" encoding="utf-8"?>
 <p:sld xmlns:a="http://schemas.openxmlformats.org/drawingml/2006/main" xmlns:r="http://schemas.openxmlformats.org/officeDocument/2006/relationships" xmlns:p="http://schemas.openxmlformats.org/presentationml/2006/main">
   <p:cSld name="Slide 14">
     <p:spTree>
@@ -6271,9 +5446,11 @@
       <p:sp>
         <p:nvSpPr>
           <p:cNvPr id="3" name="Text 0"/>
-          <p:cNvSpPr/>
+          <p:cNvSpPr>
+            <a:spLocks noGrp="1"/>
+          </p:cNvSpPr>
           <p:nvPr>
-            <p:ph idx="100" type="body" hasCustomPrompt="1"/>
+            <p:ph type="body" idx="100" hasCustomPrompt="1"/>
           </p:nvPr>
         </p:nvSpPr>
         <p:spPr>
@@ -6291,11 +5468,11 @@
           <a:bodyPr wrap="square" lIns="0" tIns="0" rIns="0" bIns="0" rtlCol="0" anchor="t"/>
           <a:lstStyle/>
           <a:p>
-            <a:pPr algn="l" indent="0" marL="0">
-              <a:buNone/>
-            </a:pPr>
-            <a:r>
-              <a:rPr lang="id-ID" altLang="en-US" sz="1300" b="1" spc="300" kern="0" dirty="0">
+            <a:pPr marL="0" indent="0" algn="l">
+              <a:buNone/>
+            </a:pPr>
+            <a:r>
+              <a:rPr lang="id-ID" altLang="en-US" sz="1300" b="1" kern="0" spc="300" dirty="0">
                 <a:solidFill>
                   <a:schemeClr val="accent4"/>
                 </a:solidFill>
@@ -6309,9 +5486,11 @@
       <p:sp>
         <p:nvSpPr>
           <p:cNvPr id="4" name="Text 0"/>
-          <p:cNvSpPr/>
+          <p:cNvSpPr>
+            <a:spLocks noGrp="1"/>
+          </p:cNvSpPr>
           <p:nvPr>
-            <p:ph idx="101" type="title" hasCustomPrompt="1"/>
+            <p:ph type="title" idx="101" hasCustomPrompt="1"/>
           </p:nvPr>
         </p:nvSpPr>
         <p:spPr>
@@ -6329,7 +5508,7 @@
           <a:bodyPr wrap="square" lIns="0" tIns="0" rIns="0" bIns="0" rtlCol="0" anchor="t"/>
           <a:lstStyle/>
           <a:p>
-            <a:pPr algn="l" indent="0" marL="0">
+            <a:pPr marL="0" indent="0" algn="l">
               <a:buNone/>
             </a:pPr>
             <a:r>
@@ -6343,7 +5522,7 @@
             <a:endParaRPr lang="id-ID" sz="5000" dirty="0"/>
           </a:p>
           <a:p>
-            <a:pPr algn="l" indent="0" marL="0">
+            <a:pPr marL="0" indent="0" algn="l">
               <a:buNone/>
             </a:pPr>
             <a:r>
@@ -6357,7 +5536,7 @@
             <a:endParaRPr lang="id-ID" sz="5000" dirty="0"/>
           </a:p>
           <a:p>
-            <a:pPr algn="l" indent="0" marL="0">
+            <a:pPr marL="0" indent="0" algn="l">
               <a:buNone/>
             </a:pPr>
             <a:r>
@@ -6369,299 +5548,6 @@
               <a:t>melayani lebih tepat.</a:t>
             </a:r>
             <a:endParaRPr lang="id-ID" sz="5000" dirty="0"/>
-          </a:p>
-        </p:txBody>
-      </p:sp>
-      <p:sp>
-        <p:nvSpPr>
-          <p:cNvPr id="5" name="Text 2"/>
-          <p:cNvSpPr txBox="1"/>
-          <p:nvPr/>
-        </p:nvSpPr>
-        <p:spPr>
-          <a:xfrm>
-            <a:off x="822960" y="3977640"/>
-            <a:ext cx="9144000" cy="548640"/>
-          </a:xfrm>
-          <a:prstGeom prst="rect">
-            <a:avLst/>
-          </a:prstGeom>
-          <a:noFill/>
-          <a:ln/>
-        </p:spPr>
-        <p:txBody>
-          <a:bodyPr wrap="square" lIns="0" tIns="0" rIns="0" bIns="0" rtlCol="0" anchor="ctr"/>
-          <a:lstStyle/>
-          <a:p>
-            <a:pPr indent="0" marL="0">
-              <a:buNone/>
-            </a:pPr>
-            <a:r>
-              <a:rPr lang="id-ID" altLang="en-US" sz="2000" dirty="0">
-                <a:solidFill>
-                  <a:schemeClr val="accent6"/>
-                </a:solidFill>
-              </a:rPr>
-              <a:t>Terima kasih. Kami menantikan pertanyaan dan masukan dari dewan.</a:t>
-            </a:r>
-            <a:endParaRPr lang="id-ID" sz="2000" dirty="0"/>
-          </a:p>
-        </p:txBody>
-      </p:sp>
-      <p:sp>
-        <p:nvSpPr>
-          <p:cNvPr id="6" name="Shape 3"/>
-          <p:cNvSpPr/>
-          <p:nvPr/>
-        </p:nvSpPr>
-        <p:spPr>
-          <a:xfrm>
-            <a:off x="1651406" y="5157216"/>
-            <a:ext cx="8889797" cy="0"/>
-          </a:xfrm>
-          <a:prstGeom prst="line">
-            <a:avLst/>
-          </a:prstGeom>
-          <a:noFill/>
-          <a:ln w="31750">
-            <a:solidFill>
-              <a:schemeClr val="accent2"/>
-            </a:solidFill>
-            <a:prstDash val="solid"/>
-          </a:ln>
-        </p:spPr>
-      </p:sp>
-      <p:sp>
-        <p:nvSpPr>
-          <p:cNvPr id="7" name="Text 4"/>
-          <p:cNvSpPr/>
-          <p:nvPr/>
-        </p:nvSpPr>
-        <p:spPr>
-          <a:xfrm>
-            <a:off x="1404518" y="4910328"/>
-            <a:ext cx="493776" cy="493776"/>
-          </a:xfrm>
-          <a:prstGeom prst="ellipse">
-            <a:avLst/>
-          </a:prstGeom>
-          <a:solidFill>
-            <a:schemeClr val="accent2"/>
-          </a:solidFill>
-          <a:ln>
-            <a:solidFill>
-              <a:schemeClr val="accent2"/>
-            </a:solidFill>
-          </a:ln>
-        </p:spPr>
-        <p:txBody>
-          <a:bodyPr wrap="square" lIns="0" tIns="0" rIns="0" bIns="0" rtlCol="0" anchor="ctr"/>
-          <a:lstStyle/>
-          <a:p>
-            <a:pPr algn="ctr" indent="0" marL="0">
-              <a:buNone/>
-            </a:pPr>
-            <a:r>
-              <a:rPr lang="id-ID" altLang="en-US" sz="2000" b="1" dirty="0">
-                <a:solidFill>
-                  <a:schemeClr val="tx1"/>
-                </a:solidFill>
-              </a:rPr>
-              <a:t>1</a:t>
-            </a:r>
-            <a:endParaRPr lang="id-ID" sz="2000" dirty="0"/>
-          </a:p>
-        </p:txBody>
-      </p:sp>
-      <p:sp>
-        <p:nvSpPr>
-          <p:cNvPr id="8" name="Text 5"/>
-          <p:cNvSpPr txBox="1"/>
-          <p:nvPr/>
-        </p:nvSpPr>
-        <p:spPr>
-          <a:xfrm>
-            <a:off x="371246" y="5532120"/>
-            <a:ext cx="2560320" cy="457200"/>
-          </a:xfrm>
-          <a:prstGeom prst="rect">
-            <a:avLst/>
-          </a:prstGeom>
-          <a:noFill/>
-          <a:ln/>
-        </p:spPr>
-        <p:txBody>
-          <a:bodyPr wrap="square" lIns="0" tIns="0" rIns="0" bIns="0" rtlCol="0" anchor="ctr"/>
-          <a:lstStyle/>
-          <a:p>
-            <a:pPr algn="ctr" indent="0" marL="0">
-              <a:buNone/>
-            </a:pPr>
-            <a:r>
-              <a:rPr lang="id-ID" altLang="en-US" sz="2000" b="1" dirty="0">
-                <a:solidFill>
-                  <a:schemeClr val="bg2"/>
-                </a:solidFill>
-              </a:rPr>
-              <a:t>Kumpulkan</a:t>
-            </a:r>
-            <a:endParaRPr lang="id-ID" sz="2000" dirty="0"/>
-          </a:p>
-        </p:txBody>
-      </p:sp>
-      <p:sp>
-        <p:nvSpPr>
-          <p:cNvPr id="9" name="Text 6"/>
-          <p:cNvSpPr/>
-          <p:nvPr/>
-        </p:nvSpPr>
-        <p:spPr>
-          <a:xfrm>
-            <a:off x="5849417" y="4910328"/>
-            <a:ext cx="493776" cy="493776"/>
-          </a:xfrm>
-          <a:prstGeom prst="ellipse">
-            <a:avLst/>
-          </a:prstGeom>
-          <a:solidFill>
-            <a:schemeClr val="accent2"/>
-          </a:solidFill>
-          <a:ln>
-            <a:solidFill>
-              <a:schemeClr val="accent2"/>
-            </a:solidFill>
-          </a:ln>
-        </p:spPr>
-        <p:txBody>
-          <a:bodyPr wrap="square" lIns="0" tIns="0" rIns="0" bIns="0" rtlCol="0" anchor="ctr"/>
-          <a:lstStyle/>
-          <a:p>
-            <a:pPr algn="ctr" indent="0" marL="0">
-              <a:buNone/>
-            </a:pPr>
-            <a:r>
-              <a:rPr lang="id-ID" altLang="en-US" sz="2000" b="1" dirty="0">
-                <a:solidFill>
-                  <a:schemeClr val="tx1"/>
-                </a:solidFill>
-              </a:rPr>
-              <a:t>2</a:t>
-            </a:r>
-            <a:endParaRPr lang="id-ID" sz="2000" dirty="0"/>
-          </a:p>
-        </p:txBody>
-      </p:sp>
-      <p:sp>
-        <p:nvSpPr>
-          <p:cNvPr id="10" name="Text 7"/>
-          <p:cNvSpPr txBox="1"/>
-          <p:nvPr/>
-        </p:nvSpPr>
-        <p:spPr>
-          <a:xfrm>
-            <a:off x="4816145" y="5532120"/>
-            <a:ext cx="2560320" cy="457200"/>
-          </a:xfrm>
-          <a:prstGeom prst="rect">
-            <a:avLst/>
-          </a:prstGeom>
-          <a:noFill/>
-          <a:ln/>
-        </p:spPr>
-        <p:txBody>
-          <a:bodyPr wrap="square" lIns="0" tIns="0" rIns="0" bIns="0" rtlCol="0" anchor="ctr"/>
-          <a:lstStyle/>
-          <a:p>
-            <a:pPr algn="ctr" indent="0" marL="0">
-              <a:buNone/>
-            </a:pPr>
-            <a:r>
-              <a:rPr lang="id-ID" altLang="en-US" sz="2000" b="1" dirty="0">
-                <a:solidFill>
-                  <a:schemeClr val="bg2"/>
-                </a:solidFill>
-              </a:rPr>
-              <a:t>Bagikan</a:t>
-            </a:r>
-            <a:endParaRPr lang="id-ID" sz="2000" dirty="0"/>
-          </a:p>
-        </p:txBody>
-      </p:sp>
-      <p:sp>
-        <p:nvSpPr>
-          <p:cNvPr id="11" name="Text 8"/>
-          <p:cNvSpPr/>
-          <p:nvPr/>
-        </p:nvSpPr>
-        <p:spPr>
-          <a:xfrm>
-            <a:off x="10294315" y="4910328"/>
-            <a:ext cx="493776" cy="493776"/>
-          </a:xfrm>
-          <a:prstGeom prst="ellipse">
-            <a:avLst/>
-          </a:prstGeom>
-          <a:solidFill>
-            <a:schemeClr val="accent2"/>
-          </a:solidFill>
-          <a:ln>
-            <a:solidFill>
-              <a:schemeClr val="accent2"/>
-            </a:solidFill>
-          </a:ln>
-        </p:spPr>
-        <p:txBody>
-          <a:bodyPr wrap="square" lIns="0" tIns="0" rIns="0" bIns="0" rtlCol="0" anchor="ctr"/>
-          <a:lstStyle/>
-          <a:p>
-            <a:pPr algn="ctr" indent="0" marL="0">
-              <a:buNone/>
-            </a:pPr>
-            <a:r>
-              <a:rPr lang="id-ID" altLang="en-US" sz="2000" b="1" dirty="0">
-                <a:solidFill>
-                  <a:schemeClr val="tx1"/>
-                </a:solidFill>
-              </a:rPr>
-              <a:t>3</a:t>
-            </a:r>
-            <a:endParaRPr lang="id-ID" sz="2000" dirty="0"/>
-          </a:p>
-        </p:txBody>
-      </p:sp>
-      <p:sp>
-        <p:nvSpPr>
-          <p:cNvPr id="12" name="Text 9"/>
-          <p:cNvSpPr txBox="1"/>
-          <p:nvPr/>
-        </p:nvSpPr>
-        <p:spPr>
-          <a:xfrm>
-            <a:off x="9261043" y="5532120"/>
-            <a:ext cx="2560320" cy="457200"/>
-          </a:xfrm>
-          <a:prstGeom prst="rect">
-            <a:avLst/>
-          </a:prstGeom>
-          <a:noFill/>
-          <a:ln/>
-        </p:spPr>
-        <p:txBody>
-          <a:bodyPr wrap="square" lIns="0" tIns="0" rIns="0" bIns="0" rtlCol="0" anchor="ctr"/>
-          <a:lstStyle/>
-          <a:p>
-            <a:pPr algn="ctr" indent="0" marL="0">
-              <a:buNone/>
-            </a:pPr>
-            <a:r>
-              <a:rPr lang="id-ID" altLang="en-US" sz="2000" b="1" dirty="0">
-                <a:solidFill>
-                  <a:schemeClr val="bg2"/>
-                </a:solidFill>
-              </a:rPr>
-              <a:t>Pahami</a:t>
-            </a:r>
-            <a:endParaRPr lang="id-ID" sz="2000" dirty="0"/>
           </a:p>
         </p:txBody>
       </p:sp>
@@ -6693,9 +5579,11 @@
       <p:sp>
         <p:nvSpPr>
           <p:cNvPr id="3" name="Text 0"/>
-          <p:cNvSpPr/>
+          <p:cNvSpPr>
+            <a:spLocks noGrp="1"/>
+          </p:cNvSpPr>
           <p:nvPr>
-            <p:ph idx="100" type="body" hasCustomPrompt="1"/>
+            <p:ph type="body" idx="100" hasCustomPrompt="1"/>
           </p:nvPr>
         </p:nvSpPr>
         <p:spPr>
@@ -6713,11 +5601,11 @@
           <a:bodyPr wrap="square" lIns="0" tIns="0" rIns="0" bIns="0" rtlCol="0" anchor="t"/>
           <a:lstStyle/>
           <a:p>
-            <a:pPr algn="l" indent="0" marL="0">
-              <a:buNone/>
-            </a:pPr>
-            <a:r>
-              <a:rPr lang="id-ID" altLang="en-US" sz="1200" b="1" spc="200" kern="0" dirty="0">
+            <a:pPr marL="0" indent="0" algn="l">
+              <a:buNone/>
+            </a:pPr>
+            <a:r>
+              <a:rPr lang="id-ID" altLang="en-US" sz="1200" b="1" kern="0" spc="200" dirty="0">
                 <a:solidFill>
                   <a:schemeClr val="accent3"/>
                 </a:solidFill>
@@ -6731,9 +5619,11 @@
       <p:sp>
         <p:nvSpPr>
           <p:cNvPr id="4" name="Text 0"/>
-          <p:cNvSpPr/>
+          <p:cNvSpPr>
+            <a:spLocks noGrp="1"/>
+          </p:cNvSpPr>
           <p:nvPr>
-            <p:ph idx="101" type="title" hasCustomPrompt="1"/>
+            <p:ph type="title" idx="101" hasCustomPrompt="1"/>
           </p:nvPr>
         </p:nvSpPr>
         <p:spPr>
@@ -6751,7 +5641,7 @@
           <a:bodyPr wrap="square" lIns="0" tIns="0" rIns="0" bIns="0" rtlCol="0" anchor="t"/>
           <a:lstStyle/>
           <a:p>
-            <a:pPr algn="l" indent="0" marL="0">
+            <a:pPr marL="0" indent="0" algn="l">
               <a:buNone/>
             </a:pPr>
             <a:r>
@@ -6792,17 +5682,24 @@
             <a:prstDash val="solid"/>
           </a:ln>
         </p:spPr>
+        <p:txBody>
+          <a:bodyPr/>
+          <a:lstStyle/>
+          <a:p>
+            <a:endParaRPr lang="en-US"/>
+          </a:p>
+        </p:txBody>
       </p:sp>
       <p:pic>
         <p:nvPicPr>
-          <p:cNvPr id="6" name="Image 0" descr="Ikon umat">    </p:cNvPr>
+          <p:cNvPr id="6" name="Image 0" descr="Ikon umat"/>
           <p:cNvPicPr>
             <a:picLocks noChangeAspect="1"/>
           </p:cNvPicPr>
           <p:nvPr/>
         </p:nvPicPr>
         <p:blipFill>
-          <a:blip r:embed="rId1"/>
+          <a:blip r:embed="rId3"/>
           <a:stretch>
             <a:fillRect/>
           </a:stretch>
@@ -6838,7 +5735,7 @@
           <a:bodyPr wrap="square" lIns="0" tIns="0" rIns="0" bIns="0" rtlCol="0" anchor="ctr"/>
           <a:lstStyle/>
           <a:p>
-            <a:pPr indent="0" marL="0">
+            <a:pPr marL="0" indent="0">
               <a:buNone/>
             </a:pPr>
             <a:r>
@@ -6879,17 +5776,24 @@
             <a:prstDash val="solid"/>
           </a:ln>
         </p:spPr>
+        <p:txBody>
+          <a:bodyPr/>
+          <a:lstStyle/>
+          <a:p>
+            <a:endParaRPr lang="en-US"/>
+          </a:p>
+        </p:txBody>
       </p:sp>
       <p:pic>
         <p:nvPicPr>
-          <p:cNvPr id="9" name="Image 1" descr="Ikon grafik">    </p:cNvPr>
+          <p:cNvPr id="9" name="Image 1" descr="Ikon grafik"/>
           <p:cNvPicPr>
             <a:picLocks noChangeAspect="1"/>
           </p:cNvPicPr>
           <p:nvPr/>
         </p:nvPicPr>
         <p:blipFill>
-          <a:blip r:embed="rId2"/>
+          <a:blip r:embed="rId4"/>
           <a:stretch>
             <a:fillRect/>
           </a:stretch>
@@ -6925,16 +5829,120 @@
           <a:bodyPr wrap="square" lIns="0" tIns="0" rIns="0" bIns="0" rtlCol="0" anchor="ctr"/>
           <a:lstStyle/>
           <a:p>
-            <a:pPr indent="0" marL="0">
-              <a:buNone/>
-            </a:pPr>
-            <a:r>
-              <a:rPr lang="id-ID" altLang="en-US" sz="1800" dirty="0">
+            <a:pPr marL="0" indent="0">
+              <a:buNone/>
+            </a:pPr>
+            <a:r>
+              <a:rPr lang="en-US" altLang="en-US" sz="1800" dirty="0" err="1">
                 <a:solidFill>
                   <a:schemeClr val="tx1"/>
                 </a:solidFill>
               </a:rPr>
-              <a:t>Apakah kolekte masih cukup menutup biaya kegiatan kita?</a:t>
+              <a:t>Bagaimanakah</a:t>
+            </a:r>
+            <a:r>
+              <a:rPr lang="en-US" altLang="en-US" sz="1800" dirty="0">
+                <a:solidFill>
+                  <a:schemeClr val="tx1"/>
+                </a:solidFill>
+              </a:rPr>
+              <a:t> </a:t>
+            </a:r>
+            <a:r>
+              <a:rPr lang="en-US" altLang="en-US" sz="1800" dirty="0" err="1">
+                <a:solidFill>
+                  <a:schemeClr val="tx1"/>
+                </a:solidFill>
+              </a:rPr>
+              <a:t>kemampuan</a:t>
+            </a:r>
+            <a:r>
+              <a:rPr lang="en-US" altLang="en-US" sz="1800" dirty="0">
+                <a:solidFill>
+                  <a:schemeClr val="tx1"/>
+                </a:solidFill>
+              </a:rPr>
+              <a:t> Paroki </a:t>
+            </a:r>
+            <a:r>
+              <a:rPr lang="en-US" altLang="en-US" sz="1800" dirty="0" err="1">
+                <a:solidFill>
+                  <a:schemeClr val="tx1"/>
+                </a:solidFill>
+              </a:rPr>
+              <a:t>dalam</a:t>
+            </a:r>
+            <a:r>
+              <a:rPr lang="en-US" altLang="en-US" sz="1800" dirty="0">
+                <a:solidFill>
+                  <a:schemeClr val="tx1"/>
+                </a:solidFill>
+              </a:rPr>
+              <a:t> </a:t>
+            </a:r>
+            <a:r>
+              <a:rPr lang="en-US" altLang="en-US" sz="1800" dirty="0" err="1">
+                <a:solidFill>
+                  <a:schemeClr val="tx1"/>
+                </a:solidFill>
+              </a:rPr>
+              <a:t>mengelola</a:t>
+            </a:r>
+            <a:r>
+              <a:rPr lang="en-US" altLang="en-US" sz="1800" dirty="0">
+                <a:solidFill>
+                  <a:schemeClr val="tx1"/>
+                </a:solidFill>
+              </a:rPr>
+              <a:t> </a:t>
+            </a:r>
+            <a:r>
+              <a:rPr lang="en-US" altLang="en-US" sz="1800" dirty="0" err="1">
+                <a:solidFill>
+                  <a:schemeClr val="tx1"/>
+                </a:solidFill>
+              </a:rPr>
+              <a:t>keuangannya</a:t>
+            </a:r>
+            <a:r>
+              <a:rPr lang="en-US" altLang="en-US" sz="1800" dirty="0">
+                <a:solidFill>
+                  <a:schemeClr val="tx1"/>
+                </a:solidFill>
+              </a:rPr>
+              <a:t> </a:t>
+            </a:r>
+            <a:r>
+              <a:rPr lang="en-US" altLang="en-US" sz="1800" dirty="0" err="1">
+                <a:solidFill>
+                  <a:schemeClr val="tx1"/>
+                </a:solidFill>
+              </a:rPr>
+              <a:t>sekarang</a:t>
+            </a:r>
+            <a:r>
+              <a:rPr lang="en-US" altLang="en-US" sz="1800" dirty="0">
+                <a:solidFill>
+                  <a:schemeClr val="tx1"/>
+                </a:solidFill>
+              </a:rPr>
+              <a:t> dan </a:t>
+            </a:r>
+            <a:r>
+              <a:rPr lang="en-US" altLang="en-US" sz="1800" dirty="0" err="1">
+                <a:solidFill>
+                  <a:schemeClr val="tx1"/>
+                </a:solidFill>
+              </a:rPr>
+              <a:t>kedepannya</a:t>
+            </a:r>
+            <a:r>
+              <a:rPr lang="en-US" altLang="en-US" sz="1800" dirty="0">
+                <a:solidFill>
+                  <a:schemeClr val="tx1"/>
+                </a:solidFill>
+              </a:rPr>
+              <a:t>?</a:t>
             </a:r>
             <a:endParaRPr lang="id-ID" sz="1800" dirty="0"/>
           </a:p>
@@ -6966,17 +5974,24 @@
             <a:prstDash val="solid"/>
           </a:ln>
         </p:spPr>
+        <p:txBody>
+          <a:bodyPr/>
+          <a:lstStyle/>
+          <a:p>
+            <a:endParaRPr lang="en-US"/>
+          </a:p>
+        </p:txBody>
       </p:sp>
       <p:pic>
         <p:nvPicPr>
-          <p:cNvPr id="12" name="Image 2" descr="Ikon jam">    </p:cNvPr>
+          <p:cNvPr id="12" name="Image 2" descr="Ikon jam"/>
           <p:cNvPicPr>
             <a:picLocks noChangeAspect="1"/>
           </p:cNvPicPr>
           <p:nvPr/>
         </p:nvPicPr>
         <p:blipFill>
-          <a:blip r:embed="rId3"/>
+          <a:blip r:embed="rId5"/>
           <a:stretch>
             <a:fillRect/>
           </a:stretch>
@@ -7012,7 +6027,7 @@
           <a:bodyPr wrap="square" lIns="0" tIns="0" rIns="0" bIns="0" rtlCol="0" anchor="ctr"/>
           <a:lstStyle/>
           <a:p>
-            <a:pPr indent="0" marL="0">
+            <a:pPr marL="0" indent="0">
               <a:buNone/>
             </a:pPr>
             <a:r>
@@ -7053,17 +6068,24 @@
             <a:prstDash val="solid"/>
           </a:ln>
         </p:spPr>
+        <p:txBody>
+          <a:bodyPr/>
+          <a:lstStyle/>
+          <a:p>
+            <a:endParaRPr lang="en-US"/>
+          </a:p>
+        </p:txBody>
       </p:sp>
       <p:pic>
         <p:nvPicPr>
-          <p:cNvPr id="15" name="Image 3" descr="Ikon keluarga">    </p:cNvPr>
+          <p:cNvPr id="15" name="Image 3" descr="Ikon keluarga"/>
           <p:cNvPicPr>
             <a:picLocks noChangeAspect="1"/>
           </p:cNvPicPr>
           <p:nvPr/>
         </p:nvPicPr>
         <p:blipFill>
-          <a:blip r:embed="rId4"/>
+          <a:blip r:embed="rId6"/>
           <a:stretch>
             <a:fillRect/>
           </a:stretch>
@@ -7099,7 +6121,7 @@
           <a:bodyPr wrap="square" lIns="0" tIns="0" rIns="0" bIns="0" rtlCol="0" anchor="ctr"/>
           <a:lstStyle/>
           <a:p>
-            <a:pPr indent="0" marL="0">
+            <a:pPr marL="0" indent="0">
               <a:buNone/>
             </a:pPr>
             <a:r>
@@ -7108,7 +6130,11 @@
                   <a:schemeClr val="tx1"/>
                 </a:solidFill>
               </a:rPr>
-              <a:t>Siapa umat kita: berapa anak, orang muda, dan lansia?</a:t>
+              <a:t>Siapa umat kita</a:t>
+            </a:r>
+            <a:r>
+              <a:rPr lang="en-US" altLang="en-US" dirty="0"/>
+              <a:t>?</a:t>
             </a:r>
             <a:endParaRPr lang="id-ID" sz="1800" dirty="0"/>
           </a:p>
@@ -7135,16 +6161,112 @@
           <a:bodyPr wrap="square" lIns="0" tIns="0" rIns="0" bIns="0" rtlCol="0" anchor="ctr"/>
           <a:lstStyle/>
           <a:p>
-            <a:pPr indent="0" marL="0">
-              <a:buNone/>
-            </a:pPr>
-            <a:r>
-              <a:rPr lang="id-ID" altLang="en-US" sz="2000" dirty="0">
+            <a:pPr marL="0" indent="0">
+              <a:buNone/>
+            </a:pPr>
+            <a:r>
+              <a:rPr lang="en-US" altLang="en-US" sz="2000" dirty="0" err="1">
                 <a:solidFill>
                   <a:schemeClr val="tx2"/>
                 </a:solidFill>
               </a:rPr>
-              <a:t>Jawabannya biasanya ada, tetapi tersebar di buku catatan, lembar kerja, dan ingatan pengurus.</a:t>
+              <a:t>Seringkali</a:t>
+            </a:r>
+            <a:r>
+              <a:rPr lang="en-US" altLang="en-US" sz="2000" dirty="0">
+                <a:solidFill>
+                  <a:schemeClr val="tx2"/>
+                </a:solidFill>
+              </a:rPr>
+              <a:t> </a:t>
+            </a:r>
+            <a:r>
+              <a:rPr lang="en-US" altLang="en-US" sz="2000" dirty="0" err="1">
+                <a:solidFill>
+                  <a:schemeClr val="tx2"/>
+                </a:solidFill>
+              </a:rPr>
+              <a:t>jawaban</a:t>
+            </a:r>
+            <a:r>
+              <a:rPr lang="en-US" altLang="en-US" sz="2000" dirty="0">
+                <a:solidFill>
+                  <a:schemeClr val="tx2"/>
+                </a:solidFill>
+              </a:rPr>
+              <a:t> </a:t>
+            </a:r>
+            <a:r>
+              <a:rPr lang="en-US" altLang="en-US" sz="2000" dirty="0" err="1">
+                <a:solidFill>
+                  <a:schemeClr val="tx2"/>
+                </a:solidFill>
+              </a:rPr>
+              <a:t>memang</a:t>
+            </a:r>
+            <a:r>
+              <a:rPr lang="en-US" altLang="en-US" sz="2000" dirty="0">
+                <a:solidFill>
+                  <a:schemeClr val="tx2"/>
+                </a:solidFill>
+              </a:rPr>
+              <a:t> </a:t>
+            </a:r>
+            <a:r>
+              <a:rPr lang="en-US" altLang="en-US" sz="2000" dirty="0" err="1">
+                <a:solidFill>
+                  <a:schemeClr val="tx2"/>
+                </a:solidFill>
+              </a:rPr>
+              <a:t>ada</a:t>
+            </a:r>
+            <a:r>
+              <a:rPr lang="en-US" altLang="en-US" sz="2000" dirty="0">
+                <a:solidFill>
+                  <a:schemeClr val="tx2"/>
+                </a:solidFill>
+              </a:rPr>
+              <a:t>, </a:t>
+            </a:r>
+            <a:r>
+              <a:rPr lang="en-US" altLang="en-US" sz="2000" dirty="0" err="1">
+                <a:solidFill>
+                  <a:schemeClr val="tx2"/>
+                </a:solidFill>
+              </a:rPr>
+              <a:t>tapi</a:t>
+            </a:r>
+            <a:r>
+              <a:rPr lang="en-US" altLang="en-US" sz="2000" dirty="0">
+                <a:solidFill>
+                  <a:schemeClr val="tx2"/>
+                </a:solidFill>
+              </a:rPr>
+              <a:t> </a:t>
+            </a:r>
+            <a:r>
+              <a:rPr lang="en-US" altLang="en-US" sz="2000" dirty="0" err="1">
+                <a:solidFill>
+                  <a:schemeClr val="tx2"/>
+                </a:solidFill>
+              </a:rPr>
+              <a:t>sulit</a:t>
+            </a:r>
+            <a:r>
+              <a:rPr lang="en-US" altLang="en-US" sz="2000" dirty="0">
+                <a:solidFill>
+                  <a:schemeClr val="tx2"/>
+                </a:solidFill>
+              </a:rPr>
+              <a:t> </a:t>
+            </a:r>
+            <a:r>
+              <a:rPr lang="en-US" altLang="en-US" sz="2000" dirty="0" err="1">
+                <a:solidFill>
+                  <a:schemeClr val="tx2"/>
+                </a:solidFill>
+              </a:rPr>
+              <a:t>menemukannya</a:t>
             </a:r>
             <a:endParaRPr lang="id-ID" sz="2000" dirty="0"/>
           </a:p>
@@ -7170,7 +6292,7 @@
           </a:prstGeom>
           <a:extLst>
             <a:ext uri="{C572A759-6A51-4108-AA02-DFA0A04FC94B}">
-              <ma14:wrappingTextBoxFlag xmlns:ma14="http://schemas.microsoft.com/office/mac/drawingml/2011/main" val="0"/>
+              <ma14:wrappingTextBoxFlag xmlns:ma14="http://schemas.microsoft.com/office/mac/drawingml/2011/main" xmlns="" val="0"/>
             </a:ext>
           </a:extLst>
         </p:spPr>
@@ -7188,7 +6310,7 @@
           <a:p>
             <a:pPr algn="r"/>
             <a:fld id="{F7021451-1387-4CA6-816F-3879F97B5CBC}" type="slidenum">
-              <a:rPr b="0" lang="en-US"/>
+              <a:rPr lang="en-US" b="0"/>
               <a:t>2</a:t>
             </a:fld>
             <a:endParaRPr lang="en-US"/>
@@ -7223,9 +6345,11 @@
       <p:sp>
         <p:nvSpPr>
           <p:cNvPr id="3" name="Text 0"/>
-          <p:cNvSpPr/>
+          <p:cNvSpPr>
+            <a:spLocks noGrp="1"/>
+          </p:cNvSpPr>
           <p:nvPr>
-            <p:ph idx="100" type="body" hasCustomPrompt="1"/>
+            <p:ph type="body" idx="100" hasCustomPrompt="1"/>
           </p:nvPr>
         </p:nvSpPr>
         <p:spPr>
@@ -7243,11 +6367,11 @@
           <a:bodyPr wrap="square" lIns="0" tIns="0" rIns="0" bIns="0" rtlCol="0" anchor="t"/>
           <a:lstStyle/>
           <a:p>
-            <a:pPr algn="l" indent="0" marL="0">
-              <a:buNone/>
-            </a:pPr>
-            <a:r>
-              <a:rPr lang="id-ID" altLang="en-US" sz="1200" b="1" spc="200" kern="0" dirty="0">
+            <a:pPr marL="0" indent="0" algn="l">
+              <a:buNone/>
+            </a:pPr>
+            <a:r>
+              <a:rPr lang="id-ID" altLang="en-US" sz="1200" b="1" kern="0" spc="200" dirty="0">
                 <a:solidFill>
                   <a:schemeClr val="accent3"/>
                 </a:solidFill>
@@ -7261,9 +6385,11 @@
       <p:sp>
         <p:nvSpPr>
           <p:cNvPr id="4" name="Text 0"/>
-          <p:cNvSpPr/>
+          <p:cNvSpPr>
+            <a:spLocks noGrp="1"/>
+          </p:cNvSpPr>
           <p:nvPr>
-            <p:ph idx="101" type="title" hasCustomPrompt="1"/>
+            <p:ph type="title" idx="101" hasCustomPrompt="1"/>
           </p:nvPr>
         </p:nvSpPr>
         <p:spPr>
@@ -7281,7 +6407,7 @@
           <a:bodyPr wrap="square" lIns="0" tIns="0" rIns="0" bIns="0" rtlCol="0" anchor="t"/>
           <a:lstStyle/>
           <a:p>
-            <a:pPr algn="l" indent="0" marL="0">
+            <a:pPr marL="0" indent="0" algn="l">
               <a:buNone/>
             </a:pPr>
             <a:r>
@@ -7322,6 +6448,13 @@
             <a:prstDash val="solid"/>
           </a:ln>
         </p:spPr>
+        <p:txBody>
+          <a:bodyPr/>
+          <a:lstStyle/>
+          <a:p>
+            <a:endParaRPr lang="en-US"/>
+          </a:p>
+        </p:txBody>
       </p:sp>
       <p:sp>
         <p:nvSpPr>
@@ -7350,7 +6483,7 @@
           <a:bodyPr wrap="square" lIns="0" tIns="0" rIns="0" bIns="0" rtlCol="0" anchor="ctr"/>
           <a:lstStyle/>
           <a:p>
-            <a:pPr algn="ctr" indent="0" marL="0">
+            <a:pPr marL="0" indent="0" algn="ctr">
               <a:buNone/>
             </a:pPr>
             <a:r>
@@ -7386,7 +6519,7 @@
           <a:bodyPr wrap="square" lIns="0" tIns="0" rIns="0" bIns="0" rtlCol="0" anchor="ctr"/>
           <a:lstStyle/>
           <a:p>
-            <a:pPr indent="0" marL="0">
+            <a:pPr marL="0" indent="0">
               <a:buNone/>
             </a:pPr>
             <a:r>
@@ -7425,7 +6558,7 @@
           <a:bodyPr wrap="square" lIns="0" tIns="0" rIns="0" bIns="0" rtlCol="0" anchor="t"/>
           <a:lstStyle/>
           <a:p>
-            <a:pPr indent="0" marL="0">
+            <a:pPr marL="0" indent="0">
               <a:buNone/>
             </a:pPr>
             <a:r>
@@ -7464,6 +6597,13 @@
             <a:prstDash val="solid"/>
           </a:ln>
         </p:spPr>
+        <p:txBody>
+          <a:bodyPr/>
+          <a:lstStyle/>
+          <a:p>
+            <a:endParaRPr lang="en-US"/>
+          </a:p>
+        </p:txBody>
       </p:sp>
       <p:sp>
         <p:nvSpPr>
@@ -7491,6 +6631,13 @@
             <a:prstDash val="solid"/>
           </a:ln>
         </p:spPr>
+        <p:txBody>
+          <a:bodyPr/>
+          <a:lstStyle/>
+          <a:p>
+            <a:endParaRPr lang="en-US"/>
+          </a:p>
+        </p:txBody>
       </p:sp>
       <p:sp>
         <p:nvSpPr>
@@ -7519,7 +6666,7 @@
           <a:bodyPr wrap="square" lIns="0" tIns="0" rIns="0" bIns="0" rtlCol="0" anchor="ctr"/>
           <a:lstStyle/>
           <a:p>
-            <a:pPr algn="ctr" indent="0" marL="0">
+            <a:pPr marL="0" indent="0" algn="ctr">
               <a:buNone/>
             </a:pPr>
             <a:r>
@@ -7555,7 +6702,7 @@
           <a:bodyPr wrap="square" lIns="0" tIns="0" rIns="0" bIns="0" rtlCol="0" anchor="ctr"/>
           <a:lstStyle/>
           <a:p>
-            <a:pPr indent="0" marL="0">
+            <a:pPr marL="0" indent="0">
               <a:buNone/>
             </a:pPr>
             <a:r>
@@ -7594,7 +6741,7 @@
           <a:bodyPr wrap="square" lIns="0" tIns="0" rIns="0" bIns="0" rtlCol="0" anchor="t"/>
           <a:lstStyle/>
           <a:p>
-            <a:pPr indent="0" marL="0">
+            <a:pPr marL="0" indent="0">
               <a:buNone/>
             </a:pPr>
             <a:r>
@@ -7633,6 +6780,13 @@
             <a:prstDash val="solid"/>
           </a:ln>
         </p:spPr>
+        <p:txBody>
+          <a:bodyPr/>
+          <a:lstStyle/>
+          <a:p>
+            <a:endParaRPr lang="en-US"/>
+          </a:p>
+        </p:txBody>
       </p:sp>
       <p:sp>
         <p:nvSpPr>
@@ -7660,6 +6814,13 @@
             <a:prstDash val="solid"/>
           </a:ln>
         </p:spPr>
+        <p:txBody>
+          <a:bodyPr/>
+          <a:lstStyle/>
+          <a:p>
+            <a:endParaRPr lang="en-US"/>
+          </a:p>
+        </p:txBody>
       </p:sp>
       <p:sp>
         <p:nvSpPr>
@@ -7688,7 +6849,7 @@
           <a:bodyPr wrap="square" lIns="0" tIns="0" rIns="0" bIns="0" rtlCol="0" anchor="ctr"/>
           <a:lstStyle/>
           <a:p>
-            <a:pPr algn="ctr" indent="0" marL="0">
+            <a:pPr marL="0" indent="0" algn="ctr">
               <a:buNone/>
             </a:pPr>
             <a:r>
@@ -7724,7 +6885,7 @@
           <a:bodyPr wrap="square" lIns="0" tIns="0" rIns="0" bIns="0" rtlCol="0" anchor="ctr"/>
           <a:lstStyle/>
           <a:p>
-            <a:pPr indent="0" marL="0">
+            <a:pPr marL="0" indent="0">
               <a:buNone/>
             </a:pPr>
             <a:r>
@@ -7763,7 +6924,7 @@
           <a:bodyPr wrap="square" lIns="0" tIns="0" rIns="0" bIns="0" rtlCol="0" anchor="t"/>
           <a:lstStyle/>
           <a:p>
-            <a:pPr indent="0" marL="0">
+            <a:pPr marL="0" indent="0">
               <a:buNone/>
             </a:pPr>
             <a:r>
@@ -7799,7 +6960,7 @@
           <a:bodyPr wrap="square" lIns="0" tIns="0" rIns="0" bIns="0" rtlCol="0" anchor="ctr"/>
           <a:lstStyle/>
           <a:p>
-            <a:pPr indent="0" marL="0">
+            <a:pPr marL="0" indent="0">
               <a:buNone/>
             </a:pPr>
             <a:r>
@@ -7808,7 +6969,55 @@
                   <a:schemeClr val="tx2"/>
                 </a:solidFill>
               </a:rPr>
-              <a:t>Setiap langkah berguna sendiri dan menyiapkan langkah berikutnya. Contoh awal kita sudah memperlihatkan ketiganya.</a:t>
+              <a:t>Setiap langkah </a:t>
+            </a:r>
+            <a:r>
+              <a:rPr lang="en-US" altLang="en-US" sz="1800" dirty="0" err="1">
+                <a:solidFill>
+                  <a:schemeClr val="tx2"/>
+                </a:solidFill>
+              </a:rPr>
+              <a:t>akan</a:t>
+            </a:r>
+            <a:r>
+              <a:rPr lang="en-US" altLang="en-US" sz="1800" dirty="0">
+                <a:solidFill>
+                  <a:schemeClr val="tx2"/>
+                </a:solidFill>
+              </a:rPr>
+              <a:t> </a:t>
+            </a:r>
+            <a:r>
+              <a:rPr lang="en-US" altLang="en-US" sz="1800" dirty="0" err="1">
+                <a:solidFill>
+                  <a:schemeClr val="tx2"/>
+                </a:solidFill>
+              </a:rPr>
+              <a:t>mendukung</a:t>
+            </a:r>
+            <a:r>
+              <a:rPr lang="en-US" altLang="en-US" sz="1800" dirty="0">
+                <a:solidFill>
+                  <a:schemeClr val="tx2"/>
+                </a:solidFill>
+              </a:rPr>
+              <a:t> Langkah </a:t>
+            </a:r>
+            <a:r>
+              <a:rPr lang="en-US" altLang="en-US" sz="1800" dirty="0" err="1">
+                <a:solidFill>
+                  <a:schemeClr val="tx2"/>
+                </a:solidFill>
+              </a:rPr>
+              <a:t>berikutnya</a:t>
+            </a:r>
+            <a:r>
+              <a:rPr lang="en-US" altLang="en-US" sz="1800" dirty="0">
+                <a:solidFill>
+                  <a:schemeClr val="tx2"/>
+                </a:solidFill>
+              </a:rPr>
+              <a:t>.</a:t>
             </a:r>
             <a:endParaRPr lang="id-ID" sz="1800" dirty="0"/>
           </a:p>
@@ -7834,7 +7043,7 @@
           </a:prstGeom>
           <a:extLst>
             <a:ext uri="{C572A759-6A51-4108-AA02-DFA0A04FC94B}">
-              <ma14:wrappingTextBoxFlag xmlns:ma14="http://schemas.microsoft.com/office/mac/drawingml/2011/main" val="0"/>
+              <ma14:wrappingTextBoxFlag xmlns:ma14="http://schemas.microsoft.com/office/mac/drawingml/2011/main" xmlns="" val="0"/>
             </a:ext>
           </a:extLst>
         </p:spPr>
@@ -7852,7 +7061,7 @@
           <a:p>
             <a:pPr algn="r"/>
             <a:fld id="{F7021451-1387-4CA6-816F-3879F97B5CBC}" type="slidenum">
-              <a:rPr b="0" lang="en-US"/>
+              <a:rPr lang="en-US" b="0"/>
               <a:t>3</a:t>
             </a:fld>
             <a:endParaRPr lang="en-US"/>
@@ -7887,9 +7096,11 @@
       <p:sp>
         <p:nvSpPr>
           <p:cNvPr id="3" name="Text 0"/>
-          <p:cNvSpPr/>
+          <p:cNvSpPr>
+            <a:spLocks noGrp="1"/>
+          </p:cNvSpPr>
           <p:nvPr>
-            <p:ph idx="100" type="body" hasCustomPrompt="1"/>
+            <p:ph type="body" idx="100" hasCustomPrompt="1"/>
           </p:nvPr>
         </p:nvSpPr>
         <p:spPr>
@@ -7907,11 +7118,11 @@
           <a:bodyPr wrap="square" lIns="0" tIns="0" rIns="0" bIns="0" rtlCol="0" anchor="t"/>
           <a:lstStyle/>
           <a:p>
-            <a:pPr algn="l" indent="0" marL="0">
-              <a:buNone/>
-            </a:pPr>
-            <a:r>
-              <a:rPr lang="id-ID" altLang="en-US" sz="1200" b="1" spc="200" kern="0" dirty="0">
+            <a:pPr marL="0" indent="0" algn="l">
+              <a:buNone/>
+            </a:pPr>
+            <a:r>
+              <a:rPr lang="id-ID" altLang="en-US" sz="1200" b="1" kern="0" spc="200" dirty="0">
                 <a:solidFill>
                   <a:schemeClr val="accent3"/>
                 </a:solidFill>
@@ -7925,9 +7136,11 @@
       <p:sp>
         <p:nvSpPr>
           <p:cNvPr id="4" name="Text 0"/>
-          <p:cNvSpPr/>
+          <p:cNvSpPr>
+            <a:spLocks noGrp="1"/>
+          </p:cNvSpPr>
           <p:nvPr>
-            <p:ph idx="101" type="title" hasCustomPrompt="1"/>
+            <p:ph type="title" idx="101" hasCustomPrompt="1"/>
           </p:nvPr>
         </p:nvSpPr>
         <p:spPr>
@@ -7945,7 +7158,7 @@
           <a:bodyPr wrap="square" lIns="0" tIns="0" rIns="0" bIns="0" rtlCol="0" anchor="t"/>
           <a:lstStyle/>
           <a:p>
-            <a:pPr algn="l" indent="0" marL="0">
+            <a:pPr marL="0" indent="0" algn="l">
               <a:buNone/>
             </a:pPr>
             <a:r>
@@ -7981,7 +7194,7 @@
           <a:bodyPr wrap="square" lIns="0" tIns="0" rIns="0" bIns="0" rtlCol="0" anchor="t"/>
           <a:lstStyle/>
           <a:p>
-            <a:pPr indent="0" marL="0">
+            <a:pPr marL="0" indent="0">
               <a:buNone/>
             </a:pPr>
             <a:r>
@@ -8022,17 +7235,24 @@
             <a:prstDash val="solid"/>
           </a:ln>
         </p:spPr>
+        <p:txBody>
+          <a:bodyPr/>
+          <a:lstStyle/>
+          <a:p>
+            <a:endParaRPr lang="en-US"/>
+          </a:p>
+        </p:txBody>
       </p:sp>
       <p:pic>
         <p:nvPicPr>
-          <p:cNvPr id="7" name="Image 0" descr="Ikon Jadwal Misa">    </p:cNvPr>
+          <p:cNvPr id="7" name="Image 0" descr="Ikon Jadwal Misa"/>
           <p:cNvPicPr>
             <a:picLocks noChangeAspect="1"/>
           </p:cNvPicPr>
           <p:nvPr/>
         </p:nvPicPr>
         <p:blipFill>
-          <a:blip r:embed="rId1"/>
+          <a:blip r:embed="rId3"/>
           <a:stretch>
             <a:fillRect/>
           </a:stretch>
@@ -8068,7 +7288,7 @@
           <a:bodyPr wrap="square" lIns="0" tIns="0" rIns="0" bIns="0" rtlCol="0" anchor="ctr"/>
           <a:lstStyle/>
           <a:p>
-            <a:pPr indent="0" marL="0">
+            <a:pPr marL="0" indent="0">
               <a:buNone/>
             </a:pPr>
             <a:r>
@@ -8109,17 +7329,24 @@
             <a:prstDash val="solid"/>
           </a:ln>
         </p:spPr>
+        <p:txBody>
+          <a:bodyPr/>
+          <a:lstStyle/>
+          <a:p>
+            <a:endParaRPr lang="en-US"/>
+          </a:p>
+        </p:txBody>
       </p:sp>
       <p:pic>
         <p:nvPicPr>
-          <p:cNvPr id="10" name="Image 1" descr="Ikon Kehadiran Misa">    </p:cNvPr>
+          <p:cNvPr id="10" name="Image 1" descr="Ikon Kehadiran Misa"/>
           <p:cNvPicPr>
             <a:picLocks noChangeAspect="1"/>
           </p:cNvPicPr>
           <p:nvPr/>
         </p:nvPicPr>
         <p:blipFill>
-          <a:blip r:embed="rId2"/>
+          <a:blip r:embed="rId4"/>
           <a:stretch>
             <a:fillRect/>
           </a:stretch>
@@ -8155,7 +7382,7 @@
           <a:bodyPr wrap="square" lIns="0" tIns="0" rIns="0" bIns="0" rtlCol="0" anchor="ctr"/>
           <a:lstStyle/>
           <a:p>
-            <a:pPr indent="0" marL="0">
+            <a:pPr marL="0" indent="0">
               <a:buNone/>
             </a:pPr>
             <a:r>
@@ -8196,17 +7423,24 @@
             <a:prstDash val="solid"/>
           </a:ln>
         </p:spPr>
+        <p:txBody>
+          <a:bodyPr/>
+          <a:lstStyle/>
+          <a:p>
+            <a:endParaRPr lang="en-US"/>
+          </a:p>
+        </p:txBody>
       </p:sp>
       <p:pic>
         <p:nvPicPr>
-          <p:cNvPr id="13" name="Image 2" descr="Ikon Kolekte">    </p:cNvPr>
+          <p:cNvPr id="13" name="Image 2" descr="Ikon Kolekte"/>
           <p:cNvPicPr>
             <a:picLocks noChangeAspect="1"/>
           </p:cNvPicPr>
           <p:nvPr/>
         </p:nvPicPr>
         <p:blipFill>
-          <a:blip r:embed="rId3"/>
+          <a:blip r:embed="rId5"/>
           <a:stretch>
             <a:fillRect/>
           </a:stretch>
@@ -8242,7 +7476,7 @@
           <a:bodyPr wrap="square" lIns="0" tIns="0" rIns="0" bIns="0" rtlCol="0" anchor="ctr"/>
           <a:lstStyle/>
           <a:p>
-            <a:pPr indent="0" marL="0">
+            <a:pPr marL="0" indent="0">
               <a:buNone/>
             </a:pPr>
             <a:r>
@@ -8283,17 +7517,24 @@
             <a:prstDash val="solid"/>
           </a:ln>
         </p:spPr>
+        <p:txBody>
+          <a:bodyPr/>
+          <a:lstStyle/>
+          <a:p>
+            <a:endParaRPr lang="en-US"/>
+          </a:p>
+        </p:txBody>
       </p:sp>
       <p:pic>
         <p:nvPicPr>
-          <p:cNvPr id="16" name="Image 3" descr="Ikon Umat dan keluarga">    </p:cNvPr>
+          <p:cNvPr id="16" name="Image 3" descr="Ikon Umat dan keluarga"/>
           <p:cNvPicPr>
             <a:picLocks noChangeAspect="1"/>
           </p:cNvPicPr>
           <p:nvPr/>
         </p:nvPicPr>
         <p:blipFill>
-          <a:blip r:embed="rId4"/>
+          <a:blip r:embed="rId6"/>
           <a:stretch>
             <a:fillRect/>
           </a:stretch>
@@ -8329,7 +7570,7 @@
           <a:bodyPr wrap="square" lIns="0" tIns="0" rIns="0" bIns="0" rtlCol="0" anchor="ctr"/>
           <a:lstStyle/>
           <a:p>
-            <a:pPr indent="0" marL="0">
+            <a:pPr marL="0" indent="0">
               <a:buNone/>
             </a:pPr>
             <a:r>
@@ -8370,17 +7611,24 @@
             <a:prstDash val="solid"/>
           </a:ln>
         </p:spPr>
+        <p:txBody>
+          <a:bodyPr/>
+          <a:lstStyle/>
+          <a:p>
+            <a:endParaRPr lang="en-US"/>
+          </a:p>
+        </p:txBody>
       </p:sp>
       <p:pic>
         <p:nvPicPr>
-          <p:cNvPr id="19" name="Image 4" descr="Ikon Sumbangan khusus">    </p:cNvPr>
+          <p:cNvPr id="19" name="Image 4" descr="Ikon Sumbangan khusus"/>
           <p:cNvPicPr>
             <a:picLocks noChangeAspect="1"/>
           </p:cNvPicPr>
           <p:nvPr/>
         </p:nvPicPr>
         <p:blipFill>
-          <a:blip r:embed="rId5"/>
+          <a:blip r:embed="rId7"/>
           <a:stretch>
             <a:fillRect/>
           </a:stretch>
@@ -8416,7 +7664,7 @@
           <a:bodyPr wrap="square" lIns="0" tIns="0" rIns="0" bIns="0" rtlCol="0" anchor="ctr"/>
           <a:lstStyle/>
           <a:p>
-            <a:pPr indent="0" marL="0">
+            <a:pPr marL="0" indent="0">
               <a:buNone/>
             </a:pPr>
             <a:r>
@@ -8457,17 +7705,24 @@
             <a:prstDash val="solid"/>
           </a:ln>
         </p:spPr>
+        <p:txBody>
+          <a:bodyPr/>
+          <a:lstStyle/>
+          <a:p>
+            <a:endParaRPr lang="en-US"/>
+          </a:p>
+        </p:txBody>
       </p:sp>
       <p:pic>
         <p:nvPicPr>
-          <p:cNvPr id="22" name="Image 5" descr="Ikon Survei umat">    </p:cNvPr>
+          <p:cNvPr id="22" name="Image 5" descr="Ikon Survei umat"/>
           <p:cNvPicPr>
             <a:picLocks noChangeAspect="1"/>
           </p:cNvPicPr>
           <p:nvPr/>
         </p:nvPicPr>
         <p:blipFill>
-          <a:blip r:embed="rId6"/>
+          <a:blip r:embed="rId8"/>
           <a:stretch>
             <a:fillRect/>
           </a:stretch>
@@ -8503,7 +7758,7 @@
           <a:bodyPr wrap="square" lIns="0" tIns="0" rIns="0" bIns="0" rtlCol="0" anchor="ctr"/>
           <a:lstStyle/>
           <a:p>
-            <a:pPr indent="0" marL="0">
+            <a:pPr marL="0" indent="0">
               <a:buNone/>
             </a:pPr>
             <a:r>
@@ -8544,17 +7799,24 @@
             <a:prstDash val="solid"/>
           </a:ln>
         </p:spPr>
+        <p:txBody>
+          <a:bodyPr/>
+          <a:lstStyle/>
+          <a:p>
+            <a:endParaRPr lang="en-US"/>
+          </a:p>
+        </p:txBody>
       </p:sp>
       <p:pic>
         <p:nvPicPr>
-          <p:cNvPr id="25" name="Image 6" descr="Ikon Rencana dan anggaran">    </p:cNvPr>
+          <p:cNvPr id="25" name="Image 6" descr="Ikon Rencana dan anggaran"/>
           <p:cNvPicPr>
             <a:picLocks noChangeAspect="1"/>
           </p:cNvPicPr>
           <p:nvPr/>
         </p:nvPicPr>
         <p:blipFill>
-          <a:blip r:embed="rId7"/>
+          <a:blip r:embed="rId9"/>
           <a:stretch>
             <a:fillRect/>
           </a:stretch>
@@ -8590,7 +7852,7 @@
           <a:bodyPr wrap="square" lIns="0" tIns="0" rIns="0" bIns="0" rtlCol="0" anchor="ctr"/>
           <a:lstStyle/>
           <a:p>
-            <a:pPr indent="0" marL="0">
+            <a:pPr marL="0" indent="0">
               <a:buNone/>
             </a:pPr>
             <a:r>
@@ -8631,17 +7893,24 @@
             <a:prstDash val="solid"/>
           </a:ln>
         </p:spPr>
+        <p:txBody>
+          <a:bodyPr/>
+          <a:lstStyle/>
+          <a:p>
+            <a:endParaRPr lang="en-US"/>
+          </a:p>
+        </p:txBody>
       </p:sp>
       <p:pic>
         <p:nvPicPr>
-          <p:cNvPr id="28" name="Image 7" descr="Ikon Kegiatan dan laporan">    </p:cNvPr>
+          <p:cNvPr id="28" name="Image 7" descr="Ikon Kegiatan dan laporan"/>
           <p:cNvPicPr>
             <a:picLocks noChangeAspect="1"/>
           </p:cNvPicPr>
           <p:nvPr/>
         </p:nvPicPr>
         <p:blipFill>
-          <a:blip r:embed="rId8"/>
+          <a:blip r:embed="rId10"/>
           <a:stretch>
             <a:fillRect/>
           </a:stretch>
@@ -8677,7 +7946,7 @@
           <a:bodyPr wrap="square" lIns="0" tIns="0" rIns="0" bIns="0" rtlCol="0" anchor="ctr"/>
           <a:lstStyle/>
           <a:p>
-            <a:pPr indent="0" marL="0">
+            <a:pPr marL="0" indent="0">
               <a:buNone/>
             </a:pPr>
             <a:r>
@@ -8718,17 +7987,24 @@
             <a:prstDash val="solid"/>
           </a:ln>
         </p:spPr>
+        <p:txBody>
+          <a:bodyPr/>
+          <a:lstStyle/>
+          <a:p>
+            <a:endParaRPr lang="en-US"/>
+          </a:p>
+        </p:txBody>
       </p:sp>
       <p:pic>
         <p:nvPicPr>
-          <p:cNvPr id="31" name="Image 8" descr="Ikon Wilayah dan lingkungan">    </p:cNvPr>
+          <p:cNvPr id="31" name="Image 8" descr="Ikon Wilayah dan lingkungan"/>
           <p:cNvPicPr>
             <a:picLocks noChangeAspect="1"/>
           </p:cNvPicPr>
           <p:nvPr/>
         </p:nvPicPr>
         <p:blipFill>
-          <a:blip r:embed="rId9"/>
+          <a:blip r:embed="rId11"/>
           <a:stretch>
             <a:fillRect/>
           </a:stretch>
@@ -8764,7 +8040,7 @@
           <a:bodyPr wrap="square" lIns="0" tIns="0" rIns="0" bIns="0" rtlCol="0" anchor="ctr"/>
           <a:lstStyle/>
           <a:p>
-            <a:pPr indent="0" marL="0">
+            <a:pPr marL="0" indent="0">
               <a:buNone/>
             </a:pPr>
             <a:r>
@@ -8781,41 +8057,14 @@
       </p:sp>
       <p:sp>
         <p:nvSpPr>
-          <p:cNvPr id="33" name="Shape 21"/>
-          <p:cNvSpPr/>
-          <p:nvPr/>
-        </p:nvSpPr>
-        <p:spPr>
-          <a:xfrm>
-            <a:off x="640080" y="5029200"/>
-            <a:ext cx="2556434" cy="1097280"/>
-          </a:xfrm>
-          <a:prstGeom prst="roundRect">
-            <a:avLst>
-              <a:gd name="adj" fmla="val 10000"/>
-            </a:avLst>
-          </a:prstGeom>
-          <a:solidFill>
-            <a:schemeClr val="tx1"/>
-          </a:solidFill>
-          <a:ln w="12700">
-            <a:solidFill>
-              <a:schemeClr val="tx1"/>
-            </a:solidFill>
-            <a:prstDash val="solid"/>
-          </a:ln>
-        </p:spPr>
-      </p:sp>
-      <p:sp>
-        <p:nvSpPr>
-          <p:cNvPr id="34" name="Text 22"/>
+          <p:cNvPr id="45" name="Text 33"/>
           <p:cNvSpPr txBox="1"/>
           <p:nvPr/>
         </p:nvSpPr>
         <p:spPr>
           <a:xfrm>
-            <a:off x="914400" y="5102352"/>
-            <a:ext cx="2007794" cy="548640"/>
+            <a:off x="5669280" y="6355080"/>
+            <a:ext cx="5212080" cy="274320"/>
           </a:xfrm>
           <a:prstGeom prst="rect">
             <a:avLst/>
@@ -8827,388 +8076,7 @@
           <a:bodyPr wrap="square" lIns="0" tIns="0" rIns="0" bIns="0" rtlCol="0" anchor="ctr"/>
           <a:lstStyle/>
           <a:p>
-            <a:pPr indent="0" marL="0">
-              <a:buNone/>
-            </a:pPr>
-            <a:r>
-              <a:rPr lang="id-ID" altLang="en-US" sz="2800" b="1" dirty="0">
-                <a:solidFill>
-                  <a:schemeClr val="accent4"/>
-                </a:solidFill>
-                <a:latin typeface="Cambria" pitchFamily="34" charset="0"/>
-                <a:ea typeface="Cambria" pitchFamily="34" charset="-122"/>
-                <a:cs typeface="Cambria" pitchFamily="34" charset="-120"/>
-              </a:rPr>
-              <a:t>9</a:t>
-            </a:r>
-            <a:endParaRPr lang="id-ID" sz="2800" dirty="0"/>
-          </a:p>
-        </p:txBody>
-      </p:sp>
-      <p:sp>
-        <p:nvSpPr>
-          <p:cNvPr id="35" name="Text 23"/>
-          <p:cNvSpPr txBox="1"/>
-          <p:nvPr/>
-        </p:nvSpPr>
-        <p:spPr>
-          <a:xfrm>
-            <a:off x="914400" y="5669280"/>
-            <a:ext cx="2099234" cy="365760"/>
-          </a:xfrm>
-          <a:prstGeom prst="rect">
-            <a:avLst/>
-          </a:prstGeom>
-          <a:noFill/>
-          <a:ln/>
-        </p:spPr>
-        <p:txBody>
-          <a:bodyPr wrap="square" lIns="0" tIns="0" rIns="0" bIns="0" rtlCol="0" anchor="ctr"/>
-          <a:lstStyle/>
-          <a:p>
-            <a:pPr indent="0" marL="0">
-              <a:buNone/>
-            </a:pPr>
-            <a:r>
-              <a:rPr lang="id-ID" altLang="en-US" sz="1400" dirty="0">
-                <a:solidFill>
-                  <a:schemeClr val="bg2"/>
-                </a:solidFill>
-              </a:rPr>
-              <a:t>bidang data</a:t>
-            </a:r>
-            <a:endParaRPr lang="id-ID" sz="1400" dirty="0"/>
-          </a:p>
-        </p:txBody>
-      </p:sp>
-      <p:sp>
-        <p:nvSpPr>
-          <p:cNvPr id="36" name="Shape 24"/>
-          <p:cNvSpPr/>
-          <p:nvPr/>
-        </p:nvSpPr>
-        <p:spPr>
-          <a:xfrm>
-            <a:off x="3425114" y="5029200"/>
-            <a:ext cx="2556434" cy="1097280"/>
-          </a:xfrm>
-          <a:prstGeom prst="roundRect">
-            <a:avLst>
-              <a:gd name="adj" fmla="val 10000"/>
-            </a:avLst>
-          </a:prstGeom>
-          <a:solidFill>
-            <a:schemeClr val="tx1"/>
-          </a:solidFill>
-          <a:ln w="12700">
-            <a:solidFill>
-              <a:schemeClr val="tx1"/>
-            </a:solidFill>
-            <a:prstDash val="solid"/>
-          </a:ln>
-        </p:spPr>
-      </p:sp>
-      <p:sp>
-        <p:nvSpPr>
-          <p:cNvPr id="37" name="Text 25"/>
-          <p:cNvSpPr txBox="1"/>
-          <p:nvPr/>
-        </p:nvSpPr>
-        <p:spPr>
-          <a:xfrm>
-            <a:off x="3699434" y="5102352"/>
-            <a:ext cx="2007794" cy="548640"/>
-          </a:xfrm>
-          <a:prstGeom prst="rect">
-            <a:avLst/>
-          </a:prstGeom>
-          <a:noFill/>
-          <a:ln/>
-        </p:spPr>
-        <p:txBody>
-          <a:bodyPr wrap="square" lIns="0" tIns="0" rIns="0" bIns="0" rtlCol="0" anchor="ctr"/>
-          <a:lstStyle/>
-          <a:p>
-            <a:pPr indent="0" marL="0">
-              <a:buNone/>
-            </a:pPr>
-            <a:r>
-              <a:rPr lang="id-ID" altLang="en-US" sz="2800" b="1" dirty="0">
-                <a:solidFill>
-                  <a:schemeClr val="accent4"/>
-                </a:solidFill>
-                <a:latin typeface="Cambria" pitchFamily="34" charset="0"/>
-                <a:ea typeface="Cambria" pitchFamily="34" charset="-122"/>
-                <a:cs typeface="Cambria" pitchFamily="34" charset="-120"/>
-              </a:rPr>
-              <a:t>43</a:t>
-            </a:r>
-            <a:endParaRPr lang="id-ID" sz="2800" dirty="0"/>
-          </a:p>
-        </p:txBody>
-      </p:sp>
-      <p:sp>
-        <p:nvSpPr>
-          <p:cNvPr id="38" name="Text 26"/>
-          <p:cNvSpPr txBox="1"/>
-          <p:nvPr/>
-        </p:nvSpPr>
-        <p:spPr>
-          <a:xfrm>
-            <a:off x="3699434" y="5669280"/>
-            <a:ext cx="2099234" cy="365760"/>
-          </a:xfrm>
-          <a:prstGeom prst="rect">
-            <a:avLst/>
-          </a:prstGeom>
-          <a:noFill/>
-          <a:ln/>
-        </p:spPr>
-        <p:txBody>
-          <a:bodyPr wrap="square" lIns="0" tIns="0" rIns="0" bIns="0" rtlCol="0" anchor="ctr"/>
-          <a:lstStyle/>
-          <a:p>
-            <a:pPr indent="0" marL="0">
-              <a:buNone/>
-            </a:pPr>
-            <a:r>
-              <a:rPr lang="id-ID" altLang="en-US" sz="1400" dirty="0">
-                <a:solidFill>
-                  <a:schemeClr val="bg2"/>
-                </a:solidFill>
-              </a:rPr>
-              <a:t>tabel yang terhubung</a:t>
-            </a:r>
-            <a:endParaRPr lang="id-ID" sz="1400" dirty="0"/>
-          </a:p>
-        </p:txBody>
-      </p:sp>
-      <p:sp>
-        <p:nvSpPr>
-          <p:cNvPr id="39" name="Shape 27"/>
-          <p:cNvSpPr/>
-          <p:nvPr/>
-        </p:nvSpPr>
-        <p:spPr>
-          <a:xfrm>
-            <a:off x="6210148" y="5029200"/>
-            <a:ext cx="2556434" cy="1097280"/>
-          </a:xfrm>
-          <a:prstGeom prst="roundRect">
-            <a:avLst>
-              <a:gd name="adj" fmla="val 10000"/>
-            </a:avLst>
-          </a:prstGeom>
-          <a:solidFill>
-            <a:schemeClr val="tx1"/>
-          </a:solidFill>
-          <a:ln w="12700">
-            <a:solidFill>
-              <a:schemeClr val="tx1"/>
-            </a:solidFill>
-            <a:prstDash val="solid"/>
-          </a:ln>
-        </p:spPr>
-      </p:sp>
-      <p:sp>
-        <p:nvSpPr>
-          <p:cNvPr id="40" name="Text 28"/>
-          <p:cNvSpPr txBox="1"/>
-          <p:nvPr/>
-        </p:nvSpPr>
-        <p:spPr>
-          <a:xfrm>
-            <a:off x="6484468" y="5102352"/>
-            <a:ext cx="2007794" cy="548640"/>
-          </a:xfrm>
-          <a:prstGeom prst="rect">
-            <a:avLst/>
-          </a:prstGeom>
-          <a:noFill/>
-          <a:ln/>
-        </p:spPr>
-        <p:txBody>
-          <a:bodyPr wrap="square" lIns="0" tIns="0" rIns="0" bIns="0" rtlCol="0" anchor="ctr"/>
-          <a:lstStyle/>
-          <a:p>
-            <a:pPr indent="0" marL="0">
-              <a:buNone/>
-            </a:pPr>
-            <a:r>
-              <a:rPr lang="id-ID" altLang="en-US" sz="2800" b="1" dirty="0">
-                <a:solidFill>
-                  <a:schemeClr val="accent4"/>
-                </a:solidFill>
-                <a:latin typeface="Cambria" pitchFamily="34" charset="0"/>
-                <a:ea typeface="Cambria" pitchFamily="34" charset="-122"/>
-                <a:cs typeface="Cambria" pitchFamily="34" charset="-120"/>
-              </a:rPr>
-              <a:t>5+</a:t>
-            </a:r>
-            <a:endParaRPr lang="id-ID" sz="2800" dirty="0"/>
-          </a:p>
-        </p:txBody>
-      </p:sp>
-      <p:sp>
-        <p:nvSpPr>
-          <p:cNvPr id="41" name="Text 29"/>
-          <p:cNvSpPr txBox="1"/>
-          <p:nvPr/>
-        </p:nvSpPr>
-        <p:spPr>
-          <a:xfrm>
-            <a:off x="6484468" y="5669280"/>
-            <a:ext cx="2099234" cy="365760"/>
-          </a:xfrm>
-          <a:prstGeom prst="rect">
-            <a:avLst/>
-          </a:prstGeom>
-          <a:noFill/>
-          <a:ln/>
-        </p:spPr>
-        <p:txBody>
-          <a:bodyPr wrap="square" lIns="0" tIns="0" rIns="0" bIns="0" rtlCol="0" anchor="ctr"/>
-          <a:lstStyle/>
-          <a:p>
-            <a:pPr indent="0" marL="0">
-              <a:buNone/>
-            </a:pPr>
-            <a:r>
-              <a:rPr lang="id-ID" altLang="en-US" sz="1400" dirty="0">
-                <a:solidFill>
-                  <a:schemeClr val="bg2"/>
-                </a:solidFill>
-              </a:rPr>
-              <a:t>tahun riwayat dalam contoh</a:t>
-            </a:r>
-            <a:endParaRPr lang="id-ID" sz="1400" dirty="0"/>
-          </a:p>
-        </p:txBody>
-      </p:sp>
-      <p:sp>
-        <p:nvSpPr>
-          <p:cNvPr id="42" name="Shape 30"/>
-          <p:cNvSpPr/>
-          <p:nvPr/>
-        </p:nvSpPr>
-        <p:spPr>
-          <a:xfrm>
-            <a:off x="8995181" y="5029200"/>
-            <a:ext cx="2556434" cy="1097280"/>
-          </a:xfrm>
-          <a:prstGeom prst="roundRect">
-            <a:avLst>
-              <a:gd name="adj" fmla="val 10000"/>
-            </a:avLst>
-          </a:prstGeom>
-          <a:solidFill>
-            <a:schemeClr val="tx1"/>
-          </a:solidFill>
-          <a:ln w="12700">
-            <a:solidFill>
-              <a:schemeClr val="tx1"/>
-            </a:solidFill>
-            <a:prstDash val="solid"/>
-          </a:ln>
-        </p:spPr>
-      </p:sp>
-      <p:sp>
-        <p:nvSpPr>
-          <p:cNvPr id="43" name="Text 31"/>
-          <p:cNvSpPr txBox="1"/>
-          <p:nvPr/>
-        </p:nvSpPr>
-        <p:spPr>
-          <a:xfrm>
-            <a:off x="9269501" y="5102352"/>
-            <a:ext cx="2007794" cy="548640"/>
-          </a:xfrm>
-          <a:prstGeom prst="rect">
-            <a:avLst/>
-          </a:prstGeom>
-          <a:noFill/>
-          <a:ln/>
-        </p:spPr>
-        <p:txBody>
-          <a:bodyPr wrap="square" lIns="0" tIns="0" rIns="0" bIns="0" rtlCol="0" anchor="ctr"/>
-          <a:lstStyle/>
-          <a:p>
-            <a:pPr indent="0" marL="0">
-              <a:buNone/>
-            </a:pPr>
-            <a:r>
-              <a:rPr lang="id-ID" altLang="en-US" sz="2800" b="1" dirty="0">
-                <a:solidFill>
-                  <a:schemeClr val="accent4"/>
-                </a:solidFill>
-                <a:latin typeface="Cambria" pitchFamily="34" charset="0"/>
-                <a:ea typeface="Cambria" pitchFamily="34" charset="-122"/>
-                <a:cs typeface="Cambria" pitchFamily="34" charset="-120"/>
-              </a:rPr>
-              <a:t>1.734</a:t>
-            </a:r>
-            <a:endParaRPr lang="id-ID" sz="2800" dirty="0"/>
-          </a:p>
-        </p:txBody>
-      </p:sp>
-      <p:sp>
-        <p:nvSpPr>
-          <p:cNvPr id="44" name="Text 32"/>
-          <p:cNvSpPr txBox="1"/>
-          <p:nvPr/>
-        </p:nvSpPr>
-        <p:spPr>
-          <a:xfrm>
-            <a:off x="9269501" y="5669280"/>
-            <a:ext cx="2099234" cy="365760"/>
-          </a:xfrm>
-          <a:prstGeom prst="rect">
-            <a:avLst/>
-          </a:prstGeom>
-          <a:noFill/>
-          <a:ln/>
-        </p:spPr>
-        <p:txBody>
-          <a:bodyPr wrap="square" lIns="0" tIns="0" rIns="0" bIns="0" rtlCol="0" anchor="ctr"/>
-          <a:lstStyle/>
-          <a:p>
-            <a:pPr indent="0" marL="0">
-              <a:buNone/>
-            </a:pPr>
-            <a:r>
-              <a:rPr lang="id-ID" altLang="en-US" sz="1400" dirty="0">
-                <a:solidFill>
-                  <a:schemeClr val="bg2"/>
-                </a:solidFill>
-              </a:rPr>
-              <a:t>Misa tercatat</a:t>
-            </a:r>
-            <a:endParaRPr lang="id-ID" sz="1400" dirty="0"/>
-          </a:p>
-        </p:txBody>
-      </p:sp>
-      <p:sp>
-        <p:nvSpPr>
-          <p:cNvPr id="45" name="Text 33"/>
-          <p:cNvSpPr txBox="1"/>
-          <p:nvPr/>
-        </p:nvSpPr>
-        <p:spPr>
-          <a:xfrm>
-            <a:off x="5669280" y="6355080"/>
-            <a:ext cx="5212080" cy="274320"/>
-          </a:xfrm>
-          <a:prstGeom prst="rect">
-            <a:avLst/>
-          </a:prstGeom>
-          <a:noFill/>
-          <a:ln/>
-        </p:spPr>
-        <p:txBody>
-          <a:bodyPr wrap="square" lIns="0" tIns="0" rIns="0" bIns="0" rtlCol="0" anchor="ctr"/>
-          <a:lstStyle/>
-          <a:p>
-            <a:pPr algn="r" indent="0" marL="0">
+            <a:pPr marL="0" indent="0" algn="r">
               <a:buNone/>
             </a:pPr>
             <a:r>
@@ -9219,49 +8087,13 @@
               </a:rPr>
               <a:t>1 Kumpulkan</a:t>
             </a:r>
-            <a:pPr algn="r" indent="0" marL="0">
-              <a:buNone/>
-            </a:pPr>
             <a:r>
               <a:rPr lang="id-ID" altLang="en-US" sz="1100" dirty="0">
                 <a:solidFill>
                   <a:schemeClr val="tx2"/>
                 </a:solidFill>
               </a:rPr>
-              <a:t>  ·  </a:t>
-            </a:r>
-            <a:pPr algn="r" indent="0" marL="0">
-              <a:buNone/>
-            </a:pPr>
-            <a:r>
-              <a:rPr lang="id-ID" altLang="en-US" sz="1100" dirty="0">
-                <a:solidFill>
-                  <a:schemeClr val="tx2"/>
-                </a:solidFill>
-              </a:rPr>
-              <a:t>2 Bagikan</a:t>
-            </a:r>
-            <a:pPr algn="r" indent="0" marL="0">
-              <a:buNone/>
-            </a:pPr>
-            <a:r>
-              <a:rPr lang="id-ID" altLang="en-US" sz="1100" dirty="0">
-                <a:solidFill>
-                  <a:schemeClr val="tx2"/>
-                </a:solidFill>
-              </a:rPr>
-              <a:t>  ·  </a:t>
-            </a:r>
-            <a:pPr algn="r" indent="0" marL="0">
-              <a:buNone/>
-            </a:pPr>
-            <a:r>
-              <a:rPr lang="id-ID" altLang="en-US" sz="1100" dirty="0">
-                <a:solidFill>
-                  <a:schemeClr val="tx2"/>
-                </a:solidFill>
-              </a:rPr>
-              <a:t>3 Pahami</a:t>
+              <a:t>  ·  2 Bagikan  ·  3 Pahami</a:t>
             </a:r>
             <a:endParaRPr lang="id-ID" sz="1100" dirty="0"/>
           </a:p>
@@ -9269,7 +8101,7 @@
       </p:sp>
       <p:sp>
         <p:nvSpPr>
-          <p:cNvPr id="25" name="Slide Number Placeholder 0"/>
+          <p:cNvPr id="2" name="Slide Number Placeholder 0"/>
           <p:cNvSpPr>
             <a:spLocks noGrp="1"/>
           </p:cNvSpPr>
@@ -9287,7 +8119,7 @@
           </a:prstGeom>
           <a:extLst>
             <a:ext uri="{C572A759-6A51-4108-AA02-DFA0A04FC94B}">
-              <ma14:wrappingTextBoxFlag xmlns:ma14="http://schemas.microsoft.com/office/mac/drawingml/2011/main" val="0"/>
+              <ma14:wrappingTextBoxFlag xmlns:ma14="http://schemas.microsoft.com/office/mac/drawingml/2011/main" xmlns="" val="0"/>
             </a:ext>
           </a:extLst>
         </p:spPr>
@@ -9305,7 +8137,7 @@
           <a:p>
             <a:pPr algn="r"/>
             <a:fld id="{F7021451-1387-4CA6-816F-3879F97B5CBC}" type="slidenum">
-              <a:rPr b="0" lang="en-US"/>
+              <a:rPr lang="en-US" b="0"/>
               <a:t>4</a:t>
             </a:fld>
             <a:endParaRPr lang="en-US"/>
@@ -9340,9 +8172,11 @@
       <p:sp>
         <p:nvSpPr>
           <p:cNvPr id="3" name="Text 0"/>
-          <p:cNvSpPr/>
+          <p:cNvSpPr>
+            <a:spLocks noGrp="1"/>
+          </p:cNvSpPr>
           <p:nvPr>
-            <p:ph idx="100" type="body" hasCustomPrompt="1"/>
+            <p:ph type="body" idx="100" hasCustomPrompt="1"/>
           </p:nvPr>
         </p:nvSpPr>
         <p:spPr>
@@ -9360,11 +8194,11 @@
           <a:bodyPr wrap="square" lIns="0" tIns="0" rIns="0" bIns="0" rtlCol="0" anchor="t"/>
           <a:lstStyle/>
           <a:p>
-            <a:pPr algn="l" indent="0" marL="0">
-              <a:buNone/>
-            </a:pPr>
-            <a:r>
-              <a:rPr lang="id-ID" altLang="en-US" sz="1200" b="1" spc="200" kern="0" dirty="0">
+            <a:pPr marL="0" indent="0" algn="l">
+              <a:buNone/>
+            </a:pPr>
+            <a:r>
+              <a:rPr lang="id-ID" altLang="en-US" sz="1200" b="1" kern="0" spc="200" dirty="0">
                 <a:solidFill>
                   <a:schemeClr val="accent3"/>
                 </a:solidFill>
@@ -9378,9 +8212,11 @@
       <p:sp>
         <p:nvSpPr>
           <p:cNvPr id="4" name="Text 0"/>
-          <p:cNvSpPr/>
+          <p:cNvSpPr>
+            <a:spLocks noGrp="1"/>
+          </p:cNvSpPr>
           <p:nvPr>
-            <p:ph idx="101" type="title" hasCustomPrompt="1"/>
+            <p:ph type="title" idx="101" hasCustomPrompt="1"/>
           </p:nvPr>
         </p:nvSpPr>
         <p:spPr>
@@ -9398,7 +8234,7 @@
           <a:bodyPr wrap="square" lIns="0" tIns="0" rIns="0" bIns="0" rtlCol="0" anchor="t"/>
           <a:lstStyle/>
           <a:p>
-            <a:pPr algn="l" indent="0" marL="0">
+            <a:pPr marL="0" indent="0" algn="l">
               <a:buNone/>
             </a:pPr>
             <a:r>
@@ -9439,6 +8275,13 @@
             <a:prstDash val="solid"/>
           </a:ln>
         </p:spPr>
+        <p:txBody>
+          <a:bodyPr/>
+          <a:lstStyle/>
+          <a:p>
+            <a:endParaRPr lang="en-US"/>
+          </a:p>
+        </p:txBody>
       </p:sp>
       <p:sp>
         <p:nvSpPr>
@@ -9461,11 +8304,11 @@
           <a:bodyPr wrap="square" lIns="0" tIns="0" rIns="0" bIns="0" rtlCol="0" anchor="ctr"/>
           <a:lstStyle/>
           <a:p>
-            <a:pPr indent="0" marL="0">
-              <a:buNone/>
-            </a:pPr>
-            <a:r>
-              <a:rPr lang="id-ID" altLang="en-US" sz="1200" b="1" spc="150" kern="0" dirty="0">
+            <a:pPr marL="0" indent="0">
+              <a:buNone/>
+            </a:pPr>
+            <a:r>
+              <a:rPr lang="id-ID" altLang="en-US" sz="1200" b="1" kern="0" spc="150" dirty="0">
                 <a:solidFill>
                   <a:schemeClr val="accent3"/>
                 </a:solidFill>
@@ -9497,7 +8340,7 @@
           <a:bodyPr wrap="square" lIns="0" tIns="0" rIns="0" bIns="0" rtlCol="0" anchor="t"/>
           <a:lstStyle/>
           <a:p>
-            <a:pPr indent="0" marL="0">
+            <a:pPr marL="0" indent="0">
               <a:buNone/>
             </a:pPr>
             <a:r>
@@ -9536,7 +8379,7 @@
           <a:bodyPr wrap="square" lIns="0" tIns="0" rIns="0" bIns="0" rtlCol="0" anchor="t"/>
           <a:lstStyle/>
           <a:p>
-            <a:pPr indent="0" marL="0">
+            <a:pPr marL="0" indent="0">
               <a:buNone/>
             </a:pPr>
             <a:r>
@@ -9575,6 +8418,13 @@
             <a:prstDash val="solid"/>
           </a:ln>
         </p:spPr>
+        <p:txBody>
+          <a:bodyPr/>
+          <a:lstStyle/>
+          <a:p>
+            <a:endParaRPr lang="en-US"/>
+          </a:p>
+        </p:txBody>
       </p:sp>
       <p:sp>
         <p:nvSpPr>
@@ -9602,6 +8452,13 @@
             <a:prstDash val="solid"/>
           </a:ln>
         </p:spPr>
+        <p:txBody>
+          <a:bodyPr/>
+          <a:lstStyle/>
+          <a:p>
+            <a:endParaRPr lang="en-US"/>
+          </a:p>
+        </p:txBody>
       </p:sp>
       <p:sp>
         <p:nvSpPr>
@@ -9624,11 +8481,11 @@
           <a:bodyPr wrap="square" lIns="0" tIns="0" rIns="0" bIns="0" rtlCol="0" anchor="ctr"/>
           <a:lstStyle/>
           <a:p>
-            <a:pPr indent="0" marL="0">
-              <a:buNone/>
-            </a:pPr>
-            <a:r>
-              <a:rPr lang="id-ID" altLang="en-US" sz="1200" b="1" spc="150" kern="0" dirty="0">
+            <a:pPr marL="0" indent="0">
+              <a:buNone/>
+            </a:pPr>
+            <a:r>
+              <a:rPr lang="id-ID" altLang="en-US" sz="1200" b="1" kern="0" spc="150" dirty="0">
                 <a:solidFill>
                   <a:schemeClr val="accent3"/>
                 </a:solidFill>
@@ -9660,7 +8517,7 @@
           <a:bodyPr wrap="square" lIns="0" tIns="0" rIns="0" bIns="0" rtlCol="0" anchor="t"/>
           <a:lstStyle/>
           <a:p>
-            <a:pPr indent="0" marL="0">
+            <a:pPr marL="0" indent="0">
               <a:buNone/>
             </a:pPr>
             <a:r>
@@ -9699,7 +8556,7 @@
           <a:bodyPr wrap="square" lIns="0" tIns="0" rIns="0" bIns="0" rtlCol="0" anchor="t"/>
           <a:lstStyle/>
           <a:p>
-            <a:pPr indent="0" marL="0">
+            <a:pPr marL="0" indent="0">
               <a:buNone/>
             </a:pPr>
             <a:r>
@@ -9738,6 +8595,13 @@
             <a:prstDash val="solid"/>
           </a:ln>
         </p:spPr>
+        <p:txBody>
+          <a:bodyPr/>
+          <a:lstStyle/>
+          <a:p>
+            <a:endParaRPr lang="en-US"/>
+          </a:p>
+        </p:txBody>
       </p:sp>
       <p:sp>
         <p:nvSpPr>
@@ -9765,6 +8629,13 @@
             <a:prstDash val="solid"/>
           </a:ln>
         </p:spPr>
+        <p:txBody>
+          <a:bodyPr/>
+          <a:lstStyle/>
+          <a:p>
+            <a:endParaRPr lang="en-US"/>
+          </a:p>
+        </p:txBody>
       </p:sp>
       <p:sp>
         <p:nvSpPr>
@@ -9787,11 +8658,11 @@
           <a:bodyPr wrap="square" lIns="0" tIns="0" rIns="0" bIns="0" rtlCol="0" anchor="ctr"/>
           <a:lstStyle/>
           <a:p>
-            <a:pPr indent="0" marL="0">
-              <a:buNone/>
-            </a:pPr>
-            <a:r>
-              <a:rPr lang="id-ID" altLang="en-US" sz="1200" b="1" spc="150" kern="0" dirty="0">
+            <a:pPr marL="0" indent="0">
+              <a:buNone/>
+            </a:pPr>
+            <a:r>
+              <a:rPr lang="id-ID" altLang="en-US" sz="1200" b="1" kern="0" spc="150" dirty="0">
                 <a:solidFill>
                   <a:schemeClr val="accent3"/>
                 </a:solidFill>
@@ -9823,7 +8694,7 @@
           <a:bodyPr wrap="square" lIns="0" tIns="0" rIns="0" bIns="0" rtlCol="0" anchor="t"/>
           <a:lstStyle/>
           <a:p>
-            <a:pPr indent="0" marL="0">
+            <a:pPr marL="0" indent="0">
               <a:buNone/>
             </a:pPr>
             <a:r>
@@ -9862,7 +8733,7 @@
           <a:bodyPr wrap="square" lIns="0" tIns="0" rIns="0" bIns="0" rtlCol="0" anchor="t"/>
           <a:lstStyle/>
           <a:p>
-            <a:pPr indent="0" marL="0">
+            <a:pPr marL="0" indent="0">
               <a:buNone/>
             </a:pPr>
             <a:r>
@@ -9901,6 +8772,13 @@
             <a:prstDash val="solid"/>
           </a:ln>
         </p:spPr>
+        <p:txBody>
+          <a:bodyPr/>
+          <a:lstStyle/>
+          <a:p>
+            <a:endParaRPr lang="en-US"/>
+          </a:p>
+        </p:txBody>
       </p:sp>
       <p:sp>
         <p:nvSpPr>
@@ -9928,6 +8806,13 @@
             <a:prstDash val="solid"/>
           </a:ln>
         </p:spPr>
+        <p:txBody>
+          <a:bodyPr/>
+          <a:lstStyle/>
+          <a:p>
+            <a:endParaRPr lang="en-US"/>
+          </a:p>
+        </p:txBody>
       </p:sp>
       <p:sp>
         <p:nvSpPr>
@@ -9950,11 +8835,11 @@
           <a:bodyPr wrap="square" lIns="0" tIns="0" rIns="0" bIns="0" rtlCol="0" anchor="ctr"/>
           <a:lstStyle/>
           <a:p>
-            <a:pPr indent="0" marL="0">
-              <a:buNone/>
-            </a:pPr>
-            <a:r>
-              <a:rPr lang="id-ID" altLang="en-US" sz="1200" b="1" spc="150" kern="0" dirty="0">
+            <a:pPr marL="0" indent="0">
+              <a:buNone/>
+            </a:pPr>
+            <a:r>
+              <a:rPr lang="id-ID" altLang="en-US" sz="1200" b="1" kern="0" spc="150" dirty="0">
                 <a:solidFill>
                   <a:schemeClr val="accent3"/>
                 </a:solidFill>
@@ -9986,7 +8871,7 @@
           <a:bodyPr wrap="square" lIns="0" tIns="0" rIns="0" bIns="0" rtlCol="0" anchor="t"/>
           <a:lstStyle/>
           <a:p>
-            <a:pPr indent="0" marL="0">
+            <a:pPr marL="0" indent="0">
               <a:buNone/>
             </a:pPr>
             <a:r>
@@ -10025,7 +8910,7 @@
           <a:bodyPr wrap="square" lIns="0" tIns="0" rIns="0" bIns="0" rtlCol="0" anchor="t"/>
           <a:lstStyle/>
           <a:p>
-            <a:pPr indent="0" marL="0">
+            <a:pPr marL="0" indent="0">
               <a:buNone/>
             </a:pPr>
             <a:r>
@@ -10061,7 +8946,7 @@
           <a:bodyPr wrap="square" lIns="0" tIns="0" rIns="0" bIns="0" rtlCol="0" anchor="ctr"/>
           <a:lstStyle/>
           <a:p>
-            <a:pPr indent="0" marL="0">
+            <a:pPr marL="0" indent="0">
               <a:buNone/>
             </a:pPr>
             <a:r>
@@ -10097,7 +8982,7 @@
           <a:bodyPr wrap="square" lIns="0" tIns="0" rIns="0" bIns="0" rtlCol="0" anchor="ctr"/>
           <a:lstStyle/>
           <a:p>
-            <a:pPr algn="r" indent="0" marL="0">
+            <a:pPr marL="0" indent="0" algn="r">
               <a:buNone/>
             </a:pPr>
             <a:r>
@@ -10108,49 +8993,13 @@
               </a:rPr>
               <a:t>1 Kumpulkan</a:t>
             </a:r>
-            <a:pPr algn="r" indent="0" marL="0">
-              <a:buNone/>
-            </a:pPr>
             <a:r>
               <a:rPr lang="id-ID" altLang="en-US" sz="1100" dirty="0">
                 <a:solidFill>
                   <a:schemeClr val="tx2"/>
                 </a:solidFill>
               </a:rPr>
-              <a:t>  ·  </a:t>
-            </a:r>
-            <a:pPr algn="r" indent="0" marL="0">
-              <a:buNone/>
-            </a:pPr>
-            <a:r>
-              <a:rPr lang="id-ID" altLang="en-US" sz="1100" dirty="0">
-                <a:solidFill>
-                  <a:schemeClr val="tx2"/>
-                </a:solidFill>
-              </a:rPr>
-              <a:t>2 Bagikan</a:t>
-            </a:r>
-            <a:pPr algn="r" indent="0" marL="0">
-              <a:buNone/>
-            </a:pPr>
-            <a:r>
-              <a:rPr lang="id-ID" altLang="en-US" sz="1100" dirty="0">
-                <a:solidFill>
-                  <a:schemeClr val="tx2"/>
-                </a:solidFill>
-              </a:rPr>
-              <a:t>  ·  </a:t>
-            </a:r>
-            <a:pPr algn="r" indent="0" marL="0">
-              <a:buNone/>
-            </a:pPr>
-            <a:r>
-              <a:rPr lang="id-ID" altLang="en-US" sz="1100" dirty="0">
-                <a:solidFill>
-                  <a:schemeClr val="tx2"/>
-                </a:solidFill>
-              </a:rPr>
-              <a:t>3 Pahami</a:t>
+              <a:t>  ·  2 Bagikan  ·  3 Pahami</a:t>
             </a:r>
             <a:endParaRPr lang="id-ID" sz="1100" dirty="0"/>
           </a:p>
@@ -10158,7 +9007,7 @@
       </p:sp>
       <p:sp>
         <p:nvSpPr>
-          <p:cNvPr id="25" name="Slide Number Placeholder 0"/>
+          <p:cNvPr id="2" name="Slide Number Placeholder 0"/>
           <p:cNvSpPr>
             <a:spLocks noGrp="1"/>
           </p:cNvSpPr>
@@ -10176,7 +9025,7 @@
           </a:prstGeom>
           <a:extLst>
             <a:ext uri="{C572A759-6A51-4108-AA02-DFA0A04FC94B}">
-              <ma14:wrappingTextBoxFlag xmlns:ma14="http://schemas.microsoft.com/office/mac/drawingml/2011/main" val="0"/>
+              <ma14:wrappingTextBoxFlag xmlns:ma14="http://schemas.microsoft.com/office/mac/drawingml/2011/main" xmlns="" val="0"/>
             </a:ext>
           </a:extLst>
         </p:spPr>
@@ -10194,7 +9043,7 @@
           <a:p>
             <a:pPr algn="r"/>
             <a:fld id="{F7021451-1387-4CA6-816F-3879F97B5CBC}" type="slidenum">
-              <a:rPr b="0" lang="en-US"/>
+              <a:rPr lang="en-US" b="0"/>
               <a:t>5</a:t>
             </a:fld>
             <a:endParaRPr lang="en-US"/>
@@ -10229,9 +9078,11 @@
       <p:sp>
         <p:nvSpPr>
           <p:cNvPr id="3" name="Text 0"/>
-          <p:cNvSpPr/>
+          <p:cNvSpPr>
+            <a:spLocks noGrp="1"/>
+          </p:cNvSpPr>
           <p:nvPr>
-            <p:ph idx="100" type="body" hasCustomPrompt="1"/>
+            <p:ph type="body" idx="100" hasCustomPrompt="1"/>
           </p:nvPr>
         </p:nvSpPr>
         <p:spPr>
@@ -10249,11 +9100,11 @@
           <a:bodyPr wrap="square" lIns="0" tIns="0" rIns="0" bIns="0" rtlCol="0" anchor="t"/>
           <a:lstStyle/>
           <a:p>
-            <a:pPr algn="l" indent="0" marL="0">
-              <a:buNone/>
-            </a:pPr>
-            <a:r>
-              <a:rPr lang="id-ID" altLang="en-US" sz="1200" b="1" spc="200" kern="0" dirty="0">
+            <a:pPr marL="0" indent="0" algn="l">
+              <a:buNone/>
+            </a:pPr>
+            <a:r>
+              <a:rPr lang="id-ID" altLang="en-US" sz="1200" b="1" kern="0" spc="200" dirty="0">
                 <a:solidFill>
                   <a:schemeClr val="accent3"/>
                 </a:solidFill>
@@ -10267,9 +9118,11 @@
       <p:sp>
         <p:nvSpPr>
           <p:cNvPr id="4" name="Text 0"/>
-          <p:cNvSpPr/>
+          <p:cNvSpPr>
+            <a:spLocks noGrp="1"/>
+          </p:cNvSpPr>
           <p:nvPr>
-            <p:ph idx="101" type="title" hasCustomPrompt="1"/>
+            <p:ph type="title" idx="101" hasCustomPrompt="1"/>
           </p:nvPr>
         </p:nvSpPr>
         <p:spPr>
@@ -10287,7 +9140,7 @@
           <a:bodyPr wrap="square" lIns="0" tIns="0" rIns="0" bIns="0" rtlCol="0" anchor="t"/>
           <a:lstStyle/>
           <a:p>
-            <a:pPr algn="l" indent="0" marL="0">
+            <a:pPr marL="0" indent="0" algn="l">
               <a:buNone/>
             </a:pPr>
             <a:r>
@@ -10328,6 +9181,13 @@
             <a:prstDash val="solid"/>
           </a:ln>
         </p:spPr>
+        <p:txBody>
+          <a:bodyPr/>
+          <a:lstStyle/>
+          <a:p>
+            <a:endParaRPr lang="en-US"/>
+          </a:p>
+        </p:txBody>
       </p:sp>
       <p:sp>
         <p:nvSpPr>
@@ -10350,7 +9210,7 @@
           <a:bodyPr wrap="square" lIns="0" tIns="0" rIns="0" bIns="0" rtlCol="0" anchor="ctr"/>
           <a:lstStyle/>
           <a:p>
-            <a:pPr indent="0" marL="0">
+            <a:pPr marL="0" indent="0">
               <a:buNone/>
             </a:pPr>
             <a:r>
@@ -10488,6 +9348,13 @@
             <a:prstDash val="solid"/>
           </a:ln>
         </p:spPr>
+        <p:txBody>
+          <a:bodyPr/>
+          <a:lstStyle/>
+          <a:p>
+            <a:endParaRPr lang="en-US"/>
+          </a:p>
+        </p:txBody>
       </p:sp>
       <p:sp>
         <p:nvSpPr>
@@ -10510,7 +9377,7 @@
           <a:bodyPr wrap="square" lIns="0" tIns="0" rIns="0" bIns="0" rtlCol="0" anchor="ctr"/>
           <a:lstStyle/>
           <a:p>
-            <a:pPr indent="0" marL="0">
+            <a:pPr marL="0" indent="0">
               <a:buNone/>
             </a:pPr>
             <a:r>
@@ -10643,7 +9510,7 @@
           <a:bodyPr wrap="square" lIns="0" tIns="0" rIns="0" bIns="0" rtlCol="0" anchor="ctr"/>
           <a:lstStyle/>
           <a:p>
-            <a:pPr indent="0" marL="0">
+            <a:pPr marL="0" indent="0">
               <a:buNone/>
             </a:pPr>
             <a:r>
@@ -10687,7 +9554,7 @@
           <a:bodyPr wrap="square" lIns="0" tIns="0" rIns="0" bIns="0" rtlCol="0" anchor="ctr"/>
           <a:lstStyle/>
           <a:p>
-            <a:pPr algn="ctr" indent="0" marL="0">
+            <a:pPr marL="0" indent="0" algn="ctr">
               <a:buNone/>
             </a:pPr>
             <a:r>
@@ -10731,7 +9598,7 @@
           <a:bodyPr wrap="square" lIns="0" tIns="0" rIns="0" bIns="0" rtlCol="0" anchor="ctr"/>
           <a:lstStyle/>
           <a:p>
-            <a:pPr algn="ctr" indent="0" marL="0">
+            <a:pPr marL="0" indent="0" algn="ctr">
               <a:buNone/>
             </a:pPr>
             <a:r>
@@ -10775,7 +9642,7 @@
           <a:bodyPr wrap="square" lIns="0" tIns="0" rIns="0" bIns="0" rtlCol="0" anchor="ctr"/>
           <a:lstStyle/>
           <a:p>
-            <a:pPr algn="ctr" indent="0" marL="0">
+            <a:pPr marL="0" indent="0" algn="ctr">
               <a:buNone/>
             </a:pPr>
             <a:r>
@@ -10819,7 +9686,7 @@
           <a:bodyPr wrap="square" lIns="0" tIns="0" rIns="0" bIns="0" rtlCol="0" anchor="ctr"/>
           <a:lstStyle/>
           <a:p>
-            <a:pPr algn="ctr" indent="0" marL="0">
+            <a:pPr marL="0" indent="0" algn="ctr">
               <a:buNone/>
             </a:pPr>
             <a:r>
@@ -10855,7 +9722,7 @@
           <a:bodyPr wrap="square" lIns="0" tIns="0" rIns="0" bIns="0" rtlCol="0" anchor="ctr"/>
           <a:lstStyle/>
           <a:p>
-            <a:pPr algn="r" indent="0" marL="0">
+            <a:pPr marL="0" indent="0" algn="r">
               <a:buNone/>
             </a:pPr>
             <a:r>
@@ -10864,51 +9731,23 @@
                   <a:schemeClr val="tx2"/>
                 </a:solidFill>
               </a:rPr>
-              <a:t>1 Kumpulkan</a:t>
-            </a:r>
-            <a:pPr algn="r" indent="0" marL="0">
-              <a:buNone/>
-            </a:pPr>
+              <a:t>1 Kumpulkan  ·  </a:t>
+            </a:r>
+            <a:r>
+              <a:rPr lang="id-ID" altLang="en-US" sz="1100" b="1" dirty="0">
+                <a:solidFill>
+                  <a:schemeClr val="accent3"/>
+                </a:solidFill>
+              </a:rPr>
+              <a:t>2 Bagikan</a:t>
+            </a:r>
             <a:r>
               <a:rPr lang="id-ID" altLang="en-US" sz="1100" dirty="0">
                 <a:solidFill>
                   <a:schemeClr val="tx2"/>
                 </a:solidFill>
               </a:rPr>
-              <a:t>  ·  </a:t>
-            </a:r>
-            <a:pPr algn="r" indent="0" marL="0">
-              <a:buNone/>
-            </a:pPr>
-            <a:r>
-              <a:rPr lang="id-ID" altLang="en-US" sz="1100" b="1" dirty="0">
-                <a:solidFill>
-                  <a:schemeClr val="accent3"/>
-                </a:solidFill>
-              </a:rPr>
-              <a:t>2 Bagikan</a:t>
-            </a:r>
-            <a:pPr algn="r" indent="0" marL="0">
-              <a:buNone/>
-            </a:pPr>
-            <a:r>
-              <a:rPr lang="id-ID" altLang="en-US" sz="1100" dirty="0">
-                <a:solidFill>
-                  <a:schemeClr val="tx2"/>
-                </a:solidFill>
-              </a:rPr>
-              <a:t>  ·  </a:t>
-            </a:r>
-            <a:pPr algn="r" indent="0" marL="0">
-              <a:buNone/>
-            </a:pPr>
-            <a:r>
-              <a:rPr lang="id-ID" altLang="en-US" sz="1100" dirty="0">
-                <a:solidFill>
-                  <a:schemeClr val="tx2"/>
-                </a:solidFill>
-              </a:rPr>
-              <a:t>3 Pahami</a:t>
+              <a:t>  ·  3 Pahami</a:t>
             </a:r>
             <a:endParaRPr lang="id-ID" sz="1100" dirty="0"/>
           </a:p>
@@ -10934,7 +9773,7 @@
           </a:prstGeom>
           <a:extLst>
             <a:ext uri="{C572A759-6A51-4108-AA02-DFA0A04FC94B}">
-              <ma14:wrappingTextBoxFlag xmlns:ma14="http://schemas.microsoft.com/office/mac/drawingml/2011/main" val="0"/>
+              <ma14:wrappingTextBoxFlag xmlns:ma14="http://schemas.microsoft.com/office/mac/drawingml/2011/main" xmlns="" val="0"/>
             </a:ext>
           </a:extLst>
         </p:spPr>
@@ -10952,7 +9791,7 @@
           <a:p>
             <a:pPr algn="r"/>
             <a:fld id="{F7021451-1387-4CA6-816F-3879F97B5CBC}" type="slidenum">
-              <a:rPr b="0" lang="en-US"/>
+              <a:rPr lang="en-US" b="0"/>
               <a:t>6</a:t>
             </a:fld>
             <a:endParaRPr lang="en-US"/>
@@ -10987,9 +9826,11 @@
       <p:sp>
         <p:nvSpPr>
           <p:cNvPr id="3" name="Text 0"/>
-          <p:cNvSpPr/>
+          <p:cNvSpPr>
+            <a:spLocks noGrp="1"/>
+          </p:cNvSpPr>
           <p:nvPr>
-            <p:ph idx="100" type="body" hasCustomPrompt="1"/>
+            <p:ph type="body" idx="100" hasCustomPrompt="1"/>
           </p:nvPr>
         </p:nvSpPr>
         <p:spPr>
@@ -11007,11 +9848,11 @@
           <a:bodyPr wrap="square" lIns="0" tIns="0" rIns="0" bIns="0" rtlCol="0" anchor="t"/>
           <a:lstStyle/>
           <a:p>
-            <a:pPr algn="l" indent="0" marL="0">
-              <a:buNone/>
-            </a:pPr>
-            <a:r>
-              <a:rPr lang="id-ID" altLang="en-US" sz="1200" b="1" spc="200" kern="0" dirty="0">
+            <a:pPr marL="0" indent="0" algn="l">
+              <a:buNone/>
+            </a:pPr>
+            <a:r>
+              <a:rPr lang="id-ID" altLang="en-US" sz="1200" b="1" kern="0" spc="200" dirty="0">
                 <a:solidFill>
                   <a:schemeClr val="accent3"/>
                 </a:solidFill>
@@ -11025,9 +9866,11 @@
       <p:sp>
         <p:nvSpPr>
           <p:cNvPr id="4" name="Text 0"/>
-          <p:cNvSpPr/>
+          <p:cNvSpPr>
+            <a:spLocks noGrp="1"/>
+          </p:cNvSpPr>
           <p:nvPr>
-            <p:ph idx="101" type="title" hasCustomPrompt="1"/>
+            <p:ph type="title" idx="101" hasCustomPrompt="1"/>
           </p:nvPr>
         </p:nvSpPr>
         <p:spPr>
@@ -11045,7 +9888,7 @@
           <a:bodyPr wrap="square" lIns="0" tIns="0" rIns="0" bIns="0" rtlCol="0" anchor="t"/>
           <a:lstStyle/>
           <a:p>
-            <a:pPr algn="l" indent="0" marL="0">
+            <a:pPr marL="0" indent="0" algn="l">
               <a:buNone/>
             </a:pPr>
             <a:r>
@@ -11084,17 +9927,24 @@
             <a:prstDash val="solid"/>
           </a:ln>
         </p:spPr>
+        <p:txBody>
+          <a:bodyPr/>
+          <a:lstStyle/>
+          <a:p>
+            <a:endParaRPr lang="en-US"/>
+          </a:p>
+        </p:txBody>
       </p:sp>
       <p:pic>
         <p:nvPicPr>
-          <p:cNvPr id="6" name="Image 0" descr="Contoh halaman jadwal Misa: tanggal, hari, jam, nama Misa, tempat, dan bahasa">    </p:cNvPr>
+          <p:cNvPr id="6" name="Image 0" descr="Contoh halaman jadwal Misa: tanggal, hari, jam, nama Misa, tempat, dan bahasa"/>
           <p:cNvPicPr>
             <a:picLocks noChangeAspect="1"/>
           </p:cNvPicPr>
           <p:nvPr/>
         </p:nvPicPr>
         <p:blipFill>
-          <a:blip r:embed="rId1"/>
+          <a:blip r:embed="rId3"/>
           <a:stretch>
             <a:fillRect/>
           </a:stretch>
@@ -11133,17 +9983,24 @@
             <a:prstDash val="solid"/>
           </a:ln>
         </p:spPr>
+        <p:txBody>
+          <a:bodyPr/>
+          <a:lstStyle/>
+          <a:p>
+            <a:endParaRPr lang="en-US"/>
+          </a:p>
+        </p:txBody>
       </p:sp>
       <p:pic>
         <p:nvPicPr>
-          <p:cNvPr id="8" name="Image 1" descr="Contoh halaman panduan layanan: persyaratan Baptis Dewasa sebagai daftar periksa">    </p:cNvPr>
+          <p:cNvPr id="8" name="Image 1" descr="Contoh halaman panduan layanan: persyaratan Baptis Dewasa sebagai daftar periksa"/>
           <p:cNvPicPr>
             <a:picLocks noChangeAspect="1"/>
           </p:cNvPicPr>
           <p:nvPr/>
         </p:nvPicPr>
         <p:blipFill>
-          <a:blip r:embed="rId2"/>
+          <a:blip r:embed="rId4"/>
           <a:stretch>
             <a:fillRect/>
           </a:stretch>
@@ -11179,7 +10036,7 @@
           <a:bodyPr wrap="square" lIns="0" tIns="0" rIns="0" bIns="0" rtlCol="0" anchor="ctr"/>
           <a:lstStyle/>
           <a:p>
-            <a:pPr algn="ctr" indent="0" marL="0">
+            <a:pPr marL="0" indent="0" algn="ctr">
               <a:buNone/>
             </a:pPr>
             <a:r>
@@ -11215,7 +10072,7 @@
           <a:bodyPr wrap="square" lIns="0" tIns="0" rIns="0" bIns="0" rtlCol="0" anchor="ctr"/>
           <a:lstStyle/>
           <a:p>
-            <a:pPr algn="ctr" indent="0" marL="0">
+            <a:pPr marL="0" indent="0" algn="ctr">
               <a:buNone/>
             </a:pPr>
             <a:r>
@@ -11251,7 +10108,7 @@
           <a:bodyPr wrap="square" lIns="0" tIns="0" rIns="0" bIns="0" rtlCol="0" anchor="ctr"/>
           <a:lstStyle/>
           <a:p>
-            <a:pPr indent="0" marL="0">
+            <a:pPr marL="0" indent="0">
               <a:buNone/>
             </a:pPr>
             <a:r>
@@ -11287,7 +10144,7 @@
           <a:bodyPr wrap="square" lIns="0" tIns="0" rIns="0" bIns="0" rtlCol="0" anchor="ctr"/>
           <a:lstStyle/>
           <a:p>
-            <a:pPr algn="r" indent="0" marL="0">
+            <a:pPr marL="0" indent="0" algn="r">
               <a:buNone/>
             </a:pPr>
             <a:r>
@@ -11296,51 +10153,23 @@
                   <a:schemeClr val="tx2"/>
                 </a:solidFill>
               </a:rPr>
-              <a:t>1 Kumpulkan</a:t>
-            </a:r>
-            <a:pPr algn="r" indent="0" marL="0">
-              <a:buNone/>
-            </a:pPr>
+              <a:t>1 Kumpulkan  ·  </a:t>
+            </a:r>
+            <a:r>
+              <a:rPr lang="id-ID" altLang="en-US" sz="1100" b="1" dirty="0">
+                <a:solidFill>
+                  <a:schemeClr val="accent3"/>
+                </a:solidFill>
+              </a:rPr>
+              <a:t>2 Bagikan</a:t>
+            </a:r>
             <a:r>
               <a:rPr lang="id-ID" altLang="en-US" sz="1100" dirty="0">
                 <a:solidFill>
                   <a:schemeClr val="tx2"/>
                 </a:solidFill>
               </a:rPr>
-              <a:t>  ·  </a:t>
-            </a:r>
-            <a:pPr algn="r" indent="0" marL="0">
-              <a:buNone/>
-            </a:pPr>
-            <a:r>
-              <a:rPr lang="id-ID" altLang="en-US" sz="1100" b="1" dirty="0">
-                <a:solidFill>
-                  <a:schemeClr val="accent3"/>
-                </a:solidFill>
-              </a:rPr>
-              <a:t>2 Bagikan</a:t>
-            </a:r>
-            <a:pPr algn="r" indent="0" marL="0">
-              <a:buNone/>
-            </a:pPr>
-            <a:r>
-              <a:rPr lang="id-ID" altLang="en-US" sz="1100" dirty="0">
-                <a:solidFill>
-                  <a:schemeClr val="tx2"/>
-                </a:solidFill>
-              </a:rPr>
-              <a:t>  ·  </a:t>
-            </a:r>
-            <a:pPr algn="r" indent="0" marL="0">
-              <a:buNone/>
-            </a:pPr>
-            <a:r>
-              <a:rPr lang="id-ID" altLang="en-US" sz="1100" dirty="0">
-                <a:solidFill>
-                  <a:schemeClr val="tx2"/>
-                </a:solidFill>
-              </a:rPr>
-              <a:t>3 Pahami</a:t>
+              <a:t>  ·  3 Pahami</a:t>
             </a:r>
             <a:endParaRPr lang="id-ID" sz="1100" dirty="0"/>
           </a:p>
@@ -11366,7 +10195,7 @@
           </a:prstGeom>
           <a:extLst>
             <a:ext uri="{C572A759-6A51-4108-AA02-DFA0A04FC94B}">
-              <ma14:wrappingTextBoxFlag xmlns:ma14="http://schemas.microsoft.com/office/mac/drawingml/2011/main" val="0"/>
+              <ma14:wrappingTextBoxFlag xmlns:ma14="http://schemas.microsoft.com/office/mac/drawingml/2011/main" xmlns="" val="0"/>
             </a:ext>
           </a:extLst>
         </p:spPr>
@@ -11384,7 +10213,7 @@
           <a:p>
             <a:pPr algn="r"/>
             <a:fld id="{F7021451-1387-4CA6-816F-3879F97B5CBC}" type="slidenum">
-              <a:rPr b="0" lang="en-US"/>
+              <a:rPr lang="en-US" b="0"/>
               <a:t>7</a:t>
             </a:fld>
             <a:endParaRPr lang="en-US"/>
@@ -11419,9 +10248,11 @@
       <p:sp>
         <p:nvSpPr>
           <p:cNvPr id="3" name="Text 0"/>
-          <p:cNvSpPr/>
+          <p:cNvSpPr>
+            <a:spLocks noGrp="1"/>
+          </p:cNvSpPr>
           <p:nvPr>
-            <p:ph idx="100" type="body" hasCustomPrompt="1"/>
+            <p:ph type="body" idx="100" hasCustomPrompt="1"/>
           </p:nvPr>
         </p:nvSpPr>
         <p:spPr>
@@ -11439,11 +10270,11 @@
           <a:bodyPr wrap="square" lIns="0" tIns="0" rIns="0" bIns="0" rtlCol="0" anchor="t"/>
           <a:lstStyle/>
           <a:p>
-            <a:pPr algn="l" indent="0" marL="0">
-              <a:buNone/>
-            </a:pPr>
-            <a:r>
-              <a:rPr lang="id-ID" altLang="en-US" sz="1200" b="1" spc="200" kern="0" dirty="0">
+            <a:pPr marL="0" indent="0" algn="l">
+              <a:buNone/>
+            </a:pPr>
+            <a:r>
+              <a:rPr lang="id-ID" altLang="en-US" sz="1200" b="1" kern="0" spc="200" dirty="0">
                 <a:solidFill>
                   <a:schemeClr val="accent3"/>
                 </a:solidFill>
@@ -11457,9 +10288,11 @@
       <p:sp>
         <p:nvSpPr>
           <p:cNvPr id="4" name="Text 0"/>
-          <p:cNvSpPr/>
+          <p:cNvSpPr>
+            <a:spLocks noGrp="1"/>
+          </p:cNvSpPr>
           <p:nvPr>
-            <p:ph idx="101" type="title" hasCustomPrompt="1"/>
+            <p:ph type="title" idx="101" hasCustomPrompt="1"/>
           </p:nvPr>
         </p:nvSpPr>
         <p:spPr>
@@ -11477,7 +10310,7 @@
           <a:bodyPr wrap="square" lIns="0" tIns="0" rIns="0" bIns="0" rtlCol="0" anchor="t"/>
           <a:lstStyle/>
           <a:p>
-            <a:pPr algn="l" indent="0" marL="0">
+            <a:pPr marL="0" indent="0" algn="l">
               <a:buNone/>
             </a:pPr>
             <a:r>
@@ -11518,6 +10351,13 @@
             <a:prstDash val="solid"/>
           </a:ln>
         </p:spPr>
+        <p:txBody>
+          <a:bodyPr/>
+          <a:lstStyle/>
+          <a:p>
+            <a:endParaRPr lang="en-US"/>
+          </a:p>
+        </p:txBody>
       </p:sp>
       <p:sp>
         <p:nvSpPr>
@@ -11540,7 +10380,7 @@
           <a:bodyPr wrap="square" lIns="0" tIns="0" rIns="0" bIns="0" rtlCol="0" anchor="ctr"/>
           <a:lstStyle/>
           <a:p>
-            <a:pPr indent="0" marL="0">
+            <a:pPr marL="0" indent="0">
               <a:buNone/>
             </a:pPr>
             <a:r>
@@ -11579,7 +10419,7 @@
           <a:bodyPr wrap="square" lIns="0" tIns="0" rIns="0" bIns="0" rtlCol="0" anchor="t"/>
           <a:lstStyle/>
           <a:p>
-            <a:pPr indent="0" marL="0">
+            <a:pPr marL="0" indent="0">
               <a:buNone/>
             </a:pPr>
             <a:r>
@@ -11615,7 +10455,7 @@
           <a:bodyPr wrap="square" lIns="0" tIns="0" rIns="0" bIns="0" rtlCol="0" anchor="t"/>
           <a:lstStyle/>
           <a:p>
-            <a:pPr indent="0" marL="0">
+            <a:pPr marL="0" indent="0">
               <a:buNone/>
             </a:pPr>
             <a:r>
@@ -11656,6 +10496,13 @@
             <a:prstDash val="solid"/>
           </a:ln>
         </p:spPr>
+        <p:txBody>
+          <a:bodyPr/>
+          <a:lstStyle/>
+          <a:p>
+            <a:endParaRPr lang="en-US"/>
+          </a:p>
+        </p:txBody>
       </p:sp>
       <p:sp>
         <p:nvSpPr>
@@ -11678,7 +10525,7 @@
           <a:bodyPr wrap="square" lIns="0" tIns="0" rIns="0" bIns="0" rtlCol="0" anchor="ctr"/>
           <a:lstStyle/>
           <a:p>
-            <a:pPr indent="0" marL="0">
+            <a:pPr marL="0" indent="0">
               <a:buNone/>
             </a:pPr>
             <a:r>
@@ -11717,7 +10564,7 @@
           <a:bodyPr wrap="square" lIns="0" tIns="0" rIns="0" bIns="0" rtlCol="0" anchor="t"/>
           <a:lstStyle/>
           <a:p>
-            <a:pPr indent="0" marL="0">
+            <a:pPr marL="0" indent="0">
               <a:buNone/>
             </a:pPr>
             <a:r>
@@ -11753,7 +10600,7 @@
           <a:bodyPr wrap="square" lIns="0" tIns="0" rIns="0" bIns="0" rtlCol="0" anchor="t"/>
           <a:lstStyle/>
           <a:p>
-            <a:pPr indent="0" marL="0">
+            <a:pPr marL="0" indent="0">
               <a:buNone/>
             </a:pPr>
             <a:r>
@@ -11794,6 +10641,13 @@
             <a:prstDash val="solid"/>
           </a:ln>
         </p:spPr>
+        <p:txBody>
+          <a:bodyPr/>
+          <a:lstStyle/>
+          <a:p>
+            <a:endParaRPr lang="en-US"/>
+          </a:p>
+        </p:txBody>
       </p:sp>
       <p:sp>
         <p:nvSpPr>
@@ -11816,7 +10670,7 @@
           <a:bodyPr wrap="square" lIns="0" tIns="0" rIns="0" bIns="0" rtlCol="0" anchor="ctr"/>
           <a:lstStyle/>
           <a:p>
-            <a:pPr indent="0" marL="0">
+            <a:pPr marL="0" indent="0">
               <a:buNone/>
             </a:pPr>
             <a:r>
@@ -11855,7 +10709,7 @@
           <a:bodyPr wrap="square" lIns="0" tIns="0" rIns="0" bIns="0" rtlCol="0" anchor="t"/>
           <a:lstStyle/>
           <a:p>
-            <a:pPr indent="0" marL="0">
+            <a:pPr marL="0" indent="0">
               <a:buNone/>
             </a:pPr>
             <a:r>
@@ -11891,7 +10745,7 @@
           <a:bodyPr wrap="square" lIns="0" tIns="0" rIns="0" bIns="0" rtlCol="0" anchor="t"/>
           <a:lstStyle/>
           <a:p>
-            <a:pPr indent="0" marL="0">
+            <a:pPr marL="0" indent="0">
               <a:buNone/>
             </a:pPr>
             <a:r>
@@ -11932,6 +10786,13 @@
             <a:prstDash val="solid"/>
           </a:ln>
         </p:spPr>
+        <p:txBody>
+          <a:bodyPr/>
+          <a:lstStyle/>
+          <a:p>
+            <a:endParaRPr lang="en-US"/>
+          </a:p>
+        </p:txBody>
       </p:sp>
       <p:sp>
         <p:nvSpPr>
@@ -11954,7 +10815,7 @@
           <a:bodyPr wrap="square" lIns="0" tIns="0" rIns="0" bIns="0" rtlCol="0" anchor="ctr"/>
           <a:lstStyle/>
           <a:p>
-            <a:pPr indent="0" marL="0">
+            <a:pPr marL="0" indent="0">
               <a:buNone/>
             </a:pPr>
             <a:r>
@@ -11993,7 +10854,7 @@
           <a:bodyPr wrap="square" lIns="0" tIns="0" rIns="0" bIns="0" rtlCol="0" anchor="t"/>
           <a:lstStyle/>
           <a:p>
-            <a:pPr indent="0" marL="0">
+            <a:pPr marL="0" indent="0">
               <a:buNone/>
             </a:pPr>
             <a:r>
@@ -12029,7 +10890,7 @@
           <a:bodyPr wrap="square" lIns="0" tIns="0" rIns="0" bIns="0" rtlCol="0" anchor="t"/>
           <a:lstStyle/>
           <a:p>
-            <a:pPr indent="0" marL="0">
+            <a:pPr marL="0" indent="0">
               <a:buNone/>
             </a:pPr>
             <a:r>
@@ -12070,6 +10931,13 @@
             <a:prstDash val="solid"/>
           </a:ln>
         </p:spPr>
+        <p:txBody>
+          <a:bodyPr/>
+          <a:lstStyle/>
+          <a:p>
+            <a:endParaRPr lang="en-US"/>
+          </a:p>
+        </p:txBody>
       </p:sp>
       <p:sp>
         <p:nvSpPr>
@@ -12092,7 +10960,7 @@
           <a:bodyPr wrap="square" lIns="0" tIns="0" rIns="0" bIns="0" rtlCol="0" anchor="ctr"/>
           <a:lstStyle/>
           <a:p>
-            <a:pPr indent="0" marL="0">
+            <a:pPr marL="0" indent="0">
               <a:buNone/>
             </a:pPr>
             <a:r>
@@ -12128,7 +10996,7 @@
           <a:bodyPr wrap="square" lIns="0" tIns="0" rIns="0" bIns="0" rtlCol="0" anchor="ctr"/>
           <a:lstStyle/>
           <a:p>
-            <a:pPr algn="r" indent="0" marL="0">
+            <a:pPr marL="0" indent="0" algn="r">
               <a:buNone/>
             </a:pPr>
             <a:r>
@@ -12137,44 +11005,8 @@
                   <a:schemeClr val="tx2"/>
                 </a:solidFill>
               </a:rPr>
-              <a:t>1 Kumpulkan</a:t>
-            </a:r>
-            <a:pPr algn="r" indent="0" marL="0">
-              <a:buNone/>
-            </a:pPr>
-            <a:r>
-              <a:rPr lang="id-ID" altLang="en-US" sz="1100" dirty="0">
-                <a:solidFill>
-                  <a:schemeClr val="tx2"/>
-                </a:solidFill>
-              </a:rPr>
-              <a:t>  ·  </a:t>
-            </a:r>
-            <a:pPr algn="r" indent="0" marL="0">
-              <a:buNone/>
-            </a:pPr>
-            <a:r>
-              <a:rPr lang="id-ID" altLang="en-US" sz="1100" dirty="0">
-                <a:solidFill>
-                  <a:schemeClr val="tx2"/>
-                </a:solidFill>
-              </a:rPr>
-              <a:t>2 Bagikan</a:t>
-            </a:r>
-            <a:pPr algn="r" indent="0" marL="0">
-              <a:buNone/>
-            </a:pPr>
-            <a:r>
-              <a:rPr lang="id-ID" altLang="en-US" sz="1100" dirty="0">
-                <a:solidFill>
-                  <a:schemeClr val="tx2"/>
-                </a:solidFill>
-              </a:rPr>
-              <a:t>  ·  </a:t>
-            </a:r>
-            <a:pPr algn="r" indent="0" marL="0">
-              <a:buNone/>
-            </a:pPr>
+              <a:t>1 Kumpulkan  ·  2 Bagikan  ·  </a:t>
+            </a:r>
             <a:r>
               <a:rPr lang="id-ID" altLang="en-US" sz="1100" b="1" dirty="0">
                 <a:solidFill>
@@ -12207,7 +11039,7 @@
           </a:prstGeom>
           <a:extLst>
             <a:ext uri="{C572A759-6A51-4108-AA02-DFA0A04FC94B}">
-              <ma14:wrappingTextBoxFlag xmlns:ma14="http://schemas.microsoft.com/office/mac/drawingml/2011/main" val="0"/>
+              <ma14:wrappingTextBoxFlag xmlns:ma14="http://schemas.microsoft.com/office/mac/drawingml/2011/main" xmlns="" val="0"/>
             </a:ext>
           </a:extLst>
         </p:spPr>
@@ -12225,7 +11057,7 @@
           <a:p>
             <a:pPr algn="r"/>
             <a:fld id="{F7021451-1387-4CA6-816F-3879F97B5CBC}" type="slidenum">
-              <a:rPr b="0" lang="en-US"/>
+              <a:rPr lang="en-US" b="0"/>
               <a:t>8</a:t>
             </a:fld>
             <a:endParaRPr lang="en-US"/>
@@ -12260,9 +11092,11 @@
       <p:sp>
         <p:nvSpPr>
           <p:cNvPr id="3" name="Text 0"/>
-          <p:cNvSpPr/>
+          <p:cNvSpPr>
+            <a:spLocks noGrp="1"/>
+          </p:cNvSpPr>
           <p:nvPr>
-            <p:ph idx="100" type="body" hasCustomPrompt="1"/>
+            <p:ph type="body" idx="100" hasCustomPrompt="1"/>
           </p:nvPr>
         </p:nvSpPr>
         <p:spPr>
@@ -12280,11 +11114,11 @@
           <a:bodyPr wrap="square" lIns="0" tIns="0" rIns="0" bIns="0" rtlCol="0" anchor="t"/>
           <a:lstStyle/>
           <a:p>
-            <a:pPr algn="l" indent="0" marL="0">
-              <a:buNone/>
-            </a:pPr>
-            <a:r>
-              <a:rPr lang="id-ID" altLang="en-US" sz="1200" b="1" spc="200" kern="0" dirty="0">
+            <a:pPr marL="0" indent="0" algn="l">
+              <a:buNone/>
+            </a:pPr>
+            <a:r>
+              <a:rPr lang="id-ID" altLang="en-US" sz="1200" b="1" kern="0" spc="200" dirty="0">
                 <a:solidFill>
                   <a:schemeClr val="accent3"/>
                 </a:solidFill>
@@ -12298,9 +11132,11 @@
       <p:sp>
         <p:nvSpPr>
           <p:cNvPr id="4" name="Text 0"/>
-          <p:cNvSpPr/>
+          <p:cNvSpPr>
+            <a:spLocks noGrp="1"/>
+          </p:cNvSpPr>
           <p:nvPr>
-            <p:ph idx="101" type="title" hasCustomPrompt="1"/>
+            <p:ph type="title" idx="101" hasCustomPrompt="1"/>
           </p:nvPr>
         </p:nvSpPr>
         <p:spPr>
@@ -12318,7 +11154,7 @@
           <a:bodyPr wrap="square" lIns="0" tIns="0" rIns="0" bIns="0" rtlCol="0" anchor="t"/>
           <a:lstStyle/>
           <a:p>
-            <a:pPr algn="l" indent="0" marL="0">
+            <a:pPr marL="0" indent="0" algn="l">
               <a:buNone/>
             </a:pPr>
             <a:r>
@@ -12357,17 +11193,24 @@
             <a:prstDash val="solid"/>
           </a:ln>
         </p:spPr>
+        <p:txBody>
+          <a:bodyPr/>
+          <a:lstStyle/>
+          <a:p>
+            <a:endParaRPr lang="en-US"/>
+          </a:p>
+        </p:txBody>
       </p:sp>
       <p:pic>
         <p:nvPicPr>
-          <p:cNvPr id="6" name="Image 0" descr="Contoh dasbor Ringkasan: angka pokok kolekte dan pengeluaran program, dan grafik dengan garis tren">    </p:cNvPr>
+          <p:cNvPr id="6" name="Image 0" descr="Contoh dasbor Ringkasan: angka pokok kolekte dan pengeluaran program, dan grafik dengan garis tren"/>
           <p:cNvPicPr>
             <a:picLocks noChangeAspect="1"/>
           </p:cNvPicPr>
           <p:nvPr/>
         </p:nvPicPr>
         <p:blipFill>
-          <a:blip r:embed="rId1"/>
+          <a:blip r:embed="rId3"/>
           <a:stretch>
             <a:fillRect/>
           </a:stretch>
@@ -12403,7 +11246,7 @@
           <a:bodyPr wrap="square" lIns="0" tIns="0" rIns="0" bIns="0" rtlCol="0" anchor="ctr"/>
           <a:lstStyle/>
           <a:p>
-            <a:pPr algn="ctr" indent="0" marL="0">
+            <a:pPr marL="0" indent="0" algn="ctr">
               <a:buNone/>
             </a:pPr>
             <a:r>
@@ -12442,17 +11285,24 @@
             <a:prstDash val="solid"/>
           </a:ln>
         </p:spPr>
+        <p:txBody>
+          <a:bodyPr/>
+          <a:lstStyle/>
+          <a:p>
+            <a:endParaRPr lang="en-US"/>
+          </a:p>
+        </p:txBody>
       </p:sp>
       <p:pic>
         <p:nvPicPr>
-          <p:cNvPr id="9" name="Image 1" descr="Contoh piramida umat menurut usia dan jenis kelamin">    </p:cNvPr>
+          <p:cNvPr id="9" name="Image 1" descr="Contoh piramida umat menurut usia dan jenis kelamin"/>
           <p:cNvPicPr>
             <a:picLocks noChangeAspect="1"/>
           </p:cNvPicPr>
           <p:nvPr/>
         </p:nvPicPr>
         <p:blipFill>
-          <a:blip r:embed="rId2"/>
+          <a:blip r:embed="rId4"/>
           <a:stretch>
             <a:fillRect/>
           </a:stretch>
@@ -12488,7 +11338,7 @@
           <a:bodyPr wrap="square" lIns="0" tIns="0" rIns="0" bIns="0" rtlCol="0" anchor="ctr"/>
           <a:lstStyle/>
           <a:p>
-            <a:pPr algn="ctr" indent="0" marL="0">
+            <a:pPr marL="0" indent="0" algn="ctr">
               <a:buNone/>
             </a:pPr>
             <a:r>
@@ -12582,7 +11432,7 @@
           <a:bodyPr wrap="square" lIns="0" tIns="0" rIns="0" bIns="0" rtlCol="0" anchor="ctr"/>
           <a:lstStyle/>
           <a:p>
-            <a:pPr algn="r" indent="0" marL="0">
+            <a:pPr marL="0" indent="0" algn="r">
               <a:buNone/>
             </a:pPr>
             <a:r>
@@ -12591,44 +11441,8 @@
                   <a:schemeClr val="tx2"/>
                 </a:solidFill>
               </a:rPr>
-              <a:t>1 Kumpulkan</a:t>
-            </a:r>
-            <a:pPr algn="r" indent="0" marL="0">
-              <a:buNone/>
-            </a:pPr>
-            <a:r>
-              <a:rPr lang="id-ID" altLang="en-US" sz="1100" dirty="0">
-                <a:solidFill>
-                  <a:schemeClr val="tx2"/>
-                </a:solidFill>
-              </a:rPr>
-              <a:t>  ·  </a:t>
-            </a:r>
-            <a:pPr algn="r" indent="0" marL="0">
-              <a:buNone/>
-            </a:pPr>
-            <a:r>
-              <a:rPr lang="id-ID" altLang="en-US" sz="1100" dirty="0">
-                <a:solidFill>
-                  <a:schemeClr val="tx2"/>
-                </a:solidFill>
-              </a:rPr>
-              <a:t>2 Bagikan</a:t>
-            </a:r>
-            <a:pPr algn="r" indent="0" marL="0">
-              <a:buNone/>
-            </a:pPr>
-            <a:r>
-              <a:rPr lang="id-ID" altLang="en-US" sz="1100" dirty="0">
-                <a:solidFill>
-                  <a:schemeClr val="tx2"/>
-                </a:solidFill>
-              </a:rPr>
-              <a:t>  ·  </a:t>
-            </a:r>
-            <a:pPr algn="r" indent="0" marL="0">
-              <a:buNone/>
-            </a:pPr>
+              <a:t>1 Kumpulkan  ·  2 Bagikan  ·  </a:t>
+            </a:r>
             <a:r>
               <a:rPr lang="id-ID" altLang="en-US" sz="1100" b="1" dirty="0">
                 <a:solidFill>
@@ -12661,7 +11475,7 @@
           </a:prstGeom>
           <a:extLst>
             <a:ext uri="{C572A759-6A51-4108-AA02-DFA0A04FC94B}">
-              <ma14:wrappingTextBoxFlag xmlns:ma14="http://schemas.microsoft.com/office/mac/drawingml/2011/main" val="0"/>
+              <ma14:wrappingTextBoxFlag xmlns:ma14="http://schemas.microsoft.com/office/mac/drawingml/2011/main" xmlns="" val="0"/>
             </a:ext>
           </a:extLst>
         </p:spPr>
@@ -12679,7 +11493,7 @@
           <a:p>
             <a:pPr algn="r"/>
             <a:fld id="{F7021451-1387-4CA6-816F-3879F97B5CBC}" type="slidenum">
-              <a:rPr b="0" lang="en-US"/>
+              <a:rPr lang="en-US" b="0"/>
               <a:t>9</a:t>
             </a:fld>
             <a:endParaRPr lang="en-US"/>
@@ -12987,4 +11801,325 @@
     </a:ext>
   </a:extLst>
 </a:theme>
+</file>
+
+<file path=ppt/theme/theme2.xml><?xml version="1.0" encoding="utf-8"?>
+<a:theme xmlns:a="http://schemas.openxmlformats.org/drawingml/2006/main" name="Office Theme">
+  <a:themeElements>
+    <a:clrScheme name="Office">
+      <a:dk1>
+        <a:sysClr val="windowText" lastClr="000000"/>
+      </a:dk1>
+      <a:lt1>
+        <a:sysClr val="window" lastClr="FFFFFF"/>
+      </a:lt1>
+      <a:dk2>
+        <a:srgbClr val="0E2841"/>
+      </a:dk2>
+      <a:lt2>
+        <a:srgbClr val="E8E8E8"/>
+      </a:lt2>
+      <a:accent1>
+        <a:srgbClr val="156082"/>
+      </a:accent1>
+      <a:accent2>
+        <a:srgbClr val="E97132"/>
+      </a:accent2>
+      <a:accent3>
+        <a:srgbClr val="196B24"/>
+      </a:accent3>
+      <a:accent4>
+        <a:srgbClr val="0F9ED5"/>
+      </a:accent4>
+      <a:accent5>
+        <a:srgbClr val="A02B93"/>
+      </a:accent5>
+      <a:accent6>
+        <a:srgbClr val="4EA72E"/>
+      </a:accent6>
+      <a:hlink>
+        <a:srgbClr val="467886"/>
+      </a:hlink>
+      <a:folHlink>
+        <a:srgbClr val="96607D"/>
+      </a:folHlink>
+    </a:clrScheme>
+    <a:fontScheme name="Office">
+      <a:majorFont>
+        <a:latin typeface="Aptos Display" panose="02110004020202020204"/>
+        <a:ea typeface=""/>
+        <a:cs typeface=""/>
+        <a:font script="Jpan" typeface="游ゴシック Light"/>
+        <a:font script="Hang" typeface="맑은 고딕"/>
+        <a:font script="Hans" typeface="等线 Light"/>
+        <a:font script="Hant" typeface="新細明體"/>
+        <a:font script="Arab" typeface="Times New Roman"/>
+        <a:font script="Hebr" typeface="Times New Roman"/>
+        <a:font script="Thai" typeface="Angsana New"/>
+        <a:font script="Ethi" typeface="Nyala"/>
+        <a:font script="Beng" typeface="Vrinda"/>
+        <a:font script="Gujr" typeface="Shruti"/>
+        <a:font script="Khmr" typeface="MoolBoran"/>
+        <a:font script="Knda" typeface="Tunga"/>
+        <a:font script="Guru" typeface="Raavi"/>
+        <a:font script="Cans" typeface="Euphemia"/>
+        <a:font script="Cher" typeface="Plantagenet Cherokee"/>
+        <a:font script="Yiii" typeface="Microsoft Yi Baiti"/>
+        <a:font script="Tibt" typeface="Microsoft Himalaya"/>
+        <a:font script="Thaa" typeface="MV Boli"/>
+        <a:font script="Deva" typeface="Mangal"/>
+        <a:font script="Telu" typeface="Gautami"/>
+        <a:font script="Taml" typeface="Latha"/>
+        <a:font script="Syrc" typeface="Estrangelo Edessa"/>
+        <a:font script="Orya" typeface="Kalinga"/>
+        <a:font script="Mlym" typeface="Kartika"/>
+        <a:font script="Laoo" typeface="DokChampa"/>
+        <a:font script="Sinh" typeface="Iskoola Pota"/>
+        <a:font script="Mong" typeface="Mongolian Baiti"/>
+        <a:font script="Viet" typeface="Times New Roman"/>
+        <a:font script="Uigh" typeface="Microsoft Uighur"/>
+        <a:font script="Geor" typeface="Sylfaen"/>
+        <a:font script="Armn" typeface="Arial"/>
+        <a:font script="Bugi" typeface="Leelawadee UI"/>
+        <a:font script="Bopo" typeface="Microsoft JhengHei"/>
+        <a:font script="Java" typeface="Javanese Text"/>
+        <a:font script="Lisu" typeface="Segoe UI"/>
+        <a:font script="Mymr" typeface="Myanmar Text"/>
+        <a:font script="Nkoo" typeface="Ebrima"/>
+        <a:font script="Olck" typeface="Nirmala UI"/>
+        <a:font script="Osma" typeface="Ebrima"/>
+        <a:font script="Phag" typeface="Phagspa"/>
+        <a:font script="Syrn" typeface="Estrangelo Edessa"/>
+        <a:font script="Syrj" typeface="Estrangelo Edessa"/>
+        <a:font script="Syre" typeface="Estrangelo Edessa"/>
+        <a:font script="Sora" typeface="Nirmala UI"/>
+        <a:font script="Tale" typeface="Microsoft Tai Le"/>
+        <a:font script="Talu" typeface="Microsoft New Tai Lue"/>
+        <a:font script="Tfng" typeface="Ebrima"/>
+      </a:majorFont>
+      <a:minorFont>
+        <a:latin typeface="Aptos" panose="02110004020202020204"/>
+        <a:ea typeface=""/>
+        <a:cs typeface=""/>
+        <a:font script="Jpan" typeface="游ゴシック"/>
+        <a:font script="Hang" typeface="맑은 고딕"/>
+        <a:font script="Hans" typeface="等线"/>
+        <a:font script="Hant" typeface="新細明體"/>
+        <a:font script="Arab" typeface="Arial"/>
+        <a:font script="Hebr" typeface="Arial"/>
+        <a:font script="Thai" typeface="Cordia New"/>
+        <a:font script="Ethi" typeface="Nyala"/>
+        <a:font script="Beng" typeface="Vrinda"/>
+        <a:font script="Gujr" typeface="Shruti"/>
+        <a:font script="Khmr" typeface="DaunPenh"/>
+        <a:font script="Knda" typeface="Tunga"/>
+        <a:font script="Guru" typeface="Raavi"/>
+        <a:font script="Cans" typeface="Euphemia"/>
+        <a:font script="Cher" typeface="Plantagenet Cherokee"/>
+        <a:font script="Yiii" typeface="Microsoft Yi Baiti"/>
+        <a:font script="Tibt" typeface="Microsoft Himalaya"/>
+        <a:font script="Thaa" typeface="MV Boli"/>
+        <a:font script="Deva" typeface="Mangal"/>
+        <a:font script="Telu" typeface="Gautami"/>
+        <a:font script="Taml" typeface="Latha"/>
+        <a:font script="Syrc" typeface="Estrangelo Edessa"/>
+        <a:font script="Orya" typeface="Kalinga"/>
+        <a:font script="Mlym" typeface="Kartika"/>
+        <a:font script="Laoo" typeface="DokChampa"/>
+        <a:font script="Sinh" typeface="Iskoola Pota"/>
+        <a:font script="Mong" typeface="Mongolian Baiti"/>
+        <a:font script="Viet" typeface="Arial"/>
+        <a:font script="Uigh" typeface="Microsoft Uighur"/>
+        <a:font script="Geor" typeface="Sylfaen"/>
+        <a:font script="Armn" typeface="Arial"/>
+        <a:font script="Bugi" typeface="Leelawadee UI"/>
+        <a:font script="Bopo" typeface="Microsoft JhengHei"/>
+        <a:font script="Java" typeface="Javanese Text"/>
+        <a:font script="Lisu" typeface="Segoe UI"/>
+        <a:font script="Mymr" typeface="Myanmar Text"/>
+        <a:font script="Nkoo" typeface="Ebrima"/>
+        <a:font script="Olck" typeface="Nirmala UI"/>
+        <a:font script="Osma" typeface="Ebrima"/>
+        <a:font script="Phag" typeface="Phagspa"/>
+        <a:font script="Syrn" typeface="Estrangelo Edessa"/>
+        <a:font script="Syrj" typeface="Estrangelo Edessa"/>
+        <a:font script="Syre" typeface="Estrangelo Edessa"/>
+        <a:font script="Sora" typeface="Nirmala UI"/>
+        <a:font script="Tale" typeface="Microsoft Tai Le"/>
+        <a:font script="Talu" typeface="Microsoft New Tai Lue"/>
+        <a:font script="Tfng" typeface="Ebrima"/>
+      </a:minorFont>
+    </a:fontScheme>
+    <a:fmtScheme name="Office">
+      <a:fillStyleLst>
+        <a:solidFill>
+          <a:schemeClr val="phClr"/>
+        </a:solidFill>
+        <a:gradFill rotWithShape="1">
+          <a:gsLst>
+            <a:gs pos="0">
+              <a:schemeClr val="phClr">
+                <a:lumMod val="110000"/>
+                <a:satMod val="105000"/>
+                <a:tint val="67000"/>
+              </a:schemeClr>
+            </a:gs>
+            <a:gs pos="50000">
+              <a:schemeClr val="phClr">
+                <a:lumMod val="105000"/>
+                <a:satMod val="103000"/>
+                <a:tint val="73000"/>
+              </a:schemeClr>
+            </a:gs>
+            <a:gs pos="100000">
+              <a:schemeClr val="phClr">
+                <a:lumMod val="105000"/>
+                <a:satMod val="109000"/>
+                <a:tint val="81000"/>
+              </a:schemeClr>
+            </a:gs>
+          </a:gsLst>
+          <a:lin ang="5400000" scaled="0"/>
+        </a:gradFill>
+        <a:gradFill rotWithShape="1">
+          <a:gsLst>
+            <a:gs pos="0">
+              <a:schemeClr val="phClr">
+                <a:satMod val="103000"/>
+                <a:lumMod val="102000"/>
+                <a:tint val="94000"/>
+              </a:schemeClr>
+            </a:gs>
+            <a:gs pos="50000">
+              <a:schemeClr val="phClr">
+                <a:satMod val="110000"/>
+                <a:lumMod val="100000"/>
+                <a:shade val="100000"/>
+              </a:schemeClr>
+            </a:gs>
+            <a:gs pos="100000">
+              <a:schemeClr val="phClr">
+                <a:lumMod val="99000"/>
+                <a:satMod val="120000"/>
+                <a:shade val="78000"/>
+              </a:schemeClr>
+            </a:gs>
+          </a:gsLst>
+          <a:lin ang="5400000" scaled="0"/>
+        </a:gradFill>
+      </a:fillStyleLst>
+      <a:lnStyleLst>
+        <a:ln w="12700" cap="flat" cmpd="sng" algn="ctr">
+          <a:solidFill>
+            <a:schemeClr val="phClr"/>
+          </a:solidFill>
+          <a:prstDash val="solid"/>
+          <a:miter lim="800000"/>
+        </a:ln>
+        <a:ln w="19050" cap="flat" cmpd="sng" algn="ctr">
+          <a:solidFill>
+            <a:schemeClr val="phClr"/>
+          </a:solidFill>
+          <a:prstDash val="solid"/>
+          <a:miter lim="800000"/>
+        </a:ln>
+        <a:ln w="25400" cap="flat" cmpd="sng" algn="ctr">
+          <a:solidFill>
+            <a:schemeClr val="phClr"/>
+          </a:solidFill>
+          <a:prstDash val="solid"/>
+          <a:miter lim="800000"/>
+        </a:ln>
+      </a:lnStyleLst>
+      <a:effectStyleLst>
+        <a:effectStyle>
+          <a:effectLst/>
+        </a:effectStyle>
+        <a:effectStyle>
+          <a:effectLst/>
+        </a:effectStyle>
+        <a:effectStyle>
+          <a:effectLst>
+            <a:outerShdw blurRad="57150" dist="19050" dir="5400000" algn="ctr" rotWithShape="0">
+              <a:srgbClr val="000000">
+                <a:alpha val="63000"/>
+              </a:srgbClr>
+            </a:outerShdw>
+          </a:effectLst>
+        </a:effectStyle>
+      </a:effectStyleLst>
+      <a:bgFillStyleLst>
+        <a:solidFill>
+          <a:schemeClr val="phClr"/>
+        </a:solidFill>
+        <a:solidFill>
+          <a:schemeClr val="phClr">
+            <a:tint val="95000"/>
+            <a:satMod val="170000"/>
+          </a:schemeClr>
+        </a:solidFill>
+        <a:gradFill rotWithShape="1">
+          <a:gsLst>
+            <a:gs pos="0">
+              <a:schemeClr val="phClr">
+                <a:tint val="93000"/>
+                <a:satMod val="150000"/>
+                <a:shade val="98000"/>
+                <a:lumMod val="102000"/>
+              </a:schemeClr>
+            </a:gs>
+            <a:gs pos="50000">
+              <a:schemeClr val="phClr">
+                <a:tint val="98000"/>
+                <a:satMod val="130000"/>
+                <a:shade val="90000"/>
+                <a:lumMod val="103000"/>
+              </a:schemeClr>
+            </a:gs>
+            <a:gs pos="100000">
+              <a:schemeClr val="phClr">
+                <a:shade val="63000"/>
+                <a:satMod val="120000"/>
+              </a:schemeClr>
+            </a:gs>
+          </a:gsLst>
+          <a:lin ang="5400000" scaled="0"/>
+        </a:gradFill>
+      </a:bgFillStyleLst>
+    </a:fmtScheme>
+  </a:themeElements>
+  <a:objectDefaults>
+    <a:lnDef>
+      <a:spPr/>
+      <a:bodyPr/>
+      <a:lstStyle/>
+      <a:style>
+        <a:lnRef idx="2">
+          <a:schemeClr val="accent1"/>
+        </a:lnRef>
+        <a:fillRef idx="0">
+          <a:schemeClr val="accent1"/>
+        </a:fillRef>
+        <a:effectRef idx="1">
+          <a:schemeClr val="accent1"/>
+        </a:effectRef>
+        <a:fontRef idx="minor">
+          <a:schemeClr val="tx1"/>
+        </a:fontRef>
+      </a:style>
+    </a:lnDef>
+  </a:objectDefaults>
+  <a:extraClrSchemeLst/>
+  <a:extLst>
+    <a:ext uri="{05A4C25C-085E-4340-85A3-A5531E510DB2}">
+      <thm15:themeFamily xmlns:thm15="http://schemas.microsoft.com/office/thememl/2012/main" name="Office Theme" id="{2E142A2C-CD16-42D6-873A-C26D2A0506FA}" vid="{1BDDFF52-6CD6-40A5-AB3C-68EB2F1E4D0A}"/>
+    </a:ext>
+  </a:extLst>
+</a:theme>
+</file>
+
+<file path=docMetadata/LabelInfo.xml><?xml version="1.0" encoding="utf-8"?>
+<clbl:labelList xmlns:clbl="http://schemas.microsoft.com/office/2020/mipLabelMetadata">
+  <clbl:label id="{ea60d57e-af5b-4752-ac57-3e4f28ca11dc}" enabled="1" method="Standard" siteId="{36da45f1-dd2c-4d1f-af13-5abe46b99921}" contentBits="0" removed="0"/>
+</clbl:labelList>
 </file>
--- a/docs/presentation/pusat_informasi_paroki_dewan.pptx
+++ b/docs/presentation/pusat_informasi_paroki_dewan.pptx
@@ -9,6 +9,7 @@
   </p:notesMasterIdLst>
   <p:sldIdLst>
     <p:sldId id="256" r:id="rId2"/>
+    <p:sldId id="270" r:id="rId21"/>
     <p:sldId id="257" r:id="rId3"/>
     <p:sldId id="258" r:id="rId4"/>
     <p:sldId id="259" r:id="rId5"/>
@@ -18,6 +19,7 @@
     <p:sldId id="263" r:id="rId9"/>
     <p:sldId id="264" r:id="rId10"/>
     <p:sldId id="265" r:id="rId11"/>
+    <p:sldId id="271" r:id="rId22"/>
     <p:sldId id="266" r:id="rId12"/>
     <p:sldId id="267" r:id="rId13"/>
     <p:sldId id="269" r:id="rId14"/>
@@ -666,8 +668,7 @@
           <a:lstStyle/>
           <a:p>
             <a:r>
-              <a:rPr lang="en-US" dirty="0"/>
-              <a:t>Selamat pagi, Bapak dan Ibu anggota dewan. Hari ini saya ingin mengajak kita melihat sebuah perjalanan kecil, dari catatan paroki yang tersebar menuju pastoral yang berbasis data. Perjalanan ini punya tiga langkah: mengumpulkan data, membagikan informasi yang tepat kepada umat, lalu memahami data itu supaya pelayanan kita lebih tepat. Semua angka yang akan Bapak dan Ibu lihat hari ini adalah data simulasi (fiktif), bukan data nyata paroki kita.</a:t>
+              <a:t>Selamat pagi, Bapak dan Ibu anggota dewan. Dewan menginginkan sebuah bank informasi bagi paroki. Pertanyaan yang wajar menyusul: apa yang sebenarnya perlu kita bangun, dan apa manfaatnya bagi pelayanan? Hari ini saya ingin mengajak kita membayangkannya lewat sebuah perjalanan kecil, dari catatan paroki yang tersebar menuju pastoral yang berbasis data. Perjalanan ini punya tiga langkah: mengumpulkan data, membagikan informasi yang tepat kepada umat, lalu memahami data itu supaya pelayanan kita lebih tepat. Semua angka yang akan Bapak dan Ibu lihat hari ini adalah data simulasi (fiktif), bukan data nyata paroki kita. Contoh-contoh ini bukan laporan keadaan paroki, melainkan gambaran tentang apa yang mungkin kita capai.</a:t>
             </a:r>
           </a:p>
         </p:txBody>
@@ -927,8 +928,7 @@
           <a:lstStyle/>
           <a:p>
             <a:r>
-              <a:rPr lang="en-US" dirty="0"/>
-              <a:t>Supaya jelas, inilah posisi kita sekarang. Yang sudah ada adalah contoh awal: dasbor berbahasa Indonesia dengan dua belas halaman, versi satu berkas yang bisa dibuka tanpa instalasi, seratus tiga puluh delapan dokumen PDF contoh, dan semuanya sudah dicoba berjalan di akun percobaan Snowflake. Semua ini memakai data simulasi. Yang belum ada adalah hal-hal yang memang perlu diputuskan bersama: data nyata paroki, kesepakatan siapa boleh melihat apa, penanggung jawab data di setiap seksi, kebijakan privasi dan izin pemakaian data, serta pilihan platform dan biayanya. Contoh ini memakai Snowflake karena akun percobaannya memudahkan, tetapi konsepnya tidak terikat pada satu produk.</a:t>
+              <a:t>Contoh yang kita lihat hari ini hanyalah gambaran. Yang menentukan bentuk bank informasi kita adalah hal-hal yang perlu diputuskan bersama. Yang pertama dan terpenting: apa yang ingin kita capai dan pahami dengan data kita? Dari jawaban itu kita bisa menentukan data apa yang perlu dikumpulkan. Berikutnya: kesepakatan siapa boleh melihat apa, penanggung jawab data di setiap seksi, serta kebijakan privasi dan izin pemakaian data. Terakhir, pilihan platform dan biaya akhir. Contoh ini memakai Snowflake karena akun percobaannya memudahkan, tetapi konsepnya tidak terikat pada satu produk dan dapat dipindahkan ke platform lain. Bank informasi yang baik dimulai dari tujuan yang jelas, bukan dari data yang banyak.</a:t>
             </a:r>
           </a:p>
         </p:txBody>
@@ -1014,8 +1014,7 @@
           <a:lstStyle/>
           <a:p>
             <a:r>
-              <a:rPr lang="en-US" dirty="0"/>
-              <a:t>Sebagai penutup: perjalanan ini dimulai dari hal yang sederhana, yaitu mengumpulkan data dengan rapi, membagikan yang tepat kepada umat, lalu memahaminya supaya pelayanan kita lebih tepat. Pastoral berbasis data bukan tentang menilai umat, melainkan tentang mendengar lebih baik dan melayani lebih tepat. Terima kasih atas perhatian Bapak dan Ibu. Kami sangat menantikan pertanyaan dan masukan dari dewan.</a:t>
+              <a:t>Sebagai penutup: bank informasi bukan sekadar tempat menyimpan data. Nilainya ada pada pelayanan yang bisa kita tingkatkan bila kita tahu apa yang ingin kita capai. Perjalanan ini dimulai dari hal yang sederhana, yaitu mengumpulkan data dengan rapi, membagikan yang tepat kepada umat, lalu memahaminya supaya pelayanan kita lebih tepat. Pastoral berbasis data bukan tentang menilai umat, melainkan tentang mendengar lebih baik dan melayani lebih tepat. Terima kasih atas perhatian Bapak dan Ibu. Kami sangat menantikan pertanyaan dan masukan dari dewan.</a:t>
             </a:r>
           </a:p>
         </p:txBody>
@@ -1049,6 +1048,168 @@
         <p14:creationId xmlns:p14="http://schemas.microsoft.com/office/powerpoint/2010/main" val="1024086991"/>
       </p:ext>
     </p:extLst>
+  </p:cSld>
+  <p:clrMapOvr>
+    <a:masterClrMapping/>
+  </p:clrMapOvr>
+</p:notes>
+</file>
+
+<file path=ppt/notesSlides/notesSlide14.xml><?xml version="1.0" encoding="utf-8"?>
+<p:notes xmlns:a="http://schemas.openxmlformats.org/drawingml/2006/main" xmlns:p="http://schemas.openxmlformats.org/presentationml/2006/main" xmlns:r="http://schemas.openxmlformats.org/officeDocument/2006/relationships">
+  <p:cSld>
+    <p:spTree>
+      <p:nvGrpSpPr>
+        <p:cNvPr id="1" name=""/>
+        <p:cNvGrpSpPr/>
+        <p:nvPr/>
+      </p:nvGrpSpPr>
+      <p:grpSpPr>
+        <a:xfrm>
+          <a:off x="0" y="0"/>
+          <a:ext cx="0" cy="0"/>
+          <a:chOff x="0" y="0"/>
+          <a:chExt cx="0" cy="0"/>
+        </a:xfrm>
+      </p:grpSpPr>
+      <p:sp>
+        <p:nvSpPr>
+          <p:cNvPr id="2" name="Slide Image Placeholder 1"/>
+          <p:cNvSpPr>
+            <a:spLocks noGrp="1" noRot="1" noChangeAspect="1"/>
+          </p:cNvSpPr>
+          <p:nvPr>
+            <p:ph type="sldImg"/>
+          </p:nvPr>
+        </p:nvSpPr>
+        <p:spPr/>
+      </p:sp>
+      <p:sp>
+        <p:nvSpPr>
+          <p:cNvPr id="3" name="Notes Placeholder 2"/>
+          <p:cNvSpPr>
+            <a:spLocks noGrp="1"/>
+          </p:cNvSpPr>
+          <p:nvPr>
+            <p:ph type="body" idx="1"/>
+          </p:nvPr>
+        </p:nvSpPr>
+        <p:spPr/>
+        <p:txBody>
+          <a:bodyPr/>
+          <a:lstStyle/>
+          <a:p>
+            <a:r>
+              <a:t>Dewan menginginkan sebuah bank informasi. Pertanyaan berikutnya: apa yang sebenarnya perlu kita bangun? Ada dua kemungkinan. Yang pertama hanyalah tempat menyimpan: semua data terkumpul di satu tempat, tetapi belum jelas siapa yang akan memakainya dan untuk apa. Biasanya data menumpuk, jarang dibuka, dan pelayanan berjalan seperti sebelumnya. Yang kedua adalah bank informasi yang bekerja: dimulai dari pertanyaan pelayanan, data ditata untuk menjawabnya, dan jawabannya sampai kepada yang membutuhkan, yaitu umat, seksi, dan dewan. Presentasi ini memperlihatkan kemungkinan yang kedua. Untuk membantu kita membayangkannya, kami menyusun contoh dengan data fiktif; tidak ada satu pun angka yang berasal dari paroki kita. Tujuannya bukan melaporkan keadaan paroki, melainkan memperlihatkan apa yang bisa kita capai bila kita tahu apa yang ingin kita capai.</a:t>
+            </a:r>
+          </a:p>
+        </p:txBody>
+      </p:sp>
+      <p:sp>
+        <p:nvSpPr>
+          <p:cNvPr id="4" name="Slide Number Placeholder 3"/>
+          <p:cNvSpPr>
+            <a:spLocks noGrp="1"/>
+          </p:cNvSpPr>
+          <p:nvPr>
+            <p:ph type="sldNum" sz="quarter" idx="10"/>
+          </p:nvPr>
+        </p:nvSpPr>
+        <p:spPr/>
+        <p:txBody>
+          <a:bodyPr/>
+          <a:lstStyle/>
+          <a:p>
+            <a:fld id="{F7021451-1387-4CA6-816F-3879F97B5CBC}" type="slidenum">
+              <a:rPr lang="en-US"/>
+              <a:t>1</a:t>
+            </a:fld>
+            <a:endParaRPr lang="en-US"/>
+          </a:p>
+        </p:txBody>
+      </p:sp>
+    </p:spTree>
+  </p:cSld>
+  <p:clrMapOvr>
+    <a:masterClrMapping/>
+  </p:clrMapOvr>
+</p:notes>
+</file>
+
+<file path=ppt/notesSlides/notesSlide15.xml><?xml version="1.0" encoding="utf-8"?>
+<p:notes xmlns:a="http://schemas.openxmlformats.org/drawingml/2006/main" xmlns:p="http://schemas.openxmlformats.org/presentationml/2006/main" xmlns:r="http://schemas.openxmlformats.org/officeDocument/2006/relationships">
+  <p:cSld>
+    <p:spTree>
+      <p:nvGrpSpPr>
+        <p:cNvPr id="1" name=""/>
+        <p:cNvGrpSpPr/>
+        <p:nvPr/>
+      </p:nvGrpSpPr>
+      <p:grpSpPr>
+        <a:xfrm>
+          <a:off x="0" y="0"/>
+          <a:ext cx="0" cy="0"/>
+          <a:chOff x="0" y="0"/>
+          <a:chExt cx="0" cy="0"/>
+        </a:xfrm>
+      </p:grpSpPr>
+      <p:sp>
+        <p:nvSpPr>
+          <p:cNvPr id="2" name="Slide Image Placeholder 1"/>
+          <p:cNvSpPr>
+            <a:spLocks noGrp="1" noRot="1" noChangeAspect="1"/>
+          </p:cNvSpPr>
+          <p:nvPr>
+            <p:ph type="sldImg"/>
+          </p:nvPr>
+        </p:nvSpPr>
+        <p:spPr/>
+      </p:sp>
+      <p:sp>
+        <p:nvSpPr>
+          <p:cNvPr id="3" name="Notes Placeholder 2"/>
+          <p:cNvSpPr>
+            <a:spLocks noGrp="1"/>
+          </p:cNvSpPr>
+          <p:nvPr>
+            <p:ph type="body" idx="1"/>
+          </p:nvPr>
+        </p:nvSpPr>
+        <p:spPr/>
+        <p:txBody>
+          <a:bodyPr/>
+          <a:lstStyle/>
+          <a:p>
+            <a:r>
+              <a:t>Inilah gambaran apa yang mungkin kita capai bila kita tahu apa yang ingin kita capai. Setiap kotak adalah satu tujuan pelayanan, ditulis sebagai pertanyaan pastoral. Empat di antaranya sudah kami perlihatkan dengan data simulasi: mendengar umat lewat susunan usia dan survei; mengelola dengan bijak lewat kolekte, sumbangan, dan anggaran; bersiap menghadapi peristiwa seperti hujan deras atau kabut asap; dan belajar dari kegiatan dengan menghubungkan rencana, anggaran, kegiatan, dan laporannya. Dua lainnya masih berupa kemungkinan yang belum dibangun: menata jadwal dan jumlah petugas Misa sesuai kehadiran, dan melihat jangkauan pelayanan di tiap lingkungan dengan peta. Satu hal menyatukan semuanya: setiap kemungkinan ini dimulai dari tujuan, bukan dari data. Karena itu pertanyaan terpenting bagi dewan adalah: apa yang ingin kita capai? Seluruh angka dan contoh di sini adalah simulasi.</a:t>
+            </a:r>
+          </a:p>
+        </p:txBody>
+      </p:sp>
+      <p:sp>
+        <p:nvSpPr>
+          <p:cNvPr id="4" name="Slide Number Placeholder 3"/>
+          <p:cNvSpPr>
+            <a:spLocks noGrp="1"/>
+          </p:cNvSpPr>
+          <p:nvPr>
+            <p:ph type="sldNum" sz="quarter" idx="10"/>
+          </p:nvPr>
+        </p:nvSpPr>
+        <p:spPr/>
+        <p:txBody>
+          <a:bodyPr/>
+          <a:lstStyle/>
+          <a:p>
+            <a:fld id="{F7021451-1387-4CA6-816F-3879F97B5CBC}" type="slidenum">
+              <a:rPr lang="en-US"/>
+              <a:t>1</a:t>
+            </a:fld>
+            <a:endParaRPr lang="en-US"/>
+          </a:p>
+        </p:txBody>
+      </p:sp>
+    </p:spTree>
   </p:cSld>
   <p:clrMapOvr>
     <a:masterClrMapping/>
@@ -1101,8 +1262,7 @@
           <a:lstStyle/>
           <a:p>
             <a:r>
-              <a:rPr lang="en-US" dirty="0"/>
-              <a:t>Ini empat pertanyaan yang mungkin akrab bagi kita semua: berapa umat yang hadir di setiap Misa, apakah kolekte cukup menutup biaya kegiatan, kegiatan apa yang akan datang, dan siapa saja umat kita menurut usia. Jawabannya biasanya ada di paroki, tetapi tersebar di buku catatan, lembar kerja, dan ingatan para pengurus. Akibatnya, menjawab satu pertanyaan sederhana bisa memakan waktu, dan jawaban dari dua orang bisa berbeda. Itulah alasan kita ingin memulai perjalanan ini.</a:t>
+              <a:t>Tujuan yang baik biasanya dimulai dari pertanyaan yang memang sudah sering kita ajukan. Ini empat di antaranya: berapa umat yang hadir di setiap Misa dan apakah jumlahnya berubah; bagaimana kemampuan paroki mengelola keuangannya sekarang dan ke depan; kegiatan apa yang akan datang dan siapa yang perlu tahu; dan siapa umat kita. Jawabannya biasanya ada di paroki, tetapi tersebar di buku catatan, lembar kerja, dan ingatan para pengurus. Akibatnya, menjawab satu pertanyaan sederhana bisa memakan waktu, dan jawaban dari dua orang bisa berbeda. Pertanyaan-pertanyaan seperti inilah yang menentukan apa yang perlu kita bangun.</a:t>
             </a:r>
           </a:p>
         </p:txBody>
@@ -1188,8 +1348,7 @@
           <a:lstStyle/>
           <a:p>
             <a:r>
-              <a:rPr lang="en-US" dirty="0"/>
-              <a:t>Perjalanan ini kita bagi menjadi tiga langkah. Langkah pertama, Kumpulkan: data dari semua bidang paroki disimpan rapi di satu tempat, dalam tabel sederhana yang saling terhubung. Langkah kedua, Bagikan: umat mendapat informasi yang berguna bagi mereka, seperti jadwal, kegiatan, dan panduan layanan. Langkah ketiga, Pahami: data menjadi wawasan yang membantu dewan dan seksi mengambil keputusan. Setiap langkah berguna sendiri, jadi kita tidak perlu menunggu semuanya selesai untuk merasakan manfaatnya. Contoh awal yang akan kita lihat sudah memperlihatkan ketiganya, dengan data simulasi.</a:t>
+              <a:t>Perjalanan ini kita bagi menjadi tiga langkah. Langkah pertama, Kumpulkan: data dari semua bidang paroki disimpan rapi di satu tempat, dalam tabel sederhana yang saling terhubung. Langkah kedua, Bagikan: umat mendapat informasi yang berguna bagi mereka, seperti jadwal, kegiatan, dan panduan layanan. Langkah ketiga, Pahami: data menjadi wawasan yang membantu dewan dan seksi mengambil keputusan. Mengumpulkan data hanyalah awal; manfaat bagi pelayanan baru terasa ketika data dibagikan dan dipahami. Setiap langkah juga berguna sendiri, jadi kita tidak perlu menunggu semuanya selesai untuk merasakan manfaatnya. Contoh-contoh berikut, dengan data simulasi, memperlihatkan ketiganya.</a:t>
             </a:r>
           </a:p>
         </p:txBody>
@@ -1275,8 +1434,7 @@
           <a:lstStyle/>
           <a:p>
             <a:r>
-              <a:rPr lang="en-US" dirty="0"/>
-              <a:t>Langkah pertama adalah mengumpulkan data. Idenya sederhana: setiap bidang kegiatan paroki punya tabelnya sendiri, seperti lembar kerja yang rapi dan seragam, dan tabel-tabel itu saling terhubung. Dalam contoh ini ada sembilan bidang: jadwal Misa, kehadiran, kolekte, data umat dan keluarga, sumbangan khusus seperti Prapaskah dan Adven, survei, rencana kerja dan anggaran, kegiatan dan laporannya, serta wilayah dan lingkungan. Isinya empat puluh tiga tabel dengan riwayat lebih dari lima tahun, termasuk seribu tujuh ratus tiga puluh empat Misa. Semuanya data simulasi.</a:t>
+              <a:t>Langkah pertama adalah mengumpulkan data. Idenya sederhana: setiap bidang kegiatan paroki punya tabelnya sendiri, seperti lembar kerja yang rapi dan seragam, dan tabel-tabel itu saling terhubung. Dalam contoh ini ada sembilan bidang: jadwal Misa, kehadiran, kolekte, data umat dan keluarga, sumbangan khusus seperti Prapaskah dan Adven, survei, rencana kerja dan anggaran, kegiatan dan laporannya, serta wilayah dan lingkungan. Isinya empat puluh tiga tabel dengan riwayat lebih dari lima tahun, termasuk seribu tujuh ratus tiga puluh empat Misa. Semuanya data simulasi. Ini baru fondasinya: tempat penyimpanan yang rapi belum otomatis membuat pelayanan lebih baik. Manfaatnya muncul ketika kita tahu apa yang ingin kita capai dengan data ini, dan itulah yang akan kita lihat berikutnya.</a:t>
             </a:r>
           </a:p>
         </p:txBody>
@@ -1536,8 +1694,7 @@
           <a:lstStyle/>
           <a:p>
             <a:r>
-              <a:rPr lang="en-US" dirty="0"/>
-              <a:t>Ini dua contoh dari halaman yang sudah kita buat, dengan data simulasi. Di kiri, jadwal Misa lengkap dengan hari, jam, tempat, dan bahasanya. Di kanan, panduan layanan: Baptis Dewasa dengan daftar persyaratan dan langkah-langkahnya, yang juga bisa diunduh sebagai PDF untuk dicetak. Ada enam panduan contoh: Baptis Dewasa, Baptis Batuta, Krisma, Pernikahan, Pendaftaran Lingkungan, dan Pelayanan Kematian. Perlu saya jelaskan bahwa halaman kegiatan di contoh kita adalah tampilan pengurus dan memuat anggaran. Untuk umat, kita akan menampilkan jadwalnya saja: nama, tanggal, dan tempat. Panduan ini hanya contoh untuk demonstrasi, bukan ketentuan resmi.</a:t>
+              <a:t>Ini dua contoh tampilan yang kami susun dengan data simulasi, supaya kita bisa membayangkan bentuknya. Di kiri, jadwal Misa lengkap dengan hari, jam, tempat, dan bahasanya. Di kanan, panduan layanan: Baptis Dewasa dengan daftar persyaratan dan langkah-langkahnya, yang juga bisa diunduh sebagai PDF untuk dicetak. Ada enam panduan contoh: Baptis Dewasa, Baptis Batuta, Krisma, Pernikahan, Pendaftaran Lingkungan, dan Pelayanan Kematian. Perlu saya jelaskan bahwa halaman kegiatan di contoh ini adalah tampilan pengurus dan memuat anggaran. Untuk umat, yang akan ditampilkan hanya nama, tanggal, dan tempat kegiatan. Panduan ini hanya contoh untuk demonstrasi, bukan ketentuan resmi.</a:t>
             </a:r>
           </a:p>
         </p:txBody>
@@ -2670,7 +2827,7 @@
                   <a:schemeClr val="accent4"/>
                 </a:solidFill>
               </a:rPr>
-              <a:t>DEWAN PAROKI · USULAN AWAL · CONTOH DENGAN DATA SIMULASI</a:t>
+              <a:t>DEWAN PAROKI · GAMBARAN KEMUNGKINAN · CONTOH DENGAN DATA SIMULASI</a:t>
             </a:r>
             <a:endParaRPr lang="id-ID" sz="1300" dirty="0"/>
           </a:p>
@@ -2760,7 +2917,7 @@
                   <a:schemeClr val="accent6"/>
                 </a:solidFill>
               </a:rPr>
-              <a:t>Pusat Informasi Paroki</a:t>
+              <a:t>Bank Informasi Paroki: apa yang bisa kita capai dengannya?</a:t>
             </a:r>
             <a:endParaRPr lang="id-ID" sz="2000" dirty="0"/>
           </a:p>
@@ -5058,36 +5215,12 @@
               <a:buNone/>
             </a:pPr>
             <a:r>
-              <a:rPr lang="en-US" altLang="en-US" sz="1200" b="1" kern="0" spc="200" dirty="0" err="1">
+              <a:rPr lang="id-ID" altLang="en-US" sz="1200" b="1" kern="0" spc="200" dirty="0">
                 <a:solidFill>
                   <a:schemeClr val="accent3"/>
                 </a:solidFill>
               </a:rPr>
-              <a:t>Mengenai</a:t>
-            </a:r>
-            <a:r>
-              <a:rPr lang="en-US" altLang="en-US" sz="1200" b="1" kern="0" spc="200" dirty="0">
-                <a:solidFill>
-                  <a:schemeClr val="accent3"/>
-                </a:solidFill>
-              </a:rPr>
-              <a:t> </a:t>
-            </a:r>
-            <a:r>
-              <a:rPr lang="en-US" altLang="en-US" sz="1200" b="1" kern="0" spc="200" dirty="0" err="1">
-                <a:solidFill>
-                  <a:schemeClr val="accent3"/>
-                </a:solidFill>
-              </a:rPr>
-              <a:t>Presentasi</a:t>
-            </a:r>
-            <a:r>
-              <a:rPr lang="en-US" altLang="en-US" sz="1200" b="1" kern="0" spc="200" dirty="0">
-                <a:solidFill>
-                  <a:schemeClr val="accent3"/>
-                </a:solidFill>
-              </a:rPr>
-              <a:t> Ini</a:t>
+              <a:t>LANGKAH BERIKUTNYA</a:t>
             </a:r>
             <a:endParaRPr lang="id-ID" sz="1200" dirty="0"/>
           </a:p>
@@ -5127,23 +5260,7 @@
                   <a:schemeClr val="tx1"/>
                 </a:solidFill>
               </a:rPr>
-              <a:t>Yang sudah ada </a:t>
-            </a:r>
-            <a:r>
-              <a:rPr lang="en-US" altLang="en-US" sz="3400" b="1" dirty="0">
-                <a:solidFill>
-                  <a:schemeClr val="tx1"/>
-                </a:solidFill>
-              </a:rPr>
-              <a:t>dan yang </a:t>
-            </a:r>
-            <a:r>
-              <a:rPr lang="en-US" altLang="en-US" sz="3400" b="1" dirty="0" err="1">
-                <a:solidFill>
-                  <a:schemeClr val="tx1"/>
-                </a:solidFill>
-              </a:rPr>
-              <a:t>diharapkan</a:t>
+              <a:t>Dari contoh menuju kebutuhan kita</a:t>
             </a:r>
             <a:endParaRPr lang="id-ID" sz="3400" dirty="0"/>
           </a:p>
@@ -5157,8 +5274,8 @@
         </p:nvSpPr>
         <p:spPr>
           <a:xfrm>
-            <a:off x="2824718" y="1828800"/>
-            <a:ext cx="5272888" cy="3749040"/>
+            <a:off x="3458032" y="1828800"/>
+            <a:ext cx="5272888" cy="3611880"/>
           </a:xfrm>
           <a:prstGeom prst="roundRect">
             <a:avLst>
@@ -5191,7 +5308,7 @@
         </p:nvSpPr>
         <p:spPr>
           <a:xfrm>
-            <a:off x="3190478" y="2057400"/>
+            <a:off x="3823792" y="2057400"/>
             <a:ext cx="4541368" cy="777240"/>
           </a:xfrm>
           <a:prstGeom prst="rect">
@@ -5208,7 +5325,7 @@
               <a:buNone/>
             </a:pPr>
             <a:r>
-              <a:rPr lang="en-US" altLang="en-US" sz="2200" b="1" dirty="0">
+              <a:rPr lang="id-ID" altLang="en-US" sz="2200" b="1" dirty="0">
                 <a:solidFill>
                   <a:schemeClr val="accent3"/>
                 </a:solidFill>
@@ -5216,18 +5333,7 @@
                 <a:ea typeface="Cambria" pitchFamily="34" charset="-122"/>
                 <a:cs typeface="Cambria" pitchFamily="34" charset="-120"/>
               </a:rPr>
-              <a:t>Yang </a:t>
-            </a:r>
-            <a:r>
-              <a:rPr lang="id-ID" altLang="en-US" sz="2200" b="1" dirty="0">
-                <a:solidFill>
-                  <a:schemeClr val="accent3"/>
-                </a:solidFill>
-                <a:latin typeface="Cambria" pitchFamily="34" charset="0"/>
-                <a:ea typeface="Cambria" pitchFamily="34" charset="-122"/>
-                <a:cs typeface="Cambria" pitchFamily="34" charset="-120"/>
-              </a:rPr>
-              <a:t>perlu kita putuskan</a:t>
+              <a:t>Yang perlu kita putuskan</a:t>
             </a:r>
             <a:endParaRPr lang="id-ID" sz="2200" dirty="0"/>
           </a:p>
@@ -5241,7 +5347,7 @@
         </p:nvSpPr>
         <p:spPr>
           <a:xfrm>
-            <a:off x="3190478" y="2926080"/>
+            <a:off x="3823792" y="2926080"/>
             <a:ext cx="4541368" cy="2834640"/>
           </a:xfrm>
           <a:prstGeom prst="rect">
@@ -5262,40 +5368,8 @@
               <a:buChar char="•"/>
             </a:pPr>
             <a:r>
-              <a:rPr lang="en-US" sz="1500" dirty="0"/>
-              <a:t>Apa </a:t>
-            </a:r>
-            <a:r>
-              <a:rPr lang="en-US" sz="1500" dirty="0" err="1"/>
-              <a:t>saja</a:t>
-            </a:r>
-            <a:r>
-              <a:rPr lang="en-US" sz="1500" dirty="0"/>
-              <a:t> yang </a:t>
-            </a:r>
-            <a:r>
-              <a:rPr lang="en-US" sz="1500" dirty="0" err="1"/>
-              <a:t>ingin</a:t>
-            </a:r>
-            <a:r>
-              <a:rPr lang="en-US" sz="1500" dirty="0"/>
-              <a:t> </a:t>
-            </a:r>
-            <a:r>
-              <a:rPr lang="en-US" sz="1500" dirty="0" err="1"/>
-              <a:t>kita</a:t>
-            </a:r>
-            <a:r>
-              <a:rPr lang="en-US" sz="1500" dirty="0"/>
-              <a:t> </a:t>
-            </a:r>
-            <a:r>
-              <a:rPr lang="en-US" sz="1500" dirty="0" err="1"/>
-              <a:t>pahami</a:t>
-            </a:r>
-            <a:r>
-              <a:rPr lang="en-US" sz="1500" dirty="0"/>
-              <a:t>?</a:t>
+              <a:rPr lang="id-ID" sz="1500" dirty="0"/>
+              <a:t>Apa yang ingin kita capai dan pahami dengan data kita?</a:t>
             </a:r>
             <a:endParaRPr lang="id-ID" sz="1500" dirty="0"/>
           </a:p>
@@ -5415,6 +5489,42 @@
               <a:t>12</a:t>
             </a:fld>
             <a:endParaRPr lang="en-US"/>
+          </a:p>
+        </p:txBody>
+      </p:sp>
+      <p:sp>
+        <p:nvSpPr>
+          <p:cNvPr id="26" name="Pesan penutup"/>
+          <p:cNvSpPr txBox="1"/>
+          <p:nvPr/>
+        </p:nvSpPr>
+        <p:spPr>
+          <a:xfrm>
+            <a:off x="640080" y="5623560"/>
+            <a:ext cx="10911535" cy="457200"/>
+          </a:xfrm>
+          <a:prstGeom prst="rect">
+            <a:avLst/>
+          </a:prstGeom>
+          <a:noFill/>
+          <a:ln/>
+        </p:spPr>
+        <p:txBody>
+          <a:bodyPr wrap="square" lIns="0" tIns="0" rIns="0" bIns="0" rtlCol="0" anchor="ctr"/>
+          <a:lstStyle/>
+          <a:p>
+            <a:pPr marL="0" indent="0" algn="ctr">
+              <a:buNone/>
+            </a:pPr>
+            <a:r>
+              <a:rPr lang="id-ID" altLang="en-US" sz="1800" dirty="0" b="1">
+                <a:solidFill>
+                  <a:schemeClr val="tx2"/>
+                </a:solidFill>
+              </a:rPr>
+              <a:t>Bank informasi yang baik dimulai dari tujuan yang jelas, bukan dari data yang banyak.</a:t>
+            </a:r>
+            <a:endParaRPr lang="id-ID" sz="1800" dirty="0"/>
           </a:p>
         </p:txBody>
       </p:sp>
@@ -5559,6 +5669,1722 @@
 </p:sld>
 </file>
 
+<file path=ppt/slides/slide14.xml><?xml version="1.0" encoding="utf-8"?>
+<p:sld xmlns:a="http://schemas.openxmlformats.org/drawingml/2006/main" xmlns:p="http://schemas.openxmlformats.org/presentationml/2006/main" xmlns:r="http://schemas.openxmlformats.org/officeDocument/2006/relationships">
+  <p:cSld>
+    <p:spTree>
+      <p:nvGrpSpPr>
+        <p:cNvPr id="1" name=""/>
+        <p:cNvGrpSpPr/>
+        <p:nvPr/>
+      </p:nvGrpSpPr>
+      <p:grpSpPr/>
+      <p:sp>
+        <p:nvSpPr>
+          <p:cNvPr id="3" name="Text 0"/>
+          <p:cNvSpPr>
+            <a:spLocks noGrp="1"/>
+          </p:cNvSpPr>
+          <p:nvPr>
+            <p:ph type="body" idx="100" hasCustomPrompt="1"/>
+          </p:nvPr>
+        </p:nvSpPr>
+        <p:spPr>
+          <a:xfrm>
+            <a:off x="640080" y="502920"/>
+            <a:ext cx="10911535" cy="320040"/>
+          </a:xfrm>
+          <a:prstGeom prst="rect">
+            <a:avLst/>
+          </a:prstGeom>
+          <a:noFill/>
+          <a:ln/>
+        </p:spPr>
+        <p:txBody>
+          <a:bodyPr wrap="square" lIns="0" tIns="0" rIns="0" bIns="0" rtlCol="0" anchor="t"/>
+          <a:lstStyle/>
+          <a:p>
+            <a:pPr marL="0" indent="0" algn="l">
+              <a:buNone/>
+            </a:pPr>
+            <a:r>
+              <a:rPr lang="id-ID" altLang="en-US" sz="1200" b="1" kern="0" spc="200" dirty="0">
+                <a:solidFill>
+                  <a:schemeClr val="accent3"/>
+                </a:solidFill>
+              </a:rPr>
+              <a:t>TITIK AWAL</a:t>
+            </a:r>
+            <a:endParaRPr lang="id-ID" sz="1200" dirty="0"/>
+          </a:p>
+        </p:txBody>
+      </p:sp>
+      <p:sp>
+        <p:nvSpPr>
+          <p:cNvPr id="4" name="Text 0"/>
+          <p:cNvSpPr>
+            <a:spLocks noGrp="1"/>
+          </p:cNvSpPr>
+          <p:nvPr>
+            <p:ph type="title" idx="101" hasCustomPrompt="1"/>
+          </p:nvPr>
+        </p:nvSpPr>
+        <p:spPr>
+          <a:xfrm>
+            <a:off x="640080" y="841248"/>
+            <a:ext cx="10911535" cy="822960"/>
+          </a:xfrm>
+          <a:prstGeom prst="rect">
+            <a:avLst/>
+          </a:prstGeom>
+          <a:noFill/>
+          <a:ln/>
+        </p:spPr>
+        <p:txBody>
+          <a:bodyPr wrap="square" lIns="0" tIns="0" rIns="0" bIns="0" rtlCol="0" anchor="t"/>
+          <a:lstStyle/>
+          <a:p>
+            <a:pPr marL="0" indent="0" algn="l">
+              <a:buNone/>
+            </a:pPr>
+            <a:r>
+              <a:rPr lang="id-ID" altLang="en-US" sz="3400" b="1" dirty="0">
+                <a:solidFill>
+                  <a:schemeClr val="tx1"/>
+                </a:solidFill>
+              </a:rPr>
+              <a:t>Bank informasi: apa yang kita bangun?</a:t>
+            </a:r>
+            <a:endParaRPr lang="id-ID" sz="3400" dirty="0"/>
+          </a:p>
+        </p:txBody>
+      </p:sp>
+      <p:sp>
+        <p:nvSpPr>
+          <p:cNvPr id="5" name="Shape 2"/>
+          <p:cNvSpPr/>
+          <p:nvPr/>
+        </p:nvSpPr>
+        <p:spPr>
+          <a:xfrm>
+            <a:off x="640080" y="1874520"/>
+            <a:ext cx="5272888" cy="3246120"/>
+          </a:xfrm>
+          <a:prstGeom prst="roundRect">
+            <a:avLst>
+              <a:gd name="adj" fmla="val 4225"/>
+            </a:avLst>
+          </a:prstGeom>
+          <a:solidFill>
+            <a:schemeClr val="bg1"/>
+          </a:solidFill>
+          <a:ln w="25400">
+            <a:solidFill>
+              <a:schemeClr val="accent1"/>
+            </a:solidFill>
+            <a:prstDash val="solid"/>
+          </a:ln>
+        </p:spPr>
+        <p:txBody>
+          <a:bodyPr/>
+          <a:lstStyle/>
+          <a:p>
+            <a:endParaRPr lang="en-US"/>
+          </a:p>
+        </p:txBody>
+      </p:sp>
+      <p:sp>
+        <p:nvSpPr>
+          <p:cNvPr id="6" name="Text 3"/>
+          <p:cNvSpPr txBox="1"/>
+          <p:nvPr/>
+        </p:nvSpPr>
+        <p:spPr>
+          <a:xfrm>
+            <a:off x="1005840" y="2103120"/>
+            <a:ext cx="4541368" cy="548640"/>
+          </a:xfrm>
+          <a:prstGeom prst="rect">
+            <a:avLst/>
+          </a:prstGeom>
+          <a:noFill/>
+          <a:ln/>
+        </p:spPr>
+        <p:txBody>
+          <a:bodyPr wrap="square" lIns="0" tIns="0" rIns="0" bIns="0" rtlCol="0" anchor="ctr"/>
+          <a:lstStyle/>
+          <a:p>
+            <a:pPr marL="0" indent="0">
+              <a:buNone/>
+            </a:pPr>
+            <a:r>
+              <a:rPr lang="id-ID" altLang="en-US" sz="2600" b="1" dirty="0">
+                <a:solidFill>
+                  <a:schemeClr val="accent1"/>
+                </a:solidFill>
+                <a:latin typeface="Cambria" pitchFamily="34" charset="0"/>
+                <a:ea typeface="Cambria" pitchFamily="34" charset="-122"/>
+                <a:cs typeface="Cambria" pitchFamily="34" charset="-120"/>
+              </a:rPr>
+              <a:t>Hanya tempat menyimpan</a:t>
+            </a:r>
+            <a:endParaRPr lang="id-ID" sz="2600" dirty="0"/>
+          </a:p>
+        </p:txBody>
+      </p:sp>
+      <p:sp>
+        <p:nvSpPr>
+          <p:cNvPr id="7" name="Text 4"/>
+          <p:cNvSpPr txBox="1"/>
+          <p:nvPr/>
+        </p:nvSpPr>
+        <p:spPr>
+          <a:xfrm>
+            <a:off x="1005840" y="2743200"/>
+            <a:ext cx="4541368" cy="2240280"/>
+          </a:xfrm>
+          <a:prstGeom prst="rect">
+            <a:avLst/>
+          </a:prstGeom>
+          <a:noFill/>
+          <a:ln/>
+        </p:spPr>
+        <p:txBody>
+          <a:bodyPr wrap="square" lIns="0" tIns="0" rIns="0" bIns="0" rtlCol="0" anchor="t"/>
+          <a:lstStyle/>
+          <a:p>
+            <a:pPr marL="342900" indent="-342900">
+              <a:spcAft>
+                <a:spcPts val="800"/>
+              </a:spcAft>
+              <a:buSzPct val="100000"/>
+              <a:buChar char="•"/>
+            </a:pPr>
+            <a:r>
+              <a:rPr lang="id-ID" altLang="en-US" sz="1600" dirty="0">
+                <a:solidFill>
+                  <a:schemeClr val="tx1"/>
+                </a:solidFill>
+              </a:rPr>
+              <a:t>Semua data terkumpul di satu tempat</a:t>
+            </a:r>
+            <a:endParaRPr lang="id-ID" sz="1600" dirty="0"/>
+          </a:p>
+          <a:p>
+            <a:pPr marL="342900" indent="-342900">
+              <a:spcAft>
+                <a:spcPts val="800"/>
+              </a:spcAft>
+              <a:buSzPct val="100000"/>
+              <a:buChar char="•"/>
+            </a:pPr>
+            <a:r>
+              <a:rPr lang="id-ID" altLang="en-US" sz="1600" dirty="0">
+                <a:solidFill>
+                  <a:schemeClr val="tx1"/>
+                </a:solidFill>
+              </a:rPr>
+              <a:t>Belum jelas siapa memakainya, dan untuk apa</a:t>
+            </a:r>
+            <a:endParaRPr lang="id-ID" sz="1600" dirty="0"/>
+          </a:p>
+          <a:p>
+            <a:pPr marL="342900" indent="-342900">
+              <a:spcAft>
+                <a:spcPts val="800"/>
+              </a:spcAft>
+              <a:buSzPct val="100000"/>
+              <a:buChar char="•"/>
+            </a:pPr>
+            <a:r>
+              <a:rPr lang="id-ID" altLang="en-US" sz="1600" dirty="0">
+                <a:solidFill>
+                  <a:schemeClr val="tx1"/>
+                </a:solidFill>
+              </a:rPr>
+              <a:t>Data menumpuk dan jarang dibuka</a:t>
+            </a:r>
+            <a:endParaRPr lang="id-ID" sz="1600" dirty="0"/>
+          </a:p>
+          <a:p>
+            <a:pPr marL="342900" indent="-342900">
+              <a:spcAft>
+                <a:spcPts val="800"/>
+              </a:spcAft>
+              <a:buSzPct val="100000"/>
+              <a:buChar char="•"/>
+            </a:pPr>
+            <a:r>
+              <a:rPr lang="id-ID" altLang="en-US" sz="1600" dirty="0">
+                <a:solidFill>
+                  <a:schemeClr val="tx1"/>
+                </a:solidFill>
+              </a:rPr>
+              <a:t>Pelayanan berjalan seperti sebelumnya</a:t>
+            </a:r>
+            <a:endParaRPr lang="id-ID" sz="1600" dirty="0"/>
+          </a:p>
+        </p:txBody>
+      </p:sp>
+      <p:sp>
+        <p:nvSpPr>
+          <p:cNvPr id="8" name="Shape 5"/>
+          <p:cNvSpPr/>
+          <p:nvPr/>
+        </p:nvSpPr>
+        <p:spPr>
+          <a:xfrm>
+            <a:off x="6278728" y="1874520"/>
+            <a:ext cx="5272888" cy="3246120"/>
+          </a:xfrm>
+          <a:prstGeom prst="roundRect">
+            <a:avLst>
+              <a:gd name="adj" fmla="val 4225"/>
+            </a:avLst>
+          </a:prstGeom>
+          <a:solidFill>
+            <a:schemeClr val="tx1"/>
+          </a:solidFill>
+          <a:ln w="12700">
+            <a:solidFill>
+              <a:schemeClr val="tx1"/>
+            </a:solidFill>
+            <a:prstDash val="solid"/>
+          </a:ln>
+        </p:spPr>
+        <p:txBody>
+          <a:bodyPr/>
+          <a:lstStyle/>
+          <a:p>
+            <a:endParaRPr lang="en-US"/>
+          </a:p>
+        </p:txBody>
+      </p:sp>
+      <p:sp>
+        <p:nvSpPr>
+          <p:cNvPr id="9" name="Text 6"/>
+          <p:cNvSpPr txBox="1"/>
+          <p:nvPr/>
+        </p:nvSpPr>
+        <p:spPr>
+          <a:xfrm>
+            <a:off x="6644488" y="2103120"/>
+            <a:ext cx="4541368" cy="548640"/>
+          </a:xfrm>
+          <a:prstGeom prst="rect">
+            <a:avLst/>
+          </a:prstGeom>
+          <a:noFill/>
+          <a:ln/>
+        </p:spPr>
+        <p:txBody>
+          <a:bodyPr wrap="square" lIns="0" tIns="0" rIns="0" bIns="0" rtlCol="0" anchor="ctr"/>
+          <a:lstStyle/>
+          <a:p>
+            <a:pPr marL="0" indent="0">
+              <a:buNone/>
+            </a:pPr>
+            <a:r>
+              <a:rPr lang="id-ID" altLang="en-US" sz="2600" b="1" dirty="0">
+                <a:solidFill>
+                  <a:schemeClr val="accent4"/>
+                </a:solidFill>
+                <a:latin typeface="Cambria" pitchFamily="34" charset="0"/>
+                <a:ea typeface="Cambria" pitchFamily="34" charset="-122"/>
+                <a:cs typeface="Cambria" pitchFamily="34" charset="-120"/>
+              </a:rPr>
+              <a:t>Bank informasi yang bekerja</a:t>
+            </a:r>
+            <a:endParaRPr lang="id-ID" sz="2600" dirty="0"/>
+          </a:p>
+        </p:txBody>
+      </p:sp>
+      <p:sp>
+        <p:nvSpPr>
+          <p:cNvPr id="10" name="Text 7"/>
+          <p:cNvSpPr txBox="1"/>
+          <p:nvPr/>
+        </p:nvSpPr>
+        <p:spPr>
+          <a:xfrm>
+            <a:off x="6644488" y="2743200"/>
+            <a:ext cx="4541368" cy="2240280"/>
+          </a:xfrm>
+          <a:prstGeom prst="rect">
+            <a:avLst/>
+          </a:prstGeom>
+          <a:noFill/>
+          <a:ln/>
+        </p:spPr>
+        <p:txBody>
+          <a:bodyPr wrap="square" lIns="0" tIns="0" rIns="0" bIns="0" rtlCol="0" anchor="t"/>
+          <a:lstStyle/>
+          <a:p>
+            <a:pPr marL="342900" indent="-342900">
+              <a:spcAft>
+                <a:spcPts val="800"/>
+              </a:spcAft>
+              <a:buSzPct val="100000"/>
+              <a:buChar char="•"/>
+            </a:pPr>
+            <a:r>
+              <a:rPr lang="id-ID" altLang="en-US" sz="1600" dirty="0">
+                <a:solidFill>
+                  <a:schemeClr val="bg2"/>
+                </a:solidFill>
+              </a:rPr>
+              <a:t>Dimulai dari pertanyaan pelayanan</a:t>
+            </a:r>
+            <a:endParaRPr lang="id-ID" sz="1600" dirty="0"/>
+          </a:p>
+          <a:p>
+            <a:pPr marL="342900" indent="-342900">
+              <a:spcAft>
+                <a:spcPts val="800"/>
+              </a:spcAft>
+              <a:buSzPct val="100000"/>
+              <a:buChar char="•"/>
+            </a:pPr>
+            <a:r>
+              <a:rPr lang="id-ID" altLang="en-US" sz="1600" dirty="0">
+                <a:solidFill>
+                  <a:schemeClr val="bg2"/>
+                </a:solidFill>
+              </a:rPr>
+              <a:t>Data ditata untuk menjawabnya</a:t>
+            </a:r>
+            <a:endParaRPr lang="id-ID" sz="1600" dirty="0"/>
+          </a:p>
+          <a:p>
+            <a:pPr marL="342900" indent="-342900">
+              <a:spcAft>
+                <a:spcPts val="800"/>
+              </a:spcAft>
+              <a:buSzPct val="100000"/>
+              <a:buChar char="•"/>
+            </a:pPr>
+            <a:r>
+              <a:rPr lang="id-ID" altLang="en-US" sz="1600" dirty="0">
+                <a:solidFill>
+                  <a:schemeClr val="bg2"/>
+                </a:solidFill>
+              </a:rPr>
+              <a:t>Jawaban sampai kepada yang membutuhkan: umat, seksi, dan dewan</a:t>
+            </a:r>
+            <a:endParaRPr lang="id-ID" sz="1600" dirty="0"/>
+          </a:p>
+          <a:p>
+            <a:pPr marL="342900" indent="-342900">
+              <a:spcAft>
+                <a:spcPts val="800"/>
+              </a:spcAft>
+              <a:buSzPct val="100000"/>
+              <a:buChar char="•"/>
+            </a:pPr>
+            <a:r>
+              <a:rPr lang="id-ID" altLang="en-US" sz="1600" dirty="0">
+                <a:solidFill>
+                  <a:schemeClr val="bg2"/>
+                </a:solidFill>
+              </a:rPr>
+              <a:t>Pelayanan menjadi lebih tepat</a:t>
+            </a:r>
+            <a:endParaRPr lang="id-ID" sz="1600" dirty="0"/>
+          </a:p>
+        </p:txBody>
+      </p:sp>
+      <p:sp>
+        <p:nvSpPr>
+          <p:cNvPr id="25" name="Slide Number Placeholder 0"/>
+          <p:cNvSpPr>
+            <a:spLocks noGrp="1"/>
+          </p:cNvSpPr>
+          <p:nvPr>
+            <p:ph type="sldNum" sz="quarter" idx="4294967295"/>
+          </p:nvPr>
+        </p:nvSpPr>
+        <p:spPr>
+          <a:xfrm>
+            <a:off x="11000232" y="6355080"/>
+            <a:ext cx="548640" cy="274320"/>
+          </a:xfrm>
+          <a:prstGeom prst="rect">
+            <a:avLst/>
+          </a:prstGeom>
+          <a:extLst>
+            <a:ext uri="{C572A759-6A51-4108-AA02-DFA0A04FC94B}">
+              <ma14:wrappingTextBoxFlag xmlns:ma14="http://schemas.microsoft.com/office/mac/drawingml/2011/main" xmlns="" val="0"/>
+            </a:ext>
+          </a:extLst>
+        </p:spPr>
+        <p:txBody>
+          <a:bodyPr/>
+          <a:lstStyle>
+            <a:lvl1pPr>
+              <a:defRPr sz="1100">
+                <a:solidFill>
+                  <a:schemeClr val="tx2"/>
+                </a:solidFill>
+              </a:defRPr>
+            </a:lvl1pPr>
+          </a:lstStyle>
+          <a:p>
+            <a:pPr algn="r"/>
+            <a:fld id="{F7021451-1387-4CA6-816F-3879F97B5CBC}" type="slidenum">
+              <a:rPr lang="en-US" b="0"/>
+              <a:t>6</a:t>
+            </a:fld>
+            <a:endParaRPr lang="en-US"/>
+          </a:p>
+        </p:txBody>
+      </p:sp>
+      <p:sp>
+        <p:nvSpPr>
+          <p:cNvPr id="26" name="Pesan utama"/>
+          <p:cNvSpPr txBox="1"/>
+          <p:nvPr/>
+        </p:nvSpPr>
+        <p:spPr>
+          <a:xfrm>
+            <a:off x="640080" y="5257800"/>
+            <a:ext cx="10911535" cy="502920"/>
+          </a:xfrm>
+          <a:prstGeom prst="rect">
+            <a:avLst/>
+          </a:prstGeom>
+          <a:noFill/>
+          <a:ln/>
+        </p:spPr>
+        <p:txBody>
+          <a:bodyPr wrap="square" lIns="0" tIns="0" rIns="0" bIns="0" rtlCol="0" anchor="ctr"/>
+          <a:lstStyle/>
+          <a:p>
+            <a:pPr marL="0" indent="0">
+              <a:buNone/>
+            </a:pPr>
+            <a:r>
+              <a:rPr lang="id-ID" altLang="en-US" sz="1800" dirty="0" b="1">
+                <a:solidFill>
+                  <a:schemeClr val="tx1"/>
+                </a:solidFill>
+              </a:rPr>
+              <a:t>Pertanyaannya bukan hanya “data apa yang kita simpan?”, tetapi “apa yang ingin kita capai dengannya?”</a:t>
+            </a:r>
+            <a:endParaRPr lang="id-ID" sz="1800" dirty="0"/>
+          </a:p>
+        </p:txBody>
+      </p:sp>
+      <p:sp>
+        <p:nvSpPr>
+          <p:cNvPr id="27" name="Catatan data fiktif"/>
+          <p:cNvSpPr txBox="1"/>
+          <p:nvPr/>
+        </p:nvSpPr>
+        <p:spPr>
+          <a:xfrm>
+            <a:off x="640080" y="5806440"/>
+            <a:ext cx="10911535" cy="411480"/>
+          </a:xfrm>
+          <a:prstGeom prst="rect">
+            <a:avLst/>
+          </a:prstGeom>
+          <a:noFill/>
+          <a:ln/>
+        </p:spPr>
+        <p:txBody>
+          <a:bodyPr wrap="square" lIns="0" tIns="0" rIns="0" bIns="0" rtlCol="0" anchor="ctr"/>
+          <a:lstStyle/>
+          <a:p>
+            <a:pPr marL="0" indent="0">
+              <a:buNone/>
+            </a:pPr>
+            <a:r>
+              <a:rPr lang="id-ID" altLang="en-US" sz="1300" dirty="0">
+                <a:solidFill>
+                  <a:schemeClr val="tx2"/>
+                </a:solidFill>
+              </a:rPr>
+              <a:t>Seluruh contoh dalam presentasi ini memakai data fiktif. Tujuannya memperlihatkan apa yang mungkin, bukan melaporkan keadaan paroki.</a:t>
+            </a:r>
+            <a:endParaRPr lang="id-ID" sz="1800" dirty="0"/>
+          </a:p>
+        </p:txBody>
+      </p:sp>
+    </p:spTree>
+  </p:cSld>
+  <p:clrMapOvr>
+    <a:masterClrMapping/>
+  </p:clrMapOvr>
+</p:sld>
+</file>
+
+<file path=ppt/slides/slide15.xml><?xml version="1.0" encoding="utf-8"?>
+<p:sld xmlns:a="http://schemas.openxmlformats.org/drawingml/2006/main" xmlns:p="http://schemas.openxmlformats.org/presentationml/2006/main" xmlns:r="http://schemas.openxmlformats.org/officeDocument/2006/relationships">
+  <p:cSld>
+    <p:spTree>
+      <p:nvGrpSpPr>
+        <p:cNvPr id="1" name=""/>
+        <p:cNvGrpSpPr/>
+        <p:nvPr/>
+      </p:nvGrpSpPr>
+      <p:grpSpPr/>
+      <p:sp>
+        <p:nvSpPr>
+          <p:cNvPr id="3" name="Text 0"/>
+          <p:cNvSpPr>
+            <a:spLocks noGrp="1"/>
+          </p:cNvSpPr>
+          <p:nvPr>
+            <p:ph type="body" idx="100" hasCustomPrompt="1"/>
+          </p:nvPr>
+        </p:nvSpPr>
+        <p:spPr>
+          <a:xfrm>
+            <a:off x="640080" y="502920"/>
+            <a:ext cx="10911535" cy="320040"/>
+          </a:xfrm>
+          <a:prstGeom prst="rect">
+            <a:avLst/>
+          </a:prstGeom>
+          <a:noFill/>
+          <a:ln/>
+        </p:spPr>
+        <p:txBody>
+          <a:bodyPr wrap="square" lIns="0" tIns="0" rIns="0" bIns="0" rtlCol="0" anchor="t"/>
+          <a:lstStyle/>
+          <a:p>
+            <a:pPr marL="0" indent="0" algn="l">
+              <a:buNone/>
+            </a:pPr>
+            <a:r>
+              <a:rPr lang="id-ID" altLang="en-US" sz="1200" b="1" kern="0" spc="200" dirty="0">
+                <a:solidFill>
+                  <a:schemeClr val="accent3"/>
+                </a:solidFill>
+              </a:rPr>
+              <a:t>LANGKAH 3 · PAHAMI · KEMUNGKINAN</a:t>
+            </a:r>
+            <a:endParaRPr lang="id-ID" sz="1200" dirty="0"/>
+          </a:p>
+        </p:txBody>
+      </p:sp>
+      <p:sp>
+        <p:nvSpPr>
+          <p:cNvPr id="4" name="Text 0"/>
+          <p:cNvSpPr>
+            <a:spLocks noGrp="1"/>
+          </p:cNvSpPr>
+          <p:nvPr>
+            <p:ph type="title" idx="101" hasCustomPrompt="1"/>
+          </p:nvPr>
+        </p:nvSpPr>
+        <p:spPr>
+          <a:xfrm>
+            <a:off x="640080" y="841248"/>
+            <a:ext cx="10911535" cy="822960"/>
+          </a:xfrm>
+          <a:prstGeom prst="rect">
+            <a:avLst/>
+          </a:prstGeom>
+          <a:noFill/>
+          <a:ln/>
+        </p:spPr>
+        <p:txBody>
+          <a:bodyPr wrap="square" lIns="0" tIns="0" rIns="0" bIns="0" rtlCol="0" anchor="t"/>
+          <a:lstStyle/>
+          <a:p>
+            <a:pPr marL="0" indent="0" algn="l">
+              <a:buNone/>
+            </a:pPr>
+            <a:r>
+              <a:rPr lang="id-ID" altLang="en-US" sz="3400" b="1" dirty="0">
+                <a:solidFill>
+                  <a:schemeClr val="tx1"/>
+                </a:solidFill>
+              </a:rPr>
+              <a:t>Apa saja yang bisa kita capai</a:t>
+            </a:r>
+            <a:endParaRPr lang="id-ID" sz="3400" dirty="0"/>
+          </a:p>
+        </p:txBody>
+      </p:sp>
+      <p:sp>
+        <p:nvSpPr>
+          <p:cNvPr id="25" name="Slide Number Placeholder 0"/>
+          <p:cNvSpPr>
+            <a:spLocks noGrp="1"/>
+          </p:cNvSpPr>
+          <p:nvPr>
+            <p:ph type="sldNum" sz="quarter" idx="4294967295"/>
+          </p:nvPr>
+        </p:nvSpPr>
+        <p:spPr>
+          <a:xfrm>
+            <a:off x="11000232" y="6355080"/>
+            <a:ext cx="548640" cy="274320"/>
+          </a:xfrm>
+          <a:prstGeom prst="rect">
+            <a:avLst/>
+          </a:prstGeom>
+          <a:extLst>
+            <a:ext uri="{C572A759-6A51-4108-AA02-DFA0A04FC94B}">
+              <ma14:wrappingTextBoxFlag xmlns:ma14="http://schemas.microsoft.com/office/mac/drawingml/2011/main" xmlns="" val="0"/>
+            </a:ext>
+          </a:extLst>
+        </p:spPr>
+        <p:txBody>
+          <a:bodyPr/>
+          <a:lstStyle>
+            <a:lvl1pPr>
+              <a:defRPr sz="1100">
+                <a:solidFill>
+                  <a:schemeClr val="tx2"/>
+                </a:solidFill>
+              </a:defRPr>
+            </a:lvl1pPr>
+          </a:lstStyle>
+          <a:p>
+            <a:pPr algn="r"/>
+            <a:fld id="{F7021451-1387-4CA6-816F-3879F97B5CBC}" type="slidenum">
+              <a:rPr lang="en-US" b="0"/>
+              <a:t>10</a:t>
+            </a:fld>
+            <a:endParaRPr lang="en-US"/>
+          </a:p>
+        </p:txBody>
+      </p:sp>
+      <p:sp>
+        <p:nvSpPr>
+          <p:cNvPr id="26" name="Kartu 1"/>
+          <p:cNvSpPr/>
+          <p:nvPr/>
+        </p:nvSpPr>
+        <p:spPr>
+          <a:xfrm>
+            <a:off x="640080" y="1783080"/>
+            <a:ext cx="3526536" cy="1627632"/>
+          </a:xfrm>
+          <a:prstGeom prst="roundRect">
+            <a:avLst>
+              <a:gd name="adj" fmla="val 5365"/>
+            </a:avLst>
+          </a:prstGeom>
+          <a:solidFill>
+            <a:schemeClr val="bg1"/>
+          </a:solidFill>
+          <a:ln w="12700">
+            <a:solidFill>
+              <a:schemeClr val="accent6"/>
+            </a:solidFill>
+            <a:prstDash val="solid"/>
+          </a:ln>
+        </p:spPr>
+        <p:txBody>
+          <a:bodyPr/>
+          <a:lstStyle/>
+          <a:p>
+            <a:endParaRPr lang="en-US"/>
+          </a:p>
+        </p:txBody>
+      </p:sp>
+      <p:sp>
+        <p:nvSpPr>
+          <p:cNvPr id="27" name="Status 1"/>
+          <p:cNvSpPr/>
+          <p:nvPr/>
+        </p:nvSpPr>
+        <p:spPr>
+          <a:xfrm>
+            <a:off x="841248" y="1938528"/>
+            <a:ext cx="1188720" cy="246888"/>
+          </a:xfrm>
+          <a:prstGeom prst="roundRect">
+            <a:avLst>
+              <a:gd name="adj" fmla="val 50000"/>
+            </a:avLst>
+          </a:prstGeom>
+          <a:solidFill>
+            <a:srgbClr val="DCEBE6"/>
+          </a:solidFill>
+          <a:ln>
+            <a:solidFill>
+              <a:srgbClr val="DCEBE6"/>
+            </a:solidFill>
+          </a:ln>
+        </p:spPr>
+        <p:txBody>
+          <a:bodyPr wrap="square" lIns="0" tIns="0" rIns="0" bIns="0" rtlCol="0" anchor="ctr"/>
+          <a:lstStyle/>
+          <a:p>
+            <a:pPr marL="0" indent="0" algn="ctr">
+              <a:buNone/>
+            </a:pPr>
+            <a:r>
+              <a:rPr lang="id-ID" altLang="en-US" sz="1100" b="1" dirty="0">
+                <a:solidFill>
+                  <a:schemeClr val="tx1"/>
+                </a:solidFill>
+              </a:rPr>
+              <a:t>Ada di contoh</a:t>
+            </a:r>
+            <a:endParaRPr lang="id-ID" sz="1400" dirty="0"/>
+          </a:p>
+        </p:txBody>
+      </p:sp>
+      <p:sp>
+        <p:nvSpPr>
+          <p:cNvPr id="28" name="Judul 1"/>
+          <p:cNvSpPr txBox="1"/>
+          <p:nvPr/>
+        </p:nvSpPr>
+        <p:spPr>
+          <a:xfrm>
+            <a:off x="841248" y="2286000"/>
+            <a:ext cx="3124200" cy="310896"/>
+          </a:xfrm>
+          <a:prstGeom prst="rect">
+            <a:avLst/>
+          </a:prstGeom>
+          <a:noFill/>
+          <a:ln/>
+        </p:spPr>
+        <p:txBody>
+          <a:bodyPr wrap="square" lIns="0" tIns="0" rIns="0" bIns="0" rtlCol="0" anchor="t"/>
+          <a:lstStyle/>
+          <a:p>
+            <a:pPr marL="0" indent="0">
+              <a:buNone/>
+            </a:pPr>
+            <a:r>
+              <a:rPr lang="id-ID" altLang="en-US" sz="1700" b="1" dirty="0">
+                <a:solidFill>
+                  <a:schemeClr val="tx1"/>
+                </a:solidFill>
+              </a:rPr>
+              <a:t>Mendengar umat</a:t>
+            </a:r>
+            <a:endParaRPr lang="id-ID" sz="1500" dirty="0"/>
+          </a:p>
+        </p:txBody>
+      </p:sp>
+      <p:sp>
+        <p:nvSpPr>
+          <p:cNvPr id="29" name="Isi 1"/>
+          <p:cNvSpPr txBox="1"/>
+          <p:nvPr/>
+        </p:nvSpPr>
+        <p:spPr>
+          <a:xfrm>
+            <a:off x="841248" y="2633472"/>
+            <a:ext cx="3124200" cy="713232"/>
+          </a:xfrm>
+          <a:prstGeom prst="rect">
+            <a:avLst/>
+          </a:prstGeom>
+          <a:noFill/>
+          <a:ln/>
+        </p:spPr>
+        <p:txBody>
+          <a:bodyPr wrap="square" lIns="0" tIns="0" rIns="0" bIns="0" rtlCol="0" anchor="t"/>
+          <a:lstStyle/>
+          <a:p>
+            <a:pPr marL="0" indent="0">
+              <a:buNone/>
+            </a:pPr>
+            <a:r>
+              <a:rPr lang="id-ID" altLang="en-US" sz="1300" dirty="0">
+                <a:solidFill>
+                  <a:schemeClr val="tx2"/>
+                </a:solidFill>
+              </a:rPr>
+              <a:t>Kelompok usia mana yang kurang terjangkau, dan apa kata survei tentang kebutuhan mereka?</a:t>
+            </a:r>
+            <a:endParaRPr lang="id-ID" sz="1300" dirty="0"/>
+          </a:p>
+        </p:txBody>
+      </p:sp>
+      <p:sp>
+        <p:nvSpPr>
+          <p:cNvPr id="30" name="Kartu 2"/>
+          <p:cNvSpPr/>
+          <p:nvPr/>
+        </p:nvSpPr>
+        <p:spPr>
+          <a:xfrm>
+            <a:off x="4331208" y="1783080"/>
+            <a:ext cx="3526536" cy="1627632"/>
+          </a:xfrm>
+          <a:prstGeom prst="roundRect">
+            <a:avLst>
+              <a:gd name="adj" fmla="val 5365"/>
+            </a:avLst>
+          </a:prstGeom>
+          <a:solidFill>
+            <a:schemeClr val="bg1"/>
+          </a:solidFill>
+          <a:ln w="12700">
+            <a:solidFill>
+              <a:schemeClr val="accent6"/>
+            </a:solidFill>
+            <a:prstDash val="solid"/>
+          </a:ln>
+        </p:spPr>
+        <p:txBody>
+          <a:bodyPr/>
+          <a:lstStyle/>
+          <a:p>
+            <a:endParaRPr lang="en-US"/>
+          </a:p>
+        </p:txBody>
+      </p:sp>
+      <p:sp>
+        <p:nvSpPr>
+          <p:cNvPr id="31" name="Status 2"/>
+          <p:cNvSpPr/>
+          <p:nvPr/>
+        </p:nvSpPr>
+        <p:spPr>
+          <a:xfrm>
+            <a:off x="4532376" y="1938528"/>
+            <a:ext cx="1024128" cy="246888"/>
+          </a:xfrm>
+          <a:prstGeom prst="roundRect">
+            <a:avLst>
+              <a:gd name="adj" fmla="val 50000"/>
+            </a:avLst>
+          </a:prstGeom>
+          <a:noFill/>
+          <a:ln w="12700">
+            <a:solidFill>
+              <a:schemeClr val="accent3"/>
+            </a:solidFill>
+          </a:ln>
+        </p:spPr>
+        <p:txBody>
+          <a:bodyPr wrap="square" lIns="0" tIns="0" rIns="0" bIns="0" rtlCol="0" anchor="ctr"/>
+          <a:lstStyle/>
+          <a:p>
+            <a:pPr marL="0" indent="0" algn="ctr">
+              <a:buNone/>
+            </a:pPr>
+            <a:r>
+              <a:rPr lang="id-ID" altLang="en-US" sz="1100" b="1" dirty="0">
+                <a:solidFill>
+                  <a:schemeClr val="tx1"/>
+                </a:solidFill>
+              </a:rPr>
+              <a:t>Kemungkinan</a:t>
+            </a:r>
+            <a:endParaRPr lang="id-ID" sz="1400" dirty="0"/>
+          </a:p>
+        </p:txBody>
+      </p:sp>
+      <p:sp>
+        <p:nvSpPr>
+          <p:cNvPr id="32" name="Judul 2"/>
+          <p:cNvSpPr txBox="1"/>
+          <p:nvPr/>
+        </p:nvSpPr>
+        <p:spPr>
+          <a:xfrm>
+            <a:off x="4532376" y="2286000"/>
+            <a:ext cx="3124200" cy="310896"/>
+          </a:xfrm>
+          <a:prstGeom prst="rect">
+            <a:avLst/>
+          </a:prstGeom>
+          <a:noFill/>
+          <a:ln/>
+        </p:spPr>
+        <p:txBody>
+          <a:bodyPr wrap="square" lIns="0" tIns="0" rIns="0" bIns="0" rtlCol="0" anchor="t"/>
+          <a:lstStyle/>
+          <a:p>
+            <a:pPr marL="0" indent="0">
+              <a:buNone/>
+            </a:pPr>
+            <a:r>
+              <a:rPr lang="id-ID" altLang="en-US" sz="1700" b="1" dirty="0">
+                <a:solidFill>
+                  <a:schemeClr val="tx1"/>
+                </a:solidFill>
+              </a:rPr>
+              <a:t>Menata pelayanan Misa</a:t>
+            </a:r>
+            <a:endParaRPr lang="id-ID" sz="1500" dirty="0"/>
+          </a:p>
+        </p:txBody>
+      </p:sp>
+      <p:sp>
+        <p:nvSpPr>
+          <p:cNvPr id="33" name="Isi 2"/>
+          <p:cNvSpPr txBox="1"/>
+          <p:nvPr/>
+        </p:nvSpPr>
+        <p:spPr>
+          <a:xfrm>
+            <a:off x="4532376" y="2633472"/>
+            <a:ext cx="3124200" cy="713232"/>
+          </a:xfrm>
+          <a:prstGeom prst="rect">
+            <a:avLst/>
+          </a:prstGeom>
+          <a:noFill/>
+          <a:ln/>
+        </p:spPr>
+        <p:txBody>
+          <a:bodyPr wrap="square" lIns="0" tIns="0" rIns="0" bIns="0" rtlCol="0" anchor="t"/>
+          <a:lstStyle/>
+          <a:p>
+            <a:pPr marL="0" indent="0">
+              <a:buNone/>
+            </a:pPr>
+            <a:r>
+              <a:rPr lang="id-ID" altLang="en-US" sz="1300" dirty="0">
+                <a:solidFill>
+                  <a:schemeClr val="tx2"/>
+                </a:solidFill>
+              </a:rPr>
+              <a:t>Jadwal dan jumlah petugas mana yang perlu disesuaikan dengan kehadiran umat?</a:t>
+            </a:r>
+            <a:endParaRPr lang="id-ID" sz="1300" dirty="0"/>
+          </a:p>
+        </p:txBody>
+      </p:sp>
+      <p:sp>
+        <p:nvSpPr>
+          <p:cNvPr id="34" name="Kartu 3"/>
+          <p:cNvSpPr/>
+          <p:nvPr/>
+        </p:nvSpPr>
+        <p:spPr>
+          <a:xfrm>
+            <a:off x="8022336" y="1783080"/>
+            <a:ext cx="3526536" cy="1627632"/>
+          </a:xfrm>
+          <a:prstGeom prst="roundRect">
+            <a:avLst>
+              <a:gd name="adj" fmla="val 5365"/>
+            </a:avLst>
+          </a:prstGeom>
+          <a:solidFill>
+            <a:schemeClr val="bg1"/>
+          </a:solidFill>
+          <a:ln w="12700">
+            <a:solidFill>
+              <a:schemeClr val="accent6"/>
+            </a:solidFill>
+            <a:prstDash val="solid"/>
+          </a:ln>
+        </p:spPr>
+        <p:txBody>
+          <a:bodyPr/>
+          <a:lstStyle/>
+          <a:p>
+            <a:endParaRPr lang="en-US"/>
+          </a:p>
+        </p:txBody>
+      </p:sp>
+      <p:sp>
+        <p:nvSpPr>
+          <p:cNvPr id="35" name="Status 3"/>
+          <p:cNvSpPr/>
+          <p:nvPr/>
+        </p:nvSpPr>
+        <p:spPr>
+          <a:xfrm>
+            <a:off x="8223504" y="1938528"/>
+            <a:ext cx="1188720" cy="246888"/>
+          </a:xfrm>
+          <a:prstGeom prst="roundRect">
+            <a:avLst>
+              <a:gd name="adj" fmla="val 50000"/>
+            </a:avLst>
+          </a:prstGeom>
+          <a:solidFill>
+            <a:srgbClr val="DCEBE6"/>
+          </a:solidFill>
+          <a:ln>
+            <a:solidFill>
+              <a:srgbClr val="DCEBE6"/>
+            </a:solidFill>
+          </a:ln>
+        </p:spPr>
+        <p:txBody>
+          <a:bodyPr wrap="square" lIns="0" tIns="0" rIns="0" bIns="0" rtlCol="0" anchor="ctr"/>
+          <a:lstStyle/>
+          <a:p>
+            <a:pPr marL="0" indent="0" algn="ctr">
+              <a:buNone/>
+            </a:pPr>
+            <a:r>
+              <a:rPr lang="id-ID" altLang="en-US" sz="1100" b="1" dirty="0">
+                <a:solidFill>
+                  <a:schemeClr val="tx1"/>
+                </a:solidFill>
+              </a:rPr>
+              <a:t>Ada di contoh</a:t>
+            </a:r>
+            <a:endParaRPr lang="id-ID" sz="1400" dirty="0"/>
+          </a:p>
+        </p:txBody>
+      </p:sp>
+      <p:sp>
+        <p:nvSpPr>
+          <p:cNvPr id="36" name="Judul 3"/>
+          <p:cNvSpPr txBox="1"/>
+          <p:nvPr/>
+        </p:nvSpPr>
+        <p:spPr>
+          <a:xfrm>
+            <a:off x="8223504" y="2286000"/>
+            <a:ext cx="3124200" cy="310896"/>
+          </a:xfrm>
+          <a:prstGeom prst="rect">
+            <a:avLst/>
+          </a:prstGeom>
+          <a:noFill/>
+          <a:ln/>
+        </p:spPr>
+        <p:txBody>
+          <a:bodyPr wrap="square" lIns="0" tIns="0" rIns="0" bIns="0" rtlCol="0" anchor="t"/>
+          <a:lstStyle/>
+          <a:p>
+            <a:pPr marL="0" indent="0">
+              <a:buNone/>
+            </a:pPr>
+            <a:r>
+              <a:rPr lang="id-ID" altLang="en-US" sz="1700" b="1" dirty="0">
+                <a:solidFill>
+                  <a:schemeClr val="tx1"/>
+                </a:solidFill>
+              </a:rPr>
+              <a:t>Mengelola dengan bijak</a:t>
+            </a:r>
+            <a:endParaRPr lang="id-ID" sz="1500" dirty="0"/>
+          </a:p>
+        </p:txBody>
+      </p:sp>
+      <p:sp>
+        <p:nvSpPr>
+          <p:cNvPr id="37" name="Isi 3"/>
+          <p:cNvSpPr txBox="1"/>
+          <p:nvPr/>
+        </p:nvSpPr>
+        <p:spPr>
+          <a:xfrm>
+            <a:off x="8223504" y="2633472"/>
+            <a:ext cx="3124200" cy="713232"/>
+          </a:xfrm>
+          <a:prstGeom prst="rect">
+            <a:avLst/>
+          </a:prstGeom>
+          <a:noFill/>
+          <a:ln/>
+        </p:spPr>
+        <p:txBody>
+          <a:bodyPr wrap="square" lIns="0" tIns="0" rIns="0" bIns="0" rtlCol="0" anchor="t"/>
+          <a:lstStyle/>
+          <a:p>
+            <a:pPr marL="0" indent="0">
+              <a:buNone/>
+            </a:pPr>
+            <a:r>
+              <a:rPr lang="id-ID" altLang="en-US" sz="1300" dirty="0">
+                <a:solidFill>
+                  <a:schemeClr val="tx2"/>
+                </a:solidFill>
+              </a:rPr>
+              <a:t>Apakah kolekte dan sumbangan cukup menopang program kita dalam beberapa tahun ke depan?</a:t>
+            </a:r>
+            <a:endParaRPr lang="id-ID" sz="1300" dirty="0"/>
+          </a:p>
+        </p:txBody>
+      </p:sp>
+      <p:sp>
+        <p:nvSpPr>
+          <p:cNvPr id="38" name="Kartu 4"/>
+          <p:cNvSpPr/>
+          <p:nvPr/>
+        </p:nvSpPr>
+        <p:spPr>
+          <a:xfrm>
+            <a:off x="640080" y="3575304"/>
+            <a:ext cx="3526536" cy="1627632"/>
+          </a:xfrm>
+          <a:prstGeom prst="roundRect">
+            <a:avLst>
+              <a:gd name="adj" fmla="val 5365"/>
+            </a:avLst>
+          </a:prstGeom>
+          <a:solidFill>
+            <a:schemeClr val="bg1"/>
+          </a:solidFill>
+          <a:ln w="12700">
+            <a:solidFill>
+              <a:schemeClr val="accent6"/>
+            </a:solidFill>
+            <a:prstDash val="solid"/>
+          </a:ln>
+        </p:spPr>
+        <p:txBody>
+          <a:bodyPr/>
+          <a:lstStyle/>
+          <a:p>
+            <a:endParaRPr lang="en-US"/>
+          </a:p>
+        </p:txBody>
+      </p:sp>
+      <p:sp>
+        <p:nvSpPr>
+          <p:cNvPr id="39" name="Status 4"/>
+          <p:cNvSpPr/>
+          <p:nvPr/>
+        </p:nvSpPr>
+        <p:spPr>
+          <a:xfrm>
+            <a:off x="841248" y="3730752"/>
+            <a:ext cx="1188720" cy="246888"/>
+          </a:xfrm>
+          <a:prstGeom prst="roundRect">
+            <a:avLst>
+              <a:gd name="adj" fmla="val 50000"/>
+            </a:avLst>
+          </a:prstGeom>
+          <a:solidFill>
+            <a:srgbClr val="DCEBE6"/>
+          </a:solidFill>
+          <a:ln>
+            <a:solidFill>
+              <a:srgbClr val="DCEBE6"/>
+            </a:solidFill>
+          </a:ln>
+        </p:spPr>
+        <p:txBody>
+          <a:bodyPr wrap="square" lIns="0" tIns="0" rIns="0" bIns="0" rtlCol="0" anchor="ctr"/>
+          <a:lstStyle/>
+          <a:p>
+            <a:pPr marL="0" indent="0" algn="ctr">
+              <a:buNone/>
+            </a:pPr>
+            <a:r>
+              <a:rPr lang="id-ID" altLang="en-US" sz="1100" b="1" dirty="0">
+                <a:solidFill>
+                  <a:schemeClr val="tx1"/>
+                </a:solidFill>
+              </a:rPr>
+              <a:t>Ada di contoh</a:t>
+            </a:r>
+            <a:endParaRPr lang="id-ID" sz="1400" dirty="0"/>
+          </a:p>
+        </p:txBody>
+      </p:sp>
+      <p:sp>
+        <p:nvSpPr>
+          <p:cNvPr id="40" name="Judul 4"/>
+          <p:cNvSpPr txBox="1"/>
+          <p:nvPr/>
+        </p:nvSpPr>
+        <p:spPr>
+          <a:xfrm>
+            <a:off x="841248" y="4078224"/>
+            <a:ext cx="3124200" cy="310896"/>
+          </a:xfrm>
+          <a:prstGeom prst="rect">
+            <a:avLst/>
+          </a:prstGeom>
+          <a:noFill/>
+          <a:ln/>
+        </p:spPr>
+        <p:txBody>
+          <a:bodyPr wrap="square" lIns="0" tIns="0" rIns="0" bIns="0" rtlCol="0" anchor="t"/>
+          <a:lstStyle/>
+          <a:p>
+            <a:pPr marL="0" indent="0">
+              <a:buNone/>
+            </a:pPr>
+            <a:r>
+              <a:rPr lang="id-ID" altLang="en-US" sz="1700" b="1" dirty="0">
+                <a:solidFill>
+                  <a:schemeClr val="tx1"/>
+                </a:solidFill>
+              </a:rPr>
+              <a:t>Bersiap menghadapi peristiwa</a:t>
+            </a:r>
+            <a:endParaRPr lang="id-ID" sz="1500" dirty="0"/>
+          </a:p>
+        </p:txBody>
+      </p:sp>
+      <p:sp>
+        <p:nvSpPr>
+          <p:cNvPr id="41" name="Isi 4"/>
+          <p:cNvSpPr txBox="1"/>
+          <p:nvPr/>
+        </p:nvSpPr>
+        <p:spPr>
+          <a:xfrm>
+            <a:off x="841248" y="4425696"/>
+            <a:ext cx="3124200" cy="713232"/>
+          </a:xfrm>
+          <a:prstGeom prst="rect">
+            <a:avLst/>
+          </a:prstGeom>
+          <a:noFill/>
+          <a:ln/>
+        </p:spPr>
+        <p:txBody>
+          <a:bodyPr wrap="square" lIns="0" tIns="0" rIns="0" bIns="0" rtlCol="0" anchor="t"/>
+          <a:lstStyle/>
+          <a:p>
+            <a:pPr marL="0" indent="0">
+              <a:buNone/>
+            </a:pPr>
+            <a:r>
+              <a:rPr lang="id-ID" altLang="en-US" sz="1300" dirty="0">
+                <a:solidFill>
+                  <a:schemeClr val="tx2"/>
+                </a:solidFill>
+              </a:rPr>
+              <a:t>Berapa besar dampak hujan deras atau kabut asap pada kehadiran dan kolekte, dan apa yang perlu disiapkan?</a:t>
+            </a:r>
+            <a:endParaRPr lang="id-ID" sz="1300" dirty="0"/>
+          </a:p>
+        </p:txBody>
+      </p:sp>
+      <p:sp>
+        <p:nvSpPr>
+          <p:cNvPr id="42" name="Kartu 5"/>
+          <p:cNvSpPr/>
+          <p:nvPr/>
+        </p:nvSpPr>
+        <p:spPr>
+          <a:xfrm>
+            <a:off x="4331208" y="3575304"/>
+            <a:ext cx="3526536" cy="1627632"/>
+          </a:xfrm>
+          <a:prstGeom prst="roundRect">
+            <a:avLst>
+              <a:gd name="adj" fmla="val 5365"/>
+            </a:avLst>
+          </a:prstGeom>
+          <a:solidFill>
+            <a:schemeClr val="bg1"/>
+          </a:solidFill>
+          <a:ln w="12700">
+            <a:solidFill>
+              <a:schemeClr val="accent6"/>
+            </a:solidFill>
+            <a:prstDash val="solid"/>
+          </a:ln>
+        </p:spPr>
+        <p:txBody>
+          <a:bodyPr/>
+          <a:lstStyle/>
+          <a:p>
+            <a:endParaRPr lang="en-US"/>
+          </a:p>
+        </p:txBody>
+      </p:sp>
+      <p:sp>
+        <p:nvSpPr>
+          <p:cNvPr id="43" name="Status 5"/>
+          <p:cNvSpPr/>
+          <p:nvPr/>
+        </p:nvSpPr>
+        <p:spPr>
+          <a:xfrm>
+            <a:off x="4532376" y="3730752"/>
+            <a:ext cx="1188720" cy="246888"/>
+          </a:xfrm>
+          <a:prstGeom prst="roundRect">
+            <a:avLst>
+              <a:gd name="adj" fmla="val 50000"/>
+            </a:avLst>
+          </a:prstGeom>
+          <a:solidFill>
+            <a:srgbClr val="DCEBE6"/>
+          </a:solidFill>
+          <a:ln>
+            <a:solidFill>
+              <a:srgbClr val="DCEBE6"/>
+            </a:solidFill>
+          </a:ln>
+        </p:spPr>
+        <p:txBody>
+          <a:bodyPr wrap="square" lIns="0" tIns="0" rIns="0" bIns="0" rtlCol="0" anchor="ctr"/>
+          <a:lstStyle/>
+          <a:p>
+            <a:pPr marL="0" indent="0" algn="ctr">
+              <a:buNone/>
+            </a:pPr>
+            <a:r>
+              <a:rPr lang="id-ID" altLang="en-US" sz="1100" b="1" dirty="0">
+                <a:solidFill>
+                  <a:schemeClr val="tx1"/>
+                </a:solidFill>
+              </a:rPr>
+              <a:t>Ada di contoh</a:t>
+            </a:r>
+            <a:endParaRPr lang="id-ID" sz="1400" dirty="0"/>
+          </a:p>
+        </p:txBody>
+      </p:sp>
+      <p:sp>
+        <p:nvSpPr>
+          <p:cNvPr id="44" name="Judul 5"/>
+          <p:cNvSpPr txBox="1"/>
+          <p:nvPr/>
+        </p:nvSpPr>
+        <p:spPr>
+          <a:xfrm>
+            <a:off x="4532376" y="4078224"/>
+            <a:ext cx="3124200" cy="310896"/>
+          </a:xfrm>
+          <a:prstGeom prst="rect">
+            <a:avLst/>
+          </a:prstGeom>
+          <a:noFill/>
+          <a:ln/>
+        </p:spPr>
+        <p:txBody>
+          <a:bodyPr wrap="square" lIns="0" tIns="0" rIns="0" bIns="0" rtlCol="0" anchor="t"/>
+          <a:lstStyle/>
+          <a:p>
+            <a:pPr marL="0" indent="0">
+              <a:buNone/>
+            </a:pPr>
+            <a:r>
+              <a:rPr lang="id-ID" altLang="en-US" sz="1700" b="1" dirty="0">
+                <a:solidFill>
+                  <a:schemeClr val="tx1"/>
+                </a:solidFill>
+              </a:rPr>
+              <a:t>Belajar dari kegiatan</a:t>
+            </a:r>
+            <a:endParaRPr lang="id-ID" sz="1500" dirty="0"/>
+          </a:p>
+        </p:txBody>
+      </p:sp>
+      <p:sp>
+        <p:nvSpPr>
+          <p:cNvPr id="45" name="Isi 5"/>
+          <p:cNvSpPr txBox="1"/>
+          <p:nvPr/>
+        </p:nvSpPr>
+        <p:spPr>
+          <a:xfrm>
+            <a:off x="4532376" y="4425696"/>
+            <a:ext cx="3124200" cy="713232"/>
+          </a:xfrm>
+          <a:prstGeom prst="rect">
+            <a:avLst/>
+          </a:prstGeom>
+          <a:noFill/>
+          <a:ln/>
+        </p:spPr>
+        <p:txBody>
+          <a:bodyPr wrap="square" lIns="0" tIns="0" rIns="0" bIns="0" rtlCol="0" anchor="t"/>
+          <a:lstStyle/>
+          <a:p>
+            <a:pPr marL="0" indent="0">
+              <a:buNone/>
+            </a:pPr>
+            <a:r>
+              <a:rPr lang="id-ID" altLang="en-US" sz="1300" dirty="0">
+                <a:solidFill>
+                  <a:schemeClr val="tx2"/>
+                </a:solidFill>
+              </a:rPr>
+              <a:t>Kegiatan mana yang mencapai target peserta dan biaya, dan apa tindak lanjutnya?</a:t>
+            </a:r>
+            <a:endParaRPr lang="id-ID" sz="1300" dirty="0"/>
+          </a:p>
+        </p:txBody>
+      </p:sp>
+      <p:sp>
+        <p:nvSpPr>
+          <p:cNvPr id="46" name="Kartu 6"/>
+          <p:cNvSpPr/>
+          <p:nvPr/>
+        </p:nvSpPr>
+        <p:spPr>
+          <a:xfrm>
+            <a:off x="8022336" y="3575304"/>
+            <a:ext cx="3526536" cy="1627632"/>
+          </a:xfrm>
+          <a:prstGeom prst="roundRect">
+            <a:avLst>
+              <a:gd name="adj" fmla="val 5365"/>
+            </a:avLst>
+          </a:prstGeom>
+          <a:solidFill>
+            <a:schemeClr val="bg1"/>
+          </a:solidFill>
+          <a:ln w="12700">
+            <a:solidFill>
+              <a:schemeClr val="accent6"/>
+            </a:solidFill>
+            <a:prstDash val="solid"/>
+          </a:ln>
+        </p:spPr>
+        <p:txBody>
+          <a:bodyPr/>
+          <a:lstStyle/>
+          <a:p>
+            <a:endParaRPr lang="en-US"/>
+          </a:p>
+        </p:txBody>
+      </p:sp>
+      <p:sp>
+        <p:nvSpPr>
+          <p:cNvPr id="47" name="Status 6"/>
+          <p:cNvSpPr/>
+          <p:nvPr/>
+        </p:nvSpPr>
+        <p:spPr>
+          <a:xfrm>
+            <a:off x="8223504" y="3730752"/>
+            <a:ext cx="1024128" cy="246888"/>
+          </a:xfrm>
+          <a:prstGeom prst="roundRect">
+            <a:avLst>
+              <a:gd name="adj" fmla="val 50000"/>
+            </a:avLst>
+          </a:prstGeom>
+          <a:noFill/>
+          <a:ln w="12700">
+            <a:solidFill>
+              <a:schemeClr val="accent3"/>
+            </a:solidFill>
+          </a:ln>
+        </p:spPr>
+        <p:txBody>
+          <a:bodyPr wrap="square" lIns="0" tIns="0" rIns="0" bIns="0" rtlCol="0" anchor="ctr"/>
+          <a:lstStyle/>
+          <a:p>
+            <a:pPr marL="0" indent="0" algn="ctr">
+              <a:buNone/>
+            </a:pPr>
+            <a:r>
+              <a:rPr lang="id-ID" altLang="en-US" sz="1100" b="1" dirty="0">
+                <a:solidFill>
+                  <a:schemeClr val="tx1"/>
+                </a:solidFill>
+              </a:rPr>
+              <a:t>Kemungkinan</a:t>
+            </a:r>
+            <a:endParaRPr lang="id-ID" sz="1400" dirty="0"/>
+          </a:p>
+        </p:txBody>
+      </p:sp>
+      <p:sp>
+        <p:nvSpPr>
+          <p:cNvPr id="48" name="Judul 6"/>
+          <p:cNvSpPr txBox="1"/>
+          <p:nvPr/>
+        </p:nvSpPr>
+        <p:spPr>
+          <a:xfrm>
+            <a:off x="8223504" y="4078224"/>
+            <a:ext cx="3124200" cy="310896"/>
+          </a:xfrm>
+          <a:prstGeom prst="rect">
+            <a:avLst/>
+          </a:prstGeom>
+          <a:noFill/>
+          <a:ln/>
+        </p:spPr>
+        <p:txBody>
+          <a:bodyPr wrap="square" lIns="0" tIns="0" rIns="0" bIns="0" rtlCol="0" anchor="t"/>
+          <a:lstStyle/>
+          <a:p>
+            <a:pPr marL="0" indent="0">
+              <a:buNone/>
+            </a:pPr>
+            <a:r>
+              <a:rPr lang="id-ID" altLang="en-US" sz="1700" b="1" dirty="0">
+                <a:solidFill>
+                  <a:schemeClr val="tx1"/>
+                </a:solidFill>
+              </a:rPr>
+              <a:t>Menjangkau lebih luas</a:t>
+            </a:r>
+            <a:endParaRPr lang="id-ID" sz="1500" dirty="0"/>
+          </a:p>
+        </p:txBody>
+      </p:sp>
+      <p:sp>
+        <p:nvSpPr>
+          <p:cNvPr id="49" name="Isi 6"/>
+          <p:cNvSpPr txBox="1"/>
+          <p:nvPr/>
+        </p:nvSpPr>
+        <p:spPr>
+          <a:xfrm>
+            <a:off x="8223504" y="4425696"/>
+            <a:ext cx="3124200" cy="713232"/>
+          </a:xfrm>
+          <a:prstGeom prst="rect">
+            <a:avLst/>
+          </a:prstGeom>
+          <a:noFill/>
+          <a:ln/>
+        </p:spPr>
+        <p:txBody>
+          <a:bodyPr wrap="square" lIns="0" tIns="0" rIns="0" bIns="0" rtlCol="0" anchor="t"/>
+          <a:lstStyle/>
+          <a:p>
+            <a:pPr marL="0" indent="0">
+              <a:buNone/>
+            </a:pPr>
+            <a:r>
+              <a:rPr lang="id-ID" altLang="en-US" sz="1300" dirty="0">
+                <a:solidFill>
+                  <a:schemeClr val="tx2"/>
+                </a:solidFill>
+              </a:rPr>
+              <a:t>Lingkungan mana yang masih jauh dari layanan paroki? Peta membantu kita melihatnya.</a:t>
+            </a:r>
+            <a:endParaRPr lang="id-ID" sz="1300" dirty="0"/>
+          </a:p>
+        </p:txBody>
+      </p:sp>
+      <p:sp>
+        <p:nvSpPr>
+          <p:cNvPr id="50" name="Kotak pesan"/>
+          <p:cNvSpPr/>
+          <p:nvPr/>
+        </p:nvSpPr>
+        <p:spPr>
+          <a:xfrm>
+            <a:off x="640080" y="5440680"/>
+            <a:ext cx="10911535" cy="804672"/>
+          </a:xfrm>
+          <a:prstGeom prst="roundRect">
+            <a:avLst>
+              <a:gd name="adj" fmla="val 14118"/>
+            </a:avLst>
+          </a:prstGeom>
+          <a:solidFill>
+            <a:schemeClr val="tx1"/>
+          </a:solidFill>
+          <a:ln w="12700">
+            <a:solidFill>
+              <a:schemeClr val="tx1"/>
+            </a:solidFill>
+            <a:prstDash val="solid"/>
+          </a:ln>
+        </p:spPr>
+        <p:txBody>
+          <a:bodyPr/>
+          <a:lstStyle/>
+          <a:p>
+            <a:endParaRPr lang="en-US"/>
+          </a:p>
+        </p:txBody>
+      </p:sp>
+      <p:sp>
+        <p:nvSpPr>
+          <p:cNvPr id="51" name="Teks pesan"/>
+          <p:cNvSpPr txBox="1"/>
+          <p:nvPr/>
+        </p:nvSpPr>
+        <p:spPr>
+          <a:xfrm>
+            <a:off x="960120" y="5440680"/>
+            <a:ext cx="10271455" cy="804672"/>
+          </a:xfrm>
+          <a:prstGeom prst="rect">
+            <a:avLst/>
+          </a:prstGeom>
+          <a:noFill/>
+          <a:ln/>
+        </p:spPr>
+        <p:txBody>
+          <a:bodyPr wrap="square" lIns="0" tIns="0" rIns="0" bIns="0" rtlCol="0" anchor="ctr"/>
+          <a:lstStyle/>
+          <a:p>
+            <a:pPr marL="0" indent="0">
+              <a:buNone/>
+            </a:pPr>
+            <a:r>
+              <a:rPr lang="id-ID" altLang="en-US" sz="1600" dirty="0">
+                <a:solidFill>
+                  <a:schemeClr val="bg2"/>
+                </a:solidFill>
+              </a:rPr>
+              <a:t>Semua ini mungkin bila kita tahu apa yang ingin kita capai, lalu menata data untuk itu.</a:t>
+            </a:r>
+            <a:endParaRPr lang="id-ID" sz="1600" dirty="0"/>
+          </a:p>
+          <a:p>
+            <a:pPr marL="0" indent="0">
+              <a:buNone/>
+            </a:pPr>
+            <a:r>
+              <a:rPr lang="id-ID" altLang="en-US" sz="1200" dirty="0">
+                <a:solidFill>
+                  <a:schemeClr val="bg2"/>
+                </a:solidFill>
+              </a:rPr>
+              <a:t>Ada di contoh: sudah diperlihatkan dengan data simulasi. Kemungkinan: belum dibangun, perlu dibahas bersama.</a:t>
+            </a:r>
+            <a:endParaRPr lang="id-ID" sz="1600" dirty="0"/>
+          </a:p>
+        </p:txBody>
+      </p:sp>
+      <p:sp>
+        <p:nvSpPr>
+          <p:cNvPr id="52" name="Penanda langkah"/>
+          <p:cNvSpPr txBox="1"/>
+          <p:nvPr/>
+        </p:nvSpPr>
+        <p:spPr>
+          <a:xfrm>
+            <a:off x="5669280" y="6355080"/>
+            <a:ext cx="5212080" cy="274320"/>
+          </a:xfrm>
+          <a:prstGeom prst="rect">
+            <a:avLst/>
+          </a:prstGeom>
+          <a:noFill/>
+          <a:ln/>
+        </p:spPr>
+        <p:txBody>
+          <a:bodyPr wrap="square" lIns="0" tIns="0" rIns="0" bIns="0" rtlCol="0" anchor="ctr"/>
+          <a:lstStyle/>
+          <a:p>
+            <a:pPr marL="0" indent="0" algn="r">
+              <a:buNone/>
+            </a:pPr>
+            <a:r>
+              <a:rPr lang="id-ID" altLang="en-US" sz="1100" dirty="0">
+                <a:solidFill>
+                  <a:schemeClr val="tx2"/>
+                </a:solidFill>
+              </a:rPr>
+              <a:t>1 Kumpulkan  ·  2 Bagikan  ·  </a:t>
+            </a:r>
+            <a:r>
+              <a:rPr lang="id-ID" altLang="en-US" sz="1100" b="1" dirty="0">
+                <a:solidFill>
+                  <a:schemeClr val="accent3"/>
+                </a:solidFill>
+              </a:rPr>
+              <a:t>3 Pahami</a:t>
+            </a:r>
+            <a:endParaRPr lang="id-ID" sz="1100" dirty="0"/>
+          </a:p>
+        </p:txBody>
+      </p:sp>
+    </p:spTree>
+  </p:cSld>
+  <p:clrMapOvr>
+    <a:masterClrMapping/>
+  </p:clrMapOvr>
+</p:sld>
+</file>
+
 <file path=ppt/slides/slide2.xml><?xml version="1.0" encoding="utf-8"?>
 <p:sld xmlns:a="http://schemas.openxmlformats.org/drawingml/2006/main" xmlns:r="http://schemas.openxmlformats.org/officeDocument/2006/relationships" xmlns:p="http://schemas.openxmlformats.org/presentationml/2006/main">
   <p:cSld name="Slide 2">
@@ -5610,7 +7436,7 @@
                   <a:schemeClr val="accent3"/>
                 </a:solidFill>
               </a:rPr>
-              <a:t>MENGAPA KITA PERLU MULAI</a:t>
+              <a:t>MULAI DARI PERTANYAAN</a:t>
             </a:r>
             <a:endParaRPr lang="id-ID" sz="1200" dirty="0"/>
           </a:p>
@@ -6969,55 +8795,7 @@
                   <a:schemeClr val="tx2"/>
                 </a:solidFill>
               </a:rPr>
-              <a:t>Setiap langkah </a:t>
-            </a:r>
-            <a:r>
-              <a:rPr lang="en-US" altLang="en-US" sz="1800" dirty="0" err="1">
-                <a:solidFill>
-                  <a:schemeClr val="tx2"/>
-                </a:solidFill>
-              </a:rPr>
-              <a:t>akan</a:t>
-            </a:r>
-            <a:r>
-              <a:rPr lang="en-US" altLang="en-US" sz="1800" dirty="0">
-                <a:solidFill>
-                  <a:schemeClr val="tx2"/>
-                </a:solidFill>
-              </a:rPr>
-              <a:t> </a:t>
-            </a:r>
-            <a:r>
-              <a:rPr lang="en-US" altLang="en-US" sz="1800" dirty="0" err="1">
-                <a:solidFill>
-                  <a:schemeClr val="tx2"/>
-                </a:solidFill>
-              </a:rPr>
-              <a:t>mendukung</a:t>
-            </a:r>
-            <a:r>
-              <a:rPr lang="en-US" altLang="en-US" sz="1800" dirty="0">
-                <a:solidFill>
-                  <a:schemeClr val="tx2"/>
-                </a:solidFill>
-              </a:rPr>
-              <a:t> Langkah </a:t>
-            </a:r>
-            <a:r>
-              <a:rPr lang="en-US" altLang="en-US" sz="1800" dirty="0" err="1">
-                <a:solidFill>
-                  <a:schemeClr val="tx2"/>
-                </a:solidFill>
-              </a:rPr>
-              <a:t>berikutnya</a:t>
-            </a:r>
-            <a:r>
-              <a:rPr lang="en-US" altLang="en-US" sz="1800" dirty="0">
-                <a:solidFill>
-                  <a:schemeClr val="tx2"/>
-                </a:solidFill>
-              </a:rPr>
-              <a:t>.</a:t>
+              <a:t>Mengumpulkan data hanyalah awal. Manfaat bagi pelayanan muncul ketika data dibagikan dan dipahami.</a:t>
             </a:r>
             <a:endParaRPr lang="id-ID" sz="1800" dirty="0"/>
           </a:p>
@@ -7204,6 +8982,23 @@
                 </a:solidFill>
               </a:rPr>
               <a:t>Setiap bidang disimpan sebagai tabel sederhana yang seragam dan saling terhubung, seperti lembar kerja yang rapi.</a:t>
+            </a:r>
+            <a:endParaRPr lang="id-ID" sz="1800" dirty="0"/>
+          </a:p>
+          <a:p>
+            <a:pPr marL="0" indent="0">
+              <a:spcBef>
+                <a:spcPts val="1400"/>
+              </a:spcBef>
+              <a:buNone/>
+            </a:pPr>
+            <a:r>
+              <a:rPr lang="id-ID" altLang="en-US" sz="1800" dirty="0" b="1">
+                <a:solidFill>
+                  <a:schemeClr val="tx1"/>
+                </a:solidFill>
+              </a:rPr>
+              <a:t>Ini baru fondasinya. Manfaatnya muncul ketika kita tahu apa yang ingin kita capai dengan data ini.</a:t>
             </a:r>
             <a:endParaRPr lang="id-ID" sz="1800" dirty="0"/>
           </a:p>

--- a/docs/presentation/pusat_informasi_paroki_dewan.pptx
+++ b/docs/presentation/pusat_informasi_paroki_dewan.pptx
@@ -5,24 +5,24 @@
     <p:sldMasterId id="2147483648" r:id="rId1"/>
   </p:sldMasterIdLst>
   <p:notesMasterIdLst>
-    <p:notesMasterId r:id="rId15"/>
+    <p:notesMasterId r:id="rId17"/>
   </p:notesMasterIdLst>
   <p:sldIdLst>
     <p:sldId id="256" r:id="rId2"/>
-    <p:sldId id="270" r:id="rId21"/>
-    <p:sldId id="257" r:id="rId3"/>
-    <p:sldId id="258" r:id="rId4"/>
-    <p:sldId id="259" r:id="rId5"/>
-    <p:sldId id="260" r:id="rId6"/>
-    <p:sldId id="261" r:id="rId7"/>
-    <p:sldId id="262" r:id="rId8"/>
-    <p:sldId id="263" r:id="rId9"/>
-    <p:sldId id="264" r:id="rId10"/>
-    <p:sldId id="265" r:id="rId11"/>
-    <p:sldId id="271" r:id="rId22"/>
-    <p:sldId id="266" r:id="rId12"/>
-    <p:sldId id="267" r:id="rId13"/>
-    <p:sldId id="269" r:id="rId14"/>
+    <p:sldId id="270" r:id="rId3"/>
+    <p:sldId id="257" r:id="rId4"/>
+    <p:sldId id="258" r:id="rId5"/>
+    <p:sldId id="259" r:id="rId6"/>
+    <p:sldId id="260" r:id="rId7"/>
+    <p:sldId id="261" r:id="rId8"/>
+    <p:sldId id="262" r:id="rId9"/>
+    <p:sldId id="263" r:id="rId10"/>
+    <p:sldId id="264" r:id="rId11"/>
+    <p:sldId id="265" r:id="rId12"/>
+    <p:sldId id="271" r:id="rId13"/>
+    <p:sldId id="266" r:id="rId14"/>
+    <p:sldId id="267" r:id="rId15"/>
+    <p:sldId id="269" r:id="rId16"/>
   </p:sldIdLst>
   <p:sldSz cx="12192000" cy="6858000"/>
   <p:notesSz cx="6858000" cy="12192000"/>
@@ -124,6 +124,7 @@
         <p14:section name="Pembukaan" id="{E74A8AEF-42CB-2CEC-02E3-EB18E1BCE971}">
           <p14:sldIdLst>
             <p14:sldId id="256"/>
+            <p14:sldId id="270"/>
             <p14:sldId id="257"/>
             <p14:sldId id="258"/>
           </p14:sldIdLst>
@@ -145,6 +146,7 @@
             <p14:sldId id="263"/>
             <p14:sldId id="264"/>
             <p14:sldId id="265"/>
+            <p14:sldId id="271"/>
           </p14:sldIdLst>
         </p14:section>
         <p14:section name="Prinsip dan usulan" id="{697A309A-5C97-A68F-C56D-2D801D562FBA}">
@@ -168,18 +170,18 @@
   <pc:docChgLst>
     <pc:chgData name="Thong, Sintyadi" userId="9dfa709e-56f0-43d5-a48d-209ca243e947" providerId="ADAL" clId="{EBDA2D21-6929-4704-A288-8E38C5AADA9C}"/>
     <pc:docChg chg="undo custSel delSld modSld modSection">
-      <pc:chgData name="Thong, Sintyadi" userId="9dfa709e-56f0-43d5-a48d-209ca243e947" providerId="ADAL" clId="{EBDA2D21-6929-4704-A288-8E38C5AADA9C}" dt="2026-10-23T11:26:59.412" v="469" actId="478"/>
+      <pc:chgData name="Thong, Sintyadi" userId="9dfa709e-56f0-43d5-a48d-209ca243e947" providerId="ADAL" clId="{EBDA2D21-6929-4704-A288-8E38C5AADA9C}" dt="2026-10-23T11:51:41.362" v="683" actId="20577"/>
       <pc:docMkLst>
         <pc:docMk/>
       </pc:docMkLst>
       <pc:sldChg chg="modSp mod">
-        <pc:chgData name="Thong, Sintyadi" userId="9dfa709e-56f0-43d5-a48d-209ca243e947" providerId="ADAL" clId="{EBDA2D21-6929-4704-A288-8E38C5AADA9C}" dt="2026-10-23T11:16:44.938" v="155" actId="20577"/>
+        <pc:chgData name="Thong, Sintyadi" userId="9dfa709e-56f0-43d5-a48d-209ca243e947" providerId="ADAL" clId="{EBDA2D21-6929-4704-A288-8E38C5AADA9C}" dt="2026-10-23T11:47:23.389" v="470" actId="20577"/>
         <pc:sldMkLst>
           <pc:docMk/>
           <pc:sldMk cId="0" sldId="256"/>
         </pc:sldMkLst>
         <pc:spChg chg="mod">
-          <ac:chgData name="Thong, Sintyadi" userId="9dfa709e-56f0-43d5-a48d-209ca243e947" providerId="ADAL" clId="{EBDA2D21-6929-4704-A288-8E38C5AADA9C}" dt="2026-10-23T11:16:44.938" v="155" actId="20577"/>
+          <ac:chgData name="Thong, Sintyadi" userId="9dfa709e-56f0-43d5-a48d-209ca243e947" providerId="ADAL" clId="{EBDA2D21-6929-4704-A288-8E38C5AADA9C}" dt="2026-10-23T11:47:23.389" v="470" actId="20577"/>
           <ac:spMkLst>
             <pc:docMk/>
             <pc:sldMk cId="0" sldId="256"/>
@@ -219,11 +221,35 @@
         </pc:spChg>
       </pc:sldChg>
       <pc:sldChg chg="modSp mod">
-        <pc:chgData name="Thong, Sintyadi" userId="9dfa709e-56f0-43d5-a48d-209ca243e947" providerId="ADAL" clId="{EBDA2D21-6929-4704-A288-8E38C5AADA9C}" dt="2026-10-23T11:17:01.834" v="192" actId="20577"/>
+        <pc:chgData name="Thong, Sintyadi" userId="9dfa709e-56f0-43d5-a48d-209ca243e947" providerId="ADAL" clId="{EBDA2D21-6929-4704-A288-8E38C5AADA9C}" dt="2026-10-23T11:48:55.017" v="526" actId="20577"/>
         <pc:sldMkLst>
           <pc:docMk/>
           <pc:sldMk cId="0" sldId="258"/>
         </pc:sldMkLst>
+        <pc:spChg chg="mod">
+          <ac:chgData name="Thong, Sintyadi" userId="9dfa709e-56f0-43d5-a48d-209ca243e947" providerId="ADAL" clId="{EBDA2D21-6929-4704-A288-8E38C5AADA9C}" dt="2026-10-23T11:48:55.017" v="526" actId="20577"/>
+          <ac:spMkLst>
+            <pc:docMk/>
+            <pc:sldMk cId="0" sldId="258"/>
+            <ac:spMk id="8" creationId="{00000000-0000-0000-0000-000000000000}"/>
+          </ac:spMkLst>
+        </pc:spChg>
+        <pc:spChg chg="mod">
+          <ac:chgData name="Thong, Sintyadi" userId="9dfa709e-56f0-43d5-a48d-209ca243e947" providerId="ADAL" clId="{EBDA2D21-6929-4704-A288-8E38C5AADA9C}" dt="2026-10-23T11:48:42.692" v="520" actId="20577"/>
+          <ac:spMkLst>
+            <pc:docMk/>
+            <pc:sldMk cId="0" sldId="258"/>
+            <ac:spMk id="13" creationId="{00000000-0000-0000-0000-000000000000}"/>
+          </ac:spMkLst>
+        </pc:spChg>
+        <pc:spChg chg="mod">
+          <ac:chgData name="Thong, Sintyadi" userId="9dfa709e-56f0-43d5-a48d-209ca243e947" providerId="ADAL" clId="{EBDA2D21-6929-4704-A288-8E38C5AADA9C}" dt="2026-10-23T11:48:36.808" v="518" actId="20577"/>
+          <ac:spMkLst>
+            <pc:docMk/>
+            <pc:sldMk cId="0" sldId="258"/>
+            <ac:spMk id="18" creationId="{00000000-0000-0000-0000-000000000000}"/>
+          </ac:spMkLst>
+        </pc:spChg>
         <pc:spChg chg="mod">
           <ac:chgData name="Thong, Sintyadi" userId="9dfa709e-56f0-43d5-a48d-209ca243e947" providerId="ADAL" clId="{EBDA2D21-6929-4704-A288-8E38C5AADA9C}" dt="2026-10-23T11:17:01.834" v="192" actId="20577"/>
           <ac:spMkLst>
@@ -233,12 +259,20 @@
           </ac:spMkLst>
         </pc:spChg>
       </pc:sldChg>
-      <pc:sldChg chg="delSp mod">
-        <pc:chgData name="Thong, Sintyadi" userId="9dfa709e-56f0-43d5-a48d-209ca243e947" providerId="ADAL" clId="{EBDA2D21-6929-4704-A288-8E38C5AADA9C}" dt="2026-10-23T11:26:59.412" v="469" actId="478"/>
+      <pc:sldChg chg="delSp modSp mod">
+        <pc:chgData name="Thong, Sintyadi" userId="9dfa709e-56f0-43d5-a48d-209ca243e947" providerId="ADAL" clId="{EBDA2D21-6929-4704-A288-8E38C5AADA9C}" dt="2026-10-23T11:49:38.354" v="652" actId="20577"/>
         <pc:sldMkLst>
           <pc:docMk/>
           <pc:sldMk cId="0" sldId="259"/>
         </pc:sldMkLst>
+        <pc:spChg chg="mod">
+          <ac:chgData name="Thong, Sintyadi" userId="9dfa709e-56f0-43d5-a48d-209ca243e947" providerId="ADAL" clId="{EBDA2D21-6929-4704-A288-8E38C5AADA9C}" dt="2026-10-23T11:49:38.354" v="652" actId="20577"/>
+          <ac:spMkLst>
+            <pc:docMk/>
+            <pc:sldMk cId="0" sldId="259"/>
+            <ac:spMk id="5" creationId="{00000000-0000-0000-0000-000000000000}"/>
+          </ac:spMkLst>
+        </pc:spChg>
         <pc:spChg chg="del">
           <ac:chgData name="Thong, Sintyadi" userId="9dfa709e-56f0-43d5-a48d-209ca243e947" providerId="ADAL" clId="{EBDA2D21-6929-4704-A288-8E38C5AADA9C}" dt="2026-10-23T11:26:59.412" v="469" actId="478"/>
           <ac:spMkLst>
@@ -493,6 +527,44 @@
           </ac:spMkLst>
         </pc:spChg>
       </pc:sldChg>
+      <pc:sldChg chg="modSp mod">
+        <pc:chgData name="Thong, Sintyadi" userId="9dfa709e-56f0-43d5-a48d-209ca243e947" providerId="ADAL" clId="{EBDA2D21-6929-4704-A288-8E38C5AADA9C}" dt="2026-10-23T11:47:29.841" v="471" actId="20577"/>
+        <pc:sldMkLst>
+          <pc:docMk/>
+          <pc:sldMk cId="0" sldId="270"/>
+        </pc:sldMkLst>
+        <pc:spChg chg="mod">
+          <ac:chgData name="Thong, Sintyadi" userId="9dfa709e-56f0-43d5-a48d-209ca243e947" providerId="ADAL" clId="{EBDA2D21-6929-4704-A288-8E38C5AADA9C}" dt="2026-10-23T11:47:29.841" v="471" actId="20577"/>
+          <ac:spMkLst>
+            <pc:docMk/>
+            <pc:sldMk cId="0" sldId="270"/>
+            <ac:spMk id="4" creationId="{00000000-0000-0000-0000-000000000000}"/>
+          </ac:spMkLst>
+        </pc:spChg>
+      </pc:sldChg>
+      <pc:sldChg chg="modSp mod">
+        <pc:chgData name="Thong, Sintyadi" userId="9dfa709e-56f0-43d5-a48d-209ca243e947" providerId="ADAL" clId="{EBDA2D21-6929-4704-A288-8E38C5AADA9C}" dt="2026-10-23T11:51:41.362" v="683" actId="20577"/>
+        <pc:sldMkLst>
+          <pc:docMk/>
+          <pc:sldMk cId="0" sldId="271"/>
+        </pc:sldMkLst>
+        <pc:spChg chg="mod">
+          <ac:chgData name="Thong, Sintyadi" userId="9dfa709e-56f0-43d5-a48d-209ca243e947" providerId="ADAL" clId="{EBDA2D21-6929-4704-A288-8E38C5AADA9C}" dt="2026-10-23T11:51:41.362" v="683" actId="20577"/>
+          <ac:spMkLst>
+            <pc:docMk/>
+            <pc:sldMk cId="0" sldId="271"/>
+            <ac:spMk id="41" creationId="{00000000-0000-0000-0000-000000000000}"/>
+          </ac:spMkLst>
+        </pc:spChg>
+        <pc:spChg chg="mod">
+          <ac:chgData name="Thong, Sintyadi" userId="9dfa709e-56f0-43d5-a48d-209ca243e947" providerId="ADAL" clId="{EBDA2D21-6929-4704-A288-8E38C5AADA9C}" dt="2026-10-23T11:51:18.993" v="671" actId="20577"/>
+          <ac:spMkLst>
+            <pc:docMk/>
+            <pc:sldMk cId="0" sldId="271"/>
+            <ac:spMk id="49" creationId="{00000000-0000-0000-0000-000000000000}"/>
+          </ac:spMkLst>
+        </pc:spChg>
+      </pc:sldChg>
     </pc:docChg>
   </pc:docChgLst>
 </pc:chgInfo>
@@ -755,7 +827,7 @@
           <a:p>
             <a:r>
               <a:rPr lang="en-US" dirty="0"/>
-              <a:t>Di sinilah data bertemu dengan pelayanan. Data tidak memberi jawaban, tetapi membantu kita mengajukan pertanyaan yang lebih tepat. Pengeluaran program naik lebih cepat daripada kolekte: pertanyaan pastoralnya, program mana yang paling berbuah dan perlu dipertahankan. Sumbangan Adven menutup makin sedikit biaya Natal: bagaimana mengajak umat terlibat lebih awal. Sedikit umat berusia dua puluh sampai dua puluh sembilan tahun: apa yang dibutuhkan orang muda dari paroki, dan kita bisa mendengarkannya lewat survei. Ini contoh saja. Dewan dan gembala tetap yang memutuskan; data membantu kita mendengar dengan lebih teliti.</a:t>
+              <a:t>Beginilah tampilan dasbor contoh kita. Di kiri, halaman Ringkasan: angka pokok kolekte dan pengeluaran program, serta grafik yang memperlihatkan arah tren. Di kanan, halaman Demografi umat, dengan piramida usia dan jenis kelamin. Halaman ini hanya memuat angka gabungan: tidak ada nama, dan kelompok yang terlalu kecil disembunyikan agar tidak ada orang yang bisa dikenali. Seluruhnya ada dua belas halaman berbahasa Indonesia, dan tersedia juga sebagai satu berkas yang bisa dibuka tanpa memasang apa pun, misalnya bila akun percobaan berakhir.</a:t>
             </a:r>
           </a:p>
         </p:txBody>
@@ -842,7 +914,7 @@
           <a:p>
             <a:r>
               <a:rPr lang="en-US" dirty="0"/>
-              <a:t>Sebelum melangkah lebih jauh, ada lima prinsip yang kita pegang. Pertama, melayani bukan menilai: kolekte bukan ukuran iman, dan kita tidak mengurutkan wilayah atau lingkungan dari yang terbaik. Kedua, privasi lebih dulu: hanya angka gabungan yang ditampilkan, dan kelompok yang hanya berisi satu sampai empat orang disembunyikan. Ketiga, jelas sumbernya: setiap angka dapat ditelusuri ke catatan asal dan penanggung jawabnya. Keempat, manusia yang memutuskan: perkiraan hanyalah gambaran, dan dewan serta gembala tetap yang memutuskan. Kelima, mulai kecil dan bertahap. Pastoral berbasis data berarti mendengar lebih teliti, bukan menilai umat.</a:t>
+              <a:t>Di sinilah data bertemu dengan pelayanan. Data tidak memberi jawaban, tetapi membantu kita mengajukan pertanyaan yang lebih tepat. Pengeluaran program naik lebih cepat daripada kolekte: pertanyaan pastoralnya, program mana yang paling berbuah dan perlu dipertahankan. Sumbangan Adven menutup makin sedikit biaya Natal: bagaimana mengajak umat terlibat lebih awal. Sedikit umat berusia dua puluh sampai dua puluh sembilan tahun: apa yang dibutuhkan orang muda dari paroki, dan kita bisa mendengarkannya lewat survei. Ini contoh saja. Dewan dan gembala tetap yang memutuskan; data membantu kita mendengar dengan lebih teliti.</a:t>
             </a:r>
           </a:p>
         </p:txBody>
@@ -928,7 +1000,7 @@
           <a:lstStyle/>
           <a:p>
             <a:r>
-              <a:t>Contoh yang kita lihat hari ini hanyalah gambaran. Yang menentukan bentuk bank informasi kita adalah hal-hal yang perlu diputuskan bersama. Yang pertama dan terpenting: apa yang ingin kita capai dan pahami dengan data kita? Dari jawaban itu kita bisa menentukan data apa yang perlu dikumpulkan. Berikutnya: kesepakatan siapa boleh melihat apa, penanggung jawab data di setiap seksi, serta kebijakan privasi dan izin pemakaian data. Terakhir, pilihan platform dan biaya akhir. Contoh ini memakai Snowflake karena akun percobaannya memudahkan, tetapi konsepnya tidak terikat pada satu produk dan dapat dipindahkan ke platform lain. Bank informasi yang baik dimulai dari tujuan yang jelas, bukan dari data yang banyak.</a:t>
+              <a:t>Inilah gambaran apa yang mungkin kita capai bila kita tahu apa yang ingin kita capai. Setiap kotak adalah satu tujuan pelayanan, ditulis sebagai pertanyaan pastoral. Empat di antaranya sudah kami perlihatkan dengan data simulasi: mendengar umat lewat susunan usia dan survei; mengelola dengan bijak lewat kolekte, sumbangan, dan anggaran; bersiap menghadapi peristiwa seperti hujan deras atau kabut asap; dan belajar dari kegiatan dengan menghubungkan rencana, anggaran, kegiatan, dan laporannya. Dua lainnya masih berupa kemungkinan yang belum dibangun: menata jadwal dan jumlah petugas Misa sesuai kehadiran, dan melihat jangkauan pelayanan di tiap lingkungan dengan peta. Satu hal menyatukan semuanya: setiap kemungkinan ini dimulai dari tujuan, bukan dari data. Karena itu pertanyaan terpenting bagi dewan adalah: apa yang ingin kita capai? Seluruh angka dan contoh di sini adalah simulasi.</a:t>
             </a:r>
           </a:p>
         </p:txBody>
@@ -957,11 +1029,6 @@
         </p:txBody>
       </p:sp>
     </p:spTree>
-    <p:extLst>
-      <p:ext uri="{BB962C8B-B14F-4D97-AF65-F5344CB8AC3E}">
-        <p14:creationId xmlns:p14="http://schemas.microsoft.com/office/powerpoint/2010/main" val="1024086991"/>
-      </p:ext>
-    </p:extLst>
   </p:cSld>
   <p:clrMapOvr>
     <a:masterClrMapping/>
@@ -1014,7 +1081,8 @@
           <a:lstStyle/>
           <a:p>
             <a:r>
-              <a:t>Sebagai penutup: bank informasi bukan sekadar tempat menyimpan data. Nilainya ada pada pelayanan yang bisa kita tingkatkan bila kita tahu apa yang ingin kita capai. Perjalanan ini dimulai dari hal yang sederhana, yaitu mengumpulkan data dengan rapi, membagikan yang tepat kepada umat, lalu memahaminya supaya pelayanan kita lebih tepat. Pastoral berbasis data bukan tentang menilai umat, melainkan tentang mendengar lebih baik dan melayani lebih tepat. Terima kasih atas perhatian Bapak dan Ibu. Kami sangat menantikan pertanyaan dan masukan dari dewan.</a:t>
+              <a:rPr lang="en-US" dirty="0"/>
+              <a:t>Sebelum melangkah lebih jauh, ada lima prinsip yang kita pegang. Pertama, melayani bukan menilai: kolekte bukan ukuran iman, dan kita tidak mengurutkan wilayah atau lingkungan dari yang terbaik. Kedua, privasi lebih dulu: hanya angka gabungan yang ditampilkan, dan kelompok yang hanya berisi satu sampai empat orang disembunyikan. Ketiga, jelas sumbernya: setiap angka dapat ditelusuri ke catatan asal dan penanggung jawabnya. Keempat, manusia yang memutuskan: perkiraan hanyalah gambaran, dan dewan serta gembala tetap yang memutuskan. Kelima, mulai kecil dan bertahap. Pastoral berbasis data berarti mendengar lebih teliti, bukan menilai umat.</a:t>
             </a:r>
           </a:p>
         </p:txBody>
@@ -1056,7 +1124,7 @@
 </file>
 
 <file path=ppt/notesSlides/notesSlide14.xml><?xml version="1.0" encoding="utf-8"?>
-<p:notes xmlns:a="http://schemas.openxmlformats.org/drawingml/2006/main" xmlns:p="http://schemas.openxmlformats.org/presentationml/2006/main" xmlns:r="http://schemas.openxmlformats.org/officeDocument/2006/relationships">
+<p:notes xmlns:a="http://schemas.openxmlformats.org/drawingml/2006/main" xmlns:r="http://schemas.openxmlformats.org/officeDocument/2006/relationships" xmlns:p="http://schemas.openxmlformats.org/presentationml/2006/main">
   <p:cSld>
     <p:spTree>
       <p:nvGrpSpPr>
@@ -1100,7 +1168,7 @@
           <a:lstStyle/>
           <a:p>
             <a:r>
-              <a:t>Dewan menginginkan sebuah bank informasi. Pertanyaan berikutnya: apa yang sebenarnya perlu kita bangun? Ada dua kemungkinan. Yang pertama hanyalah tempat menyimpan: semua data terkumpul di satu tempat, tetapi belum jelas siapa yang akan memakainya dan untuk apa. Biasanya data menumpuk, jarang dibuka, dan pelayanan berjalan seperti sebelumnya. Yang kedua adalah bank informasi yang bekerja: dimulai dari pertanyaan pelayanan, data ditata untuk menjawabnya, dan jawabannya sampai kepada yang membutuhkan, yaitu umat, seksi, dan dewan. Presentasi ini memperlihatkan kemungkinan yang kedua. Untuk membantu kita membayangkannya, kami menyusun contoh dengan data fiktif; tidak ada satu pun angka yang berasal dari paroki kita. Tujuannya bukan melaporkan keadaan paroki, melainkan memperlihatkan apa yang bisa kita capai bila kita tahu apa yang ingin kita capai.</a:t>
+              <a:t>Contoh yang kita lihat hari ini hanyalah gambaran. Yang menentukan bentuk bank informasi kita adalah hal-hal yang perlu diputuskan bersama. Yang pertama dan terpenting: apa yang ingin kita capai dan pahami dengan data kita? Dari jawaban itu kita bisa menentukan data apa yang perlu dikumpulkan. Berikutnya: kesepakatan siapa boleh melihat apa, penanggung jawab data di setiap seksi, serta kebijakan privasi dan izin pemakaian data. Terakhir, pilihan platform dan biaya akhir. Contoh ini memakai Snowflake karena akun percobaannya memudahkan, tetapi konsepnya tidak terikat pada satu produk dan dapat dipindahkan ke platform lain. Bank informasi yang baik dimulai dari tujuan yang jelas, bukan dari data yang banyak.</a:t>
             </a:r>
           </a:p>
         </p:txBody>
@@ -1122,13 +1190,18 @@
           <a:p>
             <a:fld id="{F7021451-1387-4CA6-816F-3879F97B5CBC}" type="slidenum">
               <a:rPr lang="en-US"/>
-              <a:t>1</a:t>
+              <a:t>14</a:t>
             </a:fld>
             <a:endParaRPr lang="en-US"/>
           </a:p>
         </p:txBody>
       </p:sp>
     </p:spTree>
+    <p:extLst>
+      <p:ext uri="{BB962C8B-B14F-4D97-AF65-F5344CB8AC3E}">
+        <p14:creationId xmlns:p14="http://schemas.microsoft.com/office/powerpoint/2010/main" val="1024086991"/>
+      </p:ext>
+    </p:extLst>
   </p:cSld>
   <p:clrMapOvr>
     <a:masterClrMapping/>
@@ -1137,7 +1210,7 @@
 </file>
 
 <file path=ppt/notesSlides/notesSlide15.xml><?xml version="1.0" encoding="utf-8"?>
-<p:notes xmlns:a="http://schemas.openxmlformats.org/drawingml/2006/main" xmlns:p="http://schemas.openxmlformats.org/presentationml/2006/main" xmlns:r="http://schemas.openxmlformats.org/officeDocument/2006/relationships">
+<p:notes xmlns:a="http://schemas.openxmlformats.org/drawingml/2006/main" xmlns:r="http://schemas.openxmlformats.org/officeDocument/2006/relationships" xmlns:p="http://schemas.openxmlformats.org/presentationml/2006/main">
   <p:cSld>
     <p:spTree>
       <p:nvGrpSpPr>
@@ -1181,7 +1254,7 @@
           <a:lstStyle/>
           <a:p>
             <a:r>
-              <a:t>Inilah gambaran apa yang mungkin kita capai bila kita tahu apa yang ingin kita capai. Setiap kotak adalah satu tujuan pelayanan, ditulis sebagai pertanyaan pastoral. Empat di antaranya sudah kami perlihatkan dengan data simulasi: mendengar umat lewat susunan usia dan survei; mengelola dengan bijak lewat kolekte, sumbangan, dan anggaran; bersiap menghadapi peristiwa seperti hujan deras atau kabut asap; dan belajar dari kegiatan dengan menghubungkan rencana, anggaran, kegiatan, dan laporannya. Dua lainnya masih berupa kemungkinan yang belum dibangun: menata jadwal dan jumlah petugas Misa sesuai kehadiran, dan melihat jangkauan pelayanan di tiap lingkungan dengan peta. Satu hal menyatukan semuanya: setiap kemungkinan ini dimulai dari tujuan, bukan dari data. Karena itu pertanyaan terpenting bagi dewan adalah: apa yang ingin kita capai? Seluruh angka dan contoh di sini adalah simulasi.</a:t>
+              <a:t>Sebagai penutup: bank informasi bukan sekadar tempat menyimpan data. Nilainya ada pada pelayanan yang bisa kita tingkatkan bila kita tahu apa yang ingin kita capai. Perjalanan ini dimulai dari hal yang sederhana, yaitu mengumpulkan data dengan rapi, membagikan yang tepat kepada umat, lalu memahaminya supaya pelayanan kita lebih tepat. Pastoral berbasis data bukan tentang menilai umat, melainkan tentang mendengar lebih baik dan melayani lebih tepat. Terima kasih atas perhatian Bapak dan Ibu. Kami sangat menantikan pertanyaan dan masukan dari dewan.</a:t>
             </a:r>
           </a:p>
         </p:txBody>
@@ -1203,13 +1276,18 @@
           <a:p>
             <a:fld id="{F7021451-1387-4CA6-816F-3879F97B5CBC}" type="slidenum">
               <a:rPr lang="en-US"/>
-              <a:t>1</a:t>
+              <a:t>15</a:t>
             </a:fld>
             <a:endParaRPr lang="en-US"/>
           </a:p>
         </p:txBody>
       </p:sp>
     </p:spTree>
+    <p:extLst>
+      <p:ext uri="{BB962C8B-B14F-4D97-AF65-F5344CB8AC3E}">
+        <p14:creationId xmlns:p14="http://schemas.microsoft.com/office/powerpoint/2010/main" val="1024086991"/>
+      </p:ext>
+    </p:extLst>
   </p:cSld>
   <p:clrMapOvr>
     <a:masterClrMapping/>
@@ -1262,7 +1340,7 @@
           <a:lstStyle/>
           <a:p>
             <a:r>
-              <a:t>Tujuan yang baik biasanya dimulai dari pertanyaan yang memang sudah sering kita ajukan. Ini empat di antaranya: berapa umat yang hadir di setiap Misa dan apakah jumlahnya berubah; bagaimana kemampuan paroki mengelola keuangannya sekarang dan ke depan; kegiatan apa yang akan datang dan siapa yang perlu tahu; dan siapa umat kita. Jawabannya biasanya ada di paroki, tetapi tersebar di buku catatan, lembar kerja, dan ingatan para pengurus. Akibatnya, menjawab satu pertanyaan sederhana bisa memakan waktu, dan jawaban dari dua orang bisa berbeda. Pertanyaan-pertanyaan seperti inilah yang menentukan apa yang perlu kita bangun.</a:t>
+              <a:t>Dewan menginginkan sebuah bank informasi. Pertanyaan berikutnya: apa yang sebenarnya perlu kita bangun? Ada dua kemungkinan. Yang pertama hanyalah tempat menyimpan: semua data terkumpul di satu tempat, tetapi belum jelas siapa yang akan memakainya dan untuk apa. Biasanya data menumpuk, jarang dibuka, dan pelayanan berjalan seperti sebelumnya. Yang kedua adalah bank informasi yang bekerja: dimulai dari pertanyaan pelayanan, data ditata untuk menjawabnya, dan jawabannya sampai kepada yang membutuhkan, yaitu umat, seksi, dan dewan. Presentasi ini memperlihatkan kemungkinan yang kedua. Untuk membantu kita membayangkannya, kami menyusun contoh dengan data fiktif; tidak ada satu pun angka yang berasal dari paroki kita. Tujuannya bukan melaporkan keadaan paroki, melainkan memperlihatkan apa yang bisa kita capai bila kita tahu apa yang ingin kita capai.</a:t>
             </a:r>
           </a:p>
         </p:txBody>
@@ -1291,11 +1369,6 @@
         </p:txBody>
       </p:sp>
     </p:spTree>
-    <p:extLst>
-      <p:ext uri="{BB962C8B-B14F-4D97-AF65-F5344CB8AC3E}">
-        <p14:creationId xmlns:p14="http://schemas.microsoft.com/office/powerpoint/2010/main" val="1024086991"/>
-      </p:ext>
-    </p:extLst>
   </p:cSld>
   <p:clrMapOvr>
     <a:masterClrMapping/>
@@ -1348,7 +1421,7 @@
           <a:lstStyle/>
           <a:p>
             <a:r>
-              <a:t>Perjalanan ini kita bagi menjadi tiga langkah. Langkah pertama, Kumpulkan: data dari semua bidang paroki disimpan rapi di satu tempat, dalam tabel sederhana yang saling terhubung. Langkah kedua, Bagikan: umat mendapat informasi yang berguna bagi mereka, seperti jadwal, kegiatan, dan panduan layanan. Langkah ketiga, Pahami: data menjadi wawasan yang membantu dewan dan seksi mengambil keputusan. Mengumpulkan data hanyalah awal; manfaat bagi pelayanan baru terasa ketika data dibagikan dan dipahami. Setiap langkah juga berguna sendiri, jadi kita tidak perlu menunggu semuanya selesai untuk merasakan manfaatnya. Contoh-contoh berikut, dengan data simulasi, memperlihatkan ketiganya.</a:t>
+              <a:t>Tujuan yang baik biasanya dimulai dari pertanyaan yang memang sudah sering kita ajukan. Ini empat di antaranya: berapa umat yang hadir di setiap Misa dan apakah jumlahnya berubah; bagaimana kemampuan paroki mengelola keuangannya sekarang dan ke depan; kegiatan apa yang akan datang dan siapa yang perlu tahu; dan siapa umat kita. Jawabannya biasanya ada di paroki, tetapi tersebar di buku catatan, lembar kerja, dan ingatan para pengurus. Akibatnya, menjawab satu pertanyaan sederhana bisa memakan waktu, dan jawaban dari dua orang bisa berbeda. Pertanyaan-pertanyaan seperti inilah yang menentukan apa yang perlu kita bangun.</a:t>
             </a:r>
           </a:p>
         </p:txBody>
@@ -1434,7 +1507,7 @@
           <a:lstStyle/>
           <a:p>
             <a:r>
-              <a:t>Langkah pertama adalah mengumpulkan data. Idenya sederhana: setiap bidang kegiatan paroki punya tabelnya sendiri, seperti lembar kerja yang rapi dan seragam, dan tabel-tabel itu saling terhubung. Dalam contoh ini ada sembilan bidang: jadwal Misa, kehadiran, kolekte, data umat dan keluarga, sumbangan khusus seperti Prapaskah dan Adven, survei, rencana kerja dan anggaran, kegiatan dan laporannya, serta wilayah dan lingkungan. Isinya empat puluh tiga tabel dengan riwayat lebih dari lima tahun, termasuk seribu tujuh ratus tiga puluh empat Misa. Semuanya data simulasi. Ini baru fondasinya: tempat penyimpanan yang rapi belum otomatis membuat pelayanan lebih baik. Manfaatnya muncul ketika kita tahu apa yang ingin kita capai dengan data ini, dan itulah yang akan kita lihat berikutnya.</a:t>
+              <a:t>Perjalanan ini kita bagi menjadi tiga langkah. Langkah pertama, Kumpulkan: data dari semua bidang paroki disimpan rapi di satu tempat, dalam tabel sederhana yang saling terhubung. Langkah kedua, Bagikan: umat mendapat informasi yang berguna bagi mereka, seperti jadwal, kegiatan, dan panduan layanan. Langkah ketiga, Pahami: data menjadi wawasan yang membantu dewan dan seksi mengambil keputusan. Mengumpulkan data hanyalah awal; manfaat bagi pelayanan baru terasa ketika data dibagikan dan dipahami. Setiap langkah juga berguna sendiri, jadi kita tidak perlu menunggu semuanya selesai untuk merasakan manfaatnya. Contoh-contoh berikut, dengan data simulasi, memperlihatkan ketiganya.</a:t>
             </a:r>
           </a:p>
         </p:txBody>
@@ -1520,8 +1593,7 @@
           <a:lstStyle/>
           <a:p>
             <a:r>
-              <a:rPr lang="en-US" dirty="0"/>
-              <a:t>Inilah artinya data yang saling terhubung. Ambil satu kegiatan saja: Pelatihan Lektor dan Pemazmur dari Seksi Liturgi. Ada rencana kerja, ada anggaran sebesar satu juta tujuh ratus lima puluh ribu rupiah, ada kegiatannya sendiri pada empat belas Februari dua ribu dua puluh satu dengan target tiga puluh peserta dan dua puluh sembilan yang hadir, dan ada laporan akhirnya dengan biaya terpakai satu juta tujuh ratus empat puluh ribu rupiah. Karena keempatnya terhubung, kita bisa melihatnya bersama dan menelusurinya kapan saja, tanpa mencari di empat tempat berbeda. Kegiatan ini hanya contoh simulasi.</a:t>
+              <a:t>Langkah pertama adalah mengumpulkan data. Idenya sederhana: setiap bidang kegiatan paroki punya tabelnya sendiri, seperti lembar kerja yang rapi dan seragam, dan tabel-tabel itu saling terhubung. Dalam contoh ini ada sembilan bidang: jadwal Misa, kehadiran, kolekte, data umat dan keluarga, sumbangan khusus seperti Prapaskah dan Adven, survei, rencana kerja dan anggaran, kegiatan dan laporannya, serta wilayah dan lingkungan. Isinya empat puluh tiga tabel dengan riwayat lebih dari lima tahun, termasuk seribu tujuh ratus tiga puluh empat Misa. Semuanya data simulasi. Ini baru fondasinya: tempat penyimpanan yang rapi belum otomatis membuat pelayanan lebih baik. Manfaatnya muncul ketika kita tahu apa yang ingin kita capai dengan data ini, dan itulah yang akan kita lihat berikutnya.</a:t>
             </a:r>
           </a:p>
         </p:txBody>
@@ -1608,7 +1680,7 @@
           <a:p>
             <a:r>
               <a:rPr lang="en-US" dirty="0"/>
-              <a:t>Langkah kedua adalah berbagi. Tidak semua data perlu atau boleh dilihat semua orang. Umat cukup tahu hal-hal yang berguna bagi mereka: jadwal Misa, kegiatan yang akan datang dengan nama, tanggal, dan tempatnya, panduan layanan seperti persyaratan Baptis, Krisma, dan Pernikahan, serta pengumuman. Umat tidak perlu melihat anggaran. Anggaran, kolekte, laporan kegiatan, dan data umat hanya untuk pengurus dan dewan, dan data umat hanya bagi yang berwenang. Karena itu setiap data diberi tingkat kerahasiaan: Publik, Internal, Terbatas, dan Sangat Terbatas.</a:t>
+              <a:t>Inilah artinya data yang saling terhubung. Ambil satu kegiatan saja: Pelatihan Lektor dan Pemazmur dari Seksi Liturgi. Ada rencana kerja, ada anggaran sebesar satu juta tujuh ratus lima puluh ribu rupiah, ada kegiatannya sendiri pada empat belas Februari dua ribu dua puluh satu dengan target tiga puluh peserta dan dua puluh sembilan yang hadir, dan ada laporan akhirnya dengan biaya terpakai satu juta tujuh ratus empat puluh ribu rupiah. Karena keempatnya terhubung, kita bisa melihatnya bersama dan menelusurinya kapan saja, tanpa mencari di empat tempat berbeda. Kegiatan ini hanya contoh simulasi.</a:t>
             </a:r>
           </a:p>
         </p:txBody>
@@ -1694,7 +1766,8 @@
           <a:lstStyle/>
           <a:p>
             <a:r>
-              <a:t>Ini dua contoh tampilan yang kami susun dengan data simulasi, supaya kita bisa membayangkan bentuknya. Di kiri, jadwal Misa lengkap dengan hari, jam, tempat, dan bahasanya. Di kanan, panduan layanan: Baptis Dewasa dengan daftar persyaratan dan langkah-langkahnya, yang juga bisa diunduh sebagai PDF untuk dicetak. Ada enam panduan contoh: Baptis Dewasa, Baptis Batuta, Krisma, Pernikahan, Pendaftaran Lingkungan, dan Pelayanan Kematian. Perlu saya jelaskan bahwa halaman kegiatan di contoh ini adalah tampilan pengurus dan memuat anggaran. Untuk umat, yang akan ditampilkan hanya nama, tanggal, dan tempat kegiatan. Panduan ini hanya contoh untuk demonstrasi, bukan ketentuan resmi.</a:t>
+              <a:rPr lang="en-US" dirty="0"/>
+              <a:t>Langkah kedua adalah berbagi. Tidak semua data perlu atau boleh dilihat semua orang. Umat cukup tahu hal-hal yang berguna bagi mereka: jadwal Misa, kegiatan yang akan datang dengan nama, tanggal, dan tempatnya, panduan layanan seperti persyaratan Baptis, Krisma, dan Pernikahan, serta pengumuman. Umat tidak perlu melihat anggaran. Anggaran, kolekte, laporan kegiatan, dan data umat hanya untuk pengurus dan dewan, dan data umat hanya bagi yang berwenang. Karena itu setiap data diberi tingkat kerahasiaan: Publik, Internal, Terbatas, dan Sangat Terbatas.</a:t>
             </a:r>
           </a:p>
         </p:txBody>
@@ -1780,8 +1853,7 @@
           <a:lstStyle/>
           <a:p>
             <a:r>
-              <a:rPr lang="en-US" dirty="0"/>
-              <a:t>Inilah langkah ketiga, mengubah data menjadi wawasan. Dengan data simulasi, ada empat hal yang langsung terlihat. Pertama, pengeluaran program naik tiga koma enam kali lipat, dari sekitar lima puluh lima juta rupiah pada tahun dua ribu dua puluh satu menjadi sekitar seratus sembilan puluh tujuh juta pada dua ribu dua puluh lima, sementara kolekte relatif datar. Kedua, sumbangan Adven yang menutup biaya Natal turun dari seratus tujuh belas persen menjadi enam puluh enam persen, sedangkan sumbangan Prapaskah masih menutup biaya Paskah. Ketiga, sepuluh peristiwa luar biasa seperti hujan deras dan kabut asap membuat sekitar enam puluh dua juta rupiah kolekte tidak diterima, dan perkiraan kolekte meleset jauh bila ada peristiwa. Keempat, hanya tiga puluh tujuh umat berusia dua puluh sampai dua puluh sembilan tahun. Semua ini angka simulasi untuk memperlihatkan jenis pertanyaan yang bisa dijawab. Garis tren hanya gambaran, bukan ramalan.</a:t>
+              <a:t>Ini dua contoh tampilan yang kami susun dengan data simulasi, supaya kita bisa membayangkan bentuknya. Di kiri, jadwal Misa lengkap dengan hari, jam, tempat, dan bahasanya. Di kanan, panduan layanan: Baptis Dewasa dengan daftar persyaratan dan langkah-langkahnya, yang juga bisa diunduh sebagai PDF untuk dicetak. Ada enam panduan contoh: Baptis Dewasa, Baptis Batuta, Krisma, Pernikahan, Pendaftaran Lingkungan, dan Pelayanan Kematian. Perlu saya jelaskan bahwa halaman kegiatan di contoh ini adalah tampilan pengurus dan memuat anggaran. Untuk umat, yang akan ditampilkan hanya nama, tanggal, dan tempat kegiatan. Panduan ini hanya contoh untuk demonstrasi, bukan ketentuan resmi.</a:t>
             </a:r>
           </a:p>
         </p:txBody>
@@ -1868,7 +1940,7 @@
           <a:p>
             <a:r>
               <a:rPr lang="en-US" dirty="0"/>
-              <a:t>Beginilah tampilan dasbor contoh kita. Di kiri, halaman Ringkasan: angka pokok kolekte dan pengeluaran program, serta grafik yang memperlihatkan arah tren. Di kanan, halaman Demografi umat, dengan piramida usia dan jenis kelamin. Halaman ini hanya memuat angka gabungan: tidak ada nama, dan kelompok yang terlalu kecil disembunyikan agar tidak ada orang yang bisa dikenali. Seluruhnya ada dua belas halaman berbahasa Indonesia, dan tersedia juga sebagai satu berkas yang bisa dibuka tanpa memasang apa pun, misalnya bila akun percobaan berakhir.</a:t>
+              <a:t>Inilah langkah ketiga, mengubah data menjadi wawasan. Dengan data simulasi, ada empat hal yang langsung terlihat. Pertama, pengeluaran program naik tiga koma enam kali lipat, dari sekitar lima puluh lima juta rupiah pada tahun dua ribu dua puluh satu menjadi sekitar seratus sembilan puluh tujuh juta pada dua ribu dua puluh lima, sementara kolekte relatif datar. Kedua, sumbangan Adven yang menutup biaya Natal turun dari seratus tujuh belas persen menjadi enam puluh enam persen, sedangkan sumbangan Prapaskah masih menutup biaya Paskah. Ketiga, sepuluh peristiwa luar biasa seperti hujan deras dan kabut asap membuat sekitar enam puluh dua juta rupiah kolekte tidak diterima, dan perkiraan kolekte meleset jauh bila ada peristiwa. Keempat, hanya tiga puluh tujuh umat berusia dua puluh sampai dua puluh sembilan tahun. Semua ini angka simulasi untuk memperlihatkan jenis pertanyaan yang bisa dijawab. Garis tren hanya gambaran, bukan ramalan.</a:t>
             </a:r>
           </a:p>
         </p:txBody>
@@ -2102,7 +2174,7 @@
           </a:prstGeom>
           <a:extLst>
             <a:ext uri="{C572A759-6A51-4108-AA02-DFA0A04FC94B}">
-              <ma14:wrappingTextBoxFlag xmlns:ma14="http://schemas.microsoft.com/office/mac/drawingml/2011/main" xmlns="" val="0"/>
+              <ma14:wrappingTextBoxFlag xmlns="" xmlns:ma14="http://schemas.microsoft.com/office/mac/drawingml/2011/main" val="0"/>
             </a:ext>
           </a:extLst>
         </p:spPr>
@@ -2298,7 +2370,7 @@
           </a:prstGeom>
           <a:extLst>
             <a:ext uri="{C572A759-6A51-4108-AA02-DFA0A04FC94B}">
-              <ma14:wrappingTextBoxFlag xmlns:ma14="http://schemas.microsoft.com/office/mac/drawingml/2011/main" xmlns="" val="0"/>
+              <ma14:wrappingTextBoxFlag xmlns="" xmlns:ma14="http://schemas.microsoft.com/office/mac/drawingml/2011/main" val="0"/>
             </a:ext>
           </a:extLst>
         </p:spPr>
@@ -2488,7 +2560,7 @@
           </a:prstGeom>
           <a:extLst>
             <a:ext uri="{C572A759-6A51-4108-AA02-DFA0A04FC94B}">
-              <ma14:wrappingTextBoxFlag xmlns:ma14="http://schemas.microsoft.com/office/mac/drawingml/2011/main" xmlns="" val="0"/>
+              <ma14:wrappingTextBoxFlag xmlns="" xmlns:ma14="http://schemas.microsoft.com/office/mac/drawingml/2011/main" val="0"/>
             </a:ext>
           </a:extLst>
         </p:spPr>
@@ -2911,14 +2983,6 @@
             <a:pPr marL="0" indent="0">
               <a:buNone/>
             </a:pPr>
-            <a:r>
-              <a:rPr lang="id-ID" altLang="en-US" sz="2000" dirty="0">
-                <a:solidFill>
-                  <a:schemeClr val="accent6"/>
-                </a:solidFill>
-              </a:rPr>
-              <a:t>Bank Informasi Paroki: apa yang bisa kita capai dengannya?</a:t>
-            </a:r>
             <a:endParaRPr lang="id-ID" sz="2000" dirty="0"/>
           </a:p>
         </p:txBody>
@@ -3196,6 +3260,442 @@
 </file>
 
 <file path=ppt/slides/slide10.xml><?xml version="1.0" encoding="utf-8"?>
+<p:sld xmlns:a="http://schemas.openxmlformats.org/drawingml/2006/main" xmlns:r="http://schemas.openxmlformats.org/officeDocument/2006/relationships" xmlns:p="http://schemas.openxmlformats.org/presentationml/2006/main">
+  <p:cSld name="Slide 9">
+    <p:spTree>
+      <p:nvGrpSpPr>
+        <p:cNvPr id="1" name=""/>
+        <p:cNvGrpSpPr/>
+        <p:nvPr/>
+      </p:nvGrpSpPr>
+      <p:grpSpPr>
+        <a:xfrm>
+          <a:off x="0" y="0"/>
+          <a:ext cx="0" cy="0"/>
+          <a:chOff x="0" y="0"/>
+          <a:chExt cx="0" cy="0"/>
+        </a:xfrm>
+      </p:grpSpPr>
+      <p:sp>
+        <p:nvSpPr>
+          <p:cNvPr id="3" name="Text 0"/>
+          <p:cNvSpPr>
+            <a:spLocks noGrp="1"/>
+          </p:cNvSpPr>
+          <p:nvPr>
+            <p:ph type="body" idx="100" hasCustomPrompt="1"/>
+          </p:nvPr>
+        </p:nvSpPr>
+        <p:spPr>
+          <a:xfrm>
+            <a:off x="640080" y="502920"/>
+            <a:ext cx="10911535" cy="320040"/>
+          </a:xfrm>
+          <a:prstGeom prst="rect">
+            <a:avLst/>
+          </a:prstGeom>
+          <a:noFill/>
+          <a:ln/>
+        </p:spPr>
+        <p:txBody>
+          <a:bodyPr wrap="square" lIns="0" tIns="0" rIns="0" bIns="0" rtlCol="0" anchor="t"/>
+          <a:lstStyle/>
+          <a:p>
+            <a:pPr marL="0" indent="0" algn="l">
+              <a:buNone/>
+            </a:pPr>
+            <a:r>
+              <a:rPr lang="id-ID" altLang="en-US" sz="1200" b="1" kern="0" spc="200" dirty="0">
+                <a:solidFill>
+                  <a:schemeClr val="accent3"/>
+                </a:solidFill>
+              </a:rPr>
+              <a:t>LANGKAH 3 · PAHAMI · CONTOH</a:t>
+            </a:r>
+            <a:endParaRPr lang="id-ID" sz="1200" dirty="0"/>
+          </a:p>
+        </p:txBody>
+      </p:sp>
+      <p:sp>
+        <p:nvSpPr>
+          <p:cNvPr id="4" name="Text 0"/>
+          <p:cNvSpPr>
+            <a:spLocks noGrp="1"/>
+          </p:cNvSpPr>
+          <p:nvPr>
+            <p:ph type="title" idx="101" hasCustomPrompt="1"/>
+          </p:nvPr>
+        </p:nvSpPr>
+        <p:spPr>
+          <a:xfrm>
+            <a:off x="640080" y="841248"/>
+            <a:ext cx="10911535" cy="822960"/>
+          </a:xfrm>
+          <a:prstGeom prst="rect">
+            <a:avLst/>
+          </a:prstGeom>
+          <a:noFill/>
+          <a:ln/>
+        </p:spPr>
+        <p:txBody>
+          <a:bodyPr wrap="square" lIns="0" tIns="0" rIns="0" bIns="0" rtlCol="0" anchor="t"/>
+          <a:lstStyle/>
+          <a:p>
+            <a:pPr marL="0" indent="0" algn="l">
+              <a:buNone/>
+            </a:pPr>
+            <a:r>
+              <a:rPr lang="id-ID" altLang="en-US" sz="3400" b="1" dirty="0">
+                <a:solidFill>
+                  <a:schemeClr val="tx1"/>
+                </a:solidFill>
+              </a:rPr>
+              <a:t>Ringkasannya dalam satu layar</a:t>
+            </a:r>
+            <a:endParaRPr lang="id-ID" sz="3400" dirty="0"/>
+          </a:p>
+        </p:txBody>
+      </p:sp>
+      <p:sp>
+        <p:nvSpPr>
+          <p:cNvPr id="5" name="Shape 2"/>
+          <p:cNvSpPr/>
+          <p:nvPr/>
+        </p:nvSpPr>
+        <p:spPr>
+          <a:xfrm>
+            <a:off x="640080" y="1828800"/>
+            <a:ext cx="5303520" cy="3412191"/>
+          </a:xfrm>
+          <a:prstGeom prst="rect">
+            <a:avLst/>
+          </a:prstGeom>
+          <a:solidFill>
+            <a:srgbClr val="FFFFFF"/>
+          </a:solidFill>
+          <a:ln w="12700">
+            <a:solidFill>
+              <a:schemeClr val="accent6"/>
+            </a:solidFill>
+            <a:prstDash val="solid"/>
+          </a:ln>
+        </p:spPr>
+        <p:txBody>
+          <a:bodyPr/>
+          <a:lstStyle/>
+          <a:p>
+            <a:endParaRPr lang="en-US"/>
+          </a:p>
+        </p:txBody>
+      </p:sp>
+      <p:pic>
+        <p:nvPicPr>
+          <p:cNvPr id="6" name="Image 0" descr="Contoh dasbor Ringkasan: angka pokok kolekte dan pengeluaran program, dan grafik dengan garis tren"/>
+          <p:cNvPicPr>
+            <a:picLocks noChangeAspect="1"/>
+          </p:cNvPicPr>
+          <p:nvPr/>
+        </p:nvPicPr>
+        <p:blipFill>
+          <a:blip r:embed="rId3"/>
+          <a:stretch>
+            <a:fillRect/>
+          </a:stretch>
+        </p:blipFill>
+        <p:spPr>
+          <a:xfrm>
+            <a:off x="640080" y="1828800"/>
+            <a:ext cx="5303520" cy="3412191"/>
+          </a:xfrm>
+          <a:prstGeom prst="rect">
+            <a:avLst/>
+          </a:prstGeom>
+        </p:spPr>
+      </p:pic>
+      <p:sp>
+        <p:nvSpPr>
+          <p:cNvPr id="7" name="Text 3"/>
+          <p:cNvSpPr txBox="1"/>
+          <p:nvPr/>
+        </p:nvSpPr>
+        <p:spPr>
+          <a:xfrm>
+            <a:off x="640080" y="5332431"/>
+            <a:ext cx="5303520" cy="365760"/>
+          </a:xfrm>
+          <a:prstGeom prst="rect">
+            <a:avLst/>
+          </a:prstGeom>
+          <a:noFill/>
+          <a:ln/>
+        </p:spPr>
+        <p:txBody>
+          <a:bodyPr wrap="square" lIns="0" tIns="0" rIns="0" bIns="0" rtlCol="0" anchor="ctr"/>
+          <a:lstStyle/>
+          <a:p>
+            <a:pPr marL="0" indent="0" algn="ctr">
+              <a:buNone/>
+            </a:pPr>
+            <a:r>
+              <a:rPr lang="id-ID" altLang="en-US" sz="1400" dirty="0">
+                <a:solidFill>
+                  <a:schemeClr val="tx1"/>
+                </a:solidFill>
+              </a:rPr>
+              <a:t>Ringkasan: kolekte, pengeluaran program, dan arah tren</a:t>
+            </a:r>
+            <a:endParaRPr lang="id-ID" sz="1400" dirty="0"/>
+          </a:p>
+        </p:txBody>
+      </p:sp>
+      <p:sp>
+        <p:nvSpPr>
+          <p:cNvPr id="8" name="Shape 4"/>
+          <p:cNvSpPr/>
+          <p:nvPr/>
+        </p:nvSpPr>
+        <p:spPr>
+          <a:xfrm>
+            <a:off x="6248095" y="1828800"/>
+            <a:ext cx="5303520" cy="2125308"/>
+          </a:xfrm>
+          <a:prstGeom prst="rect">
+            <a:avLst/>
+          </a:prstGeom>
+          <a:solidFill>
+            <a:srgbClr val="FFFFFF"/>
+          </a:solidFill>
+          <a:ln w="12700">
+            <a:solidFill>
+              <a:schemeClr val="accent6"/>
+            </a:solidFill>
+            <a:prstDash val="solid"/>
+          </a:ln>
+        </p:spPr>
+        <p:txBody>
+          <a:bodyPr/>
+          <a:lstStyle/>
+          <a:p>
+            <a:endParaRPr lang="en-US"/>
+          </a:p>
+        </p:txBody>
+      </p:sp>
+      <p:pic>
+        <p:nvPicPr>
+          <p:cNvPr id="9" name="Image 1" descr="Contoh piramida umat menurut usia dan jenis kelamin"/>
+          <p:cNvPicPr>
+            <a:picLocks noChangeAspect="1"/>
+          </p:cNvPicPr>
+          <p:nvPr/>
+        </p:nvPicPr>
+        <p:blipFill>
+          <a:blip r:embed="rId4"/>
+          <a:stretch>
+            <a:fillRect/>
+          </a:stretch>
+        </p:blipFill>
+        <p:spPr>
+          <a:xfrm>
+            <a:off x="6248095" y="1828800"/>
+            <a:ext cx="5303520" cy="2125308"/>
+          </a:xfrm>
+          <a:prstGeom prst="rect">
+            <a:avLst/>
+          </a:prstGeom>
+        </p:spPr>
+      </p:pic>
+      <p:sp>
+        <p:nvSpPr>
+          <p:cNvPr id="10" name="Text 5"/>
+          <p:cNvSpPr txBox="1"/>
+          <p:nvPr/>
+        </p:nvSpPr>
+        <p:spPr>
+          <a:xfrm>
+            <a:off x="6248095" y="4045548"/>
+            <a:ext cx="5303520" cy="365760"/>
+          </a:xfrm>
+          <a:prstGeom prst="rect">
+            <a:avLst/>
+          </a:prstGeom>
+          <a:noFill/>
+          <a:ln/>
+        </p:spPr>
+        <p:txBody>
+          <a:bodyPr wrap="square" lIns="0" tIns="0" rIns="0" bIns="0" rtlCol="0" anchor="ctr"/>
+          <a:lstStyle/>
+          <a:p>
+            <a:pPr marL="0" indent="0" algn="ctr">
+              <a:buNone/>
+            </a:pPr>
+            <a:r>
+              <a:rPr lang="id-ID" altLang="en-US" sz="1400" dirty="0">
+                <a:solidFill>
+                  <a:schemeClr val="tx1"/>
+                </a:solidFill>
+              </a:rPr>
+              <a:t>Demografi umat: usia dan jenis kelamin, hanya angka gabungan</a:t>
+            </a:r>
+            <a:endParaRPr lang="id-ID" sz="1400" dirty="0"/>
+          </a:p>
+        </p:txBody>
+      </p:sp>
+      <p:sp>
+        <p:nvSpPr>
+          <p:cNvPr id="11" name="Text 6"/>
+          <p:cNvSpPr txBox="1"/>
+          <p:nvPr/>
+        </p:nvSpPr>
+        <p:spPr>
+          <a:xfrm>
+            <a:off x="6248095" y="4639908"/>
+            <a:ext cx="5303520" cy="1005840"/>
+          </a:xfrm>
+          <a:prstGeom prst="rect">
+            <a:avLst/>
+          </a:prstGeom>
+          <a:noFill/>
+          <a:ln/>
+        </p:spPr>
+        <p:txBody>
+          <a:bodyPr wrap="square" lIns="0" tIns="0" rIns="0" bIns="0" rtlCol="0" anchor="t"/>
+          <a:lstStyle/>
+          <a:p>
+            <a:pPr marL="342900" indent="-342900">
+              <a:spcAft>
+                <a:spcPts val="600"/>
+              </a:spcAft>
+              <a:buSzPct val="100000"/>
+              <a:buChar char="•"/>
+            </a:pPr>
+            <a:r>
+              <a:rPr lang="id-ID" altLang="en-US" sz="1600" dirty="0">
+                <a:solidFill>
+                  <a:schemeClr val="tx1"/>
+                </a:solidFill>
+              </a:rPr>
+              <a:t>12 halaman berbahasa Indonesia</a:t>
+            </a:r>
+            <a:endParaRPr lang="id-ID" sz="1600" dirty="0"/>
+          </a:p>
+          <a:p>
+            <a:pPr marL="342900" indent="-342900">
+              <a:spcAft>
+                <a:spcPts val="600"/>
+              </a:spcAft>
+              <a:buSzPct val="100000"/>
+              <a:buChar char="•"/>
+            </a:pPr>
+            <a:r>
+              <a:rPr lang="id-ID" altLang="en-US" sz="1600" dirty="0">
+                <a:solidFill>
+                  <a:schemeClr val="tx1"/>
+                </a:solidFill>
+              </a:rPr>
+              <a:t>Tersedia juga sebagai satu berkas yang dibuka tanpa instalasi</a:t>
+            </a:r>
+            <a:endParaRPr lang="id-ID" sz="1600" dirty="0"/>
+          </a:p>
+        </p:txBody>
+      </p:sp>
+      <p:sp>
+        <p:nvSpPr>
+          <p:cNvPr id="12" name="Text 7"/>
+          <p:cNvSpPr txBox="1"/>
+          <p:nvPr/>
+        </p:nvSpPr>
+        <p:spPr>
+          <a:xfrm>
+            <a:off x="5669280" y="6355080"/>
+            <a:ext cx="5212080" cy="274320"/>
+          </a:xfrm>
+          <a:prstGeom prst="rect">
+            <a:avLst/>
+          </a:prstGeom>
+          <a:noFill/>
+          <a:ln/>
+        </p:spPr>
+        <p:txBody>
+          <a:bodyPr wrap="square" lIns="0" tIns="0" rIns="0" bIns="0" rtlCol="0" anchor="ctr"/>
+          <a:lstStyle/>
+          <a:p>
+            <a:pPr marL="0" indent="0" algn="r">
+              <a:buNone/>
+            </a:pPr>
+            <a:r>
+              <a:rPr lang="id-ID" altLang="en-US" sz="1100" dirty="0">
+                <a:solidFill>
+                  <a:schemeClr val="tx2"/>
+                </a:solidFill>
+              </a:rPr>
+              <a:t>1 Kumpulkan  ·  2 Bagikan  ·  </a:t>
+            </a:r>
+            <a:r>
+              <a:rPr lang="id-ID" altLang="en-US" sz="1100" b="1" dirty="0">
+                <a:solidFill>
+                  <a:schemeClr val="accent3"/>
+                </a:solidFill>
+              </a:rPr>
+              <a:t>3 Pahami</a:t>
+            </a:r>
+            <a:endParaRPr lang="id-ID" sz="1100" dirty="0"/>
+          </a:p>
+        </p:txBody>
+      </p:sp>
+      <p:sp>
+        <p:nvSpPr>
+          <p:cNvPr id="25" name="Slide Number Placeholder 0"/>
+          <p:cNvSpPr>
+            <a:spLocks noGrp="1"/>
+          </p:cNvSpPr>
+          <p:nvPr>
+            <p:ph type="sldNum" sz="quarter" idx="4294967295"/>
+          </p:nvPr>
+        </p:nvSpPr>
+        <p:spPr>
+          <a:xfrm>
+            <a:off x="11000232" y="6355080"/>
+            <a:ext cx="548640" cy="274320"/>
+          </a:xfrm>
+          <a:prstGeom prst="rect">
+            <a:avLst/>
+          </a:prstGeom>
+          <a:extLst>
+            <a:ext uri="{C572A759-6A51-4108-AA02-DFA0A04FC94B}">
+              <ma14:wrappingTextBoxFlag xmlns="" xmlns:ma14="http://schemas.microsoft.com/office/mac/drawingml/2011/main" val="0"/>
+            </a:ext>
+          </a:extLst>
+        </p:spPr>
+        <p:txBody>
+          <a:bodyPr/>
+          <a:lstStyle>
+            <a:lvl1pPr>
+              <a:defRPr sz="1100">
+                <a:solidFill>
+                  <a:schemeClr val="tx2"/>
+                </a:solidFill>
+              </a:defRPr>
+            </a:lvl1pPr>
+          </a:lstStyle>
+          <a:p>
+            <a:pPr algn="r"/>
+            <a:fld id="{F7021451-1387-4CA6-816F-3879F97B5CBC}" type="slidenum">
+              <a:rPr lang="en-US" b="0"/>
+              <a:t>10</a:t>
+            </a:fld>
+            <a:endParaRPr lang="en-US"/>
+          </a:p>
+        </p:txBody>
+      </p:sp>
+    </p:spTree>
+  </p:cSld>
+  <p:clrMapOvr>
+    <a:masterClrMapping/>
+  </p:clrMapOvr>
+</p:sld>
+</file>
+
+<file path=ppt/slides/slide11.xml><?xml version="1.0" encoding="utf-8"?>
 <p:sld xmlns:a="http://schemas.openxmlformats.org/drawingml/2006/main" xmlns:r="http://schemas.openxmlformats.org/officeDocument/2006/relationships" xmlns:p="http://schemas.openxmlformats.org/presentationml/2006/main">
   <p:cSld name="Slide 10">
     <p:spTree>
@@ -4285,7 +4785,7 @@
           </a:prstGeom>
           <a:extLst>
             <a:ext uri="{C572A759-6A51-4108-AA02-DFA0A04FC94B}">
-              <ma14:wrappingTextBoxFlag xmlns:ma14="http://schemas.microsoft.com/office/mac/drawingml/2011/main" xmlns="" val="0"/>
+              <ma14:wrappingTextBoxFlag xmlns="" xmlns:ma14="http://schemas.microsoft.com/office/mac/drawingml/2011/main" val="0"/>
             </a:ext>
           </a:extLst>
         </p:spPr>
@@ -4304,7 +4804,7 @@
             <a:pPr algn="r"/>
             <a:fld id="{F7021451-1387-4CA6-816F-3879F97B5CBC}" type="slidenum">
               <a:rPr lang="en-US" b="0"/>
-              <a:t>10</a:t>
+              <a:t>11</a:t>
             </a:fld>
             <a:endParaRPr lang="en-US"/>
           </a:p>
@@ -4318,7 +4818,1245 @@
 </p:sld>
 </file>
 
-<file path=ppt/slides/slide11.xml><?xml version="1.0" encoding="utf-8"?>
+<file path=ppt/slides/slide12.xml><?xml version="1.0" encoding="utf-8"?>
+<p:sld xmlns:a="http://schemas.openxmlformats.org/drawingml/2006/main" xmlns:r="http://schemas.openxmlformats.org/officeDocument/2006/relationships" xmlns:p="http://schemas.openxmlformats.org/presentationml/2006/main">
+  <p:cSld>
+    <p:spTree>
+      <p:nvGrpSpPr>
+        <p:cNvPr id="1" name=""/>
+        <p:cNvGrpSpPr/>
+        <p:nvPr/>
+      </p:nvGrpSpPr>
+      <p:grpSpPr>
+        <a:xfrm>
+          <a:off x="0" y="0"/>
+          <a:ext cx="0" cy="0"/>
+          <a:chOff x="0" y="0"/>
+          <a:chExt cx="0" cy="0"/>
+        </a:xfrm>
+      </p:grpSpPr>
+      <p:sp>
+        <p:nvSpPr>
+          <p:cNvPr id="3" name="Text 0"/>
+          <p:cNvSpPr>
+            <a:spLocks noGrp="1"/>
+          </p:cNvSpPr>
+          <p:nvPr>
+            <p:ph type="body" idx="100" hasCustomPrompt="1"/>
+          </p:nvPr>
+        </p:nvSpPr>
+        <p:spPr>
+          <a:xfrm>
+            <a:off x="640080" y="502920"/>
+            <a:ext cx="10911535" cy="320040"/>
+          </a:xfrm>
+          <a:prstGeom prst="rect">
+            <a:avLst/>
+          </a:prstGeom>
+          <a:noFill/>
+          <a:ln/>
+        </p:spPr>
+        <p:txBody>
+          <a:bodyPr wrap="square" lIns="0" tIns="0" rIns="0" bIns="0" rtlCol="0" anchor="t"/>
+          <a:lstStyle/>
+          <a:p>
+            <a:pPr marL="0" indent="0" algn="l">
+              <a:buNone/>
+            </a:pPr>
+            <a:r>
+              <a:rPr lang="id-ID" altLang="en-US" sz="1200" b="1" kern="0" spc="200" dirty="0">
+                <a:solidFill>
+                  <a:schemeClr val="accent3"/>
+                </a:solidFill>
+              </a:rPr>
+              <a:t>LANGKAH 3 · PAHAMI · KEMUNGKINAN</a:t>
+            </a:r>
+            <a:endParaRPr lang="id-ID" sz="1200" dirty="0"/>
+          </a:p>
+        </p:txBody>
+      </p:sp>
+      <p:sp>
+        <p:nvSpPr>
+          <p:cNvPr id="4" name="Text 0"/>
+          <p:cNvSpPr>
+            <a:spLocks noGrp="1"/>
+          </p:cNvSpPr>
+          <p:nvPr>
+            <p:ph type="title" idx="101" hasCustomPrompt="1"/>
+          </p:nvPr>
+        </p:nvSpPr>
+        <p:spPr>
+          <a:xfrm>
+            <a:off x="640080" y="841248"/>
+            <a:ext cx="10911535" cy="822960"/>
+          </a:xfrm>
+          <a:prstGeom prst="rect">
+            <a:avLst/>
+          </a:prstGeom>
+          <a:noFill/>
+          <a:ln/>
+        </p:spPr>
+        <p:txBody>
+          <a:bodyPr wrap="square" lIns="0" tIns="0" rIns="0" bIns="0" rtlCol="0" anchor="t"/>
+          <a:lstStyle/>
+          <a:p>
+            <a:pPr marL="0" indent="0" algn="l">
+              <a:buNone/>
+            </a:pPr>
+            <a:r>
+              <a:rPr lang="id-ID" altLang="en-US" sz="3400" b="1" dirty="0">
+                <a:solidFill>
+                  <a:schemeClr val="tx1"/>
+                </a:solidFill>
+              </a:rPr>
+              <a:t>Apa saja yang bisa kita capai</a:t>
+            </a:r>
+            <a:endParaRPr lang="id-ID" sz="3400" dirty="0"/>
+          </a:p>
+        </p:txBody>
+      </p:sp>
+      <p:sp>
+        <p:nvSpPr>
+          <p:cNvPr id="25" name="Slide Number Placeholder 0"/>
+          <p:cNvSpPr>
+            <a:spLocks noGrp="1"/>
+          </p:cNvSpPr>
+          <p:nvPr>
+            <p:ph type="sldNum" sz="quarter" idx="4294967295"/>
+          </p:nvPr>
+        </p:nvSpPr>
+        <p:spPr>
+          <a:xfrm>
+            <a:off x="11000232" y="6355080"/>
+            <a:ext cx="548640" cy="274320"/>
+          </a:xfrm>
+          <a:prstGeom prst="rect">
+            <a:avLst/>
+          </a:prstGeom>
+          <a:extLst>
+            <a:ext uri="{C572A759-6A51-4108-AA02-DFA0A04FC94B}">
+              <ma14:wrappingTextBoxFlag xmlns="" xmlns:ma14="http://schemas.microsoft.com/office/mac/drawingml/2011/main" val="0"/>
+            </a:ext>
+          </a:extLst>
+        </p:spPr>
+        <p:txBody>
+          <a:bodyPr/>
+          <a:lstStyle>
+            <a:lvl1pPr>
+              <a:defRPr sz="1100">
+                <a:solidFill>
+                  <a:schemeClr val="tx2"/>
+                </a:solidFill>
+              </a:defRPr>
+            </a:lvl1pPr>
+          </a:lstStyle>
+          <a:p>
+            <a:pPr algn="r"/>
+            <a:fld id="{F7021451-1387-4CA6-816F-3879F97B5CBC}" type="slidenum">
+              <a:rPr lang="en-US" b="0"/>
+              <a:t>12</a:t>
+            </a:fld>
+            <a:endParaRPr lang="en-US"/>
+          </a:p>
+        </p:txBody>
+      </p:sp>
+      <p:sp>
+        <p:nvSpPr>
+          <p:cNvPr id="26" name="Kartu 1"/>
+          <p:cNvSpPr/>
+          <p:nvPr/>
+        </p:nvSpPr>
+        <p:spPr>
+          <a:xfrm>
+            <a:off x="640080" y="1783080"/>
+            <a:ext cx="3526536" cy="1627632"/>
+          </a:xfrm>
+          <a:prstGeom prst="roundRect">
+            <a:avLst>
+              <a:gd name="adj" fmla="val 5365"/>
+            </a:avLst>
+          </a:prstGeom>
+          <a:solidFill>
+            <a:schemeClr val="bg1"/>
+          </a:solidFill>
+          <a:ln w="12700">
+            <a:solidFill>
+              <a:schemeClr val="accent6"/>
+            </a:solidFill>
+            <a:prstDash val="solid"/>
+          </a:ln>
+        </p:spPr>
+        <p:txBody>
+          <a:bodyPr/>
+          <a:lstStyle/>
+          <a:p>
+            <a:endParaRPr lang="en-US"/>
+          </a:p>
+        </p:txBody>
+      </p:sp>
+      <p:sp>
+        <p:nvSpPr>
+          <p:cNvPr id="27" name="Status 1"/>
+          <p:cNvSpPr/>
+          <p:nvPr/>
+        </p:nvSpPr>
+        <p:spPr>
+          <a:xfrm>
+            <a:off x="841248" y="1938528"/>
+            <a:ext cx="1188720" cy="246888"/>
+          </a:xfrm>
+          <a:prstGeom prst="roundRect">
+            <a:avLst>
+              <a:gd name="adj" fmla="val 50000"/>
+            </a:avLst>
+          </a:prstGeom>
+          <a:solidFill>
+            <a:srgbClr val="DCEBE6"/>
+          </a:solidFill>
+          <a:ln>
+            <a:solidFill>
+              <a:srgbClr val="DCEBE6"/>
+            </a:solidFill>
+          </a:ln>
+        </p:spPr>
+        <p:txBody>
+          <a:bodyPr wrap="square" lIns="0" tIns="0" rIns="0" bIns="0" rtlCol="0" anchor="ctr"/>
+          <a:lstStyle/>
+          <a:p>
+            <a:pPr marL="0" indent="0" algn="ctr">
+              <a:buNone/>
+            </a:pPr>
+            <a:r>
+              <a:rPr lang="id-ID" altLang="en-US" sz="1100" b="1" dirty="0">
+                <a:solidFill>
+                  <a:schemeClr val="tx1"/>
+                </a:solidFill>
+              </a:rPr>
+              <a:t>Ada di contoh</a:t>
+            </a:r>
+            <a:endParaRPr lang="id-ID" sz="1400" dirty="0"/>
+          </a:p>
+        </p:txBody>
+      </p:sp>
+      <p:sp>
+        <p:nvSpPr>
+          <p:cNvPr id="28" name="Judul 1"/>
+          <p:cNvSpPr txBox="1"/>
+          <p:nvPr/>
+        </p:nvSpPr>
+        <p:spPr>
+          <a:xfrm>
+            <a:off x="841248" y="2286000"/>
+            <a:ext cx="3124200" cy="310896"/>
+          </a:xfrm>
+          <a:prstGeom prst="rect">
+            <a:avLst/>
+          </a:prstGeom>
+          <a:noFill/>
+          <a:ln/>
+        </p:spPr>
+        <p:txBody>
+          <a:bodyPr wrap="square" lIns="0" tIns="0" rIns="0" bIns="0" rtlCol="0" anchor="t"/>
+          <a:lstStyle/>
+          <a:p>
+            <a:pPr marL="0" indent="0">
+              <a:buNone/>
+            </a:pPr>
+            <a:r>
+              <a:rPr lang="id-ID" altLang="en-US" sz="1700" b="1" dirty="0">
+                <a:solidFill>
+                  <a:schemeClr val="tx1"/>
+                </a:solidFill>
+              </a:rPr>
+              <a:t>Mendengar umat</a:t>
+            </a:r>
+            <a:endParaRPr lang="id-ID" sz="1500" dirty="0"/>
+          </a:p>
+        </p:txBody>
+      </p:sp>
+      <p:sp>
+        <p:nvSpPr>
+          <p:cNvPr id="29" name="Isi 1"/>
+          <p:cNvSpPr txBox="1"/>
+          <p:nvPr/>
+        </p:nvSpPr>
+        <p:spPr>
+          <a:xfrm>
+            <a:off x="841248" y="2633472"/>
+            <a:ext cx="3124200" cy="713232"/>
+          </a:xfrm>
+          <a:prstGeom prst="rect">
+            <a:avLst/>
+          </a:prstGeom>
+          <a:noFill/>
+          <a:ln/>
+        </p:spPr>
+        <p:txBody>
+          <a:bodyPr wrap="square" lIns="0" tIns="0" rIns="0" bIns="0" rtlCol="0" anchor="t"/>
+          <a:lstStyle/>
+          <a:p>
+            <a:pPr marL="0" indent="0">
+              <a:buNone/>
+            </a:pPr>
+            <a:r>
+              <a:rPr lang="id-ID" altLang="en-US" sz="1300" dirty="0">
+                <a:solidFill>
+                  <a:schemeClr val="tx2"/>
+                </a:solidFill>
+              </a:rPr>
+              <a:t>Kelompok usia mana yang kurang terjangkau, dan apa kata survei tentang kebutuhan mereka?</a:t>
+            </a:r>
+            <a:endParaRPr lang="id-ID" sz="1300" dirty="0"/>
+          </a:p>
+        </p:txBody>
+      </p:sp>
+      <p:sp>
+        <p:nvSpPr>
+          <p:cNvPr id="30" name="Kartu 2"/>
+          <p:cNvSpPr/>
+          <p:nvPr/>
+        </p:nvSpPr>
+        <p:spPr>
+          <a:xfrm>
+            <a:off x="4331208" y="1783080"/>
+            <a:ext cx="3526536" cy="1627632"/>
+          </a:xfrm>
+          <a:prstGeom prst="roundRect">
+            <a:avLst>
+              <a:gd name="adj" fmla="val 5365"/>
+            </a:avLst>
+          </a:prstGeom>
+          <a:solidFill>
+            <a:schemeClr val="bg1"/>
+          </a:solidFill>
+          <a:ln w="12700">
+            <a:solidFill>
+              <a:schemeClr val="accent6"/>
+            </a:solidFill>
+            <a:prstDash val="solid"/>
+          </a:ln>
+        </p:spPr>
+        <p:txBody>
+          <a:bodyPr/>
+          <a:lstStyle/>
+          <a:p>
+            <a:endParaRPr lang="en-US"/>
+          </a:p>
+        </p:txBody>
+      </p:sp>
+      <p:sp>
+        <p:nvSpPr>
+          <p:cNvPr id="31" name="Status 2"/>
+          <p:cNvSpPr/>
+          <p:nvPr/>
+        </p:nvSpPr>
+        <p:spPr>
+          <a:xfrm>
+            <a:off x="4532376" y="1938528"/>
+            <a:ext cx="1024128" cy="246888"/>
+          </a:xfrm>
+          <a:prstGeom prst="roundRect">
+            <a:avLst>
+              <a:gd name="adj" fmla="val 50000"/>
+            </a:avLst>
+          </a:prstGeom>
+          <a:noFill/>
+          <a:ln w="12700">
+            <a:solidFill>
+              <a:schemeClr val="accent3"/>
+            </a:solidFill>
+          </a:ln>
+        </p:spPr>
+        <p:txBody>
+          <a:bodyPr wrap="square" lIns="0" tIns="0" rIns="0" bIns="0" rtlCol="0" anchor="ctr"/>
+          <a:lstStyle/>
+          <a:p>
+            <a:pPr marL="0" indent="0" algn="ctr">
+              <a:buNone/>
+            </a:pPr>
+            <a:r>
+              <a:rPr lang="id-ID" altLang="en-US" sz="1100" b="1" dirty="0">
+                <a:solidFill>
+                  <a:schemeClr val="tx1"/>
+                </a:solidFill>
+              </a:rPr>
+              <a:t>Kemungkinan</a:t>
+            </a:r>
+            <a:endParaRPr lang="id-ID" sz="1400" dirty="0"/>
+          </a:p>
+        </p:txBody>
+      </p:sp>
+      <p:sp>
+        <p:nvSpPr>
+          <p:cNvPr id="32" name="Judul 2"/>
+          <p:cNvSpPr txBox="1"/>
+          <p:nvPr/>
+        </p:nvSpPr>
+        <p:spPr>
+          <a:xfrm>
+            <a:off x="4532376" y="2286000"/>
+            <a:ext cx="3124200" cy="310896"/>
+          </a:xfrm>
+          <a:prstGeom prst="rect">
+            <a:avLst/>
+          </a:prstGeom>
+          <a:noFill/>
+          <a:ln/>
+        </p:spPr>
+        <p:txBody>
+          <a:bodyPr wrap="square" lIns="0" tIns="0" rIns="0" bIns="0" rtlCol="0" anchor="t"/>
+          <a:lstStyle/>
+          <a:p>
+            <a:pPr marL="0" indent="0">
+              <a:buNone/>
+            </a:pPr>
+            <a:r>
+              <a:rPr lang="id-ID" altLang="en-US" sz="1700" b="1" dirty="0">
+                <a:solidFill>
+                  <a:schemeClr val="tx1"/>
+                </a:solidFill>
+              </a:rPr>
+              <a:t>Menata pelayanan Misa</a:t>
+            </a:r>
+            <a:endParaRPr lang="id-ID" sz="1500" dirty="0"/>
+          </a:p>
+        </p:txBody>
+      </p:sp>
+      <p:sp>
+        <p:nvSpPr>
+          <p:cNvPr id="33" name="Isi 2"/>
+          <p:cNvSpPr txBox="1"/>
+          <p:nvPr/>
+        </p:nvSpPr>
+        <p:spPr>
+          <a:xfrm>
+            <a:off x="4532376" y="2633472"/>
+            <a:ext cx="3124200" cy="713232"/>
+          </a:xfrm>
+          <a:prstGeom prst="rect">
+            <a:avLst/>
+          </a:prstGeom>
+          <a:noFill/>
+          <a:ln/>
+        </p:spPr>
+        <p:txBody>
+          <a:bodyPr wrap="square" lIns="0" tIns="0" rIns="0" bIns="0" rtlCol="0" anchor="t"/>
+          <a:lstStyle/>
+          <a:p>
+            <a:pPr marL="0" indent="0">
+              <a:buNone/>
+            </a:pPr>
+            <a:r>
+              <a:rPr lang="id-ID" altLang="en-US" sz="1300" dirty="0">
+                <a:solidFill>
+                  <a:schemeClr val="tx2"/>
+                </a:solidFill>
+              </a:rPr>
+              <a:t>Jadwal dan jumlah petugas mana yang perlu disesuaikan dengan kehadiran umat?</a:t>
+            </a:r>
+            <a:endParaRPr lang="id-ID" sz="1300" dirty="0"/>
+          </a:p>
+        </p:txBody>
+      </p:sp>
+      <p:sp>
+        <p:nvSpPr>
+          <p:cNvPr id="34" name="Kartu 3"/>
+          <p:cNvSpPr/>
+          <p:nvPr/>
+        </p:nvSpPr>
+        <p:spPr>
+          <a:xfrm>
+            <a:off x="8022336" y="1783080"/>
+            <a:ext cx="3526536" cy="1627632"/>
+          </a:xfrm>
+          <a:prstGeom prst="roundRect">
+            <a:avLst>
+              <a:gd name="adj" fmla="val 5365"/>
+            </a:avLst>
+          </a:prstGeom>
+          <a:solidFill>
+            <a:schemeClr val="bg1"/>
+          </a:solidFill>
+          <a:ln w="12700">
+            <a:solidFill>
+              <a:schemeClr val="accent6"/>
+            </a:solidFill>
+            <a:prstDash val="solid"/>
+          </a:ln>
+        </p:spPr>
+        <p:txBody>
+          <a:bodyPr/>
+          <a:lstStyle/>
+          <a:p>
+            <a:endParaRPr lang="en-US"/>
+          </a:p>
+        </p:txBody>
+      </p:sp>
+      <p:sp>
+        <p:nvSpPr>
+          <p:cNvPr id="35" name="Status 3"/>
+          <p:cNvSpPr/>
+          <p:nvPr/>
+        </p:nvSpPr>
+        <p:spPr>
+          <a:xfrm>
+            <a:off x="8223504" y="1938528"/>
+            <a:ext cx="1188720" cy="246888"/>
+          </a:xfrm>
+          <a:prstGeom prst="roundRect">
+            <a:avLst>
+              <a:gd name="adj" fmla="val 50000"/>
+            </a:avLst>
+          </a:prstGeom>
+          <a:solidFill>
+            <a:srgbClr val="DCEBE6"/>
+          </a:solidFill>
+          <a:ln>
+            <a:solidFill>
+              <a:srgbClr val="DCEBE6"/>
+            </a:solidFill>
+          </a:ln>
+        </p:spPr>
+        <p:txBody>
+          <a:bodyPr wrap="square" lIns="0" tIns="0" rIns="0" bIns="0" rtlCol="0" anchor="ctr"/>
+          <a:lstStyle/>
+          <a:p>
+            <a:pPr marL="0" indent="0" algn="ctr">
+              <a:buNone/>
+            </a:pPr>
+            <a:r>
+              <a:rPr lang="id-ID" altLang="en-US" sz="1100" b="1" dirty="0">
+                <a:solidFill>
+                  <a:schemeClr val="tx1"/>
+                </a:solidFill>
+              </a:rPr>
+              <a:t>Ada di contoh</a:t>
+            </a:r>
+            <a:endParaRPr lang="id-ID" sz="1400" dirty="0"/>
+          </a:p>
+        </p:txBody>
+      </p:sp>
+      <p:sp>
+        <p:nvSpPr>
+          <p:cNvPr id="36" name="Judul 3"/>
+          <p:cNvSpPr txBox="1"/>
+          <p:nvPr/>
+        </p:nvSpPr>
+        <p:spPr>
+          <a:xfrm>
+            <a:off x="8223504" y="2286000"/>
+            <a:ext cx="3124200" cy="310896"/>
+          </a:xfrm>
+          <a:prstGeom prst="rect">
+            <a:avLst/>
+          </a:prstGeom>
+          <a:noFill/>
+          <a:ln/>
+        </p:spPr>
+        <p:txBody>
+          <a:bodyPr wrap="square" lIns="0" tIns="0" rIns="0" bIns="0" rtlCol="0" anchor="t"/>
+          <a:lstStyle/>
+          <a:p>
+            <a:pPr marL="0" indent="0">
+              <a:buNone/>
+            </a:pPr>
+            <a:r>
+              <a:rPr lang="id-ID" altLang="en-US" sz="1700" b="1" dirty="0">
+                <a:solidFill>
+                  <a:schemeClr val="tx1"/>
+                </a:solidFill>
+              </a:rPr>
+              <a:t>Mengelola dengan bijak</a:t>
+            </a:r>
+            <a:endParaRPr lang="id-ID" sz="1500" dirty="0"/>
+          </a:p>
+        </p:txBody>
+      </p:sp>
+      <p:sp>
+        <p:nvSpPr>
+          <p:cNvPr id="37" name="Isi 3"/>
+          <p:cNvSpPr txBox="1"/>
+          <p:nvPr/>
+        </p:nvSpPr>
+        <p:spPr>
+          <a:xfrm>
+            <a:off x="8223504" y="2633472"/>
+            <a:ext cx="3124200" cy="713232"/>
+          </a:xfrm>
+          <a:prstGeom prst="rect">
+            <a:avLst/>
+          </a:prstGeom>
+          <a:noFill/>
+          <a:ln/>
+        </p:spPr>
+        <p:txBody>
+          <a:bodyPr wrap="square" lIns="0" tIns="0" rIns="0" bIns="0" rtlCol="0" anchor="t"/>
+          <a:lstStyle/>
+          <a:p>
+            <a:pPr marL="0" indent="0">
+              <a:buNone/>
+            </a:pPr>
+            <a:r>
+              <a:rPr lang="id-ID" altLang="en-US" sz="1300" dirty="0">
+                <a:solidFill>
+                  <a:schemeClr val="tx2"/>
+                </a:solidFill>
+              </a:rPr>
+              <a:t>Apakah kolekte dan sumbangan cukup menopang program kita dalam beberapa tahun ke depan?</a:t>
+            </a:r>
+            <a:endParaRPr lang="id-ID" sz="1300" dirty="0"/>
+          </a:p>
+        </p:txBody>
+      </p:sp>
+      <p:sp>
+        <p:nvSpPr>
+          <p:cNvPr id="38" name="Kartu 4"/>
+          <p:cNvSpPr/>
+          <p:nvPr/>
+        </p:nvSpPr>
+        <p:spPr>
+          <a:xfrm>
+            <a:off x="640080" y="3575304"/>
+            <a:ext cx="3526536" cy="1627632"/>
+          </a:xfrm>
+          <a:prstGeom prst="roundRect">
+            <a:avLst>
+              <a:gd name="adj" fmla="val 5365"/>
+            </a:avLst>
+          </a:prstGeom>
+          <a:solidFill>
+            <a:schemeClr val="bg1"/>
+          </a:solidFill>
+          <a:ln w="12700">
+            <a:solidFill>
+              <a:schemeClr val="accent6"/>
+            </a:solidFill>
+            <a:prstDash val="solid"/>
+          </a:ln>
+        </p:spPr>
+        <p:txBody>
+          <a:bodyPr/>
+          <a:lstStyle/>
+          <a:p>
+            <a:endParaRPr lang="en-US"/>
+          </a:p>
+        </p:txBody>
+      </p:sp>
+      <p:sp>
+        <p:nvSpPr>
+          <p:cNvPr id="39" name="Status 4"/>
+          <p:cNvSpPr/>
+          <p:nvPr/>
+        </p:nvSpPr>
+        <p:spPr>
+          <a:xfrm>
+            <a:off x="841248" y="3730752"/>
+            <a:ext cx="1188720" cy="246888"/>
+          </a:xfrm>
+          <a:prstGeom prst="roundRect">
+            <a:avLst>
+              <a:gd name="adj" fmla="val 50000"/>
+            </a:avLst>
+          </a:prstGeom>
+          <a:solidFill>
+            <a:srgbClr val="DCEBE6"/>
+          </a:solidFill>
+          <a:ln>
+            <a:solidFill>
+              <a:srgbClr val="DCEBE6"/>
+            </a:solidFill>
+          </a:ln>
+        </p:spPr>
+        <p:txBody>
+          <a:bodyPr wrap="square" lIns="0" tIns="0" rIns="0" bIns="0" rtlCol="0" anchor="ctr"/>
+          <a:lstStyle/>
+          <a:p>
+            <a:pPr marL="0" indent="0" algn="ctr">
+              <a:buNone/>
+            </a:pPr>
+            <a:r>
+              <a:rPr lang="id-ID" altLang="en-US" sz="1100" b="1" dirty="0">
+                <a:solidFill>
+                  <a:schemeClr val="tx1"/>
+                </a:solidFill>
+              </a:rPr>
+              <a:t>Ada di contoh</a:t>
+            </a:r>
+            <a:endParaRPr lang="id-ID" sz="1400" dirty="0"/>
+          </a:p>
+        </p:txBody>
+      </p:sp>
+      <p:sp>
+        <p:nvSpPr>
+          <p:cNvPr id="40" name="Judul 4"/>
+          <p:cNvSpPr txBox="1"/>
+          <p:nvPr/>
+        </p:nvSpPr>
+        <p:spPr>
+          <a:xfrm>
+            <a:off x="841248" y="4078224"/>
+            <a:ext cx="3124200" cy="310896"/>
+          </a:xfrm>
+          <a:prstGeom prst="rect">
+            <a:avLst/>
+          </a:prstGeom>
+          <a:noFill/>
+          <a:ln/>
+        </p:spPr>
+        <p:txBody>
+          <a:bodyPr wrap="square" lIns="0" tIns="0" rIns="0" bIns="0" rtlCol="0" anchor="t"/>
+          <a:lstStyle/>
+          <a:p>
+            <a:pPr marL="0" indent="0">
+              <a:buNone/>
+            </a:pPr>
+            <a:r>
+              <a:rPr lang="id-ID" altLang="en-US" sz="1700" b="1" dirty="0">
+                <a:solidFill>
+                  <a:schemeClr val="tx1"/>
+                </a:solidFill>
+              </a:rPr>
+              <a:t>Bersiap menghadapi peristiwa</a:t>
+            </a:r>
+            <a:endParaRPr lang="id-ID" sz="1500" dirty="0"/>
+          </a:p>
+        </p:txBody>
+      </p:sp>
+      <p:sp>
+        <p:nvSpPr>
+          <p:cNvPr id="41" name="Isi 4"/>
+          <p:cNvSpPr txBox="1"/>
+          <p:nvPr/>
+        </p:nvSpPr>
+        <p:spPr>
+          <a:xfrm>
+            <a:off x="841248" y="4425696"/>
+            <a:ext cx="3124200" cy="713232"/>
+          </a:xfrm>
+          <a:prstGeom prst="rect">
+            <a:avLst/>
+          </a:prstGeom>
+          <a:noFill/>
+          <a:ln/>
+        </p:spPr>
+        <p:txBody>
+          <a:bodyPr wrap="square" lIns="0" tIns="0" rIns="0" bIns="0" rtlCol="0" anchor="t"/>
+          <a:lstStyle/>
+          <a:p>
+            <a:pPr marL="0" indent="0">
+              <a:buNone/>
+            </a:pPr>
+            <a:r>
+              <a:rPr lang="id-ID" altLang="en-US" sz="1300" dirty="0">
+                <a:solidFill>
+                  <a:schemeClr val="tx2"/>
+                </a:solidFill>
+              </a:rPr>
+              <a:t>Berapa besar dampak </a:t>
+            </a:r>
+            <a:r>
+              <a:rPr lang="en-US" altLang="en-US" sz="1300" dirty="0" err="1">
+                <a:solidFill>
+                  <a:schemeClr val="tx2"/>
+                </a:solidFill>
+              </a:rPr>
+              <a:t>cuaca</a:t>
+            </a:r>
+            <a:r>
+              <a:rPr lang="en-US" altLang="en-US" sz="1300" dirty="0">
+                <a:solidFill>
+                  <a:schemeClr val="tx2"/>
+                </a:solidFill>
+              </a:rPr>
+              <a:t> </a:t>
+            </a:r>
+            <a:r>
+              <a:rPr lang="id-ID" altLang="en-US" sz="1300">
+                <a:solidFill>
+                  <a:schemeClr val="tx2"/>
+                </a:solidFill>
+              </a:rPr>
+              <a:t>pada kehadiran, </a:t>
+            </a:r>
+            <a:r>
+              <a:rPr lang="id-ID" altLang="en-US" sz="1300" dirty="0">
+                <a:solidFill>
+                  <a:schemeClr val="tx2"/>
+                </a:solidFill>
+              </a:rPr>
+              <a:t>dan apa yang perlu disiapkan?</a:t>
+            </a:r>
+            <a:endParaRPr lang="id-ID" sz="1300" dirty="0"/>
+          </a:p>
+        </p:txBody>
+      </p:sp>
+      <p:sp>
+        <p:nvSpPr>
+          <p:cNvPr id="42" name="Kartu 5"/>
+          <p:cNvSpPr/>
+          <p:nvPr/>
+        </p:nvSpPr>
+        <p:spPr>
+          <a:xfrm>
+            <a:off x="4331208" y="3575304"/>
+            <a:ext cx="3526536" cy="1627632"/>
+          </a:xfrm>
+          <a:prstGeom prst="roundRect">
+            <a:avLst>
+              <a:gd name="adj" fmla="val 5365"/>
+            </a:avLst>
+          </a:prstGeom>
+          <a:solidFill>
+            <a:schemeClr val="bg1"/>
+          </a:solidFill>
+          <a:ln w="12700">
+            <a:solidFill>
+              <a:schemeClr val="accent6"/>
+            </a:solidFill>
+            <a:prstDash val="solid"/>
+          </a:ln>
+        </p:spPr>
+        <p:txBody>
+          <a:bodyPr/>
+          <a:lstStyle/>
+          <a:p>
+            <a:endParaRPr lang="en-US"/>
+          </a:p>
+        </p:txBody>
+      </p:sp>
+      <p:sp>
+        <p:nvSpPr>
+          <p:cNvPr id="43" name="Status 5"/>
+          <p:cNvSpPr/>
+          <p:nvPr/>
+        </p:nvSpPr>
+        <p:spPr>
+          <a:xfrm>
+            <a:off x="4532376" y="3730752"/>
+            <a:ext cx="1188720" cy="246888"/>
+          </a:xfrm>
+          <a:prstGeom prst="roundRect">
+            <a:avLst>
+              <a:gd name="adj" fmla="val 50000"/>
+            </a:avLst>
+          </a:prstGeom>
+          <a:solidFill>
+            <a:srgbClr val="DCEBE6"/>
+          </a:solidFill>
+          <a:ln>
+            <a:solidFill>
+              <a:srgbClr val="DCEBE6"/>
+            </a:solidFill>
+          </a:ln>
+        </p:spPr>
+        <p:txBody>
+          <a:bodyPr wrap="square" lIns="0" tIns="0" rIns="0" bIns="0" rtlCol="0" anchor="ctr"/>
+          <a:lstStyle/>
+          <a:p>
+            <a:pPr marL="0" indent="0" algn="ctr">
+              <a:buNone/>
+            </a:pPr>
+            <a:r>
+              <a:rPr lang="id-ID" altLang="en-US" sz="1100" b="1" dirty="0">
+                <a:solidFill>
+                  <a:schemeClr val="tx1"/>
+                </a:solidFill>
+              </a:rPr>
+              <a:t>Ada di contoh</a:t>
+            </a:r>
+            <a:endParaRPr lang="id-ID" sz="1400" dirty="0"/>
+          </a:p>
+        </p:txBody>
+      </p:sp>
+      <p:sp>
+        <p:nvSpPr>
+          <p:cNvPr id="44" name="Judul 5"/>
+          <p:cNvSpPr txBox="1"/>
+          <p:nvPr/>
+        </p:nvSpPr>
+        <p:spPr>
+          <a:xfrm>
+            <a:off x="4532376" y="4078224"/>
+            <a:ext cx="3124200" cy="310896"/>
+          </a:xfrm>
+          <a:prstGeom prst="rect">
+            <a:avLst/>
+          </a:prstGeom>
+          <a:noFill/>
+          <a:ln/>
+        </p:spPr>
+        <p:txBody>
+          <a:bodyPr wrap="square" lIns="0" tIns="0" rIns="0" bIns="0" rtlCol="0" anchor="t"/>
+          <a:lstStyle/>
+          <a:p>
+            <a:pPr marL="0" indent="0">
+              <a:buNone/>
+            </a:pPr>
+            <a:r>
+              <a:rPr lang="id-ID" altLang="en-US" sz="1700" b="1" dirty="0">
+                <a:solidFill>
+                  <a:schemeClr val="tx1"/>
+                </a:solidFill>
+              </a:rPr>
+              <a:t>Belajar dari kegiatan</a:t>
+            </a:r>
+            <a:endParaRPr lang="id-ID" sz="1500" dirty="0"/>
+          </a:p>
+        </p:txBody>
+      </p:sp>
+      <p:sp>
+        <p:nvSpPr>
+          <p:cNvPr id="45" name="Isi 5"/>
+          <p:cNvSpPr txBox="1"/>
+          <p:nvPr/>
+        </p:nvSpPr>
+        <p:spPr>
+          <a:xfrm>
+            <a:off x="4532376" y="4425696"/>
+            <a:ext cx="3124200" cy="713232"/>
+          </a:xfrm>
+          <a:prstGeom prst="rect">
+            <a:avLst/>
+          </a:prstGeom>
+          <a:noFill/>
+          <a:ln/>
+        </p:spPr>
+        <p:txBody>
+          <a:bodyPr wrap="square" lIns="0" tIns="0" rIns="0" bIns="0" rtlCol="0" anchor="t"/>
+          <a:lstStyle/>
+          <a:p>
+            <a:pPr marL="0" indent="0">
+              <a:buNone/>
+            </a:pPr>
+            <a:r>
+              <a:rPr lang="id-ID" altLang="en-US" sz="1300" dirty="0">
+                <a:solidFill>
+                  <a:schemeClr val="tx2"/>
+                </a:solidFill>
+              </a:rPr>
+              <a:t>Kegiatan mana yang mencapai target peserta dan biaya, dan apa tindak lanjutnya?</a:t>
+            </a:r>
+            <a:endParaRPr lang="id-ID" sz="1300" dirty="0"/>
+          </a:p>
+        </p:txBody>
+      </p:sp>
+      <p:sp>
+        <p:nvSpPr>
+          <p:cNvPr id="46" name="Kartu 6"/>
+          <p:cNvSpPr/>
+          <p:nvPr/>
+        </p:nvSpPr>
+        <p:spPr>
+          <a:xfrm>
+            <a:off x="8022336" y="3575304"/>
+            <a:ext cx="3526536" cy="1627632"/>
+          </a:xfrm>
+          <a:prstGeom prst="roundRect">
+            <a:avLst>
+              <a:gd name="adj" fmla="val 5365"/>
+            </a:avLst>
+          </a:prstGeom>
+          <a:solidFill>
+            <a:schemeClr val="bg1"/>
+          </a:solidFill>
+          <a:ln w="12700">
+            <a:solidFill>
+              <a:schemeClr val="accent6"/>
+            </a:solidFill>
+            <a:prstDash val="solid"/>
+          </a:ln>
+        </p:spPr>
+        <p:txBody>
+          <a:bodyPr/>
+          <a:lstStyle/>
+          <a:p>
+            <a:endParaRPr lang="en-US"/>
+          </a:p>
+        </p:txBody>
+      </p:sp>
+      <p:sp>
+        <p:nvSpPr>
+          <p:cNvPr id="47" name="Status 6"/>
+          <p:cNvSpPr/>
+          <p:nvPr/>
+        </p:nvSpPr>
+        <p:spPr>
+          <a:xfrm>
+            <a:off x="8223504" y="3730752"/>
+            <a:ext cx="1024128" cy="246888"/>
+          </a:xfrm>
+          <a:prstGeom prst="roundRect">
+            <a:avLst>
+              <a:gd name="adj" fmla="val 50000"/>
+            </a:avLst>
+          </a:prstGeom>
+          <a:noFill/>
+          <a:ln w="12700">
+            <a:solidFill>
+              <a:schemeClr val="accent3"/>
+            </a:solidFill>
+          </a:ln>
+        </p:spPr>
+        <p:txBody>
+          <a:bodyPr wrap="square" lIns="0" tIns="0" rIns="0" bIns="0" rtlCol="0" anchor="ctr"/>
+          <a:lstStyle/>
+          <a:p>
+            <a:pPr marL="0" indent="0" algn="ctr">
+              <a:buNone/>
+            </a:pPr>
+            <a:r>
+              <a:rPr lang="id-ID" altLang="en-US" sz="1100" b="1" dirty="0">
+                <a:solidFill>
+                  <a:schemeClr val="tx1"/>
+                </a:solidFill>
+              </a:rPr>
+              <a:t>Kemungkinan</a:t>
+            </a:r>
+            <a:endParaRPr lang="id-ID" sz="1400" dirty="0"/>
+          </a:p>
+        </p:txBody>
+      </p:sp>
+      <p:sp>
+        <p:nvSpPr>
+          <p:cNvPr id="48" name="Judul 6"/>
+          <p:cNvSpPr txBox="1"/>
+          <p:nvPr/>
+        </p:nvSpPr>
+        <p:spPr>
+          <a:xfrm>
+            <a:off x="8223504" y="4078224"/>
+            <a:ext cx="3124200" cy="310896"/>
+          </a:xfrm>
+          <a:prstGeom prst="rect">
+            <a:avLst/>
+          </a:prstGeom>
+          <a:noFill/>
+          <a:ln/>
+        </p:spPr>
+        <p:txBody>
+          <a:bodyPr wrap="square" lIns="0" tIns="0" rIns="0" bIns="0" rtlCol="0" anchor="t"/>
+          <a:lstStyle/>
+          <a:p>
+            <a:pPr marL="0" indent="0">
+              <a:buNone/>
+            </a:pPr>
+            <a:r>
+              <a:rPr lang="id-ID" altLang="en-US" sz="1700" b="1" dirty="0">
+                <a:solidFill>
+                  <a:schemeClr val="tx1"/>
+                </a:solidFill>
+              </a:rPr>
+              <a:t>Menjangkau lebih luas</a:t>
+            </a:r>
+            <a:endParaRPr lang="id-ID" sz="1500" dirty="0"/>
+          </a:p>
+        </p:txBody>
+      </p:sp>
+      <p:sp>
+        <p:nvSpPr>
+          <p:cNvPr id="49" name="Isi 6"/>
+          <p:cNvSpPr txBox="1"/>
+          <p:nvPr/>
+        </p:nvSpPr>
+        <p:spPr>
+          <a:xfrm>
+            <a:off x="8223504" y="4425696"/>
+            <a:ext cx="3124200" cy="713232"/>
+          </a:xfrm>
+          <a:prstGeom prst="rect">
+            <a:avLst/>
+          </a:prstGeom>
+          <a:noFill/>
+          <a:ln/>
+        </p:spPr>
+        <p:txBody>
+          <a:bodyPr wrap="square" lIns="0" tIns="0" rIns="0" bIns="0" rtlCol="0" anchor="t"/>
+          <a:lstStyle/>
+          <a:p>
+            <a:pPr marL="0" indent="0">
+              <a:buNone/>
+            </a:pPr>
+            <a:r>
+              <a:rPr lang="id-ID" altLang="en-US" sz="1300" dirty="0">
+                <a:solidFill>
+                  <a:schemeClr val="tx2"/>
+                </a:solidFill>
+              </a:rPr>
+              <a:t>Lingkungan mana yang masih jauh dari layanan paroki? </a:t>
+            </a:r>
+            <a:r>
+              <a:rPr lang="en-US" altLang="en-US" sz="1300" dirty="0" err="1">
+                <a:solidFill>
+                  <a:schemeClr val="tx2"/>
+                </a:solidFill>
+              </a:rPr>
+              <a:t>Pemetaan</a:t>
+            </a:r>
+            <a:r>
+              <a:rPr lang="en-US" altLang="en-US" sz="1300" dirty="0">
+                <a:solidFill>
+                  <a:schemeClr val="tx2"/>
+                </a:solidFill>
+              </a:rPr>
+              <a:t> yang </a:t>
+            </a:r>
+            <a:r>
+              <a:rPr lang="en-US" altLang="en-US" sz="1300" dirty="0" err="1">
+                <a:solidFill>
+                  <a:schemeClr val="tx2"/>
+                </a:solidFill>
+              </a:rPr>
+              <a:t>tepat</a:t>
+            </a:r>
+            <a:r>
+              <a:rPr lang="id-ID" altLang="en-US" sz="1300" dirty="0">
+                <a:solidFill>
+                  <a:schemeClr val="tx2"/>
+                </a:solidFill>
+              </a:rPr>
+              <a:t> membantu kita melihatnya.</a:t>
+            </a:r>
+            <a:endParaRPr lang="id-ID" sz="1300" dirty="0"/>
+          </a:p>
+        </p:txBody>
+      </p:sp>
+      <p:sp>
+        <p:nvSpPr>
+          <p:cNvPr id="50" name="Kotak pesan"/>
+          <p:cNvSpPr/>
+          <p:nvPr/>
+        </p:nvSpPr>
+        <p:spPr>
+          <a:xfrm>
+            <a:off x="640080" y="5440680"/>
+            <a:ext cx="10911535" cy="804672"/>
+          </a:xfrm>
+          <a:prstGeom prst="roundRect">
+            <a:avLst>
+              <a:gd name="adj" fmla="val 14118"/>
+            </a:avLst>
+          </a:prstGeom>
+          <a:solidFill>
+            <a:schemeClr val="tx1"/>
+          </a:solidFill>
+          <a:ln w="12700">
+            <a:solidFill>
+              <a:schemeClr val="tx1"/>
+            </a:solidFill>
+            <a:prstDash val="solid"/>
+          </a:ln>
+        </p:spPr>
+        <p:txBody>
+          <a:bodyPr/>
+          <a:lstStyle/>
+          <a:p>
+            <a:endParaRPr lang="en-US"/>
+          </a:p>
+        </p:txBody>
+      </p:sp>
+      <p:sp>
+        <p:nvSpPr>
+          <p:cNvPr id="51" name="Teks pesan"/>
+          <p:cNvSpPr txBox="1"/>
+          <p:nvPr/>
+        </p:nvSpPr>
+        <p:spPr>
+          <a:xfrm>
+            <a:off x="960120" y="5440680"/>
+            <a:ext cx="10271455" cy="804672"/>
+          </a:xfrm>
+          <a:prstGeom prst="rect">
+            <a:avLst/>
+          </a:prstGeom>
+          <a:noFill/>
+          <a:ln/>
+        </p:spPr>
+        <p:txBody>
+          <a:bodyPr wrap="square" lIns="0" tIns="0" rIns="0" bIns="0" rtlCol="0" anchor="ctr"/>
+          <a:lstStyle/>
+          <a:p>
+            <a:pPr marL="0" indent="0">
+              <a:buNone/>
+            </a:pPr>
+            <a:r>
+              <a:rPr lang="id-ID" altLang="en-US" sz="1600" dirty="0">
+                <a:solidFill>
+                  <a:schemeClr val="bg2"/>
+                </a:solidFill>
+              </a:rPr>
+              <a:t>Semua ini mungkin bila kita tahu apa yang ingin kita capai, lalu menata data untuk itu.</a:t>
+            </a:r>
+            <a:endParaRPr lang="id-ID" sz="1600" dirty="0"/>
+          </a:p>
+          <a:p>
+            <a:pPr marL="0" indent="0">
+              <a:buNone/>
+            </a:pPr>
+            <a:r>
+              <a:rPr lang="id-ID" altLang="en-US" sz="1200" dirty="0">
+                <a:solidFill>
+                  <a:schemeClr val="bg2"/>
+                </a:solidFill>
+              </a:rPr>
+              <a:t>Ada di contoh: sudah diperlihatkan dengan data simulasi. Kemungkinan: belum dibangun, perlu dibahas bersama.</a:t>
+            </a:r>
+            <a:endParaRPr lang="id-ID" sz="1600" dirty="0"/>
+          </a:p>
+        </p:txBody>
+      </p:sp>
+      <p:sp>
+        <p:nvSpPr>
+          <p:cNvPr id="52" name="Penanda langkah"/>
+          <p:cNvSpPr txBox="1"/>
+          <p:nvPr/>
+        </p:nvSpPr>
+        <p:spPr>
+          <a:xfrm>
+            <a:off x="5669280" y="6355080"/>
+            <a:ext cx="5212080" cy="274320"/>
+          </a:xfrm>
+          <a:prstGeom prst="rect">
+            <a:avLst/>
+          </a:prstGeom>
+          <a:noFill/>
+          <a:ln/>
+        </p:spPr>
+        <p:txBody>
+          <a:bodyPr wrap="square" lIns="0" tIns="0" rIns="0" bIns="0" rtlCol="0" anchor="ctr"/>
+          <a:lstStyle/>
+          <a:p>
+            <a:pPr marL="0" indent="0" algn="r">
+              <a:buNone/>
+            </a:pPr>
+            <a:r>
+              <a:rPr lang="id-ID" altLang="en-US" sz="1100" dirty="0">
+                <a:solidFill>
+                  <a:schemeClr val="tx2"/>
+                </a:solidFill>
+              </a:rPr>
+              <a:t>1 Kumpulkan  ·  2 Bagikan  ·  </a:t>
+            </a:r>
+            <a:r>
+              <a:rPr lang="id-ID" altLang="en-US" sz="1100" b="1" dirty="0">
+                <a:solidFill>
+                  <a:schemeClr val="accent3"/>
+                </a:solidFill>
+              </a:rPr>
+              <a:t>3 Pahami</a:t>
+            </a:r>
+            <a:endParaRPr lang="id-ID" sz="1100" dirty="0"/>
+          </a:p>
+        </p:txBody>
+      </p:sp>
+    </p:spTree>
+  </p:cSld>
+  <p:clrMapOvr>
+    <a:masterClrMapping/>
+  </p:clrMapOvr>
+</p:sld>
+</file>
+
+<file path=ppt/slides/slide13.xml><?xml version="1.0" encoding="utf-8"?>
 <p:sld xmlns:a="http://schemas.openxmlformats.org/drawingml/2006/main" xmlns:r="http://schemas.openxmlformats.org/officeDocument/2006/relationships" xmlns:p="http://schemas.openxmlformats.org/presentationml/2006/main">
   <p:cSld name="Slide 11">
     <p:spTree>
@@ -5136,7 +6874,7 @@
           </a:prstGeom>
           <a:extLst>
             <a:ext uri="{C572A759-6A51-4108-AA02-DFA0A04FC94B}">
-              <ma14:wrappingTextBoxFlag xmlns:ma14="http://schemas.microsoft.com/office/mac/drawingml/2011/main" xmlns="" val="0"/>
+              <ma14:wrappingTextBoxFlag xmlns="" xmlns:ma14="http://schemas.microsoft.com/office/mac/drawingml/2011/main" val="0"/>
             </a:ext>
           </a:extLst>
         </p:spPr>
@@ -5155,7 +6893,7 @@
             <a:pPr algn="r"/>
             <a:fld id="{F7021451-1387-4CA6-816F-3879F97B5CBC}" type="slidenum">
               <a:rPr lang="en-US" b="0"/>
-              <a:t>11</a:t>
+              <a:t>13</a:t>
             </a:fld>
             <a:endParaRPr lang="en-US"/>
           </a:p>
@@ -5169,7 +6907,7 @@
 </p:sld>
 </file>
 
-<file path=ppt/slides/slide12.xml><?xml version="1.0" encoding="utf-8"?>
+<file path=ppt/slides/slide14.xml><?xml version="1.0" encoding="utf-8"?>
 <p:sld xmlns:a="http://schemas.openxmlformats.org/drawingml/2006/main" xmlns:r="http://schemas.openxmlformats.org/officeDocument/2006/relationships" xmlns:p="http://schemas.openxmlformats.org/presentationml/2006/main">
   <p:cSld name="Slide 12">
     <p:spTree>
@@ -5371,7 +7109,6 @@
               <a:rPr lang="id-ID" sz="1500" dirty="0"/>
               <a:t>Apa yang ingin kita capai dan pahami dengan data kita?</a:t>
             </a:r>
-            <a:endParaRPr lang="id-ID" sz="1500" dirty="0"/>
           </a:p>
           <a:p>
             <a:pPr marL="342900" indent="-342900">
@@ -5467,7 +7204,7 @@
           </a:prstGeom>
           <a:extLst>
             <a:ext uri="{C572A759-6A51-4108-AA02-DFA0A04FC94B}">
-              <ma14:wrappingTextBoxFlag xmlns:ma14="http://schemas.microsoft.com/office/mac/drawingml/2011/main" xmlns="" val="0"/>
+              <ma14:wrappingTextBoxFlag xmlns="" xmlns:ma14="http://schemas.microsoft.com/office/mac/drawingml/2011/main" val="0"/>
             </a:ext>
           </a:extLst>
         </p:spPr>
@@ -5486,7 +7223,7 @@
             <a:pPr algn="r"/>
             <a:fld id="{F7021451-1387-4CA6-816F-3879F97B5CBC}" type="slidenum">
               <a:rPr lang="en-US" b="0"/>
-              <a:t>12</a:t>
+              <a:t>14</a:t>
             </a:fld>
             <a:endParaRPr lang="en-US"/>
           </a:p>
@@ -5517,7 +7254,7 @@
               <a:buNone/>
             </a:pPr>
             <a:r>
-              <a:rPr lang="id-ID" altLang="en-US" sz="1800" dirty="0" b="1">
+              <a:rPr lang="id-ID" altLang="en-US" sz="1800" b="1" dirty="0">
                 <a:solidFill>
                   <a:schemeClr val="tx2"/>
                 </a:solidFill>
@@ -5536,7 +7273,7 @@
 </p:sld>
 </file>
 
-<file path=ppt/slides/slide13.xml><?xml version="1.0" encoding="utf-8"?>
+<file path=ppt/slides/slide15.xml><?xml version="1.0" encoding="utf-8"?>
 <p:sld xmlns:a="http://schemas.openxmlformats.org/drawingml/2006/main" xmlns:r="http://schemas.openxmlformats.org/officeDocument/2006/relationships" xmlns:p="http://schemas.openxmlformats.org/presentationml/2006/main">
   <p:cSld name="Slide 14">
     <p:spTree>
@@ -5669,8 +7406,8 @@
 </p:sld>
 </file>
 
-<file path=ppt/slides/slide14.xml><?xml version="1.0" encoding="utf-8"?>
-<p:sld xmlns:a="http://schemas.openxmlformats.org/drawingml/2006/main" xmlns:p="http://schemas.openxmlformats.org/presentationml/2006/main" xmlns:r="http://schemas.openxmlformats.org/officeDocument/2006/relationships">
+<file path=ppt/slides/slide2.xml><?xml version="1.0" encoding="utf-8"?>
+<p:sld xmlns:a="http://schemas.openxmlformats.org/drawingml/2006/main" xmlns:r="http://schemas.openxmlformats.org/officeDocument/2006/relationships" xmlns:p="http://schemas.openxmlformats.org/presentationml/2006/main">
   <p:cSld>
     <p:spTree>
       <p:nvGrpSpPr>
@@ -5678,7 +7415,14 @@
         <p:cNvGrpSpPr/>
         <p:nvPr/>
       </p:nvGrpSpPr>
-      <p:grpSpPr/>
+      <p:grpSpPr>
+        <a:xfrm>
+          <a:off x="0" y="0"/>
+          <a:ext cx="0" cy="0"/>
+          <a:chOff x="0" y="0"/>
+          <a:chExt cx="0" cy="0"/>
+        </a:xfrm>
+      </p:grpSpPr>
       <p:sp>
         <p:nvSpPr>
           <p:cNvPr id="3" name="Text 0"/>
@@ -5753,7 +7497,7 @@
                   <a:schemeClr val="tx1"/>
                 </a:solidFill>
               </a:rPr>
-              <a:t>Bank informasi: apa yang kita bangun?</a:t>
+              <a:t>Bank informasi?</a:t>
             </a:r>
             <a:endParaRPr lang="id-ID" sz="3400" dirty="0"/>
           </a:p>
@@ -6113,7 +7857,7 @@
           </a:prstGeom>
           <a:extLst>
             <a:ext uri="{C572A759-6A51-4108-AA02-DFA0A04FC94B}">
-              <ma14:wrappingTextBoxFlag xmlns:ma14="http://schemas.microsoft.com/office/mac/drawingml/2011/main" xmlns="" val="0"/>
+              <ma14:wrappingTextBoxFlag xmlns="" xmlns:ma14="http://schemas.microsoft.com/office/mac/drawingml/2011/main" val="0"/>
             </a:ext>
           </a:extLst>
         </p:spPr>
@@ -6132,7 +7876,7 @@
             <a:pPr algn="r"/>
             <a:fld id="{F7021451-1387-4CA6-816F-3879F97B5CBC}" type="slidenum">
               <a:rPr lang="en-US" b="0"/>
-              <a:t>6</a:t>
+              <a:t>2</a:t>
             </a:fld>
             <a:endParaRPr lang="en-US"/>
           </a:p>
@@ -6163,7 +7907,7 @@
               <a:buNone/>
             </a:pPr>
             <a:r>
-              <a:rPr lang="id-ID" altLang="en-US" sz="1800" dirty="0" b="1">
+              <a:rPr lang="id-ID" altLang="en-US" sz="1800" b="1" dirty="0">
                 <a:solidFill>
                   <a:schemeClr val="tx1"/>
                 </a:solidFill>
@@ -6218,1174 +7962,7 @@
 </p:sld>
 </file>
 
-<file path=ppt/slides/slide15.xml><?xml version="1.0" encoding="utf-8"?>
-<p:sld xmlns:a="http://schemas.openxmlformats.org/drawingml/2006/main" xmlns:p="http://schemas.openxmlformats.org/presentationml/2006/main" xmlns:r="http://schemas.openxmlformats.org/officeDocument/2006/relationships">
-  <p:cSld>
-    <p:spTree>
-      <p:nvGrpSpPr>
-        <p:cNvPr id="1" name=""/>
-        <p:cNvGrpSpPr/>
-        <p:nvPr/>
-      </p:nvGrpSpPr>
-      <p:grpSpPr/>
-      <p:sp>
-        <p:nvSpPr>
-          <p:cNvPr id="3" name="Text 0"/>
-          <p:cNvSpPr>
-            <a:spLocks noGrp="1"/>
-          </p:cNvSpPr>
-          <p:nvPr>
-            <p:ph type="body" idx="100" hasCustomPrompt="1"/>
-          </p:nvPr>
-        </p:nvSpPr>
-        <p:spPr>
-          <a:xfrm>
-            <a:off x="640080" y="502920"/>
-            <a:ext cx="10911535" cy="320040"/>
-          </a:xfrm>
-          <a:prstGeom prst="rect">
-            <a:avLst/>
-          </a:prstGeom>
-          <a:noFill/>
-          <a:ln/>
-        </p:spPr>
-        <p:txBody>
-          <a:bodyPr wrap="square" lIns="0" tIns="0" rIns="0" bIns="0" rtlCol="0" anchor="t"/>
-          <a:lstStyle/>
-          <a:p>
-            <a:pPr marL="0" indent="0" algn="l">
-              <a:buNone/>
-            </a:pPr>
-            <a:r>
-              <a:rPr lang="id-ID" altLang="en-US" sz="1200" b="1" kern="0" spc="200" dirty="0">
-                <a:solidFill>
-                  <a:schemeClr val="accent3"/>
-                </a:solidFill>
-              </a:rPr>
-              <a:t>LANGKAH 3 · PAHAMI · KEMUNGKINAN</a:t>
-            </a:r>
-            <a:endParaRPr lang="id-ID" sz="1200" dirty="0"/>
-          </a:p>
-        </p:txBody>
-      </p:sp>
-      <p:sp>
-        <p:nvSpPr>
-          <p:cNvPr id="4" name="Text 0"/>
-          <p:cNvSpPr>
-            <a:spLocks noGrp="1"/>
-          </p:cNvSpPr>
-          <p:nvPr>
-            <p:ph type="title" idx="101" hasCustomPrompt="1"/>
-          </p:nvPr>
-        </p:nvSpPr>
-        <p:spPr>
-          <a:xfrm>
-            <a:off x="640080" y="841248"/>
-            <a:ext cx="10911535" cy="822960"/>
-          </a:xfrm>
-          <a:prstGeom prst="rect">
-            <a:avLst/>
-          </a:prstGeom>
-          <a:noFill/>
-          <a:ln/>
-        </p:spPr>
-        <p:txBody>
-          <a:bodyPr wrap="square" lIns="0" tIns="0" rIns="0" bIns="0" rtlCol="0" anchor="t"/>
-          <a:lstStyle/>
-          <a:p>
-            <a:pPr marL="0" indent="0" algn="l">
-              <a:buNone/>
-            </a:pPr>
-            <a:r>
-              <a:rPr lang="id-ID" altLang="en-US" sz="3400" b="1" dirty="0">
-                <a:solidFill>
-                  <a:schemeClr val="tx1"/>
-                </a:solidFill>
-              </a:rPr>
-              <a:t>Apa saja yang bisa kita capai</a:t>
-            </a:r>
-            <a:endParaRPr lang="id-ID" sz="3400" dirty="0"/>
-          </a:p>
-        </p:txBody>
-      </p:sp>
-      <p:sp>
-        <p:nvSpPr>
-          <p:cNvPr id="25" name="Slide Number Placeholder 0"/>
-          <p:cNvSpPr>
-            <a:spLocks noGrp="1"/>
-          </p:cNvSpPr>
-          <p:nvPr>
-            <p:ph type="sldNum" sz="quarter" idx="4294967295"/>
-          </p:nvPr>
-        </p:nvSpPr>
-        <p:spPr>
-          <a:xfrm>
-            <a:off x="11000232" y="6355080"/>
-            <a:ext cx="548640" cy="274320"/>
-          </a:xfrm>
-          <a:prstGeom prst="rect">
-            <a:avLst/>
-          </a:prstGeom>
-          <a:extLst>
-            <a:ext uri="{C572A759-6A51-4108-AA02-DFA0A04FC94B}">
-              <ma14:wrappingTextBoxFlag xmlns:ma14="http://schemas.microsoft.com/office/mac/drawingml/2011/main" xmlns="" val="0"/>
-            </a:ext>
-          </a:extLst>
-        </p:spPr>
-        <p:txBody>
-          <a:bodyPr/>
-          <a:lstStyle>
-            <a:lvl1pPr>
-              <a:defRPr sz="1100">
-                <a:solidFill>
-                  <a:schemeClr val="tx2"/>
-                </a:solidFill>
-              </a:defRPr>
-            </a:lvl1pPr>
-          </a:lstStyle>
-          <a:p>
-            <a:pPr algn="r"/>
-            <a:fld id="{F7021451-1387-4CA6-816F-3879F97B5CBC}" type="slidenum">
-              <a:rPr lang="en-US" b="0"/>
-              <a:t>10</a:t>
-            </a:fld>
-            <a:endParaRPr lang="en-US"/>
-          </a:p>
-        </p:txBody>
-      </p:sp>
-      <p:sp>
-        <p:nvSpPr>
-          <p:cNvPr id="26" name="Kartu 1"/>
-          <p:cNvSpPr/>
-          <p:nvPr/>
-        </p:nvSpPr>
-        <p:spPr>
-          <a:xfrm>
-            <a:off x="640080" y="1783080"/>
-            <a:ext cx="3526536" cy="1627632"/>
-          </a:xfrm>
-          <a:prstGeom prst="roundRect">
-            <a:avLst>
-              <a:gd name="adj" fmla="val 5365"/>
-            </a:avLst>
-          </a:prstGeom>
-          <a:solidFill>
-            <a:schemeClr val="bg1"/>
-          </a:solidFill>
-          <a:ln w="12700">
-            <a:solidFill>
-              <a:schemeClr val="accent6"/>
-            </a:solidFill>
-            <a:prstDash val="solid"/>
-          </a:ln>
-        </p:spPr>
-        <p:txBody>
-          <a:bodyPr/>
-          <a:lstStyle/>
-          <a:p>
-            <a:endParaRPr lang="en-US"/>
-          </a:p>
-        </p:txBody>
-      </p:sp>
-      <p:sp>
-        <p:nvSpPr>
-          <p:cNvPr id="27" name="Status 1"/>
-          <p:cNvSpPr/>
-          <p:nvPr/>
-        </p:nvSpPr>
-        <p:spPr>
-          <a:xfrm>
-            <a:off x="841248" y="1938528"/>
-            <a:ext cx="1188720" cy="246888"/>
-          </a:xfrm>
-          <a:prstGeom prst="roundRect">
-            <a:avLst>
-              <a:gd name="adj" fmla="val 50000"/>
-            </a:avLst>
-          </a:prstGeom>
-          <a:solidFill>
-            <a:srgbClr val="DCEBE6"/>
-          </a:solidFill>
-          <a:ln>
-            <a:solidFill>
-              <a:srgbClr val="DCEBE6"/>
-            </a:solidFill>
-          </a:ln>
-        </p:spPr>
-        <p:txBody>
-          <a:bodyPr wrap="square" lIns="0" tIns="0" rIns="0" bIns="0" rtlCol="0" anchor="ctr"/>
-          <a:lstStyle/>
-          <a:p>
-            <a:pPr marL="0" indent="0" algn="ctr">
-              <a:buNone/>
-            </a:pPr>
-            <a:r>
-              <a:rPr lang="id-ID" altLang="en-US" sz="1100" b="1" dirty="0">
-                <a:solidFill>
-                  <a:schemeClr val="tx1"/>
-                </a:solidFill>
-              </a:rPr>
-              <a:t>Ada di contoh</a:t>
-            </a:r>
-            <a:endParaRPr lang="id-ID" sz="1400" dirty="0"/>
-          </a:p>
-        </p:txBody>
-      </p:sp>
-      <p:sp>
-        <p:nvSpPr>
-          <p:cNvPr id="28" name="Judul 1"/>
-          <p:cNvSpPr txBox="1"/>
-          <p:nvPr/>
-        </p:nvSpPr>
-        <p:spPr>
-          <a:xfrm>
-            <a:off x="841248" y="2286000"/>
-            <a:ext cx="3124200" cy="310896"/>
-          </a:xfrm>
-          <a:prstGeom prst="rect">
-            <a:avLst/>
-          </a:prstGeom>
-          <a:noFill/>
-          <a:ln/>
-        </p:spPr>
-        <p:txBody>
-          <a:bodyPr wrap="square" lIns="0" tIns="0" rIns="0" bIns="0" rtlCol="0" anchor="t"/>
-          <a:lstStyle/>
-          <a:p>
-            <a:pPr marL="0" indent="0">
-              <a:buNone/>
-            </a:pPr>
-            <a:r>
-              <a:rPr lang="id-ID" altLang="en-US" sz="1700" b="1" dirty="0">
-                <a:solidFill>
-                  <a:schemeClr val="tx1"/>
-                </a:solidFill>
-              </a:rPr>
-              <a:t>Mendengar umat</a:t>
-            </a:r>
-            <a:endParaRPr lang="id-ID" sz="1500" dirty="0"/>
-          </a:p>
-        </p:txBody>
-      </p:sp>
-      <p:sp>
-        <p:nvSpPr>
-          <p:cNvPr id="29" name="Isi 1"/>
-          <p:cNvSpPr txBox="1"/>
-          <p:nvPr/>
-        </p:nvSpPr>
-        <p:spPr>
-          <a:xfrm>
-            <a:off x="841248" y="2633472"/>
-            <a:ext cx="3124200" cy="713232"/>
-          </a:xfrm>
-          <a:prstGeom prst="rect">
-            <a:avLst/>
-          </a:prstGeom>
-          <a:noFill/>
-          <a:ln/>
-        </p:spPr>
-        <p:txBody>
-          <a:bodyPr wrap="square" lIns="0" tIns="0" rIns="0" bIns="0" rtlCol="0" anchor="t"/>
-          <a:lstStyle/>
-          <a:p>
-            <a:pPr marL="0" indent="0">
-              <a:buNone/>
-            </a:pPr>
-            <a:r>
-              <a:rPr lang="id-ID" altLang="en-US" sz="1300" dirty="0">
-                <a:solidFill>
-                  <a:schemeClr val="tx2"/>
-                </a:solidFill>
-              </a:rPr>
-              <a:t>Kelompok usia mana yang kurang terjangkau, dan apa kata survei tentang kebutuhan mereka?</a:t>
-            </a:r>
-            <a:endParaRPr lang="id-ID" sz="1300" dirty="0"/>
-          </a:p>
-        </p:txBody>
-      </p:sp>
-      <p:sp>
-        <p:nvSpPr>
-          <p:cNvPr id="30" name="Kartu 2"/>
-          <p:cNvSpPr/>
-          <p:nvPr/>
-        </p:nvSpPr>
-        <p:spPr>
-          <a:xfrm>
-            <a:off x="4331208" y="1783080"/>
-            <a:ext cx="3526536" cy="1627632"/>
-          </a:xfrm>
-          <a:prstGeom prst="roundRect">
-            <a:avLst>
-              <a:gd name="adj" fmla="val 5365"/>
-            </a:avLst>
-          </a:prstGeom>
-          <a:solidFill>
-            <a:schemeClr val="bg1"/>
-          </a:solidFill>
-          <a:ln w="12700">
-            <a:solidFill>
-              <a:schemeClr val="accent6"/>
-            </a:solidFill>
-            <a:prstDash val="solid"/>
-          </a:ln>
-        </p:spPr>
-        <p:txBody>
-          <a:bodyPr/>
-          <a:lstStyle/>
-          <a:p>
-            <a:endParaRPr lang="en-US"/>
-          </a:p>
-        </p:txBody>
-      </p:sp>
-      <p:sp>
-        <p:nvSpPr>
-          <p:cNvPr id="31" name="Status 2"/>
-          <p:cNvSpPr/>
-          <p:nvPr/>
-        </p:nvSpPr>
-        <p:spPr>
-          <a:xfrm>
-            <a:off x="4532376" y="1938528"/>
-            <a:ext cx="1024128" cy="246888"/>
-          </a:xfrm>
-          <a:prstGeom prst="roundRect">
-            <a:avLst>
-              <a:gd name="adj" fmla="val 50000"/>
-            </a:avLst>
-          </a:prstGeom>
-          <a:noFill/>
-          <a:ln w="12700">
-            <a:solidFill>
-              <a:schemeClr val="accent3"/>
-            </a:solidFill>
-          </a:ln>
-        </p:spPr>
-        <p:txBody>
-          <a:bodyPr wrap="square" lIns="0" tIns="0" rIns="0" bIns="0" rtlCol="0" anchor="ctr"/>
-          <a:lstStyle/>
-          <a:p>
-            <a:pPr marL="0" indent="0" algn="ctr">
-              <a:buNone/>
-            </a:pPr>
-            <a:r>
-              <a:rPr lang="id-ID" altLang="en-US" sz="1100" b="1" dirty="0">
-                <a:solidFill>
-                  <a:schemeClr val="tx1"/>
-                </a:solidFill>
-              </a:rPr>
-              <a:t>Kemungkinan</a:t>
-            </a:r>
-            <a:endParaRPr lang="id-ID" sz="1400" dirty="0"/>
-          </a:p>
-        </p:txBody>
-      </p:sp>
-      <p:sp>
-        <p:nvSpPr>
-          <p:cNvPr id="32" name="Judul 2"/>
-          <p:cNvSpPr txBox="1"/>
-          <p:nvPr/>
-        </p:nvSpPr>
-        <p:spPr>
-          <a:xfrm>
-            <a:off x="4532376" y="2286000"/>
-            <a:ext cx="3124200" cy="310896"/>
-          </a:xfrm>
-          <a:prstGeom prst="rect">
-            <a:avLst/>
-          </a:prstGeom>
-          <a:noFill/>
-          <a:ln/>
-        </p:spPr>
-        <p:txBody>
-          <a:bodyPr wrap="square" lIns="0" tIns="0" rIns="0" bIns="0" rtlCol="0" anchor="t"/>
-          <a:lstStyle/>
-          <a:p>
-            <a:pPr marL="0" indent="0">
-              <a:buNone/>
-            </a:pPr>
-            <a:r>
-              <a:rPr lang="id-ID" altLang="en-US" sz="1700" b="1" dirty="0">
-                <a:solidFill>
-                  <a:schemeClr val="tx1"/>
-                </a:solidFill>
-              </a:rPr>
-              <a:t>Menata pelayanan Misa</a:t>
-            </a:r>
-            <a:endParaRPr lang="id-ID" sz="1500" dirty="0"/>
-          </a:p>
-        </p:txBody>
-      </p:sp>
-      <p:sp>
-        <p:nvSpPr>
-          <p:cNvPr id="33" name="Isi 2"/>
-          <p:cNvSpPr txBox="1"/>
-          <p:nvPr/>
-        </p:nvSpPr>
-        <p:spPr>
-          <a:xfrm>
-            <a:off x="4532376" y="2633472"/>
-            <a:ext cx="3124200" cy="713232"/>
-          </a:xfrm>
-          <a:prstGeom prst="rect">
-            <a:avLst/>
-          </a:prstGeom>
-          <a:noFill/>
-          <a:ln/>
-        </p:spPr>
-        <p:txBody>
-          <a:bodyPr wrap="square" lIns="0" tIns="0" rIns="0" bIns="0" rtlCol="0" anchor="t"/>
-          <a:lstStyle/>
-          <a:p>
-            <a:pPr marL="0" indent="0">
-              <a:buNone/>
-            </a:pPr>
-            <a:r>
-              <a:rPr lang="id-ID" altLang="en-US" sz="1300" dirty="0">
-                <a:solidFill>
-                  <a:schemeClr val="tx2"/>
-                </a:solidFill>
-              </a:rPr>
-              <a:t>Jadwal dan jumlah petugas mana yang perlu disesuaikan dengan kehadiran umat?</a:t>
-            </a:r>
-            <a:endParaRPr lang="id-ID" sz="1300" dirty="0"/>
-          </a:p>
-        </p:txBody>
-      </p:sp>
-      <p:sp>
-        <p:nvSpPr>
-          <p:cNvPr id="34" name="Kartu 3"/>
-          <p:cNvSpPr/>
-          <p:nvPr/>
-        </p:nvSpPr>
-        <p:spPr>
-          <a:xfrm>
-            <a:off x="8022336" y="1783080"/>
-            <a:ext cx="3526536" cy="1627632"/>
-          </a:xfrm>
-          <a:prstGeom prst="roundRect">
-            <a:avLst>
-              <a:gd name="adj" fmla="val 5365"/>
-            </a:avLst>
-          </a:prstGeom>
-          <a:solidFill>
-            <a:schemeClr val="bg1"/>
-          </a:solidFill>
-          <a:ln w="12700">
-            <a:solidFill>
-              <a:schemeClr val="accent6"/>
-            </a:solidFill>
-            <a:prstDash val="solid"/>
-          </a:ln>
-        </p:spPr>
-        <p:txBody>
-          <a:bodyPr/>
-          <a:lstStyle/>
-          <a:p>
-            <a:endParaRPr lang="en-US"/>
-          </a:p>
-        </p:txBody>
-      </p:sp>
-      <p:sp>
-        <p:nvSpPr>
-          <p:cNvPr id="35" name="Status 3"/>
-          <p:cNvSpPr/>
-          <p:nvPr/>
-        </p:nvSpPr>
-        <p:spPr>
-          <a:xfrm>
-            <a:off x="8223504" y="1938528"/>
-            <a:ext cx="1188720" cy="246888"/>
-          </a:xfrm>
-          <a:prstGeom prst="roundRect">
-            <a:avLst>
-              <a:gd name="adj" fmla="val 50000"/>
-            </a:avLst>
-          </a:prstGeom>
-          <a:solidFill>
-            <a:srgbClr val="DCEBE6"/>
-          </a:solidFill>
-          <a:ln>
-            <a:solidFill>
-              <a:srgbClr val="DCEBE6"/>
-            </a:solidFill>
-          </a:ln>
-        </p:spPr>
-        <p:txBody>
-          <a:bodyPr wrap="square" lIns="0" tIns="0" rIns="0" bIns="0" rtlCol="0" anchor="ctr"/>
-          <a:lstStyle/>
-          <a:p>
-            <a:pPr marL="0" indent="0" algn="ctr">
-              <a:buNone/>
-            </a:pPr>
-            <a:r>
-              <a:rPr lang="id-ID" altLang="en-US" sz="1100" b="1" dirty="0">
-                <a:solidFill>
-                  <a:schemeClr val="tx1"/>
-                </a:solidFill>
-              </a:rPr>
-              <a:t>Ada di contoh</a:t>
-            </a:r>
-            <a:endParaRPr lang="id-ID" sz="1400" dirty="0"/>
-          </a:p>
-        </p:txBody>
-      </p:sp>
-      <p:sp>
-        <p:nvSpPr>
-          <p:cNvPr id="36" name="Judul 3"/>
-          <p:cNvSpPr txBox="1"/>
-          <p:nvPr/>
-        </p:nvSpPr>
-        <p:spPr>
-          <a:xfrm>
-            <a:off x="8223504" y="2286000"/>
-            <a:ext cx="3124200" cy="310896"/>
-          </a:xfrm>
-          <a:prstGeom prst="rect">
-            <a:avLst/>
-          </a:prstGeom>
-          <a:noFill/>
-          <a:ln/>
-        </p:spPr>
-        <p:txBody>
-          <a:bodyPr wrap="square" lIns="0" tIns="0" rIns="0" bIns="0" rtlCol="0" anchor="t"/>
-          <a:lstStyle/>
-          <a:p>
-            <a:pPr marL="0" indent="0">
-              <a:buNone/>
-            </a:pPr>
-            <a:r>
-              <a:rPr lang="id-ID" altLang="en-US" sz="1700" b="1" dirty="0">
-                <a:solidFill>
-                  <a:schemeClr val="tx1"/>
-                </a:solidFill>
-              </a:rPr>
-              <a:t>Mengelola dengan bijak</a:t>
-            </a:r>
-            <a:endParaRPr lang="id-ID" sz="1500" dirty="0"/>
-          </a:p>
-        </p:txBody>
-      </p:sp>
-      <p:sp>
-        <p:nvSpPr>
-          <p:cNvPr id="37" name="Isi 3"/>
-          <p:cNvSpPr txBox="1"/>
-          <p:nvPr/>
-        </p:nvSpPr>
-        <p:spPr>
-          <a:xfrm>
-            <a:off x="8223504" y="2633472"/>
-            <a:ext cx="3124200" cy="713232"/>
-          </a:xfrm>
-          <a:prstGeom prst="rect">
-            <a:avLst/>
-          </a:prstGeom>
-          <a:noFill/>
-          <a:ln/>
-        </p:spPr>
-        <p:txBody>
-          <a:bodyPr wrap="square" lIns="0" tIns="0" rIns="0" bIns="0" rtlCol="0" anchor="t"/>
-          <a:lstStyle/>
-          <a:p>
-            <a:pPr marL="0" indent="0">
-              <a:buNone/>
-            </a:pPr>
-            <a:r>
-              <a:rPr lang="id-ID" altLang="en-US" sz="1300" dirty="0">
-                <a:solidFill>
-                  <a:schemeClr val="tx2"/>
-                </a:solidFill>
-              </a:rPr>
-              <a:t>Apakah kolekte dan sumbangan cukup menopang program kita dalam beberapa tahun ke depan?</a:t>
-            </a:r>
-            <a:endParaRPr lang="id-ID" sz="1300" dirty="0"/>
-          </a:p>
-        </p:txBody>
-      </p:sp>
-      <p:sp>
-        <p:nvSpPr>
-          <p:cNvPr id="38" name="Kartu 4"/>
-          <p:cNvSpPr/>
-          <p:nvPr/>
-        </p:nvSpPr>
-        <p:spPr>
-          <a:xfrm>
-            <a:off x="640080" y="3575304"/>
-            <a:ext cx="3526536" cy="1627632"/>
-          </a:xfrm>
-          <a:prstGeom prst="roundRect">
-            <a:avLst>
-              <a:gd name="adj" fmla="val 5365"/>
-            </a:avLst>
-          </a:prstGeom>
-          <a:solidFill>
-            <a:schemeClr val="bg1"/>
-          </a:solidFill>
-          <a:ln w="12700">
-            <a:solidFill>
-              <a:schemeClr val="accent6"/>
-            </a:solidFill>
-            <a:prstDash val="solid"/>
-          </a:ln>
-        </p:spPr>
-        <p:txBody>
-          <a:bodyPr/>
-          <a:lstStyle/>
-          <a:p>
-            <a:endParaRPr lang="en-US"/>
-          </a:p>
-        </p:txBody>
-      </p:sp>
-      <p:sp>
-        <p:nvSpPr>
-          <p:cNvPr id="39" name="Status 4"/>
-          <p:cNvSpPr/>
-          <p:nvPr/>
-        </p:nvSpPr>
-        <p:spPr>
-          <a:xfrm>
-            <a:off x="841248" y="3730752"/>
-            <a:ext cx="1188720" cy="246888"/>
-          </a:xfrm>
-          <a:prstGeom prst="roundRect">
-            <a:avLst>
-              <a:gd name="adj" fmla="val 50000"/>
-            </a:avLst>
-          </a:prstGeom>
-          <a:solidFill>
-            <a:srgbClr val="DCEBE6"/>
-          </a:solidFill>
-          <a:ln>
-            <a:solidFill>
-              <a:srgbClr val="DCEBE6"/>
-            </a:solidFill>
-          </a:ln>
-        </p:spPr>
-        <p:txBody>
-          <a:bodyPr wrap="square" lIns="0" tIns="0" rIns="0" bIns="0" rtlCol="0" anchor="ctr"/>
-          <a:lstStyle/>
-          <a:p>
-            <a:pPr marL="0" indent="0" algn="ctr">
-              <a:buNone/>
-            </a:pPr>
-            <a:r>
-              <a:rPr lang="id-ID" altLang="en-US" sz="1100" b="1" dirty="0">
-                <a:solidFill>
-                  <a:schemeClr val="tx1"/>
-                </a:solidFill>
-              </a:rPr>
-              <a:t>Ada di contoh</a:t>
-            </a:r>
-            <a:endParaRPr lang="id-ID" sz="1400" dirty="0"/>
-          </a:p>
-        </p:txBody>
-      </p:sp>
-      <p:sp>
-        <p:nvSpPr>
-          <p:cNvPr id="40" name="Judul 4"/>
-          <p:cNvSpPr txBox="1"/>
-          <p:nvPr/>
-        </p:nvSpPr>
-        <p:spPr>
-          <a:xfrm>
-            <a:off x="841248" y="4078224"/>
-            <a:ext cx="3124200" cy="310896"/>
-          </a:xfrm>
-          <a:prstGeom prst="rect">
-            <a:avLst/>
-          </a:prstGeom>
-          <a:noFill/>
-          <a:ln/>
-        </p:spPr>
-        <p:txBody>
-          <a:bodyPr wrap="square" lIns="0" tIns="0" rIns="0" bIns="0" rtlCol="0" anchor="t"/>
-          <a:lstStyle/>
-          <a:p>
-            <a:pPr marL="0" indent="0">
-              <a:buNone/>
-            </a:pPr>
-            <a:r>
-              <a:rPr lang="id-ID" altLang="en-US" sz="1700" b="1" dirty="0">
-                <a:solidFill>
-                  <a:schemeClr val="tx1"/>
-                </a:solidFill>
-              </a:rPr>
-              <a:t>Bersiap menghadapi peristiwa</a:t>
-            </a:r>
-            <a:endParaRPr lang="id-ID" sz="1500" dirty="0"/>
-          </a:p>
-        </p:txBody>
-      </p:sp>
-      <p:sp>
-        <p:nvSpPr>
-          <p:cNvPr id="41" name="Isi 4"/>
-          <p:cNvSpPr txBox="1"/>
-          <p:nvPr/>
-        </p:nvSpPr>
-        <p:spPr>
-          <a:xfrm>
-            <a:off x="841248" y="4425696"/>
-            <a:ext cx="3124200" cy="713232"/>
-          </a:xfrm>
-          <a:prstGeom prst="rect">
-            <a:avLst/>
-          </a:prstGeom>
-          <a:noFill/>
-          <a:ln/>
-        </p:spPr>
-        <p:txBody>
-          <a:bodyPr wrap="square" lIns="0" tIns="0" rIns="0" bIns="0" rtlCol="0" anchor="t"/>
-          <a:lstStyle/>
-          <a:p>
-            <a:pPr marL="0" indent="0">
-              <a:buNone/>
-            </a:pPr>
-            <a:r>
-              <a:rPr lang="id-ID" altLang="en-US" sz="1300" dirty="0">
-                <a:solidFill>
-                  <a:schemeClr val="tx2"/>
-                </a:solidFill>
-              </a:rPr>
-              <a:t>Berapa besar dampak hujan deras atau kabut asap pada kehadiran dan kolekte, dan apa yang perlu disiapkan?</a:t>
-            </a:r>
-            <a:endParaRPr lang="id-ID" sz="1300" dirty="0"/>
-          </a:p>
-        </p:txBody>
-      </p:sp>
-      <p:sp>
-        <p:nvSpPr>
-          <p:cNvPr id="42" name="Kartu 5"/>
-          <p:cNvSpPr/>
-          <p:nvPr/>
-        </p:nvSpPr>
-        <p:spPr>
-          <a:xfrm>
-            <a:off x="4331208" y="3575304"/>
-            <a:ext cx="3526536" cy="1627632"/>
-          </a:xfrm>
-          <a:prstGeom prst="roundRect">
-            <a:avLst>
-              <a:gd name="adj" fmla="val 5365"/>
-            </a:avLst>
-          </a:prstGeom>
-          <a:solidFill>
-            <a:schemeClr val="bg1"/>
-          </a:solidFill>
-          <a:ln w="12700">
-            <a:solidFill>
-              <a:schemeClr val="accent6"/>
-            </a:solidFill>
-            <a:prstDash val="solid"/>
-          </a:ln>
-        </p:spPr>
-        <p:txBody>
-          <a:bodyPr/>
-          <a:lstStyle/>
-          <a:p>
-            <a:endParaRPr lang="en-US"/>
-          </a:p>
-        </p:txBody>
-      </p:sp>
-      <p:sp>
-        <p:nvSpPr>
-          <p:cNvPr id="43" name="Status 5"/>
-          <p:cNvSpPr/>
-          <p:nvPr/>
-        </p:nvSpPr>
-        <p:spPr>
-          <a:xfrm>
-            <a:off x="4532376" y="3730752"/>
-            <a:ext cx="1188720" cy="246888"/>
-          </a:xfrm>
-          <a:prstGeom prst="roundRect">
-            <a:avLst>
-              <a:gd name="adj" fmla="val 50000"/>
-            </a:avLst>
-          </a:prstGeom>
-          <a:solidFill>
-            <a:srgbClr val="DCEBE6"/>
-          </a:solidFill>
-          <a:ln>
-            <a:solidFill>
-              <a:srgbClr val="DCEBE6"/>
-            </a:solidFill>
-          </a:ln>
-        </p:spPr>
-        <p:txBody>
-          <a:bodyPr wrap="square" lIns="0" tIns="0" rIns="0" bIns="0" rtlCol="0" anchor="ctr"/>
-          <a:lstStyle/>
-          <a:p>
-            <a:pPr marL="0" indent="0" algn="ctr">
-              <a:buNone/>
-            </a:pPr>
-            <a:r>
-              <a:rPr lang="id-ID" altLang="en-US" sz="1100" b="1" dirty="0">
-                <a:solidFill>
-                  <a:schemeClr val="tx1"/>
-                </a:solidFill>
-              </a:rPr>
-              <a:t>Ada di contoh</a:t>
-            </a:r>
-            <a:endParaRPr lang="id-ID" sz="1400" dirty="0"/>
-          </a:p>
-        </p:txBody>
-      </p:sp>
-      <p:sp>
-        <p:nvSpPr>
-          <p:cNvPr id="44" name="Judul 5"/>
-          <p:cNvSpPr txBox="1"/>
-          <p:nvPr/>
-        </p:nvSpPr>
-        <p:spPr>
-          <a:xfrm>
-            <a:off x="4532376" y="4078224"/>
-            <a:ext cx="3124200" cy="310896"/>
-          </a:xfrm>
-          <a:prstGeom prst="rect">
-            <a:avLst/>
-          </a:prstGeom>
-          <a:noFill/>
-          <a:ln/>
-        </p:spPr>
-        <p:txBody>
-          <a:bodyPr wrap="square" lIns="0" tIns="0" rIns="0" bIns="0" rtlCol="0" anchor="t"/>
-          <a:lstStyle/>
-          <a:p>
-            <a:pPr marL="0" indent="0">
-              <a:buNone/>
-            </a:pPr>
-            <a:r>
-              <a:rPr lang="id-ID" altLang="en-US" sz="1700" b="1" dirty="0">
-                <a:solidFill>
-                  <a:schemeClr val="tx1"/>
-                </a:solidFill>
-              </a:rPr>
-              <a:t>Belajar dari kegiatan</a:t>
-            </a:r>
-            <a:endParaRPr lang="id-ID" sz="1500" dirty="0"/>
-          </a:p>
-        </p:txBody>
-      </p:sp>
-      <p:sp>
-        <p:nvSpPr>
-          <p:cNvPr id="45" name="Isi 5"/>
-          <p:cNvSpPr txBox="1"/>
-          <p:nvPr/>
-        </p:nvSpPr>
-        <p:spPr>
-          <a:xfrm>
-            <a:off x="4532376" y="4425696"/>
-            <a:ext cx="3124200" cy="713232"/>
-          </a:xfrm>
-          <a:prstGeom prst="rect">
-            <a:avLst/>
-          </a:prstGeom>
-          <a:noFill/>
-          <a:ln/>
-        </p:spPr>
-        <p:txBody>
-          <a:bodyPr wrap="square" lIns="0" tIns="0" rIns="0" bIns="0" rtlCol="0" anchor="t"/>
-          <a:lstStyle/>
-          <a:p>
-            <a:pPr marL="0" indent="0">
-              <a:buNone/>
-            </a:pPr>
-            <a:r>
-              <a:rPr lang="id-ID" altLang="en-US" sz="1300" dirty="0">
-                <a:solidFill>
-                  <a:schemeClr val="tx2"/>
-                </a:solidFill>
-              </a:rPr>
-              <a:t>Kegiatan mana yang mencapai target peserta dan biaya, dan apa tindak lanjutnya?</a:t>
-            </a:r>
-            <a:endParaRPr lang="id-ID" sz="1300" dirty="0"/>
-          </a:p>
-        </p:txBody>
-      </p:sp>
-      <p:sp>
-        <p:nvSpPr>
-          <p:cNvPr id="46" name="Kartu 6"/>
-          <p:cNvSpPr/>
-          <p:nvPr/>
-        </p:nvSpPr>
-        <p:spPr>
-          <a:xfrm>
-            <a:off x="8022336" y="3575304"/>
-            <a:ext cx="3526536" cy="1627632"/>
-          </a:xfrm>
-          <a:prstGeom prst="roundRect">
-            <a:avLst>
-              <a:gd name="adj" fmla="val 5365"/>
-            </a:avLst>
-          </a:prstGeom>
-          <a:solidFill>
-            <a:schemeClr val="bg1"/>
-          </a:solidFill>
-          <a:ln w="12700">
-            <a:solidFill>
-              <a:schemeClr val="accent6"/>
-            </a:solidFill>
-            <a:prstDash val="solid"/>
-          </a:ln>
-        </p:spPr>
-        <p:txBody>
-          <a:bodyPr/>
-          <a:lstStyle/>
-          <a:p>
-            <a:endParaRPr lang="en-US"/>
-          </a:p>
-        </p:txBody>
-      </p:sp>
-      <p:sp>
-        <p:nvSpPr>
-          <p:cNvPr id="47" name="Status 6"/>
-          <p:cNvSpPr/>
-          <p:nvPr/>
-        </p:nvSpPr>
-        <p:spPr>
-          <a:xfrm>
-            <a:off x="8223504" y="3730752"/>
-            <a:ext cx="1024128" cy="246888"/>
-          </a:xfrm>
-          <a:prstGeom prst="roundRect">
-            <a:avLst>
-              <a:gd name="adj" fmla="val 50000"/>
-            </a:avLst>
-          </a:prstGeom>
-          <a:noFill/>
-          <a:ln w="12700">
-            <a:solidFill>
-              <a:schemeClr val="accent3"/>
-            </a:solidFill>
-          </a:ln>
-        </p:spPr>
-        <p:txBody>
-          <a:bodyPr wrap="square" lIns="0" tIns="0" rIns="0" bIns="0" rtlCol="0" anchor="ctr"/>
-          <a:lstStyle/>
-          <a:p>
-            <a:pPr marL="0" indent="0" algn="ctr">
-              <a:buNone/>
-            </a:pPr>
-            <a:r>
-              <a:rPr lang="id-ID" altLang="en-US" sz="1100" b="1" dirty="0">
-                <a:solidFill>
-                  <a:schemeClr val="tx1"/>
-                </a:solidFill>
-              </a:rPr>
-              <a:t>Kemungkinan</a:t>
-            </a:r>
-            <a:endParaRPr lang="id-ID" sz="1400" dirty="0"/>
-          </a:p>
-        </p:txBody>
-      </p:sp>
-      <p:sp>
-        <p:nvSpPr>
-          <p:cNvPr id="48" name="Judul 6"/>
-          <p:cNvSpPr txBox="1"/>
-          <p:nvPr/>
-        </p:nvSpPr>
-        <p:spPr>
-          <a:xfrm>
-            <a:off x="8223504" y="4078224"/>
-            <a:ext cx="3124200" cy="310896"/>
-          </a:xfrm>
-          <a:prstGeom prst="rect">
-            <a:avLst/>
-          </a:prstGeom>
-          <a:noFill/>
-          <a:ln/>
-        </p:spPr>
-        <p:txBody>
-          <a:bodyPr wrap="square" lIns="0" tIns="0" rIns="0" bIns="0" rtlCol="0" anchor="t"/>
-          <a:lstStyle/>
-          <a:p>
-            <a:pPr marL="0" indent="0">
-              <a:buNone/>
-            </a:pPr>
-            <a:r>
-              <a:rPr lang="id-ID" altLang="en-US" sz="1700" b="1" dirty="0">
-                <a:solidFill>
-                  <a:schemeClr val="tx1"/>
-                </a:solidFill>
-              </a:rPr>
-              <a:t>Menjangkau lebih luas</a:t>
-            </a:r>
-            <a:endParaRPr lang="id-ID" sz="1500" dirty="0"/>
-          </a:p>
-        </p:txBody>
-      </p:sp>
-      <p:sp>
-        <p:nvSpPr>
-          <p:cNvPr id="49" name="Isi 6"/>
-          <p:cNvSpPr txBox="1"/>
-          <p:nvPr/>
-        </p:nvSpPr>
-        <p:spPr>
-          <a:xfrm>
-            <a:off x="8223504" y="4425696"/>
-            <a:ext cx="3124200" cy="713232"/>
-          </a:xfrm>
-          <a:prstGeom prst="rect">
-            <a:avLst/>
-          </a:prstGeom>
-          <a:noFill/>
-          <a:ln/>
-        </p:spPr>
-        <p:txBody>
-          <a:bodyPr wrap="square" lIns="0" tIns="0" rIns="0" bIns="0" rtlCol="0" anchor="t"/>
-          <a:lstStyle/>
-          <a:p>
-            <a:pPr marL="0" indent="0">
-              <a:buNone/>
-            </a:pPr>
-            <a:r>
-              <a:rPr lang="id-ID" altLang="en-US" sz="1300" dirty="0">
-                <a:solidFill>
-                  <a:schemeClr val="tx2"/>
-                </a:solidFill>
-              </a:rPr>
-              <a:t>Lingkungan mana yang masih jauh dari layanan paroki? Peta membantu kita melihatnya.</a:t>
-            </a:r>
-            <a:endParaRPr lang="id-ID" sz="1300" dirty="0"/>
-          </a:p>
-        </p:txBody>
-      </p:sp>
-      <p:sp>
-        <p:nvSpPr>
-          <p:cNvPr id="50" name="Kotak pesan"/>
-          <p:cNvSpPr/>
-          <p:nvPr/>
-        </p:nvSpPr>
-        <p:spPr>
-          <a:xfrm>
-            <a:off x="640080" y="5440680"/>
-            <a:ext cx="10911535" cy="804672"/>
-          </a:xfrm>
-          <a:prstGeom prst="roundRect">
-            <a:avLst>
-              <a:gd name="adj" fmla="val 14118"/>
-            </a:avLst>
-          </a:prstGeom>
-          <a:solidFill>
-            <a:schemeClr val="tx1"/>
-          </a:solidFill>
-          <a:ln w="12700">
-            <a:solidFill>
-              <a:schemeClr val="tx1"/>
-            </a:solidFill>
-            <a:prstDash val="solid"/>
-          </a:ln>
-        </p:spPr>
-        <p:txBody>
-          <a:bodyPr/>
-          <a:lstStyle/>
-          <a:p>
-            <a:endParaRPr lang="en-US"/>
-          </a:p>
-        </p:txBody>
-      </p:sp>
-      <p:sp>
-        <p:nvSpPr>
-          <p:cNvPr id="51" name="Teks pesan"/>
-          <p:cNvSpPr txBox="1"/>
-          <p:nvPr/>
-        </p:nvSpPr>
-        <p:spPr>
-          <a:xfrm>
-            <a:off x="960120" y="5440680"/>
-            <a:ext cx="10271455" cy="804672"/>
-          </a:xfrm>
-          <a:prstGeom prst="rect">
-            <a:avLst/>
-          </a:prstGeom>
-          <a:noFill/>
-          <a:ln/>
-        </p:spPr>
-        <p:txBody>
-          <a:bodyPr wrap="square" lIns="0" tIns="0" rIns="0" bIns="0" rtlCol="0" anchor="ctr"/>
-          <a:lstStyle/>
-          <a:p>
-            <a:pPr marL="0" indent="0">
-              <a:buNone/>
-            </a:pPr>
-            <a:r>
-              <a:rPr lang="id-ID" altLang="en-US" sz="1600" dirty="0">
-                <a:solidFill>
-                  <a:schemeClr val="bg2"/>
-                </a:solidFill>
-              </a:rPr>
-              <a:t>Semua ini mungkin bila kita tahu apa yang ingin kita capai, lalu menata data untuk itu.</a:t>
-            </a:r>
-            <a:endParaRPr lang="id-ID" sz="1600" dirty="0"/>
-          </a:p>
-          <a:p>
-            <a:pPr marL="0" indent="0">
-              <a:buNone/>
-            </a:pPr>
-            <a:r>
-              <a:rPr lang="id-ID" altLang="en-US" sz="1200" dirty="0">
-                <a:solidFill>
-                  <a:schemeClr val="bg2"/>
-                </a:solidFill>
-              </a:rPr>
-              <a:t>Ada di contoh: sudah diperlihatkan dengan data simulasi. Kemungkinan: belum dibangun, perlu dibahas bersama.</a:t>
-            </a:r>
-            <a:endParaRPr lang="id-ID" sz="1600" dirty="0"/>
-          </a:p>
-        </p:txBody>
-      </p:sp>
-      <p:sp>
-        <p:nvSpPr>
-          <p:cNvPr id="52" name="Penanda langkah"/>
-          <p:cNvSpPr txBox="1"/>
-          <p:nvPr/>
-        </p:nvSpPr>
-        <p:spPr>
-          <a:xfrm>
-            <a:off x="5669280" y="6355080"/>
-            <a:ext cx="5212080" cy="274320"/>
-          </a:xfrm>
-          <a:prstGeom prst="rect">
-            <a:avLst/>
-          </a:prstGeom>
-          <a:noFill/>
-          <a:ln/>
-        </p:spPr>
-        <p:txBody>
-          <a:bodyPr wrap="square" lIns="0" tIns="0" rIns="0" bIns="0" rtlCol="0" anchor="ctr"/>
-          <a:lstStyle/>
-          <a:p>
-            <a:pPr marL="0" indent="0" algn="r">
-              <a:buNone/>
-            </a:pPr>
-            <a:r>
-              <a:rPr lang="id-ID" altLang="en-US" sz="1100" dirty="0">
-                <a:solidFill>
-                  <a:schemeClr val="tx2"/>
-                </a:solidFill>
-              </a:rPr>
-              <a:t>1 Kumpulkan  ·  2 Bagikan  ·  </a:t>
-            </a:r>
-            <a:r>
-              <a:rPr lang="id-ID" altLang="en-US" sz="1100" b="1" dirty="0">
-                <a:solidFill>
-                  <a:schemeClr val="accent3"/>
-                </a:solidFill>
-              </a:rPr>
-              <a:t>3 Pahami</a:t>
-            </a:r>
-            <a:endParaRPr lang="id-ID" sz="1100" dirty="0"/>
-          </a:p>
-        </p:txBody>
-      </p:sp>
-    </p:spTree>
-  </p:cSld>
-  <p:clrMapOvr>
-    <a:masterClrMapping/>
-  </p:clrMapOvr>
-</p:sld>
-</file>
-
-<file path=ppt/slides/slide2.xml><?xml version="1.0" encoding="utf-8"?>
+<file path=ppt/slides/slide3.xml><?xml version="1.0" encoding="utf-8"?>
 <p:sld xmlns:a="http://schemas.openxmlformats.org/drawingml/2006/main" xmlns:r="http://schemas.openxmlformats.org/officeDocument/2006/relationships" xmlns:p="http://schemas.openxmlformats.org/presentationml/2006/main">
   <p:cSld name="Slide 2">
     <p:spTree>
@@ -8118,7 +8695,7 @@
           </a:prstGeom>
           <a:extLst>
             <a:ext uri="{C572A759-6A51-4108-AA02-DFA0A04FC94B}">
-              <ma14:wrappingTextBoxFlag xmlns:ma14="http://schemas.microsoft.com/office/mac/drawingml/2011/main" xmlns="" val="0"/>
+              <ma14:wrappingTextBoxFlag xmlns="" xmlns:ma14="http://schemas.microsoft.com/office/mac/drawingml/2011/main" val="0"/>
             </a:ext>
           </a:extLst>
         </p:spPr>
@@ -8137,7 +8714,7 @@
             <a:pPr algn="r"/>
             <a:fld id="{F7021451-1387-4CA6-816F-3879F97B5CBC}" type="slidenum">
               <a:rPr lang="en-US" b="0"/>
-              <a:t>2</a:t>
+              <a:t>3</a:t>
             </a:fld>
             <a:endParaRPr lang="en-US"/>
           </a:p>
@@ -8151,7 +8728,7 @@
 </p:sld>
 </file>
 
-<file path=ppt/slides/slide3.xml><?xml version="1.0" encoding="utf-8"?>
+<file path=ppt/slides/slide4.xml><?xml version="1.0" encoding="utf-8"?>
 <p:sld xmlns:a="http://schemas.openxmlformats.org/drawingml/2006/main" xmlns:r="http://schemas.openxmlformats.org/officeDocument/2006/relationships" xmlns:p="http://schemas.openxmlformats.org/presentationml/2006/main">
   <p:cSld name="Slide 3">
     <p:spTree>
@@ -8393,7 +8970,23 @@
                   <a:schemeClr val="tx1"/>
                 </a:solidFill>
               </a:rPr>
-              <a:t>Data dari semua bidang tersimpan rapi di satu tempat, dalam tabel sederhana yang saling terhubung.</a:t>
+              <a:t>Data dari semua bidang tersimpan rapi di satu tempat, dalam </a:t>
+            </a:r>
+            <a:r>
+              <a:rPr lang="en-US" altLang="en-US" sz="1600" dirty="0" err="1">
+                <a:solidFill>
+                  <a:schemeClr val="tx1"/>
+                </a:solidFill>
+              </a:rPr>
+              <a:t>bentuk</a:t>
+            </a:r>
+            <a:r>
+              <a:rPr lang="id-ID" altLang="en-US" sz="1600" dirty="0">
+                <a:solidFill>
+                  <a:schemeClr val="tx1"/>
+                </a:solidFill>
+              </a:rPr>
+              <a:t> sederhana yang saling terhubung.</a:t>
             </a:r>
             <a:endParaRPr lang="id-ID" sz="1600" dirty="0"/>
           </a:p>
@@ -8576,7 +9169,23 @@
                   <a:schemeClr val="tx1"/>
                 </a:solidFill>
               </a:rPr>
-              <a:t>Umat mendapat informasi yang berguna bagi mereka: jadwal, kegiatan, dan panduan layanan.</a:t>
+              <a:t>Umat mendapat informasi yang berguna bagi mereka: jadwal, kegiatan, dan panduan </a:t>
+            </a:r>
+            <a:r>
+              <a:rPr lang="en-US" altLang="en-US" sz="1600" dirty="0">
+                <a:solidFill>
+                  <a:schemeClr val="tx1"/>
+                </a:solidFill>
+              </a:rPr>
+              <a:t>pe</a:t>
+            </a:r>
+            <a:r>
+              <a:rPr lang="id-ID" altLang="en-US" sz="1600" dirty="0">
+                <a:solidFill>
+                  <a:schemeClr val="tx1"/>
+                </a:solidFill>
+              </a:rPr>
+              <a:t>layanan.</a:t>
             </a:r>
             <a:endParaRPr lang="id-ID" sz="1600" dirty="0"/>
           </a:p>
@@ -8759,7 +9368,63 @@
                   <a:schemeClr val="tx1"/>
                 </a:solidFill>
               </a:rPr>
-              <a:t>Data berubah menjadi wawasan yang membantu dewan dan seksi mengambil keputusan.</a:t>
+              <a:t>Data berubah menjadi wawasan yang membantu </a:t>
+            </a:r>
+            <a:r>
+              <a:rPr lang="en-US" altLang="en-US" sz="1600" dirty="0" err="1">
+                <a:solidFill>
+                  <a:schemeClr val="tx1"/>
+                </a:solidFill>
+              </a:rPr>
+              <a:t>perangkat</a:t>
+            </a:r>
+            <a:r>
+              <a:rPr lang="en-US" altLang="en-US" sz="1600" dirty="0">
+                <a:solidFill>
+                  <a:schemeClr val="tx1"/>
+                </a:solidFill>
+              </a:rPr>
+              <a:t> </a:t>
+            </a:r>
+            <a:r>
+              <a:rPr lang="en-US" altLang="en-US" sz="1600" dirty="0" err="1">
+                <a:solidFill>
+                  <a:schemeClr val="tx1"/>
+                </a:solidFill>
+              </a:rPr>
+              <a:t>karya</a:t>
+            </a:r>
+            <a:r>
+              <a:rPr lang="en-US" altLang="en-US" sz="1600" dirty="0">
+                <a:solidFill>
+                  <a:schemeClr val="tx1"/>
+                </a:solidFill>
+              </a:rPr>
+              <a:t> dan dewan </a:t>
+            </a:r>
+            <a:r>
+              <a:rPr lang="en-US" altLang="en-US" sz="1600" dirty="0" err="1">
+                <a:solidFill>
+                  <a:schemeClr val="tx1"/>
+                </a:solidFill>
+              </a:rPr>
+              <a:t>mengambil</a:t>
+            </a:r>
+            <a:r>
+              <a:rPr lang="en-US" altLang="en-US" sz="1600" dirty="0">
+                <a:solidFill>
+                  <a:schemeClr val="tx1"/>
+                </a:solidFill>
+              </a:rPr>
+              <a:t> </a:t>
+            </a:r>
+            <a:r>
+              <a:rPr lang="en-US" altLang="en-US" sz="1600" dirty="0" err="1">
+                <a:solidFill>
+                  <a:schemeClr val="tx1"/>
+                </a:solidFill>
+              </a:rPr>
+              <a:t>keputusan</a:t>
             </a:r>
             <a:endParaRPr lang="id-ID" sz="1600" dirty="0"/>
           </a:p>
@@ -8821,7 +9486,7 @@
           </a:prstGeom>
           <a:extLst>
             <a:ext uri="{C572A759-6A51-4108-AA02-DFA0A04FC94B}">
-              <ma14:wrappingTextBoxFlag xmlns:ma14="http://schemas.microsoft.com/office/mac/drawingml/2011/main" xmlns="" val="0"/>
+              <ma14:wrappingTextBoxFlag xmlns="" xmlns:ma14="http://schemas.microsoft.com/office/mac/drawingml/2011/main" val="0"/>
             </a:ext>
           </a:extLst>
         </p:spPr>
@@ -8840,7 +9505,7 @@
             <a:pPr algn="r"/>
             <a:fld id="{F7021451-1387-4CA6-816F-3879F97B5CBC}" type="slidenum">
               <a:rPr lang="en-US" b="0"/>
-              <a:t>3</a:t>
+              <a:t>4</a:t>
             </a:fld>
             <a:endParaRPr lang="en-US"/>
           </a:p>
@@ -8854,7 +9519,7 @@
 </p:sld>
 </file>
 
-<file path=ppt/slides/slide4.xml><?xml version="1.0" encoding="utf-8"?>
+<file path=ppt/slides/slide5.xml><?xml version="1.0" encoding="utf-8"?>
 <p:sld xmlns:a="http://schemas.openxmlformats.org/drawingml/2006/main" xmlns:r="http://schemas.openxmlformats.org/officeDocument/2006/relationships" xmlns:p="http://schemas.openxmlformats.org/presentationml/2006/main">
   <p:cSld name="Slide 4">
     <p:spTree>
@@ -8981,7 +9646,27 @@
                   <a:schemeClr val="tx1"/>
                 </a:solidFill>
               </a:rPr>
-              <a:t>Setiap bidang disimpan sebagai tabel sederhana yang seragam dan saling terhubung, seperti lembar kerja yang rapi.</a:t>
+              <a:t>Setiap bidang disimpan sebagai </a:t>
+            </a:r>
+            <a:r>
+              <a:rPr lang="en-US" altLang="en-US" dirty="0" err="1"/>
+              <a:t>bentuk</a:t>
+            </a:r>
+            <a:r>
+              <a:rPr lang="id-ID" altLang="en-US" sz="1800" dirty="0">
+                <a:solidFill>
+                  <a:schemeClr val="tx1"/>
+                </a:solidFill>
+              </a:rPr>
+              <a:t> sederhana yang seragam dan terhubung</a:t>
+            </a:r>
+            <a:r>
+              <a:rPr lang="en-US" altLang="en-US" sz="1800" dirty="0">
+                <a:solidFill>
+                  <a:schemeClr val="tx1"/>
+                </a:solidFill>
+              </a:rPr>
+              <a:t>.</a:t>
             </a:r>
             <a:endParaRPr lang="id-ID" sz="1800" dirty="0"/>
           </a:p>
@@ -8993,12 +9678,164 @@
               <a:buNone/>
             </a:pPr>
             <a:r>
-              <a:rPr lang="id-ID" altLang="en-US" sz="1800" dirty="0" b="1">
+              <a:rPr lang="en-US" altLang="en-US" sz="1800" b="1" dirty="0" err="1">
                 <a:solidFill>
                   <a:schemeClr val="tx1"/>
                 </a:solidFill>
               </a:rPr>
-              <a:t>Ini baru fondasinya. Manfaatnya muncul ketika kita tahu apa yang ingin kita capai dengan data ini.</a:t>
+              <a:t>Namun</a:t>
+            </a:r>
+            <a:r>
+              <a:rPr lang="en-US" altLang="en-US" sz="1800" b="1" dirty="0">
+                <a:solidFill>
+                  <a:schemeClr val="tx1"/>
+                </a:solidFill>
+              </a:rPr>
+              <a:t>, bank </a:t>
+            </a:r>
+            <a:r>
+              <a:rPr lang="en-US" altLang="en-US" sz="1800" b="1" dirty="0" err="1">
+                <a:solidFill>
+                  <a:schemeClr val="tx1"/>
+                </a:solidFill>
+              </a:rPr>
+              <a:t>informasi</a:t>
+            </a:r>
+            <a:r>
+              <a:rPr lang="en-US" altLang="en-US" sz="1800" b="1" dirty="0">
+                <a:solidFill>
+                  <a:schemeClr val="tx1"/>
+                </a:solidFill>
+              </a:rPr>
+              <a:t> </a:t>
+            </a:r>
+            <a:r>
+              <a:rPr lang="en-US" altLang="en-US" sz="1800" b="1" dirty="0" err="1">
+                <a:solidFill>
+                  <a:schemeClr val="tx1"/>
+                </a:solidFill>
+              </a:rPr>
+              <a:t>hanyalah</a:t>
+            </a:r>
+            <a:r>
+              <a:rPr lang="en-US" altLang="en-US" sz="1800" b="1" dirty="0">
+                <a:solidFill>
+                  <a:schemeClr val="tx1"/>
+                </a:solidFill>
+              </a:rPr>
+              <a:t> </a:t>
+            </a:r>
+            <a:r>
+              <a:rPr lang="en-US" altLang="en-US" sz="1800" b="1" dirty="0" err="1">
+                <a:solidFill>
+                  <a:schemeClr val="tx1"/>
+                </a:solidFill>
+              </a:rPr>
+              <a:t>tempat</a:t>
+            </a:r>
+            <a:r>
+              <a:rPr lang="en-US" altLang="en-US" sz="1800" b="1" dirty="0">
+                <a:solidFill>
+                  <a:schemeClr val="tx1"/>
+                </a:solidFill>
+              </a:rPr>
+              <a:t> </a:t>
+            </a:r>
+            <a:r>
+              <a:rPr lang="en-US" altLang="en-US" sz="1800" b="1" dirty="0" err="1">
+                <a:solidFill>
+                  <a:schemeClr val="tx1"/>
+                </a:solidFill>
+              </a:rPr>
+              <a:t>penyimpanan</a:t>
+            </a:r>
+            <a:r>
+              <a:rPr lang="en-US" altLang="en-US" sz="1800" b="1" dirty="0">
+                <a:solidFill>
+                  <a:schemeClr val="tx1"/>
+                </a:solidFill>
+              </a:rPr>
+              <a:t> </a:t>
+            </a:r>
+            <a:r>
+              <a:rPr lang="en-US" altLang="en-US" sz="1800" b="1" dirty="0" err="1">
+                <a:solidFill>
+                  <a:schemeClr val="tx1"/>
+                </a:solidFill>
+              </a:rPr>
+              <a:t>jika</a:t>
+            </a:r>
+            <a:r>
+              <a:rPr lang="en-US" altLang="en-US" sz="1800" b="1" dirty="0">
+                <a:solidFill>
+                  <a:schemeClr val="tx1"/>
+                </a:solidFill>
+              </a:rPr>
+              <a:t> </a:t>
+            </a:r>
+            <a:r>
+              <a:rPr lang="en-US" altLang="en-US" sz="1800" b="1" dirty="0" err="1">
+                <a:solidFill>
+                  <a:schemeClr val="tx1"/>
+                </a:solidFill>
+              </a:rPr>
+              <a:t>tidak</a:t>
+            </a:r>
+            <a:r>
+              <a:rPr lang="en-US" altLang="en-US" sz="1800" b="1" dirty="0">
+                <a:solidFill>
+                  <a:schemeClr val="tx1"/>
+                </a:solidFill>
+              </a:rPr>
+              <a:t> </a:t>
+            </a:r>
+            <a:r>
+              <a:rPr lang="en-US" altLang="en-US" sz="1800" b="1" dirty="0" err="1">
+                <a:solidFill>
+                  <a:schemeClr val="tx1"/>
+                </a:solidFill>
+              </a:rPr>
+              <a:t>diugnakan</a:t>
+            </a:r>
+            <a:r>
+              <a:rPr lang="en-US" altLang="en-US" sz="1800" b="1" dirty="0">
+                <a:solidFill>
+                  <a:schemeClr val="tx1"/>
+                </a:solidFill>
+              </a:rPr>
+              <a:t> </a:t>
+            </a:r>
+            <a:r>
+              <a:rPr lang="en-US" altLang="en-US" sz="1800" b="1" dirty="0" err="1">
+                <a:solidFill>
+                  <a:schemeClr val="tx1"/>
+                </a:solidFill>
+              </a:rPr>
+              <a:t>dengan</a:t>
+            </a:r>
+            <a:r>
+              <a:rPr lang="en-US" altLang="en-US" sz="1800" b="1" dirty="0">
+                <a:solidFill>
+                  <a:schemeClr val="tx1"/>
+                </a:solidFill>
+              </a:rPr>
+              <a:t> </a:t>
+            </a:r>
+            <a:r>
+              <a:rPr lang="en-US" altLang="en-US" sz="1800" b="1" dirty="0" err="1">
+                <a:solidFill>
+                  <a:schemeClr val="tx1"/>
+                </a:solidFill>
+              </a:rPr>
+              <a:t>tepat</a:t>
+            </a:r>
+            <a:r>
+              <a:rPr lang="en-US" altLang="en-US" sz="1800" b="1" dirty="0">
+                <a:solidFill>
+                  <a:schemeClr val="tx1"/>
+                </a:solidFill>
+              </a:rPr>
+              <a:t>.</a:t>
             </a:r>
             <a:endParaRPr lang="id-ID" sz="1800" dirty="0"/>
           </a:p>
@@ -9914,7 +10751,7 @@
           </a:prstGeom>
           <a:extLst>
             <a:ext uri="{C572A759-6A51-4108-AA02-DFA0A04FC94B}">
-              <ma14:wrappingTextBoxFlag xmlns:ma14="http://schemas.microsoft.com/office/mac/drawingml/2011/main" xmlns="" val="0"/>
+              <ma14:wrappingTextBoxFlag xmlns="" xmlns:ma14="http://schemas.microsoft.com/office/mac/drawingml/2011/main" val="0"/>
             </a:ext>
           </a:extLst>
         </p:spPr>
@@ -9933,7 +10770,7 @@
             <a:pPr algn="r"/>
             <a:fld id="{F7021451-1387-4CA6-816F-3879F97B5CBC}" type="slidenum">
               <a:rPr lang="en-US" b="0"/>
-              <a:t>4</a:t>
+              <a:t>5</a:t>
             </a:fld>
             <a:endParaRPr lang="en-US"/>
           </a:p>
@@ -9947,7 +10784,7 @@
 </p:sld>
 </file>
 
-<file path=ppt/slides/slide5.xml><?xml version="1.0" encoding="utf-8"?>
+<file path=ppt/slides/slide6.xml><?xml version="1.0" encoding="utf-8"?>
 <p:sld xmlns:a="http://schemas.openxmlformats.org/drawingml/2006/main" xmlns:r="http://schemas.openxmlformats.org/officeDocument/2006/relationships" xmlns:p="http://schemas.openxmlformats.org/presentationml/2006/main">
   <p:cSld name="Slide 5">
     <p:spTree>
@@ -10820,7 +11657,7 @@
           </a:prstGeom>
           <a:extLst>
             <a:ext uri="{C572A759-6A51-4108-AA02-DFA0A04FC94B}">
-              <ma14:wrappingTextBoxFlag xmlns:ma14="http://schemas.microsoft.com/office/mac/drawingml/2011/main" xmlns="" val="0"/>
+              <ma14:wrappingTextBoxFlag xmlns="" xmlns:ma14="http://schemas.microsoft.com/office/mac/drawingml/2011/main" val="0"/>
             </a:ext>
           </a:extLst>
         </p:spPr>
@@ -10839,7 +11676,7 @@
             <a:pPr algn="r"/>
             <a:fld id="{F7021451-1387-4CA6-816F-3879F97B5CBC}" type="slidenum">
               <a:rPr lang="en-US" b="0"/>
-              <a:t>5</a:t>
+              <a:t>6</a:t>
             </a:fld>
             <a:endParaRPr lang="en-US"/>
           </a:p>
@@ -10853,7 +11690,7 @@
 </p:sld>
 </file>
 
-<file path=ppt/slides/slide6.xml><?xml version="1.0" encoding="utf-8"?>
+<file path=ppt/slides/slide7.xml><?xml version="1.0" encoding="utf-8"?>
 <p:sld xmlns:a="http://schemas.openxmlformats.org/drawingml/2006/main" xmlns:r="http://schemas.openxmlformats.org/officeDocument/2006/relationships" xmlns:p="http://schemas.openxmlformats.org/presentationml/2006/main">
   <p:cSld name="Slide 6">
     <p:spTree>
@@ -11568,7 +12405,7 @@
           </a:prstGeom>
           <a:extLst>
             <a:ext uri="{C572A759-6A51-4108-AA02-DFA0A04FC94B}">
-              <ma14:wrappingTextBoxFlag xmlns:ma14="http://schemas.microsoft.com/office/mac/drawingml/2011/main" xmlns="" val="0"/>
+              <ma14:wrappingTextBoxFlag xmlns="" xmlns:ma14="http://schemas.microsoft.com/office/mac/drawingml/2011/main" val="0"/>
             </a:ext>
           </a:extLst>
         </p:spPr>
@@ -11587,7 +12424,7 @@
             <a:pPr algn="r"/>
             <a:fld id="{F7021451-1387-4CA6-816F-3879F97B5CBC}" type="slidenum">
               <a:rPr lang="en-US" b="0"/>
-              <a:t>6</a:t>
+              <a:t>7</a:t>
             </a:fld>
             <a:endParaRPr lang="en-US"/>
           </a:p>
@@ -11601,7 +12438,7 @@
 </p:sld>
 </file>
 
-<file path=ppt/slides/slide7.xml><?xml version="1.0" encoding="utf-8"?>
+<file path=ppt/slides/slide8.xml><?xml version="1.0" encoding="utf-8"?>
 <p:sld xmlns:a="http://schemas.openxmlformats.org/drawingml/2006/main" xmlns:r="http://schemas.openxmlformats.org/officeDocument/2006/relationships" xmlns:p="http://schemas.openxmlformats.org/presentationml/2006/main">
   <p:cSld name="Slide 7">
     <p:spTree>
@@ -11990,7 +12827,7 @@
           </a:prstGeom>
           <a:extLst>
             <a:ext uri="{C572A759-6A51-4108-AA02-DFA0A04FC94B}">
-              <ma14:wrappingTextBoxFlag xmlns:ma14="http://schemas.microsoft.com/office/mac/drawingml/2011/main" xmlns="" val="0"/>
+              <ma14:wrappingTextBoxFlag xmlns="" xmlns:ma14="http://schemas.microsoft.com/office/mac/drawingml/2011/main" val="0"/>
             </a:ext>
           </a:extLst>
         </p:spPr>
@@ -12009,7 +12846,7 @@
             <a:pPr algn="r"/>
             <a:fld id="{F7021451-1387-4CA6-816F-3879F97B5CBC}" type="slidenum">
               <a:rPr lang="en-US" b="0"/>
-              <a:t>7</a:t>
+              <a:t>8</a:t>
             </a:fld>
             <a:endParaRPr lang="en-US"/>
           </a:p>
@@ -12023,7 +12860,7 @@
 </p:sld>
 </file>
 
-<file path=ppt/slides/slide8.xml><?xml version="1.0" encoding="utf-8"?>
+<file path=ppt/slides/slide9.xml><?xml version="1.0" encoding="utf-8"?>
 <p:sld xmlns:a="http://schemas.openxmlformats.org/drawingml/2006/main" xmlns:r="http://schemas.openxmlformats.org/officeDocument/2006/relationships" xmlns:p="http://schemas.openxmlformats.org/presentationml/2006/main">
   <p:cSld name="Slide 8">
     <p:spTree>
@@ -12834,443 +13671,7 @@
           </a:prstGeom>
           <a:extLst>
             <a:ext uri="{C572A759-6A51-4108-AA02-DFA0A04FC94B}">
-              <ma14:wrappingTextBoxFlag xmlns:ma14="http://schemas.microsoft.com/office/mac/drawingml/2011/main" xmlns="" val="0"/>
-            </a:ext>
-          </a:extLst>
-        </p:spPr>
-        <p:txBody>
-          <a:bodyPr/>
-          <a:lstStyle>
-            <a:lvl1pPr>
-              <a:defRPr sz="1100">
-                <a:solidFill>
-                  <a:schemeClr val="tx2"/>
-                </a:solidFill>
-              </a:defRPr>
-            </a:lvl1pPr>
-          </a:lstStyle>
-          <a:p>
-            <a:pPr algn="r"/>
-            <a:fld id="{F7021451-1387-4CA6-816F-3879F97B5CBC}" type="slidenum">
-              <a:rPr lang="en-US" b="0"/>
-              <a:t>8</a:t>
-            </a:fld>
-            <a:endParaRPr lang="en-US"/>
-          </a:p>
-        </p:txBody>
-      </p:sp>
-    </p:spTree>
-  </p:cSld>
-  <p:clrMapOvr>
-    <a:masterClrMapping/>
-  </p:clrMapOvr>
-</p:sld>
-</file>
-
-<file path=ppt/slides/slide9.xml><?xml version="1.0" encoding="utf-8"?>
-<p:sld xmlns:a="http://schemas.openxmlformats.org/drawingml/2006/main" xmlns:r="http://schemas.openxmlformats.org/officeDocument/2006/relationships" xmlns:p="http://schemas.openxmlformats.org/presentationml/2006/main">
-  <p:cSld name="Slide 9">
-    <p:spTree>
-      <p:nvGrpSpPr>
-        <p:cNvPr id="1" name=""/>
-        <p:cNvGrpSpPr/>
-        <p:nvPr/>
-      </p:nvGrpSpPr>
-      <p:grpSpPr>
-        <a:xfrm>
-          <a:off x="0" y="0"/>
-          <a:ext cx="0" cy="0"/>
-          <a:chOff x="0" y="0"/>
-          <a:chExt cx="0" cy="0"/>
-        </a:xfrm>
-      </p:grpSpPr>
-      <p:sp>
-        <p:nvSpPr>
-          <p:cNvPr id="3" name="Text 0"/>
-          <p:cNvSpPr>
-            <a:spLocks noGrp="1"/>
-          </p:cNvSpPr>
-          <p:nvPr>
-            <p:ph type="body" idx="100" hasCustomPrompt="1"/>
-          </p:nvPr>
-        </p:nvSpPr>
-        <p:spPr>
-          <a:xfrm>
-            <a:off x="640080" y="502920"/>
-            <a:ext cx="10911535" cy="320040"/>
-          </a:xfrm>
-          <a:prstGeom prst="rect">
-            <a:avLst/>
-          </a:prstGeom>
-          <a:noFill/>
-          <a:ln/>
-        </p:spPr>
-        <p:txBody>
-          <a:bodyPr wrap="square" lIns="0" tIns="0" rIns="0" bIns="0" rtlCol="0" anchor="t"/>
-          <a:lstStyle/>
-          <a:p>
-            <a:pPr marL="0" indent="0" algn="l">
-              <a:buNone/>
-            </a:pPr>
-            <a:r>
-              <a:rPr lang="id-ID" altLang="en-US" sz="1200" b="1" kern="0" spc="200" dirty="0">
-                <a:solidFill>
-                  <a:schemeClr val="accent3"/>
-                </a:solidFill>
-              </a:rPr>
-              <a:t>LANGKAH 3 · PAHAMI · CONTOH</a:t>
-            </a:r>
-            <a:endParaRPr lang="id-ID" sz="1200" dirty="0"/>
-          </a:p>
-        </p:txBody>
-      </p:sp>
-      <p:sp>
-        <p:nvSpPr>
-          <p:cNvPr id="4" name="Text 0"/>
-          <p:cNvSpPr>
-            <a:spLocks noGrp="1"/>
-          </p:cNvSpPr>
-          <p:nvPr>
-            <p:ph type="title" idx="101" hasCustomPrompt="1"/>
-          </p:nvPr>
-        </p:nvSpPr>
-        <p:spPr>
-          <a:xfrm>
-            <a:off x="640080" y="841248"/>
-            <a:ext cx="10911535" cy="822960"/>
-          </a:xfrm>
-          <a:prstGeom prst="rect">
-            <a:avLst/>
-          </a:prstGeom>
-          <a:noFill/>
-          <a:ln/>
-        </p:spPr>
-        <p:txBody>
-          <a:bodyPr wrap="square" lIns="0" tIns="0" rIns="0" bIns="0" rtlCol="0" anchor="t"/>
-          <a:lstStyle/>
-          <a:p>
-            <a:pPr marL="0" indent="0" algn="l">
-              <a:buNone/>
-            </a:pPr>
-            <a:r>
-              <a:rPr lang="id-ID" altLang="en-US" sz="3400" b="1" dirty="0">
-                <a:solidFill>
-                  <a:schemeClr val="tx1"/>
-                </a:solidFill>
-              </a:rPr>
-              <a:t>Ringkasannya dalam satu layar</a:t>
-            </a:r>
-            <a:endParaRPr lang="id-ID" sz="3400" dirty="0"/>
-          </a:p>
-        </p:txBody>
-      </p:sp>
-      <p:sp>
-        <p:nvSpPr>
-          <p:cNvPr id="5" name="Shape 2"/>
-          <p:cNvSpPr/>
-          <p:nvPr/>
-        </p:nvSpPr>
-        <p:spPr>
-          <a:xfrm>
-            <a:off x="640080" y="1828800"/>
-            <a:ext cx="5303520" cy="3412191"/>
-          </a:xfrm>
-          <a:prstGeom prst="rect">
-            <a:avLst/>
-          </a:prstGeom>
-          <a:solidFill>
-            <a:srgbClr val="FFFFFF"/>
-          </a:solidFill>
-          <a:ln w="12700">
-            <a:solidFill>
-              <a:schemeClr val="accent6"/>
-            </a:solidFill>
-            <a:prstDash val="solid"/>
-          </a:ln>
-        </p:spPr>
-        <p:txBody>
-          <a:bodyPr/>
-          <a:lstStyle/>
-          <a:p>
-            <a:endParaRPr lang="en-US"/>
-          </a:p>
-        </p:txBody>
-      </p:sp>
-      <p:pic>
-        <p:nvPicPr>
-          <p:cNvPr id="6" name="Image 0" descr="Contoh dasbor Ringkasan: angka pokok kolekte dan pengeluaran program, dan grafik dengan garis tren"/>
-          <p:cNvPicPr>
-            <a:picLocks noChangeAspect="1"/>
-          </p:cNvPicPr>
-          <p:nvPr/>
-        </p:nvPicPr>
-        <p:blipFill>
-          <a:blip r:embed="rId3"/>
-          <a:stretch>
-            <a:fillRect/>
-          </a:stretch>
-        </p:blipFill>
-        <p:spPr>
-          <a:xfrm>
-            <a:off x="640080" y="1828800"/>
-            <a:ext cx="5303520" cy="3412191"/>
-          </a:xfrm>
-          <a:prstGeom prst="rect">
-            <a:avLst/>
-          </a:prstGeom>
-        </p:spPr>
-      </p:pic>
-      <p:sp>
-        <p:nvSpPr>
-          <p:cNvPr id="7" name="Text 3"/>
-          <p:cNvSpPr txBox="1"/>
-          <p:nvPr/>
-        </p:nvSpPr>
-        <p:spPr>
-          <a:xfrm>
-            <a:off x="640080" y="5332431"/>
-            <a:ext cx="5303520" cy="365760"/>
-          </a:xfrm>
-          <a:prstGeom prst="rect">
-            <a:avLst/>
-          </a:prstGeom>
-          <a:noFill/>
-          <a:ln/>
-        </p:spPr>
-        <p:txBody>
-          <a:bodyPr wrap="square" lIns="0" tIns="0" rIns="0" bIns="0" rtlCol="0" anchor="ctr"/>
-          <a:lstStyle/>
-          <a:p>
-            <a:pPr marL="0" indent="0" algn="ctr">
-              <a:buNone/>
-            </a:pPr>
-            <a:r>
-              <a:rPr lang="id-ID" altLang="en-US" sz="1400" dirty="0">
-                <a:solidFill>
-                  <a:schemeClr val="tx1"/>
-                </a:solidFill>
-              </a:rPr>
-              <a:t>Ringkasan: kolekte, pengeluaran program, dan arah tren</a:t>
-            </a:r>
-            <a:endParaRPr lang="id-ID" sz="1400" dirty="0"/>
-          </a:p>
-        </p:txBody>
-      </p:sp>
-      <p:sp>
-        <p:nvSpPr>
-          <p:cNvPr id="8" name="Shape 4"/>
-          <p:cNvSpPr/>
-          <p:nvPr/>
-        </p:nvSpPr>
-        <p:spPr>
-          <a:xfrm>
-            <a:off x="6248095" y="1828800"/>
-            <a:ext cx="5303520" cy="2125308"/>
-          </a:xfrm>
-          <a:prstGeom prst="rect">
-            <a:avLst/>
-          </a:prstGeom>
-          <a:solidFill>
-            <a:srgbClr val="FFFFFF"/>
-          </a:solidFill>
-          <a:ln w="12700">
-            <a:solidFill>
-              <a:schemeClr val="accent6"/>
-            </a:solidFill>
-            <a:prstDash val="solid"/>
-          </a:ln>
-        </p:spPr>
-        <p:txBody>
-          <a:bodyPr/>
-          <a:lstStyle/>
-          <a:p>
-            <a:endParaRPr lang="en-US"/>
-          </a:p>
-        </p:txBody>
-      </p:sp>
-      <p:pic>
-        <p:nvPicPr>
-          <p:cNvPr id="9" name="Image 1" descr="Contoh piramida umat menurut usia dan jenis kelamin"/>
-          <p:cNvPicPr>
-            <a:picLocks noChangeAspect="1"/>
-          </p:cNvPicPr>
-          <p:nvPr/>
-        </p:nvPicPr>
-        <p:blipFill>
-          <a:blip r:embed="rId4"/>
-          <a:stretch>
-            <a:fillRect/>
-          </a:stretch>
-        </p:blipFill>
-        <p:spPr>
-          <a:xfrm>
-            <a:off x="6248095" y="1828800"/>
-            <a:ext cx="5303520" cy="2125308"/>
-          </a:xfrm>
-          <a:prstGeom prst="rect">
-            <a:avLst/>
-          </a:prstGeom>
-        </p:spPr>
-      </p:pic>
-      <p:sp>
-        <p:nvSpPr>
-          <p:cNvPr id="10" name="Text 5"/>
-          <p:cNvSpPr txBox="1"/>
-          <p:nvPr/>
-        </p:nvSpPr>
-        <p:spPr>
-          <a:xfrm>
-            <a:off x="6248095" y="4045548"/>
-            <a:ext cx="5303520" cy="365760"/>
-          </a:xfrm>
-          <a:prstGeom prst="rect">
-            <a:avLst/>
-          </a:prstGeom>
-          <a:noFill/>
-          <a:ln/>
-        </p:spPr>
-        <p:txBody>
-          <a:bodyPr wrap="square" lIns="0" tIns="0" rIns="0" bIns="0" rtlCol="0" anchor="ctr"/>
-          <a:lstStyle/>
-          <a:p>
-            <a:pPr marL="0" indent="0" algn="ctr">
-              <a:buNone/>
-            </a:pPr>
-            <a:r>
-              <a:rPr lang="id-ID" altLang="en-US" sz="1400" dirty="0">
-                <a:solidFill>
-                  <a:schemeClr val="tx1"/>
-                </a:solidFill>
-              </a:rPr>
-              <a:t>Demografi umat: usia dan jenis kelamin, hanya angka gabungan</a:t>
-            </a:r>
-            <a:endParaRPr lang="id-ID" sz="1400" dirty="0"/>
-          </a:p>
-        </p:txBody>
-      </p:sp>
-      <p:sp>
-        <p:nvSpPr>
-          <p:cNvPr id="11" name="Text 6"/>
-          <p:cNvSpPr txBox="1"/>
-          <p:nvPr/>
-        </p:nvSpPr>
-        <p:spPr>
-          <a:xfrm>
-            <a:off x="6248095" y="4639908"/>
-            <a:ext cx="5303520" cy="1005840"/>
-          </a:xfrm>
-          <a:prstGeom prst="rect">
-            <a:avLst/>
-          </a:prstGeom>
-          <a:noFill/>
-          <a:ln/>
-        </p:spPr>
-        <p:txBody>
-          <a:bodyPr wrap="square" lIns="0" tIns="0" rIns="0" bIns="0" rtlCol="0" anchor="t"/>
-          <a:lstStyle/>
-          <a:p>
-            <a:pPr marL="342900" indent="-342900">
-              <a:spcAft>
-                <a:spcPts val="600"/>
-              </a:spcAft>
-              <a:buSzPct val="100000"/>
-              <a:buChar char="•"/>
-            </a:pPr>
-            <a:r>
-              <a:rPr lang="id-ID" altLang="en-US" sz="1600" dirty="0">
-                <a:solidFill>
-                  <a:schemeClr val="tx1"/>
-                </a:solidFill>
-              </a:rPr>
-              <a:t>12 halaman berbahasa Indonesia</a:t>
-            </a:r>
-            <a:endParaRPr lang="id-ID" sz="1600" dirty="0"/>
-          </a:p>
-          <a:p>
-            <a:pPr marL="342900" indent="-342900">
-              <a:spcAft>
-                <a:spcPts val="600"/>
-              </a:spcAft>
-              <a:buSzPct val="100000"/>
-              <a:buChar char="•"/>
-            </a:pPr>
-            <a:r>
-              <a:rPr lang="id-ID" altLang="en-US" sz="1600" dirty="0">
-                <a:solidFill>
-                  <a:schemeClr val="tx1"/>
-                </a:solidFill>
-              </a:rPr>
-              <a:t>Tersedia juga sebagai satu berkas yang dibuka tanpa instalasi</a:t>
-            </a:r>
-            <a:endParaRPr lang="id-ID" sz="1600" dirty="0"/>
-          </a:p>
-        </p:txBody>
-      </p:sp>
-      <p:sp>
-        <p:nvSpPr>
-          <p:cNvPr id="12" name="Text 7"/>
-          <p:cNvSpPr txBox="1"/>
-          <p:nvPr/>
-        </p:nvSpPr>
-        <p:spPr>
-          <a:xfrm>
-            <a:off x="5669280" y="6355080"/>
-            <a:ext cx="5212080" cy="274320"/>
-          </a:xfrm>
-          <a:prstGeom prst="rect">
-            <a:avLst/>
-          </a:prstGeom>
-          <a:noFill/>
-          <a:ln/>
-        </p:spPr>
-        <p:txBody>
-          <a:bodyPr wrap="square" lIns="0" tIns="0" rIns="0" bIns="0" rtlCol="0" anchor="ctr"/>
-          <a:lstStyle/>
-          <a:p>
-            <a:pPr marL="0" indent="0" algn="r">
-              <a:buNone/>
-            </a:pPr>
-            <a:r>
-              <a:rPr lang="id-ID" altLang="en-US" sz="1100" dirty="0">
-                <a:solidFill>
-                  <a:schemeClr val="tx2"/>
-                </a:solidFill>
-              </a:rPr>
-              <a:t>1 Kumpulkan  ·  2 Bagikan  ·  </a:t>
-            </a:r>
-            <a:r>
-              <a:rPr lang="id-ID" altLang="en-US" sz="1100" b="1" dirty="0">
-                <a:solidFill>
-                  <a:schemeClr val="accent3"/>
-                </a:solidFill>
-              </a:rPr>
-              <a:t>3 Pahami</a:t>
-            </a:r>
-            <a:endParaRPr lang="id-ID" sz="1100" dirty="0"/>
-          </a:p>
-        </p:txBody>
-      </p:sp>
-      <p:sp>
-        <p:nvSpPr>
-          <p:cNvPr id="25" name="Slide Number Placeholder 0"/>
-          <p:cNvSpPr>
-            <a:spLocks noGrp="1"/>
-          </p:cNvSpPr>
-          <p:nvPr>
-            <p:ph type="sldNum" sz="quarter" idx="4294967295"/>
-          </p:nvPr>
-        </p:nvSpPr>
-        <p:spPr>
-          <a:xfrm>
-            <a:off x="11000232" y="6355080"/>
-            <a:ext cx="548640" cy="274320"/>
-          </a:xfrm>
-          <a:prstGeom prst="rect">
-            <a:avLst/>
-          </a:prstGeom>
-          <a:extLst>
-            <a:ext uri="{C572A759-6A51-4108-AA02-DFA0A04FC94B}">
-              <ma14:wrappingTextBoxFlag xmlns:ma14="http://schemas.microsoft.com/office/mac/drawingml/2011/main" xmlns="" val="0"/>
+              <ma14:wrappingTextBoxFlag xmlns="" xmlns:ma14="http://schemas.microsoft.com/office/mac/drawingml/2011/main" val="0"/>
             </a:ext>
           </a:extLst>
         </p:spPr>
